--- a/_wp移行素材/★引継ぎ資料/★山口様向け_ASPATHについて_文章の直し方.pptx
+++ b/_wp移行素材/★引継ぎ資料/★山口様向け_ASPATHについて_文章の直し方.pptx
@@ -17,9 +17,13 @@
     <p:sldId id="265" r:id="rId11"/>
     <p:sldId id="266" r:id="rId12"/>
     <p:sldId id="267" r:id="rId13"/>
+    <p:sldId id="268" r:id="rId14"/>
+    <p:sldId id="269" r:id="rId15"/>
+    <p:sldId id="270" r:id="rId16"/>
+    <p:sldId id="271" r:id="rId17"/>
   </p:sldIdLst>
   <p:notesMasterIdLst>
-    <p:notesMasterId r:id="rId14"/>
+    <p:notesMasterId r:id="rId18"/>
   </p:notesMasterIdLst>
   <p:sldSz cx="12192000" cy="6858000"/>
   <p:notesSz cx="6858000" cy="12192000"/>
@@ -801,6 +805,358 @@
             <a:fld id="{F7021451-1387-4CA6-816F-3879F97B5CBC}" type="slidenum">
               <a:rPr lang="en-US"/>
               <a:t>12</a:t>
+            </a:fld>
+            <a:endParaRPr lang="en-US"/>
+          </a:p>
+        </p:txBody>
+      </p:sp>
+    </p:spTree>
+    <p:extLst>
+      <p:ext uri="{BB962C8B-B14F-4D97-AF65-F5344CB8AC3E}">
+        <p14:creationId xmlns:p14="http://schemas.microsoft.com/office/powerpoint/2010/main" val="1024086991"/>
+      </p:ext>
+    </p:extLst>
+  </p:cSld>
+  <p:clrMapOvr>
+    <a:masterClrMapping/>
+  </p:clrMapOvr>
+</p:notes>
+</file>
+
+<file path=ppt/notesSlides/notesSlide13.xml><?xml version="1.0" encoding="utf-8"?>
+<p:notes xmlns:a="http://schemas.openxmlformats.org/drawingml/2006/main" xmlns:r="http://schemas.openxmlformats.org/officeDocument/2006/relationships" xmlns:p="http://schemas.openxmlformats.org/presentationml/2006/main">
+  <p:cSld>
+    <p:spTree>
+      <p:nvGrpSpPr>
+        <p:cNvPr id="1" name=""/>
+        <p:cNvGrpSpPr/>
+        <p:nvPr/>
+      </p:nvGrpSpPr>
+      <p:grpSpPr>
+        <a:xfrm>
+          <a:off x="0" y="0"/>
+          <a:ext cx="0" cy="0"/>
+          <a:chOff x="0" y="0"/>
+          <a:chExt cx="0" cy="0"/>
+        </a:xfrm>
+      </p:grpSpPr>
+      <p:sp>
+        <p:nvSpPr>
+          <p:cNvPr id="2" name="Slide Image Placeholder 1"/>
+          <p:cNvSpPr>
+            <a:spLocks noGrp="1" noRot="1" noChangeAspect="1"/>
+          </p:cNvSpPr>
+          <p:nvPr>
+            <p:ph type="sldImg"/>
+          </p:nvPr>
+        </p:nvSpPr>
+        <p:spPr/>
+      </p:sp>
+      <p:sp>
+        <p:nvSpPr>
+          <p:cNvPr id="3" name="Notes Placeholder 2"/>
+          <p:cNvSpPr>
+            <a:spLocks noGrp="1"/>
+          </p:cNvSpPr>
+          <p:nvPr>
+            <p:ph type="body" idx="1"/>
+          </p:nvPr>
+        </p:nvSpPr>
+        <p:spPr/>
+        <p:txBody>
+          <a:bodyPr/>
+          <a:lstStyle/>
+          <a:p>
+            <a:r>
+              <a:rPr lang="en-US" dirty="0"/>
+              <a:t/>
+            </a:r>
+            <a:endParaRPr lang="en-US" dirty="0"/>
+          </a:p>
+        </p:txBody>
+      </p:sp>
+      <p:sp>
+        <p:nvSpPr>
+          <p:cNvPr id="4" name="Slide Number Placeholder 3"/>
+          <p:cNvSpPr>
+            <a:spLocks noGrp="1"/>
+          </p:cNvSpPr>
+          <p:nvPr>
+            <p:ph type="sldNum" sz="quarter" idx="10"/>
+          </p:nvPr>
+        </p:nvSpPr>
+        <p:spPr/>
+        <p:txBody>
+          <a:bodyPr/>
+          <a:lstStyle/>
+          <a:p>
+            <a:fld id="{F7021451-1387-4CA6-816F-3879F97B5CBC}" type="slidenum">
+              <a:rPr lang="en-US"/>
+              <a:t>13</a:t>
+            </a:fld>
+            <a:endParaRPr lang="en-US"/>
+          </a:p>
+        </p:txBody>
+      </p:sp>
+    </p:spTree>
+    <p:extLst>
+      <p:ext uri="{BB962C8B-B14F-4D97-AF65-F5344CB8AC3E}">
+        <p14:creationId xmlns:p14="http://schemas.microsoft.com/office/powerpoint/2010/main" val="1024086991"/>
+      </p:ext>
+    </p:extLst>
+  </p:cSld>
+  <p:clrMapOvr>
+    <a:masterClrMapping/>
+  </p:clrMapOvr>
+</p:notes>
+</file>
+
+<file path=ppt/notesSlides/notesSlide14.xml><?xml version="1.0" encoding="utf-8"?>
+<p:notes xmlns:a="http://schemas.openxmlformats.org/drawingml/2006/main" xmlns:r="http://schemas.openxmlformats.org/officeDocument/2006/relationships" xmlns:p="http://schemas.openxmlformats.org/presentationml/2006/main">
+  <p:cSld>
+    <p:spTree>
+      <p:nvGrpSpPr>
+        <p:cNvPr id="1" name=""/>
+        <p:cNvGrpSpPr/>
+        <p:nvPr/>
+      </p:nvGrpSpPr>
+      <p:grpSpPr>
+        <a:xfrm>
+          <a:off x="0" y="0"/>
+          <a:ext cx="0" cy="0"/>
+          <a:chOff x="0" y="0"/>
+          <a:chExt cx="0" cy="0"/>
+        </a:xfrm>
+      </p:grpSpPr>
+      <p:sp>
+        <p:nvSpPr>
+          <p:cNvPr id="2" name="Slide Image Placeholder 1"/>
+          <p:cNvSpPr>
+            <a:spLocks noGrp="1" noRot="1" noChangeAspect="1"/>
+          </p:cNvSpPr>
+          <p:nvPr>
+            <p:ph type="sldImg"/>
+          </p:nvPr>
+        </p:nvSpPr>
+        <p:spPr/>
+      </p:sp>
+      <p:sp>
+        <p:nvSpPr>
+          <p:cNvPr id="3" name="Notes Placeholder 2"/>
+          <p:cNvSpPr>
+            <a:spLocks noGrp="1"/>
+          </p:cNvSpPr>
+          <p:nvPr>
+            <p:ph type="body" idx="1"/>
+          </p:nvPr>
+        </p:nvSpPr>
+        <p:spPr/>
+        <p:txBody>
+          <a:bodyPr/>
+          <a:lstStyle/>
+          <a:p>
+            <a:r>
+              <a:rPr lang="en-US" dirty="0"/>
+              <a:t/>
+            </a:r>
+            <a:endParaRPr lang="en-US" dirty="0"/>
+          </a:p>
+        </p:txBody>
+      </p:sp>
+      <p:sp>
+        <p:nvSpPr>
+          <p:cNvPr id="4" name="Slide Number Placeholder 3"/>
+          <p:cNvSpPr>
+            <a:spLocks noGrp="1"/>
+          </p:cNvSpPr>
+          <p:nvPr>
+            <p:ph type="sldNum" sz="quarter" idx="10"/>
+          </p:nvPr>
+        </p:nvSpPr>
+        <p:spPr/>
+        <p:txBody>
+          <a:bodyPr/>
+          <a:lstStyle/>
+          <a:p>
+            <a:fld id="{F7021451-1387-4CA6-816F-3879F97B5CBC}" type="slidenum">
+              <a:rPr lang="en-US"/>
+              <a:t>14</a:t>
+            </a:fld>
+            <a:endParaRPr lang="en-US"/>
+          </a:p>
+        </p:txBody>
+      </p:sp>
+    </p:spTree>
+    <p:extLst>
+      <p:ext uri="{BB962C8B-B14F-4D97-AF65-F5344CB8AC3E}">
+        <p14:creationId xmlns:p14="http://schemas.microsoft.com/office/powerpoint/2010/main" val="1024086991"/>
+      </p:ext>
+    </p:extLst>
+  </p:cSld>
+  <p:clrMapOvr>
+    <a:masterClrMapping/>
+  </p:clrMapOvr>
+</p:notes>
+</file>
+
+<file path=ppt/notesSlides/notesSlide15.xml><?xml version="1.0" encoding="utf-8"?>
+<p:notes xmlns:a="http://schemas.openxmlformats.org/drawingml/2006/main" xmlns:r="http://schemas.openxmlformats.org/officeDocument/2006/relationships" xmlns:p="http://schemas.openxmlformats.org/presentationml/2006/main">
+  <p:cSld>
+    <p:spTree>
+      <p:nvGrpSpPr>
+        <p:cNvPr id="1" name=""/>
+        <p:cNvGrpSpPr/>
+        <p:nvPr/>
+      </p:nvGrpSpPr>
+      <p:grpSpPr>
+        <a:xfrm>
+          <a:off x="0" y="0"/>
+          <a:ext cx="0" cy="0"/>
+          <a:chOff x="0" y="0"/>
+          <a:chExt cx="0" cy="0"/>
+        </a:xfrm>
+      </p:grpSpPr>
+      <p:sp>
+        <p:nvSpPr>
+          <p:cNvPr id="2" name="Slide Image Placeholder 1"/>
+          <p:cNvSpPr>
+            <a:spLocks noGrp="1" noRot="1" noChangeAspect="1"/>
+          </p:cNvSpPr>
+          <p:nvPr>
+            <p:ph type="sldImg"/>
+          </p:nvPr>
+        </p:nvSpPr>
+        <p:spPr/>
+      </p:sp>
+      <p:sp>
+        <p:nvSpPr>
+          <p:cNvPr id="3" name="Notes Placeholder 2"/>
+          <p:cNvSpPr>
+            <a:spLocks noGrp="1"/>
+          </p:cNvSpPr>
+          <p:nvPr>
+            <p:ph type="body" idx="1"/>
+          </p:nvPr>
+        </p:nvSpPr>
+        <p:spPr/>
+        <p:txBody>
+          <a:bodyPr/>
+          <a:lstStyle/>
+          <a:p>
+            <a:r>
+              <a:rPr lang="en-US" dirty="0"/>
+              <a:t/>
+            </a:r>
+            <a:endParaRPr lang="en-US" dirty="0"/>
+          </a:p>
+        </p:txBody>
+      </p:sp>
+      <p:sp>
+        <p:nvSpPr>
+          <p:cNvPr id="4" name="Slide Number Placeholder 3"/>
+          <p:cNvSpPr>
+            <a:spLocks noGrp="1"/>
+          </p:cNvSpPr>
+          <p:nvPr>
+            <p:ph type="sldNum" sz="quarter" idx="10"/>
+          </p:nvPr>
+        </p:nvSpPr>
+        <p:spPr/>
+        <p:txBody>
+          <a:bodyPr/>
+          <a:lstStyle/>
+          <a:p>
+            <a:fld id="{F7021451-1387-4CA6-816F-3879F97B5CBC}" type="slidenum">
+              <a:rPr lang="en-US"/>
+              <a:t>15</a:t>
+            </a:fld>
+            <a:endParaRPr lang="en-US"/>
+          </a:p>
+        </p:txBody>
+      </p:sp>
+    </p:spTree>
+    <p:extLst>
+      <p:ext uri="{BB962C8B-B14F-4D97-AF65-F5344CB8AC3E}">
+        <p14:creationId xmlns:p14="http://schemas.microsoft.com/office/powerpoint/2010/main" val="1024086991"/>
+      </p:ext>
+    </p:extLst>
+  </p:cSld>
+  <p:clrMapOvr>
+    <a:masterClrMapping/>
+  </p:clrMapOvr>
+</p:notes>
+</file>
+
+<file path=ppt/notesSlides/notesSlide16.xml><?xml version="1.0" encoding="utf-8"?>
+<p:notes xmlns:a="http://schemas.openxmlformats.org/drawingml/2006/main" xmlns:r="http://schemas.openxmlformats.org/officeDocument/2006/relationships" xmlns:p="http://schemas.openxmlformats.org/presentationml/2006/main">
+  <p:cSld>
+    <p:spTree>
+      <p:nvGrpSpPr>
+        <p:cNvPr id="1" name=""/>
+        <p:cNvGrpSpPr/>
+        <p:nvPr/>
+      </p:nvGrpSpPr>
+      <p:grpSpPr>
+        <a:xfrm>
+          <a:off x="0" y="0"/>
+          <a:ext cx="0" cy="0"/>
+          <a:chOff x="0" y="0"/>
+          <a:chExt cx="0" cy="0"/>
+        </a:xfrm>
+      </p:grpSpPr>
+      <p:sp>
+        <p:nvSpPr>
+          <p:cNvPr id="2" name="Slide Image Placeholder 1"/>
+          <p:cNvSpPr>
+            <a:spLocks noGrp="1" noRot="1" noChangeAspect="1"/>
+          </p:cNvSpPr>
+          <p:nvPr>
+            <p:ph type="sldImg"/>
+          </p:nvPr>
+        </p:nvSpPr>
+        <p:spPr/>
+      </p:sp>
+      <p:sp>
+        <p:nvSpPr>
+          <p:cNvPr id="3" name="Notes Placeholder 2"/>
+          <p:cNvSpPr>
+            <a:spLocks noGrp="1"/>
+          </p:cNvSpPr>
+          <p:nvPr>
+            <p:ph type="body" idx="1"/>
+          </p:nvPr>
+        </p:nvSpPr>
+        <p:spPr/>
+        <p:txBody>
+          <a:bodyPr/>
+          <a:lstStyle/>
+          <a:p>
+            <a:r>
+              <a:rPr lang="en-US" dirty="0"/>
+              <a:t/>
+            </a:r>
+            <a:endParaRPr lang="en-US" dirty="0"/>
+          </a:p>
+        </p:txBody>
+      </p:sp>
+      <p:sp>
+        <p:nvSpPr>
+          <p:cNvPr id="4" name="Slide Number Placeholder 3"/>
+          <p:cNvSpPr>
+            <a:spLocks noGrp="1"/>
+          </p:cNvSpPr>
+          <p:nvPr>
+            <p:ph type="sldNum" sz="quarter" idx="10"/>
+          </p:nvPr>
+        </p:nvSpPr>
+        <p:spPr/>
+        <p:txBody>
+          <a:bodyPr/>
+          <a:lstStyle/>
+          <a:p>
+            <a:fld id="{F7021451-1387-4CA6-816F-3879F97B5CBC}" type="slidenum">
+              <a:rPr lang="en-US"/>
+              <a:t>16</a:t>
             </a:fld>
             <a:endParaRPr lang="en-US"/>
           </a:p>
@@ -2104,7 +2460,7 @@
                 <a:ea typeface="Meiryo" pitchFamily="34" charset="-122"/>
                 <a:cs typeface="Meiryo" pitchFamily="34" charset="-120"/>
               </a:rPr>
-              <a:t>⑦ 間違えたときは</a:t>
+              <a:t>どこが直せるか（後半）</a:t>
             </a:r>
             <a:endParaRPr lang="en-US" sz="3400" dirty="0"/>
           </a:p>
@@ -2143,7 +2499,7 @@
                 <a:ea typeface="Meiryo" pitchFamily="34" charset="-122"/>
                 <a:cs typeface="Meiryo" pitchFamily="34" charset="-120"/>
               </a:rPr>
-              <a:t>元に戻せなくなることはありません</a:t>
+              <a:t>02〜04 ／ 締めくくり</a:t>
             </a:r>
             <a:endParaRPr lang="en-US" sz="1600" dirty="0"/>
           </a:p>
@@ -2188,9 +2544,2478 @@
           </a:p>
         </p:txBody>
       </p:sp>
+      <p:pic>
+        <p:nvPicPr>
+          <p:cNvPr id="5" name="Image 0" descr="/sessions/compassionate-sweet-heisenberg/mnt/dev-aspath-life-main/_wp移行素材/★引継ぎ資料/画像/M3_02と03.jpg">    </p:cNvPr>
+          <p:cNvPicPr>
+            <a:picLocks noChangeAspect="1"/>
+          </p:cNvPicPr>
+          <p:nvPr/>
+        </p:nvPicPr>
+        <p:blipFill>
+          <a:blip r:embed="rId1"/>
+          <a:stretch>
+            <a:fillRect/>
+          </a:stretch>
+        </p:blipFill>
+        <p:spPr>
+          <a:xfrm>
+            <a:off x="822960" y="1645920"/>
+            <a:ext cx="2834640" cy="4629912"/>
+          </a:xfrm>
+          <a:prstGeom prst="rect">
+            <a:avLst/>
+          </a:prstGeom>
+        </p:spPr>
+      </p:pic>
+      <p:pic>
+        <p:nvPicPr>
+          <p:cNvPr id="6" name="Image 1" descr="/sessions/compassionate-sweet-heisenberg/mnt/dev-aspath-life-main/_wp移行素材/★引継ぎ資料/画像/M4_04と締めくくり.jpg">    </p:cNvPr>
+          <p:cNvPicPr>
+            <a:picLocks noChangeAspect="1"/>
+          </p:cNvPicPr>
+          <p:nvPr/>
+        </p:nvPicPr>
+        <p:blipFill>
+          <a:blip r:embed="rId2"/>
+          <a:stretch>
+            <a:fillRect/>
+          </a:stretch>
+        </p:blipFill>
+        <p:spPr>
+          <a:xfrm>
+            <a:off x="3931920" y="1645920"/>
+            <a:ext cx="2834640" cy="4629912"/>
+          </a:xfrm>
+          <a:prstGeom prst="rect">
+            <a:avLst/>
+          </a:prstGeom>
+        </p:spPr>
+      </p:pic>
+      <p:sp>
+        <p:nvSpPr>
+          <p:cNvPr id="7" name="Text 3"/>
+          <p:cNvSpPr/>
+          <p:nvPr/>
+        </p:nvSpPr>
+        <p:spPr>
+          <a:xfrm>
+            <a:off x="822960" y="6263640"/>
+            <a:ext cx="2834640" cy="274320"/>
+          </a:xfrm>
+          <a:prstGeom prst="rect">
+            <a:avLst/>
+          </a:prstGeom>
+          <a:noFill/>
+          <a:ln/>
+        </p:spPr>
+        <p:txBody>
+          <a:bodyPr wrap="square" lIns="0" tIns="0" rIns="0" bIns="0" rtlCol="0" anchor="ctr"/>
+          <a:lstStyle/>
+          <a:p>
+            <a:pPr algn="ctr" indent="0" marL="0">
+              <a:buNone/>
+            </a:pPr>
+            <a:r>
+              <a:rPr lang="en-US" sz="1200" dirty="0">
+                <a:solidFill>
+                  <a:srgbClr val="5E7681"/>
+                </a:solidFill>
+                <a:latin typeface="Meiryo" pitchFamily="34" charset="0"/>
+                <a:ea typeface="Meiryo" pitchFamily="34" charset="-122"/>
+                <a:cs typeface="Meiryo" pitchFamily="34" charset="-120"/>
+              </a:rPr>
+              <a:t>02 人生を豊かに ／ 03 第3の居場所</a:t>
+            </a:r>
+            <a:endParaRPr lang="en-US" sz="1200" dirty="0"/>
+          </a:p>
+        </p:txBody>
+      </p:sp>
+      <p:sp>
+        <p:nvSpPr>
+          <p:cNvPr id="8" name="Text 4"/>
+          <p:cNvSpPr/>
+          <p:nvPr/>
+        </p:nvSpPr>
+        <p:spPr>
+          <a:xfrm>
+            <a:off x="3931920" y="6263640"/>
+            <a:ext cx="2834640" cy="274320"/>
+          </a:xfrm>
+          <a:prstGeom prst="rect">
+            <a:avLst/>
+          </a:prstGeom>
+          <a:noFill/>
+          <a:ln/>
+        </p:spPr>
+        <p:txBody>
+          <a:bodyPr wrap="square" lIns="0" tIns="0" rIns="0" bIns="0" rtlCol="0" anchor="ctr"/>
+          <a:lstStyle/>
+          <a:p>
+            <a:pPr algn="ctr" indent="0" marL="0">
+              <a:buNone/>
+            </a:pPr>
+            <a:r>
+              <a:rPr lang="en-US" sz="1200" dirty="0">
+                <a:solidFill>
+                  <a:srgbClr val="5E7681"/>
+                </a:solidFill>
+                <a:latin typeface="Meiryo" pitchFamily="34" charset="0"/>
+                <a:ea typeface="Meiryo" pitchFamily="34" charset="-122"/>
+                <a:cs typeface="Meiryo" pitchFamily="34" charset="-120"/>
+              </a:rPr>
+              <a:t>04 エビデンス ／ 締めくくり</a:t>
+            </a:r>
+            <a:endParaRPr lang="en-US" sz="1200" dirty="0"/>
+          </a:p>
+        </p:txBody>
+      </p:sp>
+      <p:sp>
+        <p:nvSpPr>
+          <p:cNvPr id="9" name="Shape 5"/>
+          <p:cNvSpPr/>
+          <p:nvPr/>
+        </p:nvSpPr>
+        <p:spPr>
+          <a:xfrm>
+            <a:off x="7223760" y="1691640"/>
+            <a:ext cx="4480560" cy="2103120"/>
+          </a:xfrm>
+          <a:prstGeom prst="roundRect">
+            <a:avLst>
+              <a:gd name="adj" fmla="val 5217"/>
+            </a:avLst>
+          </a:prstGeom>
+          <a:solidFill>
+            <a:srgbClr val="F2F5F6"/>
+          </a:solidFill>
+          <a:ln/>
+        </p:spPr>
+      </p:sp>
+      <p:sp>
+        <p:nvSpPr>
+          <p:cNvPr id="10" name="Text 6"/>
+          <p:cNvSpPr/>
+          <p:nvPr/>
+        </p:nvSpPr>
+        <p:spPr>
+          <a:xfrm>
+            <a:off x="7498080" y="1874520"/>
+            <a:ext cx="3931920" cy="320040"/>
+          </a:xfrm>
+          <a:prstGeom prst="rect">
+            <a:avLst/>
+          </a:prstGeom>
+          <a:noFill/>
+          <a:ln/>
+        </p:spPr>
+        <p:txBody>
+          <a:bodyPr wrap="square" lIns="0" tIns="0" rIns="0" bIns="0" rtlCol="0" anchor="ctr"/>
+          <a:lstStyle/>
+          <a:p>
+            <a:pPr indent="0" marL="0">
+              <a:buNone/>
+            </a:pPr>
+            <a:r>
+              <a:rPr lang="en-US" sz="1900" b="1" dirty="0">
+                <a:solidFill>
+                  <a:srgbClr val="264653"/>
+                </a:solidFill>
+                <a:latin typeface="Meiryo" pitchFamily="34" charset="0"/>
+                <a:ea typeface="Meiryo" pitchFamily="34" charset="-122"/>
+                <a:cs typeface="Meiryo" pitchFamily="34" charset="-120"/>
+              </a:rPr>
+              <a:t>02・03・04 は同じ形</a:t>
+            </a:r>
+            <a:endParaRPr lang="en-US" sz="1900" dirty="0"/>
+          </a:p>
+        </p:txBody>
+      </p:sp>
+      <p:sp>
+        <p:nvSpPr>
+          <p:cNvPr id="11" name="Text 7"/>
+          <p:cNvSpPr/>
+          <p:nvPr/>
+        </p:nvSpPr>
+        <p:spPr>
+          <a:xfrm>
+            <a:off x="7498080" y="2286000"/>
+            <a:ext cx="3931920" cy="1371600"/>
+          </a:xfrm>
+          <a:prstGeom prst="rect">
+            <a:avLst/>
+          </a:prstGeom>
+          <a:noFill/>
+          <a:ln/>
+        </p:spPr>
+        <p:txBody>
+          <a:bodyPr wrap="square" lIns="0" tIns="0" rIns="0" bIns="0" rtlCol="0" anchor="ctr"/>
+          <a:lstStyle/>
+          <a:p>
+            <a:pPr indent="0" marL="0">
+              <a:lnSpc>
+                <a:spcPts val="2400"/>
+              </a:lnSpc>
+              <a:buNone/>
+            </a:pPr>
+            <a:r>
+              <a:rPr lang="en-US" sz="1500" dirty="0">
+                <a:solidFill>
+                  <a:srgbClr val="1E2D34"/>
+                </a:solidFill>
+                <a:latin typeface="Meiryo" pitchFamily="34" charset="0"/>
+                <a:ea typeface="Meiryo" pitchFamily="34" charset="-122"/>
+                <a:cs typeface="Meiryo" pitchFamily="34" charset="-120"/>
+              </a:rPr>
+              <a:t>番号（02）</a:t>
+            </a:r>
+            <a:endParaRPr lang="en-US" sz="1500" dirty="0"/>
+          </a:p>
+          <a:p>
+            <a:pPr indent="0" marL="0">
+              <a:lnSpc>
+                <a:spcPts val="2400"/>
+              </a:lnSpc>
+              <a:buNone/>
+            </a:pPr>
+            <a:r>
+              <a:rPr lang="en-US" sz="1500" dirty="0">
+                <a:solidFill>
+                  <a:srgbClr val="1E2D34"/>
+                </a:solidFill>
+                <a:latin typeface="Meiryo" pitchFamily="34" charset="0"/>
+                <a:ea typeface="Meiryo" pitchFamily="34" charset="-122"/>
+                <a:cs typeface="Meiryo" pitchFamily="34" charset="-120"/>
+              </a:rPr>
+              <a:t>→ 見出し</a:t>
+            </a:r>
+            <a:endParaRPr lang="en-US" sz="1500" dirty="0"/>
+          </a:p>
+          <a:p>
+            <a:pPr indent="0" marL="0">
+              <a:lnSpc>
+                <a:spcPts val="2400"/>
+              </a:lnSpc>
+              <a:buNone/>
+            </a:pPr>
+            <a:r>
+              <a:rPr lang="en-US" sz="1500" dirty="0">
+                <a:solidFill>
+                  <a:srgbClr val="1E2D34"/>
+                </a:solidFill>
+                <a:latin typeface="Meiryo" pitchFamily="34" charset="0"/>
+                <a:ea typeface="Meiryo" pitchFamily="34" charset="-122"/>
+                <a:cs typeface="Meiryo" pitchFamily="34" charset="-120"/>
+              </a:rPr>
+              <a:t>→ 大きな写真（触らない）</a:t>
+            </a:r>
+            <a:endParaRPr lang="en-US" sz="1500" dirty="0"/>
+          </a:p>
+          <a:p>
+            <a:pPr indent="0" marL="0">
+              <a:lnSpc>
+                <a:spcPts val="2400"/>
+              </a:lnSpc>
+              <a:buNone/>
+            </a:pPr>
+            <a:r>
+              <a:rPr lang="en-US" sz="1500" dirty="0">
+                <a:solidFill>
+                  <a:srgbClr val="1E2D34"/>
+                </a:solidFill>
+                <a:latin typeface="Meiryo" pitchFamily="34" charset="0"/>
+                <a:ea typeface="Meiryo" pitchFamily="34" charset="-122"/>
+                <a:cs typeface="Meiryo" pitchFamily="34" charset="-120"/>
+              </a:rPr>
+              <a:t>→ 文章がいくつか</a:t>
+            </a:r>
+            <a:endParaRPr lang="en-US" sz="1500" dirty="0"/>
+          </a:p>
+        </p:txBody>
+      </p:sp>
+      <p:sp>
+        <p:nvSpPr>
+          <p:cNvPr id="12" name="Shape 8"/>
+          <p:cNvSpPr/>
+          <p:nvPr/>
+        </p:nvSpPr>
+        <p:spPr>
+          <a:xfrm>
+            <a:off x="7223760" y="3977640"/>
+            <a:ext cx="4480560" cy="1188720"/>
+          </a:xfrm>
+          <a:prstGeom prst="roundRect">
+            <a:avLst>
+              <a:gd name="adj" fmla="val 7692"/>
+            </a:avLst>
+          </a:prstGeom>
+          <a:solidFill>
+            <a:srgbClr val="EDF6EE"/>
+          </a:solidFill>
+          <a:ln/>
+        </p:spPr>
+      </p:sp>
+      <p:sp>
+        <p:nvSpPr>
+          <p:cNvPr id="13" name="Text 9"/>
+          <p:cNvSpPr/>
+          <p:nvPr/>
+        </p:nvSpPr>
+        <p:spPr>
+          <a:xfrm>
+            <a:off x="7452360" y="4142232"/>
+            <a:ext cx="4023360" cy="859536"/>
+          </a:xfrm>
+          <a:prstGeom prst="rect">
+            <a:avLst/>
+          </a:prstGeom>
+          <a:noFill/>
+          <a:ln/>
+        </p:spPr>
+        <p:txBody>
+          <a:bodyPr wrap="square" lIns="0" tIns="0" rIns="0" bIns="0" rtlCol="0" anchor="ctr"/>
+          <a:lstStyle/>
+          <a:p>
+            <a:pPr indent="0" marL="0">
+              <a:lnSpc>
+                <a:spcPts val="2100"/>
+              </a:lnSpc>
+              <a:buNone/>
+            </a:pPr>
+            <a:r>
+              <a:rPr lang="en-US" sz="1500" b="1" dirty="0">
+                <a:solidFill>
+                  <a:srgbClr val="2E7D32"/>
+                </a:solidFill>
+                <a:latin typeface="Meiryo" pitchFamily="34" charset="0"/>
+                <a:ea typeface="Meiryo" pitchFamily="34" charset="-122"/>
+                <a:cs typeface="Meiryo" pitchFamily="34" charset="-120"/>
+              </a:rPr>
+              <a:t>1か所の直し方が分かれば</a:t>
+            </a:r>
+            <a:endParaRPr lang="en-US" sz="1500" dirty="0"/>
+          </a:p>
+          <a:p>
+            <a:pPr indent="0" marL="0">
+              <a:lnSpc>
+                <a:spcPts val="2100"/>
+              </a:lnSpc>
+              <a:buNone/>
+            </a:pPr>
+            <a:r>
+              <a:rPr lang="en-US" sz="1500" b="1" dirty="0">
+                <a:solidFill>
+                  <a:srgbClr val="2E7D32"/>
+                </a:solidFill>
+                <a:latin typeface="Meiryo" pitchFamily="34" charset="0"/>
+                <a:ea typeface="Meiryo" pitchFamily="34" charset="-122"/>
+                <a:cs typeface="Meiryo" pitchFamily="34" charset="-120"/>
+              </a:rPr>
+              <a:t>残りも同じ手順です。</a:t>
+            </a:r>
+            <a:endParaRPr lang="en-US" sz="1500" dirty="0"/>
+          </a:p>
+        </p:txBody>
+      </p:sp>
+      <p:sp>
+        <p:nvSpPr>
+          <p:cNvPr id="14" name="Shape 10"/>
+          <p:cNvSpPr/>
+          <p:nvPr/>
+        </p:nvSpPr>
+        <p:spPr>
+          <a:xfrm>
+            <a:off x="7223760" y="5349240"/>
+            <a:ext cx="4480560" cy="777240"/>
+          </a:xfrm>
+          <a:prstGeom prst="roundRect">
+            <a:avLst>
+              <a:gd name="adj" fmla="val 11765"/>
+            </a:avLst>
+          </a:prstGeom>
+          <a:solidFill>
+            <a:srgbClr val="F2F5F6"/>
+          </a:solidFill>
+          <a:ln/>
+        </p:spPr>
+      </p:sp>
+      <p:sp>
+        <p:nvSpPr>
+          <p:cNvPr id="15" name="Text 11"/>
+          <p:cNvSpPr/>
+          <p:nvPr/>
+        </p:nvSpPr>
+        <p:spPr>
+          <a:xfrm>
+            <a:off x="7452360" y="5513832"/>
+            <a:ext cx="4023360" cy="448056"/>
+          </a:xfrm>
+          <a:prstGeom prst="rect">
+            <a:avLst/>
+          </a:prstGeom>
+          <a:noFill/>
+          <a:ln/>
+        </p:spPr>
+        <p:txBody>
+          <a:bodyPr wrap="square" lIns="0" tIns="0" rIns="0" bIns="0" rtlCol="0" anchor="ctr"/>
+          <a:lstStyle/>
+          <a:p>
+            <a:pPr indent="0" marL="0">
+              <a:lnSpc>
+                <a:spcPts val="2100"/>
+              </a:lnSpc>
+              <a:buNone/>
+            </a:pPr>
+            <a:r>
+              <a:rPr lang="en-US" sz="1500" b="1" dirty="0">
+                <a:solidFill>
+                  <a:srgbClr val="264653"/>
+                </a:solidFill>
+                <a:latin typeface="Meiryo" pitchFamily="34" charset="0"/>
+                <a:ea typeface="Meiryo" pitchFamily="34" charset="-122"/>
+                <a:cs typeface="Meiryo" pitchFamily="34" charset="-120"/>
+              </a:rPr>
+              <a:t>締めくくりの4行も直せます。</a:t>
+            </a:r>
+            <a:endParaRPr lang="en-US" sz="1500" dirty="0"/>
+          </a:p>
+        </p:txBody>
+      </p:sp>
+    </p:spTree>
+  </p:cSld>
+  <p:clrMapOvr>
+    <a:masterClrMapping/>
+  </p:clrMapOvr>
+</p:sld>
+</file>
+
+<file path=ppt/slides/slide11.xml><?xml version="1.0" encoding="utf-8"?>
+<p:sld xmlns:a="http://schemas.openxmlformats.org/drawingml/2006/main" xmlns:r="http://schemas.openxmlformats.org/officeDocument/2006/relationships" xmlns:p="http://schemas.openxmlformats.org/presentationml/2006/main">
+  <p:cSld name="Slide 11">
+    <p:bg>
+      <p:bgPr>
+        <a:solidFill>
+          <a:srgbClr val="FFFFFF"/>
+        </a:solidFill>
+      </p:bgPr>
+    </p:bg>
+    <p:spTree>
+      <p:nvGrpSpPr>
+        <p:cNvPr id="1" name=""/>
+        <p:cNvGrpSpPr/>
+        <p:nvPr/>
+      </p:nvGrpSpPr>
+      <p:grpSpPr>
+        <a:xfrm>
+          <a:off x="0" y="0"/>
+          <a:ext cx="0" cy="0"/>
+          <a:chOff x="0" y="0"/>
+          <a:chExt cx="0" cy="0"/>
+        </a:xfrm>
+      </p:grpSpPr>
+      <p:sp>
+        <p:nvSpPr>
+          <p:cNvPr id="2" name="Text 0"/>
+          <p:cNvSpPr/>
+          <p:nvPr/>
+        </p:nvSpPr>
+        <p:spPr>
+          <a:xfrm>
+            <a:off x="548640" y="274320"/>
+            <a:ext cx="11064240" cy="731520"/>
+          </a:xfrm>
+          <a:prstGeom prst="rect">
+            <a:avLst/>
+          </a:prstGeom>
+          <a:noFill/>
+          <a:ln/>
+        </p:spPr>
+        <p:txBody>
+          <a:bodyPr wrap="square" lIns="0" tIns="0" rIns="0" bIns="0" rtlCol="0" anchor="ctr"/>
+          <a:lstStyle/>
+          <a:p>
+            <a:pPr indent="0" marL="0">
+              <a:buNone/>
+            </a:pPr>
+            <a:r>
+              <a:rPr lang="en-US" sz="3400" b="1" dirty="0">
+                <a:solidFill>
+                  <a:srgbClr val="264653"/>
+                </a:solidFill>
+                <a:latin typeface="Meiryo" pitchFamily="34" charset="0"/>
+                <a:ea typeface="Meiryo" pitchFamily="34" charset="-122"/>
+                <a:cs typeface="Meiryo" pitchFamily="34" charset="-120"/>
+              </a:rPr>
+              <a:t>直せますが、変えないほうがよいもの</a:t>
+            </a:r>
+            <a:endParaRPr lang="en-US" sz="3400" dirty="0"/>
+          </a:p>
+        </p:txBody>
+      </p:sp>
+      <p:sp>
+        <p:nvSpPr>
+          <p:cNvPr id="3" name="Text 1"/>
+          <p:cNvSpPr/>
+          <p:nvPr/>
+        </p:nvSpPr>
+        <p:spPr>
+          <a:xfrm>
+            <a:off x="566928" y="1024128"/>
+            <a:ext cx="11064240" cy="365760"/>
+          </a:xfrm>
+          <a:prstGeom prst="rect">
+            <a:avLst/>
+          </a:prstGeom>
+          <a:noFill/>
+          <a:ln/>
+        </p:spPr>
+        <p:txBody>
+          <a:bodyPr wrap="square" lIns="0" tIns="0" rIns="0" bIns="0" rtlCol="0" anchor="ctr"/>
+          <a:lstStyle/>
+          <a:p>
+            <a:pPr indent="0" marL="0">
+              <a:buNone/>
+            </a:pPr>
+            <a:r>
+              <a:rPr lang="en-US" sz="1600" dirty="0">
+                <a:solidFill>
+                  <a:srgbClr val="5E7681"/>
+                </a:solidFill>
+                <a:latin typeface="Meiryo" pitchFamily="34" charset="0"/>
+                <a:ea typeface="Meiryo" pitchFamily="34" charset="-122"/>
+                <a:cs typeface="Meiryo" pitchFamily="34" charset="-120"/>
+              </a:rPr>
+              <a:t>クリックできてしまうので、ご注意ください</a:t>
+            </a:r>
+            <a:endParaRPr lang="en-US" sz="1600" dirty="0"/>
+          </a:p>
+        </p:txBody>
+      </p:sp>
+      <p:sp>
+        <p:nvSpPr>
+          <p:cNvPr id="4" name="Text 2"/>
+          <p:cNvSpPr/>
+          <p:nvPr/>
+        </p:nvSpPr>
+        <p:spPr>
+          <a:xfrm>
+            <a:off x="11338560" y="6309360"/>
+            <a:ext cx="457200" cy="274320"/>
+          </a:xfrm>
+          <a:prstGeom prst="rect">
+            <a:avLst/>
+          </a:prstGeom>
+          <a:noFill/>
+          <a:ln/>
+        </p:spPr>
+        <p:txBody>
+          <a:bodyPr wrap="square" lIns="0" tIns="0" rIns="0" bIns="0" rtlCol="0" anchor="ctr"/>
+          <a:lstStyle/>
+          <a:p>
+            <a:pPr algn="r" indent="0" marL="0">
+              <a:buNone/>
+            </a:pPr>
+            <a:r>
+              <a:rPr lang="en-US" sz="1100" dirty="0">
+                <a:solidFill>
+                  <a:srgbClr val="A8B4B8"/>
+                </a:solidFill>
+                <a:latin typeface="Meiryo" pitchFamily="34" charset="0"/>
+                <a:ea typeface="Meiryo" pitchFamily="34" charset="-122"/>
+                <a:cs typeface="Meiryo" pitchFamily="34" charset="-120"/>
+              </a:rPr>
+              <a:t>10</a:t>
+            </a:r>
+            <a:endParaRPr lang="en-US" sz="1100" dirty="0"/>
+          </a:p>
+        </p:txBody>
+      </p:sp>
+      <p:sp>
+        <p:nvSpPr>
+          <p:cNvPr id="5" name="Shape 3"/>
+          <p:cNvSpPr/>
+          <p:nvPr/>
+        </p:nvSpPr>
+        <p:spPr>
+          <a:xfrm>
+            <a:off x="640080" y="1828800"/>
+            <a:ext cx="11064240" cy="1280160"/>
+          </a:xfrm>
+          <a:prstGeom prst="roundRect">
+            <a:avLst>
+              <a:gd name="adj" fmla="val 8571"/>
+            </a:avLst>
+          </a:prstGeom>
+          <a:solidFill>
+            <a:srgbClr val="F2F5F6"/>
+          </a:solidFill>
+          <a:ln/>
+        </p:spPr>
+      </p:sp>
+      <p:sp>
+        <p:nvSpPr>
+          <p:cNvPr id="6" name="Shape 4"/>
+          <p:cNvSpPr/>
+          <p:nvPr/>
+        </p:nvSpPr>
+        <p:spPr>
+          <a:xfrm>
+            <a:off x="914400" y="2212848"/>
+            <a:ext cx="512064" cy="512064"/>
+          </a:xfrm>
+          <a:prstGeom prst="ellipse">
+            <a:avLst/>
+          </a:prstGeom>
+          <a:solidFill>
+            <a:srgbClr val="DD8236"/>
+          </a:solidFill>
+          <a:ln/>
+        </p:spPr>
+      </p:sp>
+      <p:sp>
+        <p:nvSpPr>
+          <p:cNvPr id="7" name="Text 5"/>
+          <p:cNvSpPr/>
+          <p:nvPr/>
+        </p:nvSpPr>
+        <p:spPr>
+          <a:xfrm>
+            <a:off x="914400" y="2249424"/>
+            <a:ext cx="512064" cy="411480"/>
+          </a:xfrm>
+          <a:prstGeom prst="rect">
+            <a:avLst/>
+          </a:prstGeom>
+          <a:noFill/>
+          <a:ln/>
+        </p:spPr>
+        <p:txBody>
+          <a:bodyPr wrap="square" lIns="0" tIns="0" rIns="0" bIns="0" rtlCol="0" anchor="ctr"/>
+          <a:lstStyle/>
+          <a:p>
+            <a:pPr algn="ctr" indent="0" marL="0">
+              <a:buNone/>
+            </a:pPr>
+            <a:r>
+              <a:rPr lang="en-US" sz="2000" b="1" dirty="0">
+                <a:solidFill>
+                  <a:srgbClr val="FFFFFF"/>
+                </a:solidFill>
+                <a:latin typeface="Meiryo" pitchFamily="34" charset="0"/>
+                <a:ea typeface="Meiryo" pitchFamily="34" charset="-122"/>
+                <a:cs typeface="Meiryo" pitchFamily="34" charset="-120"/>
+              </a:rPr>
+              <a:t>!</a:t>
+            </a:r>
+            <a:endParaRPr lang="en-US" sz="2000" dirty="0"/>
+          </a:p>
+        </p:txBody>
+      </p:sp>
+      <p:sp>
+        <p:nvSpPr>
+          <p:cNvPr id="8" name="Text 6"/>
+          <p:cNvSpPr/>
+          <p:nvPr/>
+        </p:nvSpPr>
+        <p:spPr>
+          <a:xfrm>
+            <a:off x="1691640" y="2011680"/>
+            <a:ext cx="9601200" cy="365760"/>
+          </a:xfrm>
+          <a:prstGeom prst="rect">
+            <a:avLst/>
+          </a:prstGeom>
+          <a:noFill/>
+          <a:ln/>
+        </p:spPr>
+        <p:txBody>
+          <a:bodyPr wrap="square" lIns="0" tIns="0" rIns="0" bIns="0" rtlCol="0" anchor="ctr"/>
+          <a:lstStyle/>
+          <a:p>
+            <a:pPr indent="0" marL="0">
+              <a:buNone/>
+            </a:pPr>
+            <a:r>
+              <a:rPr lang="en-US" sz="1900" b="1" dirty="0">
+                <a:solidFill>
+                  <a:srgbClr val="264653"/>
+                </a:solidFill>
+                <a:latin typeface="Meiryo" pitchFamily="34" charset="0"/>
+                <a:ea typeface="Meiryo" pitchFamily="34" charset="-122"/>
+                <a:cs typeface="Meiryo" pitchFamily="34" charset="-120"/>
+              </a:rPr>
+              <a:t>「01」「02」などの番号</a:t>
+            </a:r>
+            <a:endParaRPr lang="en-US" sz="1900" dirty="0"/>
+          </a:p>
+        </p:txBody>
+      </p:sp>
+      <p:sp>
+        <p:nvSpPr>
+          <p:cNvPr id="9" name="Text 7"/>
+          <p:cNvSpPr/>
+          <p:nvPr/>
+        </p:nvSpPr>
+        <p:spPr>
+          <a:xfrm>
+            <a:off x="1691640" y="2450592"/>
+            <a:ext cx="9601200" cy="457200"/>
+          </a:xfrm>
+          <a:prstGeom prst="rect">
+            <a:avLst/>
+          </a:prstGeom>
+          <a:noFill/>
+          <a:ln/>
+        </p:spPr>
+        <p:txBody>
+          <a:bodyPr wrap="square" lIns="0" tIns="0" rIns="0" bIns="0" rtlCol="0" anchor="ctr"/>
+          <a:lstStyle/>
+          <a:p>
+            <a:pPr indent="0" marL="0">
+              <a:buNone/>
+            </a:pPr>
+            <a:r>
+              <a:rPr lang="en-US" sz="1500" dirty="0">
+                <a:solidFill>
+                  <a:srgbClr val="5E7681"/>
+                </a:solidFill>
+                <a:latin typeface="Meiryo" pitchFamily="34" charset="0"/>
+                <a:ea typeface="Meiryo" pitchFamily="34" charset="-122"/>
+                <a:cs typeface="Meiryo" pitchFamily="34" charset="-120"/>
+              </a:rPr>
+              <a:t>章の順番を表しています。文章を足しても番号は自動で増えません</a:t>
+            </a:r>
+            <a:endParaRPr lang="en-US" sz="1500" dirty="0"/>
+          </a:p>
+        </p:txBody>
+      </p:sp>
+      <p:sp>
+        <p:nvSpPr>
+          <p:cNvPr id="10" name="Shape 8"/>
+          <p:cNvSpPr/>
+          <p:nvPr/>
+        </p:nvSpPr>
+        <p:spPr>
+          <a:xfrm>
+            <a:off x="640080" y="3246120"/>
+            <a:ext cx="11064240" cy="1280160"/>
+          </a:xfrm>
+          <a:prstGeom prst="roundRect">
+            <a:avLst>
+              <a:gd name="adj" fmla="val 8571"/>
+            </a:avLst>
+          </a:prstGeom>
+          <a:solidFill>
+            <a:srgbClr val="F2F5F6"/>
+          </a:solidFill>
+          <a:ln/>
+        </p:spPr>
+      </p:sp>
+      <p:sp>
+        <p:nvSpPr>
+          <p:cNvPr id="11" name="Shape 9"/>
+          <p:cNvSpPr/>
+          <p:nvPr/>
+        </p:nvSpPr>
+        <p:spPr>
+          <a:xfrm>
+            <a:off x="914400" y="3630168"/>
+            <a:ext cx="512064" cy="512064"/>
+          </a:xfrm>
+          <a:prstGeom prst="ellipse">
+            <a:avLst/>
+          </a:prstGeom>
+          <a:solidFill>
+            <a:srgbClr val="DD8236"/>
+          </a:solidFill>
+          <a:ln/>
+        </p:spPr>
+      </p:sp>
+      <p:sp>
+        <p:nvSpPr>
+          <p:cNvPr id="12" name="Text 10"/>
+          <p:cNvSpPr/>
+          <p:nvPr/>
+        </p:nvSpPr>
+        <p:spPr>
+          <a:xfrm>
+            <a:off x="914400" y="3666744"/>
+            <a:ext cx="512064" cy="411480"/>
+          </a:xfrm>
+          <a:prstGeom prst="rect">
+            <a:avLst/>
+          </a:prstGeom>
+          <a:noFill/>
+          <a:ln/>
+        </p:spPr>
+        <p:txBody>
+          <a:bodyPr wrap="square" lIns="0" tIns="0" rIns="0" bIns="0" rtlCol="0" anchor="ctr"/>
+          <a:lstStyle/>
+          <a:p>
+            <a:pPr algn="ctr" indent="0" marL="0">
+              <a:buNone/>
+            </a:pPr>
+            <a:r>
+              <a:rPr lang="en-US" sz="2000" b="1" dirty="0">
+                <a:solidFill>
+                  <a:srgbClr val="FFFFFF"/>
+                </a:solidFill>
+                <a:latin typeface="Meiryo" pitchFamily="34" charset="0"/>
+                <a:ea typeface="Meiryo" pitchFamily="34" charset="-122"/>
+                <a:cs typeface="Meiryo" pitchFamily="34" charset="-120"/>
+              </a:rPr>
+              <a:t>!</a:t>
+            </a:r>
+            <a:endParaRPr lang="en-US" sz="2000" dirty="0"/>
+          </a:p>
+        </p:txBody>
+      </p:sp>
+      <p:sp>
+        <p:nvSpPr>
+          <p:cNvPr id="13" name="Text 11"/>
+          <p:cNvSpPr/>
+          <p:nvPr/>
+        </p:nvSpPr>
+        <p:spPr>
+          <a:xfrm>
+            <a:off x="1691640" y="3429000"/>
+            <a:ext cx="9601200" cy="365760"/>
+          </a:xfrm>
+          <a:prstGeom prst="rect">
+            <a:avLst/>
+          </a:prstGeom>
+          <a:noFill/>
+          <a:ln/>
+        </p:spPr>
+        <p:txBody>
+          <a:bodyPr wrap="square" lIns="0" tIns="0" rIns="0" bIns="0" rtlCol="0" anchor="ctr"/>
+          <a:lstStyle/>
+          <a:p>
+            <a:pPr indent="0" marL="0">
+              <a:buNone/>
+            </a:pPr>
+            <a:r>
+              <a:rPr lang="en-US" sz="1900" b="1" dirty="0">
+                <a:solidFill>
+                  <a:srgbClr val="264653"/>
+                </a:solidFill>
+                <a:latin typeface="Meiryo" pitchFamily="34" charset="0"/>
+                <a:ea typeface="Meiryo" pitchFamily="34" charset="-122"/>
+                <a:cs typeface="Meiryo" pitchFamily="34" charset="-120"/>
+              </a:rPr>
+              <a:t>「① 身体の芯（体幹）を…」のラベル</a:t>
+            </a:r>
+            <a:endParaRPr lang="en-US" sz="1900" dirty="0"/>
+          </a:p>
+        </p:txBody>
+      </p:sp>
+      <p:sp>
+        <p:nvSpPr>
+          <p:cNvPr id="14" name="Text 12"/>
+          <p:cNvSpPr/>
+          <p:nvPr/>
+        </p:nvSpPr>
+        <p:spPr>
+          <a:xfrm>
+            <a:off x="1691640" y="3867912"/>
+            <a:ext cx="9601200" cy="457200"/>
+          </a:xfrm>
+          <a:prstGeom prst="rect">
+            <a:avLst/>
+          </a:prstGeom>
+          <a:noFill/>
+          <a:ln/>
+        </p:spPr>
+        <p:txBody>
+          <a:bodyPr wrap="square" lIns="0" tIns="0" rIns="0" bIns="0" rtlCol="0" anchor="ctr"/>
+          <a:lstStyle/>
+          <a:p>
+            <a:pPr indent="0" marL="0">
+              <a:buNone/>
+            </a:pPr>
+            <a:r>
+              <a:rPr lang="en-US" sz="1500" dirty="0">
+                <a:solidFill>
+                  <a:srgbClr val="5E7681"/>
+                </a:solidFill>
+                <a:latin typeface="Meiryo" pitchFamily="34" charset="0"/>
+                <a:ea typeface="Meiryo" pitchFamily="34" charset="-122"/>
+                <a:cs typeface="Meiryo" pitchFamily="34" charset="-120"/>
+              </a:rPr>
+              <a:t>①②③ の並びが崩れると読みにくくなります</a:t>
+            </a:r>
+            <a:endParaRPr lang="en-US" sz="1500" dirty="0"/>
+          </a:p>
+        </p:txBody>
+      </p:sp>
+      <p:sp>
+        <p:nvSpPr>
+          <p:cNvPr id="15" name="Shape 13"/>
+          <p:cNvSpPr/>
+          <p:nvPr/>
+        </p:nvSpPr>
+        <p:spPr>
+          <a:xfrm>
+            <a:off x="640080" y="4663440"/>
+            <a:ext cx="11064240" cy="1280160"/>
+          </a:xfrm>
+          <a:prstGeom prst="roundRect">
+            <a:avLst>
+              <a:gd name="adj" fmla="val 8571"/>
+            </a:avLst>
+          </a:prstGeom>
+          <a:solidFill>
+            <a:srgbClr val="F2F5F6"/>
+          </a:solidFill>
+          <a:ln/>
+        </p:spPr>
+      </p:sp>
+      <p:sp>
+        <p:nvSpPr>
+          <p:cNvPr id="16" name="Shape 14"/>
+          <p:cNvSpPr/>
+          <p:nvPr/>
+        </p:nvSpPr>
+        <p:spPr>
+          <a:xfrm>
+            <a:off x="914400" y="5047488"/>
+            <a:ext cx="512064" cy="512064"/>
+          </a:xfrm>
+          <a:prstGeom prst="ellipse">
+            <a:avLst/>
+          </a:prstGeom>
+          <a:solidFill>
+            <a:srgbClr val="DD8236"/>
+          </a:solidFill>
+          <a:ln/>
+        </p:spPr>
+      </p:sp>
+      <p:sp>
+        <p:nvSpPr>
+          <p:cNvPr id="17" name="Text 15"/>
+          <p:cNvSpPr/>
+          <p:nvPr/>
+        </p:nvSpPr>
+        <p:spPr>
+          <a:xfrm>
+            <a:off x="914400" y="5084064"/>
+            <a:ext cx="512064" cy="411480"/>
+          </a:xfrm>
+          <a:prstGeom prst="rect">
+            <a:avLst/>
+          </a:prstGeom>
+          <a:noFill/>
+          <a:ln/>
+        </p:spPr>
+        <p:txBody>
+          <a:bodyPr wrap="square" lIns="0" tIns="0" rIns="0" bIns="0" rtlCol="0" anchor="ctr"/>
+          <a:lstStyle/>
+          <a:p>
+            <a:pPr algn="ctr" indent="0" marL="0">
+              <a:buNone/>
+            </a:pPr>
+            <a:r>
+              <a:rPr lang="en-US" sz="2000" b="1" dirty="0">
+                <a:solidFill>
+                  <a:srgbClr val="FFFFFF"/>
+                </a:solidFill>
+                <a:latin typeface="Meiryo" pitchFamily="34" charset="0"/>
+                <a:ea typeface="Meiryo" pitchFamily="34" charset="-122"/>
+                <a:cs typeface="Meiryo" pitchFamily="34" charset="-120"/>
+              </a:rPr>
+              <a:t>!</a:t>
+            </a:r>
+            <a:endParaRPr lang="en-US" sz="2000" dirty="0"/>
+          </a:p>
+        </p:txBody>
+      </p:sp>
+      <p:sp>
+        <p:nvSpPr>
+          <p:cNvPr id="18" name="Text 16"/>
+          <p:cNvSpPr/>
+          <p:nvPr/>
+        </p:nvSpPr>
+        <p:spPr>
+          <a:xfrm>
+            <a:off x="1691640" y="4846320"/>
+            <a:ext cx="9601200" cy="365760"/>
+          </a:xfrm>
+          <a:prstGeom prst="rect">
+            <a:avLst/>
+          </a:prstGeom>
+          <a:noFill/>
+          <a:ln/>
+        </p:spPr>
+        <p:txBody>
+          <a:bodyPr wrap="square" lIns="0" tIns="0" rIns="0" bIns="0" rtlCol="0" anchor="ctr"/>
+          <a:lstStyle/>
+          <a:p>
+            <a:pPr indent="0" marL="0">
+              <a:buNone/>
+            </a:pPr>
+            <a:r>
+              <a:rPr lang="en-US" sz="1900" b="1" dirty="0">
+                <a:solidFill>
+                  <a:srgbClr val="264653"/>
+                </a:solidFill>
+                <a:latin typeface="Meiryo" pitchFamily="34" charset="0"/>
+                <a:ea typeface="Meiryo" pitchFamily="34" charset="-122"/>
+                <a:cs typeface="Meiryo" pitchFamily="34" charset="-120"/>
+              </a:rPr>
+              <a:t>見出しの文字（青い大きな字）</a:t>
+            </a:r>
+            <a:endParaRPr lang="en-US" sz="1900" dirty="0"/>
+          </a:p>
+        </p:txBody>
+      </p:sp>
+      <p:sp>
+        <p:nvSpPr>
+          <p:cNvPr id="19" name="Text 17"/>
+          <p:cNvSpPr/>
+          <p:nvPr/>
+        </p:nvSpPr>
+        <p:spPr>
+          <a:xfrm>
+            <a:off x="1691640" y="5285232"/>
+            <a:ext cx="9601200" cy="457200"/>
+          </a:xfrm>
+          <a:prstGeom prst="rect">
+            <a:avLst/>
+          </a:prstGeom>
+          <a:noFill/>
+          <a:ln/>
+        </p:spPr>
+        <p:txBody>
+          <a:bodyPr wrap="square" lIns="0" tIns="0" rIns="0" bIns="0" rtlCol="0" anchor="ctr"/>
+          <a:lstStyle/>
+          <a:p>
+            <a:pPr indent="0" marL="0">
+              <a:buNone/>
+            </a:pPr>
+            <a:r>
+              <a:rPr lang="en-US" sz="1500" dirty="0">
+                <a:solidFill>
+                  <a:srgbClr val="5E7681"/>
+                </a:solidFill>
+                <a:latin typeface="Meiryo" pitchFamily="34" charset="0"/>
+                <a:ea typeface="Meiryo" pitchFamily="34" charset="-122"/>
+                <a:cs typeface="Meiryo" pitchFamily="34" charset="-120"/>
+              </a:rPr>
+              <a:t>変えるとページ内リンクがずれることがあります。変えたいときはご連絡ください</a:t>
+            </a:r>
+            <a:endParaRPr lang="en-US" sz="1500" dirty="0"/>
+          </a:p>
+        </p:txBody>
+      </p:sp>
+      <p:sp>
+        <p:nvSpPr>
+          <p:cNvPr id="20" name="Shape 18"/>
+          <p:cNvSpPr/>
+          <p:nvPr/>
+        </p:nvSpPr>
+        <p:spPr>
+          <a:xfrm>
+            <a:off x="640080" y="5623560"/>
+            <a:ext cx="11064240" cy="731520"/>
+          </a:xfrm>
+          <a:prstGeom prst="roundRect">
+            <a:avLst>
+              <a:gd name="adj" fmla="val 12500"/>
+            </a:avLst>
+          </a:prstGeom>
+          <a:solidFill>
+            <a:srgbClr val="EDF6EE"/>
+          </a:solidFill>
+          <a:ln/>
+        </p:spPr>
+      </p:sp>
+      <p:sp>
+        <p:nvSpPr>
+          <p:cNvPr id="21" name="Text 19"/>
+          <p:cNvSpPr/>
+          <p:nvPr/>
+        </p:nvSpPr>
+        <p:spPr>
+          <a:xfrm>
+            <a:off x="868680" y="5788152"/>
+            <a:ext cx="10607040" cy="402336"/>
+          </a:xfrm>
+          <a:prstGeom prst="rect">
+            <a:avLst/>
+          </a:prstGeom>
+          <a:noFill/>
+          <a:ln/>
+        </p:spPr>
+        <p:txBody>
+          <a:bodyPr wrap="square" lIns="0" tIns="0" rIns="0" bIns="0" rtlCol="0" anchor="ctr"/>
+          <a:lstStyle/>
+          <a:p>
+            <a:pPr indent="0" marL="0">
+              <a:lnSpc>
+                <a:spcPts val="2100"/>
+              </a:lnSpc>
+              <a:buNone/>
+            </a:pPr>
+            <a:r>
+              <a:rPr lang="en-US" sz="1600" b="1" dirty="0">
+                <a:solidFill>
+                  <a:srgbClr val="2E7D32"/>
+                </a:solidFill>
+                <a:latin typeface="Meiryo" pitchFamily="34" charset="0"/>
+                <a:ea typeface="Meiryo" pitchFamily="34" charset="-122"/>
+                <a:cs typeface="Meiryo" pitchFamily="34" charset="-120"/>
+              </a:rPr>
+              <a:t>本文（普通の大きさの文章）は、どこでも自由に直していただいて大丈夫です。</a:t>
+            </a:r>
+            <a:endParaRPr lang="en-US" sz="1600" dirty="0"/>
+          </a:p>
+        </p:txBody>
+      </p:sp>
+    </p:spTree>
+  </p:cSld>
+  <p:clrMapOvr>
+    <a:masterClrMapping/>
+  </p:clrMapOvr>
+</p:sld>
+</file>
+
+<file path=ppt/slides/slide12.xml><?xml version="1.0" encoding="utf-8"?>
+<p:sld xmlns:a="http://schemas.openxmlformats.org/drawingml/2006/main" xmlns:r="http://schemas.openxmlformats.org/officeDocument/2006/relationships" xmlns:p="http://schemas.openxmlformats.org/presentationml/2006/main">
+  <p:cSld name="Slide 12">
+    <p:bg>
+      <p:bgPr>
+        <a:solidFill>
+          <a:srgbClr val="FFFFFF"/>
+        </a:solidFill>
+      </p:bgPr>
+    </p:bg>
+    <p:spTree>
+      <p:nvGrpSpPr>
+        <p:cNvPr id="1" name=""/>
+        <p:cNvGrpSpPr/>
+        <p:nvPr/>
+      </p:nvGrpSpPr>
+      <p:grpSpPr>
+        <a:xfrm>
+          <a:off x="0" y="0"/>
+          <a:ext cx="0" cy="0"/>
+          <a:chOff x="0" y="0"/>
+          <a:chExt cx="0" cy="0"/>
+        </a:xfrm>
+      </p:grpSpPr>
+      <p:sp>
+        <p:nvSpPr>
+          <p:cNvPr id="2" name="Text 0"/>
+          <p:cNvSpPr/>
+          <p:nvPr/>
+        </p:nvSpPr>
+        <p:spPr>
+          <a:xfrm>
+            <a:off x="548640" y="274320"/>
+            <a:ext cx="11064240" cy="731520"/>
+          </a:xfrm>
+          <a:prstGeom prst="rect">
+            <a:avLst/>
+          </a:prstGeom>
+          <a:noFill/>
+          <a:ln/>
+        </p:spPr>
+        <p:txBody>
+          <a:bodyPr wrap="square" lIns="0" tIns="0" rIns="0" bIns="0" rtlCol="0" anchor="ctr"/>
+          <a:lstStyle/>
+          <a:p>
+            <a:pPr indent="0" marL="0">
+              <a:buNone/>
+            </a:pPr>
+            <a:r>
+              <a:rPr lang="en-US" sz="3400" b="1" dirty="0">
+                <a:solidFill>
+                  <a:srgbClr val="264653"/>
+                </a:solidFill>
+                <a:latin typeface="Meiryo" pitchFamily="34" charset="0"/>
+                <a:ea typeface="Meiryo" pitchFamily="34" charset="-122"/>
+                <a:cs typeface="Meiryo" pitchFamily="34" charset="-120"/>
+              </a:rPr>
+              <a:t>⑤ 写真を差し替える</a:t>
+            </a:r>
+            <a:endParaRPr lang="en-US" sz="3400" dirty="0"/>
+          </a:p>
+        </p:txBody>
+      </p:sp>
+      <p:sp>
+        <p:nvSpPr>
+          <p:cNvPr id="3" name="Text 1"/>
+          <p:cNvSpPr/>
+          <p:nvPr/>
+        </p:nvSpPr>
+        <p:spPr>
+          <a:xfrm>
+            <a:off x="11338560" y="6309360"/>
+            <a:ext cx="457200" cy="274320"/>
+          </a:xfrm>
+          <a:prstGeom prst="rect">
+            <a:avLst/>
+          </a:prstGeom>
+          <a:noFill/>
+          <a:ln/>
+        </p:spPr>
+        <p:txBody>
+          <a:bodyPr wrap="square" lIns="0" tIns="0" rIns="0" bIns="0" rtlCol="0" anchor="ctr"/>
+          <a:lstStyle/>
+          <a:p>
+            <a:pPr algn="r" indent="0" marL="0">
+              <a:buNone/>
+            </a:pPr>
+            <a:r>
+              <a:rPr lang="en-US" sz="1100" dirty="0">
+                <a:solidFill>
+                  <a:srgbClr val="A8B4B8"/>
+                </a:solidFill>
+                <a:latin typeface="Meiryo" pitchFamily="34" charset="0"/>
+                <a:ea typeface="Meiryo" pitchFamily="34" charset="-122"/>
+                <a:cs typeface="Meiryo" pitchFamily="34" charset="-120"/>
+              </a:rPr>
+              <a:t>11</a:t>
+            </a:r>
+            <a:endParaRPr lang="en-US" sz="1100" dirty="0"/>
+          </a:p>
+        </p:txBody>
+      </p:sp>
+      <p:sp>
+        <p:nvSpPr>
+          <p:cNvPr id="4" name="Shape 2"/>
+          <p:cNvSpPr/>
+          <p:nvPr/>
+        </p:nvSpPr>
+        <p:spPr>
+          <a:xfrm>
+            <a:off x="685800" y="1828800"/>
+            <a:ext cx="457200" cy="457200"/>
+          </a:xfrm>
+          <a:prstGeom prst="ellipse">
+            <a:avLst/>
+          </a:prstGeom>
+          <a:solidFill>
+            <a:srgbClr val="2E7D32"/>
+          </a:solidFill>
+          <a:ln/>
+        </p:spPr>
+      </p:sp>
+      <p:sp>
+        <p:nvSpPr>
+          <p:cNvPr id="5" name="Text 3"/>
+          <p:cNvSpPr/>
+          <p:nvPr/>
+        </p:nvSpPr>
+        <p:spPr>
+          <a:xfrm>
+            <a:off x="685800" y="1883664"/>
+            <a:ext cx="457200" cy="347472"/>
+          </a:xfrm>
+          <a:prstGeom prst="rect">
+            <a:avLst/>
+          </a:prstGeom>
+          <a:noFill/>
+          <a:ln/>
+        </p:spPr>
+        <p:txBody>
+          <a:bodyPr wrap="square" lIns="0" tIns="0" rIns="0" bIns="0" rtlCol="0" anchor="ctr"/>
+          <a:lstStyle/>
+          <a:p>
+            <a:pPr algn="ctr" indent="0" marL="0">
+              <a:buNone/>
+            </a:pPr>
+            <a:r>
+              <a:rPr lang="en-US" sz="1600" b="1" dirty="0">
+                <a:solidFill>
+                  <a:srgbClr val="FFFFFF"/>
+                </a:solidFill>
+                <a:latin typeface="Meiryo" pitchFamily="34" charset="0"/>
+                <a:ea typeface="Meiryo" pitchFamily="34" charset="-122"/>
+                <a:cs typeface="Meiryo" pitchFamily="34" charset="-120"/>
+              </a:rPr>
+              <a:t>1</a:t>
+            </a:r>
+            <a:endParaRPr lang="en-US" sz="1600" dirty="0"/>
+          </a:p>
+        </p:txBody>
+      </p:sp>
+      <p:sp>
+        <p:nvSpPr>
+          <p:cNvPr id="6" name="Text 4"/>
+          <p:cNvSpPr/>
+          <p:nvPr/>
+        </p:nvSpPr>
+        <p:spPr>
+          <a:xfrm>
+            <a:off x="1344168" y="1874520"/>
+            <a:ext cx="9601200" cy="384048"/>
+          </a:xfrm>
+          <a:prstGeom prst="rect">
+            <a:avLst/>
+          </a:prstGeom>
+          <a:noFill/>
+          <a:ln/>
+        </p:spPr>
+        <p:txBody>
+          <a:bodyPr wrap="square" lIns="0" tIns="0" rIns="0" bIns="0" rtlCol="0" anchor="ctr"/>
+          <a:lstStyle/>
+          <a:p>
+            <a:pPr indent="0" marL="0">
+              <a:buNone/>
+            </a:pPr>
+            <a:r>
+              <a:rPr lang="en-US" sz="1900" dirty="0">
+                <a:solidFill>
+                  <a:srgbClr val="1E2D34"/>
+                </a:solidFill>
+                <a:latin typeface="Meiryo" pitchFamily="34" charset="0"/>
+                <a:ea typeface="Meiryo" pitchFamily="34" charset="-122"/>
+                <a:cs typeface="Meiryo" pitchFamily="34" charset="-120"/>
+              </a:rPr>
+              <a:t>写真をクリック</a:t>
+            </a:r>
+            <a:endParaRPr lang="en-US" sz="1900" dirty="0"/>
+          </a:p>
+        </p:txBody>
+      </p:sp>
+      <p:sp>
+        <p:nvSpPr>
+          <p:cNvPr id="7" name="Shape 5"/>
+          <p:cNvSpPr/>
+          <p:nvPr/>
+        </p:nvSpPr>
+        <p:spPr>
+          <a:xfrm>
+            <a:off x="685800" y="2560320"/>
+            <a:ext cx="457200" cy="457200"/>
+          </a:xfrm>
+          <a:prstGeom prst="ellipse">
+            <a:avLst/>
+          </a:prstGeom>
+          <a:solidFill>
+            <a:srgbClr val="2E7D32"/>
+          </a:solidFill>
+          <a:ln/>
+        </p:spPr>
+      </p:sp>
+      <p:sp>
+        <p:nvSpPr>
+          <p:cNvPr id="8" name="Text 6"/>
+          <p:cNvSpPr/>
+          <p:nvPr/>
+        </p:nvSpPr>
+        <p:spPr>
+          <a:xfrm>
+            <a:off x="685800" y="2615184"/>
+            <a:ext cx="457200" cy="347472"/>
+          </a:xfrm>
+          <a:prstGeom prst="rect">
+            <a:avLst/>
+          </a:prstGeom>
+          <a:noFill/>
+          <a:ln/>
+        </p:spPr>
+        <p:txBody>
+          <a:bodyPr wrap="square" lIns="0" tIns="0" rIns="0" bIns="0" rtlCol="0" anchor="ctr"/>
+          <a:lstStyle/>
+          <a:p>
+            <a:pPr algn="ctr" indent="0" marL="0">
+              <a:buNone/>
+            </a:pPr>
+            <a:r>
+              <a:rPr lang="en-US" sz="1600" b="1" dirty="0">
+                <a:solidFill>
+                  <a:srgbClr val="FFFFFF"/>
+                </a:solidFill>
+                <a:latin typeface="Meiryo" pitchFamily="34" charset="0"/>
+                <a:ea typeface="Meiryo" pitchFamily="34" charset="-122"/>
+                <a:cs typeface="Meiryo" pitchFamily="34" charset="-120"/>
+              </a:rPr>
+              <a:t>2</a:t>
+            </a:r>
+            <a:endParaRPr lang="en-US" sz="1600" dirty="0"/>
+          </a:p>
+        </p:txBody>
+      </p:sp>
+      <p:sp>
+        <p:nvSpPr>
+          <p:cNvPr id="9" name="Text 7"/>
+          <p:cNvSpPr/>
+          <p:nvPr/>
+        </p:nvSpPr>
+        <p:spPr>
+          <a:xfrm>
+            <a:off x="1344168" y="2606040"/>
+            <a:ext cx="9601200" cy="384048"/>
+          </a:xfrm>
+          <a:prstGeom prst="rect">
+            <a:avLst/>
+          </a:prstGeom>
+          <a:noFill/>
+          <a:ln/>
+        </p:spPr>
+        <p:txBody>
+          <a:bodyPr wrap="square" lIns="0" tIns="0" rIns="0" bIns="0" rtlCol="0" anchor="ctr"/>
+          <a:lstStyle/>
+          <a:p>
+            <a:pPr indent="0" marL="0">
+              <a:buNone/>
+            </a:pPr>
+            <a:r>
+              <a:rPr lang="en-US" sz="1900" dirty="0">
+                <a:solidFill>
+                  <a:srgbClr val="1E2D34"/>
+                </a:solidFill>
+                <a:latin typeface="Meiryo" pitchFamily="34" charset="0"/>
+                <a:ea typeface="Meiryo" pitchFamily="34" charset="-122"/>
+                <a:cs typeface="Meiryo" pitchFamily="34" charset="-120"/>
+              </a:rPr>
+              <a:t>出てきたメニューの【置換】</a:t>
+            </a:r>
+            <a:endParaRPr lang="en-US" sz="1900" dirty="0"/>
+          </a:p>
+        </p:txBody>
+      </p:sp>
+      <p:sp>
+        <p:nvSpPr>
+          <p:cNvPr id="10" name="Shape 8"/>
+          <p:cNvSpPr/>
+          <p:nvPr/>
+        </p:nvSpPr>
+        <p:spPr>
+          <a:xfrm>
+            <a:off x="685800" y="3291840"/>
+            <a:ext cx="457200" cy="457200"/>
+          </a:xfrm>
+          <a:prstGeom prst="ellipse">
+            <a:avLst/>
+          </a:prstGeom>
+          <a:solidFill>
+            <a:srgbClr val="2E7D32"/>
+          </a:solidFill>
+          <a:ln/>
+        </p:spPr>
+      </p:sp>
+      <p:sp>
+        <p:nvSpPr>
+          <p:cNvPr id="11" name="Text 9"/>
+          <p:cNvSpPr/>
+          <p:nvPr/>
+        </p:nvSpPr>
+        <p:spPr>
+          <a:xfrm>
+            <a:off x="685800" y="3346704"/>
+            <a:ext cx="457200" cy="347472"/>
+          </a:xfrm>
+          <a:prstGeom prst="rect">
+            <a:avLst/>
+          </a:prstGeom>
+          <a:noFill/>
+          <a:ln/>
+        </p:spPr>
+        <p:txBody>
+          <a:bodyPr wrap="square" lIns="0" tIns="0" rIns="0" bIns="0" rtlCol="0" anchor="ctr"/>
+          <a:lstStyle/>
+          <a:p>
+            <a:pPr algn="ctr" indent="0" marL="0">
+              <a:buNone/>
+            </a:pPr>
+            <a:r>
+              <a:rPr lang="en-US" sz="1600" b="1" dirty="0">
+                <a:solidFill>
+                  <a:srgbClr val="FFFFFF"/>
+                </a:solidFill>
+                <a:latin typeface="Meiryo" pitchFamily="34" charset="0"/>
+                <a:ea typeface="Meiryo" pitchFamily="34" charset="-122"/>
+                <a:cs typeface="Meiryo" pitchFamily="34" charset="-120"/>
+              </a:rPr>
+              <a:t>3</a:t>
+            </a:r>
+            <a:endParaRPr lang="en-US" sz="1600" dirty="0"/>
+          </a:p>
+        </p:txBody>
+      </p:sp>
+      <p:sp>
+        <p:nvSpPr>
+          <p:cNvPr id="12" name="Text 10"/>
+          <p:cNvSpPr/>
+          <p:nvPr/>
+        </p:nvSpPr>
+        <p:spPr>
+          <a:xfrm>
+            <a:off x="1344168" y="3337560"/>
+            <a:ext cx="9601200" cy="384048"/>
+          </a:xfrm>
+          <a:prstGeom prst="rect">
+            <a:avLst/>
+          </a:prstGeom>
+          <a:noFill/>
+          <a:ln/>
+        </p:spPr>
+        <p:txBody>
+          <a:bodyPr wrap="square" lIns="0" tIns="0" rIns="0" bIns="0" rtlCol="0" anchor="ctr"/>
+          <a:lstStyle/>
+          <a:p>
+            <a:pPr indent="0" marL="0">
+              <a:buNone/>
+            </a:pPr>
+            <a:r>
+              <a:rPr lang="en-US" sz="1900" dirty="0">
+                <a:solidFill>
+                  <a:srgbClr val="1E2D34"/>
+                </a:solidFill>
+                <a:latin typeface="Meiryo" pitchFamily="34" charset="0"/>
+                <a:ea typeface="Meiryo" pitchFamily="34" charset="-122"/>
+                <a:cs typeface="Meiryo" pitchFamily="34" charset="-120"/>
+              </a:rPr>
+              <a:t>「アップロード」で新しい写真を選ぶ</a:t>
+            </a:r>
+            <a:endParaRPr lang="en-US" sz="1900" dirty="0"/>
+          </a:p>
+        </p:txBody>
+      </p:sp>
+      <p:sp>
+        <p:nvSpPr>
+          <p:cNvPr id="13" name="Shape 11"/>
+          <p:cNvSpPr/>
+          <p:nvPr/>
+        </p:nvSpPr>
+        <p:spPr>
+          <a:xfrm>
+            <a:off x="685800" y="4023360"/>
+            <a:ext cx="457200" cy="457200"/>
+          </a:xfrm>
+          <a:prstGeom prst="ellipse">
+            <a:avLst/>
+          </a:prstGeom>
+          <a:solidFill>
+            <a:srgbClr val="2E7D32"/>
+          </a:solidFill>
+          <a:ln/>
+        </p:spPr>
+      </p:sp>
+      <p:sp>
+        <p:nvSpPr>
+          <p:cNvPr id="14" name="Text 12"/>
+          <p:cNvSpPr/>
+          <p:nvPr/>
+        </p:nvSpPr>
+        <p:spPr>
+          <a:xfrm>
+            <a:off x="685800" y="4078224"/>
+            <a:ext cx="457200" cy="347472"/>
+          </a:xfrm>
+          <a:prstGeom prst="rect">
+            <a:avLst/>
+          </a:prstGeom>
+          <a:noFill/>
+          <a:ln/>
+        </p:spPr>
+        <p:txBody>
+          <a:bodyPr wrap="square" lIns="0" tIns="0" rIns="0" bIns="0" rtlCol="0" anchor="ctr"/>
+          <a:lstStyle/>
+          <a:p>
+            <a:pPr algn="ctr" indent="0" marL="0">
+              <a:buNone/>
+            </a:pPr>
+            <a:r>
+              <a:rPr lang="en-US" sz="1600" b="1" dirty="0">
+                <a:solidFill>
+                  <a:srgbClr val="FFFFFF"/>
+                </a:solidFill>
+                <a:latin typeface="Meiryo" pitchFamily="34" charset="0"/>
+                <a:ea typeface="Meiryo" pitchFamily="34" charset="-122"/>
+                <a:cs typeface="Meiryo" pitchFamily="34" charset="-120"/>
+              </a:rPr>
+              <a:t>4</a:t>
+            </a:r>
+            <a:endParaRPr lang="en-US" sz="1600" dirty="0"/>
+          </a:p>
+        </p:txBody>
+      </p:sp>
+      <p:sp>
+        <p:nvSpPr>
+          <p:cNvPr id="15" name="Text 13"/>
+          <p:cNvSpPr/>
+          <p:nvPr/>
+        </p:nvSpPr>
+        <p:spPr>
+          <a:xfrm>
+            <a:off x="1344168" y="4069080"/>
+            <a:ext cx="9601200" cy="384048"/>
+          </a:xfrm>
+          <a:prstGeom prst="rect">
+            <a:avLst/>
+          </a:prstGeom>
+          <a:noFill/>
+          <a:ln/>
+        </p:spPr>
+        <p:txBody>
+          <a:bodyPr wrap="square" lIns="0" tIns="0" rIns="0" bIns="0" rtlCol="0" anchor="ctr"/>
+          <a:lstStyle/>
+          <a:p>
+            <a:pPr indent="0" marL="0">
+              <a:buNone/>
+            </a:pPr>
+            <a:r>
+              <a:rPr lang="en-US" sz="1900" dirty="0">
+                <a:solidFill>
+                  <a:srgbClr val="1E2D34"/>
+                </a:solidFill>
+                <a:latin typeface="Meiryo" pitchFamily="34" charset="0"/>
+                <a:ea typeface="Meiryo" pitchFamily="34" charset="-122"/>
+                <a:cs typeface="Meiryo" pitchFamily="34" charset="-120"/>
+              </a:rPr>
+              <a:t>右上の【保存】</a:t>
+            </a:r>
+            <a:endParaRPr lang="en-US" sz="1900" dirty="0"/>
+          </a:p>
+        </p:txBody>
+      </p:sp>
+      <p:sp>
+        <p:nvSpPr>
+          <p:cNvPr id="16" name="Shape 14"/>
+          <p:cNvSpPr/>
+          <p:nvPr/>
+        </p:nvSpPr>
+        <p:spPr>
+          <a:xfrm>
+            <a:off x="640080" y="4937760"/>
+            <a:ext cx="11064240" cy="1097280"/>
+          </a:xfrm>
+          <a:prstGeom prst="roundRect">
+            <a:avLst>
+              <a:gd name="adj" fmla="val 8333"/>
+            </a:avLst>
+          </a:prstGeom>
+          <a:solidFill>
+            <a:srgbClr val="F2F5F6"/>
+          </a:solidFill>
+          <a:ln/>
+        </p:spPr>
+      </p:sp>
+      <p:sp>
+        <p:nvSpPr>
+          <p:cNvPr id="17" name="Text 15"/>
+          <p:cNvSpPr/>
+          <p:nvPr/>
+        </p:nvSpPr>
+        <p:spPr>
+          <a:xfrm>
+            <a:off x="868680" y="5102352"/>
+            <a:ext cx="10607040" cy="768096"/>
+          </a:xfrm>
+          <a:prstGeom prst="rect">
+            <a:avLst/>
+          </a:prstGeom>
+          <a:noFill/>
+          <a:ln/>
+        </p:spPr>
+        <p:txBody>
+          <a:bodyPr wrap="square" lIns="0" tIns="0" rIns="0" bIns="0" rtlCol="0" anchor="ctr"/>
+          <a:lstStyle/>
+          <a:p>
+            <a:pPr indent="0" marL="0">
+              <a:lnSpc>
+                <a:spcPts val="2100"/>
+              </a:lnSpc>
+              <a:buNone/>
+            </a:pPr>
+            <a:r>
+              <a:rPr lang="en-US" sz="1600" b="1" dirty="0">
+                <a:solidFill>
+                  <a:srgbClr val="264653"/>
+                </a:solidFill>
+                <a:latin typeface="Meiryo" pitchFamily="34" charset="0"/>
+                <a:ea typeface="Meiryo" pitchFamily="34" charset="-122"/>
+                <a:cs typeface="Meiryo" pitchFamily="34" charset="-120"/>
+              </a:rPr>
+              <a:t>写真は横1200ピクセルくらいがおすすめです。</a:t>
+            </a:r>
+            <a:endParaRPr lang="en-US" sz="1600" dirty="0"/>
+          </a:p>
+          <a:p>
+            <a:pPr indent="0" marL="0">
+              <a:lnSpc>
+                <a:spcPts val="2100"/>
+              </a:lnSpc>
+              <a:buNone/>
+            </a:pPr>
+            <a:r>
+              <a:rPr lang="en-US" sz="1600" b="1" dirty="0">
+                <a:solidFill>
+                  <a:srgbClr val="264653"/>
+                </a:solidFill>
+                <a:latin typeface="Meiryo" pitchFamily="34" charset="0"/>
+                <a:ea typeface="Meiryo" pitchFamily="34" charset="-122"/>
+                <a:cs typeface="Meiryo" pitchFamily="34" charset="-120"/>
+              </a:rPr>
+              <a:t>スマホで撮ったままでも表示はされますが、ページが重くなります。</a:t>
+            </a:r>
+            <a:endParaRPr lang="en-US" sz="1600" dirty="0"/>
+          </a:p>
+        </p:txBody>
+      </p:sp>
+    </p:spTree>
+  </p:cSld>
+  <p:clrMapOvr>
+    <a:masterClrMapping/>
+  </p:clrMapOvr>
+</p:sld>
+</file>
+
+<file path=ppt/slides/slide13.xml><?xml version="1.0" encoding="utf-8"?>
+<p:sld xmlns:a="http://schemas.openxmlformats.org/drawingml/2006/main" xmlns:r="http://schemas.openxmlformats.org/officeDocument/2006/relationships" xmlns:p="http://schemas.openxmlformats.org/presentationml/2006/main">
+  <p:cSld name="Slide 13">
+    <p:bg>
+      <p:bgPr>
+        <a:solidFill>
+          <a:srgbClr val="FFFFFF"/>
+        </a:solidFill>
+      </p:bgPr>
+    </p:bg>
+    <p:spTree>
+      <p:nvGrpSpPr>
+        <p:cNvPr id="1" name=""/>
+        <p:cNvGrpSpPr/>
+        <p:nvPr/>
+      </p:nvGrpSpPr>
+      <p:grpSpPr>
+        <a:xfrm>
+          <a:off x="0" y="0"/>
+          <a:ext cx="0" cy="0"/>
+          <a:chOff x="0" y="0"/>
+          <a:chExt cx="0" cy="0"/>
+        </a:xfrm>
+      </p:grpSpPr>
+      <p:sp>
+        <p:nvSpPr>
+          <p:cNvPr id="2" name="Text 0"/>
+          <p:cNvSpPr/>
+          <p:nvPr/>
+        </p:nvSpPr>
+        <p:spPr>
+          <a:xfrm>
+            <a:off x="548640" y="274320"/>
+            <a:ext cx="11064240" cy="731520"/>
+          </a:xfrm>
+          <a:prstGeom prst="rect">
+            <a:avLst/>
+          </a:prstGeom>
+          <a:noFill/>
+          <a:ln/>
+        </p:spPr>
+        <p:txBody>
+          <a:bodyPr wrap="square" lIns="0" tIns="0" rIns="0" bIns="0" rtlCol="0" anchor="ctr"/>
+          <a:lstStyle/>
+          <a:p>
+            <a:pPr indent="0" marL="0">
+              <a:buNone/>
+            </a:pPr>
+            <a:r>
+              <a:rPr lang="en-US" sz="3400" b="1" dirty="0">
+                <a:solidFill>
+                  <a:srgbClr val="264653"/>
+                </a:solidFill>
+                <a:latin typeface="Meiryo" pitchFamily="34" charset="0"/>
+                <a:ea typeface="Meiryo" pitchFamily="34" charset="-122"/>
+                <a:cs typeface="Meiryo" pitchFamily="34" charset="-120"/>
+              </a:rPr>
+              <a:t>⑥ 保存する前に確認する</a:t>
+            </a:r>
+            <a:endParaRPr lang="en-US" sz="3400" dirty="0"/>
+          </a:p>
+        </p:txBody>
+      </p:sp>
+      <p:sp>
+        <p:nvSpPr>
+          <p:cNvPr id="3" name="Text 1"/>
+          <p:cNvSpPr/>
+          <p:nvPr/>
+        </p:nvSpPr>
+        <p:spPr>
+          <a:xfrm>
+            <a:off x="566928" y="1024128"/>
+            <a:ext cx="11064240" cy="365760"/>
+          </a:xfrm>
+          <a:prstGeom prst="rect">
+            <a:avLst/>
+          </a:prstGeom>
+          <a:noFill/>
+          <a:ln/>
+        </p:spPr>
+        <p:txBody>
+          <a:bodyPr wrap="square" lIns="0" tIns="0" rIns="0" bIns="0" rtlCol="0" anchor="ctr"/>
+          <a:lstStyle/>
+          <a:p>
+            <a:pPr indent="0" marL="0">
+              <a:buNone/>
+            </a:pPr>
+            <a:r>
+              <a:rPr lang="en-US" sz="1600" dirty="0">
+                <a:solidFill>
+                  <a:srgbClr val="5E7681"/>
+                </a:solidFill>
+                <a:latin typeface="Meiryo" pitchFamily="34" charset="0"/>
+                <a:ea typeface="Meiryo" pitchFamily="34" charset="-122"/>
+                <a:cs typeface="Meiryo" pitchFamily="34" charset="-120"/>
+              </a:rPr>
+              <a:t>お客様に見える形で見られます</a:t>
+            </a:r>
+            <a:endParaRPr lang="en-US" sz="1600" dirty="0"/>
+          </a:p>
+        </p:txBody>
+      </p:sp>
+      <p:sp>
+        <p:nvSpPr>
+          <p:cNvPr id="4" name="Text 2"/>
+          <p:cNvSpPr/>
+          <p:nvPr/>
+        </p:nvSpPr>
+        <p:spPr>
+          <a:xfrm>
+            <a:off x="11338560" y="6309360"/>
+            <a:ext cx="457200" cy="274320"/>
+          </a:xfrm>
+          <a:prstGeom prst="rect">
+            <a:avLst/>
+          </a:prstGeom>
+          <a:noFill/>
+          <a:ln/>
+        </p:spPr>
+        <p:txBody>
+          <a:bodyPr wrap="square" lIns="0" tIns="0" rIns="0" bIns="0" rtlCol="0" anchor="ctr"/>
+          <a:lstStyle/>
+          <a:p>
+            <a:pPr algn="r" indent="0" marL="0">
+              <a:buNone/>
+            </a:pPr>
+            <a:r>
+              <a:rPr lang="en-US" sz="1100" dirty="0">
+                <a:solidFill>
+                  <a:srgbClr val="A8B4B8"/>
+                </a:solidFill>
+                <a:latin typeface="Meiryo" pitchFamily="34" charset="0"/>
+                <a:ea typeface="Meiryo" pitchFamily="34" charset="-122"/>
+                <a:cs typeface="Meiryo" pitchFamily="34" charset="-120"/>
+              </a:rPr>
+              <a:t>12</a:t>
+            </a:r>
+            <a:endParaRPr lang="en-US" sz="1100" dirty="0"/>
+          </a:p>
+        </p:txBody>
+      </p:sp>
+      <p:sp>
+        <p:nvSpPr>
+          <p:cNvPr id="5" name="Shape 3"/>
+          <p:cNvSpPr/>
+          <p:nvPr/>
+        </p:nvSpPr>
+        <p:spPr>
+          <a:xfrm>
+            <a:off x="640080" y="1783080"/>
+            <a:ext cx="11064240" cy="1188720"/>
+          </a:xfrm>
+          <a:prstGeom prst="roundRect">
+            <a:avLst>
+              <a:gd name="adj" fmla="val 9231"/>
+            </a:avLst>
+          </a:prstGeom>
+          <a:solidFill>
+            <a:srgbClr val="F2F5F6"/>
+          </a:solidFill>
+          <a:ln/>
+        </p:spPr>
+      </p:sp>
+      <p:sp>
+        <p:nvSpPr>
+          <p:cNvPr id="6" name="Text 4"/>
+          <p:cNvSpPr/>
+          <p:nvPr/>
+        </p:nvSpPr>
+        <p:spPr>
+          <a:xfrm>
+            <a:off x="960120" y="2148840"/>
+            <a:ext cx="10515600" cy="457200"/>
+          </a:xfrm>
+          <a:prstGeom prst="rect">
+            <a:avLst/>
+          </a:prstGeom>
+          <a:noFill/>
+          <a:ln/>
+        </p:spPr>
+        <p:txBody>
+          <a:bodyPr wrap="square" lIns="0" tIns="0" rIns="0" bIns="0" rtlCol="0" anchor="ctr"/>
+          <a:lstStyle/>
+          <a:p>
+            <a:pPr indent="0" marL="0">
+              <a:buNone/>
+            </a:pPr>
+            <a:r>
+              <a:rPr lang="en-US" sz="2200" b="1" dirty="0">
+                <a:solidFill>
+                  <a:srgbClr val="264653"/>
+                </a:solidFill>
+                <a:latin typeface="Meiryo" pitchFamily="34" charset="0"/>
+                <a:ea typeface="Meiryo" pitchFamily="34" charset="-122"/>
+                <a:cs typeface="Meiryo" pitchFamily="34" charset="-120"/>
+              </a:rPr>
+              <a:t>右上の【プレビュー】 →「新しいタブでプレビュー」</a:t>
+            </a:r>
+            <a:endParaRPr lang="en-US" sz="2200" dirty="0"/>
+          </a:p>
+        </p:txBody>
+      </p:sp>
+      <p:sp>
+        <p:nvSpPr>
+          <p:cNvPr id="7" name="Text 5"/>
+          <p:cNvSpPr/>
+          <p:nvPr/>
+        </p:nvSpPr>
+        <p:spPr>
+          <a:xfrm>
+            <a:off x="685800" y="3200400"/>
+            <a:ext cx="10972800" cy="365760"/>
+          </a:xfrm>
+          <a:prstGeom prst="rect">
+            <a:avLst/>
+          </a:prstGeom>
+          <a:noFill/>
+          <a:ln/>
+        </p:spPr>
+        <p:txBody>
+          <a:bodyPr wrap="square" lIns="0" tIns="0" rIns="0" bIns="0" rtlCol="0" anchor="ctr"/>
+          <a:lstStyle/>
+          <a:p>
+            <a:pPr indent="0" marL="0">
+              <a:buNone/>
+            </a:pPr>
+            <a:r>
+              <a:rPr lang="en-US" sz="2000" b="1" dirty="0">
+                <a:solidFill>
+                  <a:srgbClr val="264653"/>
+                </a:solidFill>
+                <a:latin typeface="Meiryo" pitchFamily="34" charset="0"/>
+                <a:ea typeface="Meiryo" pitchFamily="34" charset="-122"/>
+                <a:cs typeface="Meiryo" pitchFamily="34" charset="-120"/>
+              </a:rPr>
+              <a:t>反映されないと感じたときは</a:t>
+            </a:r>
+            <a:endParaRPr lang="en-US" sz="2000" dirty="0"/>
+          </a:p>
+        </p:txBody>
+      </p:sp>
+      <p:sp>
+        <p:nvSpPr>
+          <p:cNvPr id="8" name="Shape 6"/>
+          <p:cNvSpPr/>
+          <p:nvPr/>
+        </p:nvSpPr>
+        <p:spPr>
+          <a:xfrm>
+            <a:off x="685800" y="3657600"/>
+            <a:ext cx="457200" cy="457200"/>
+          </a:xfrm>
+          <a:prstGeom prst="ellipse">
+            <a:avLst/>
+          </a:prstGeom>
+          <a:solidFill>
+            <a:srgbClr val="DD8236"/>
+          </a:solidFill>
+          <a:ln/>
+        </p:spPr>
+      </p:sp>
+      <p:sp>
+        <p:nvSpPr>
+          <p:cNvPr id="9" name="Text 7"/>
+          <p:cNvSpPr/>
+          <p:nvPr/>
+        </p:nvSpPr>
+        <p:spPr>
+          <a:xfrm>
+            <a:off x="685800" y="3712464"/>
+            <a:ext cx="457200" cy="347472"/>
+          </a:xfrm>
+          <a:prstGeom prst="rect">
+            <a:avLst/>
+          </a:prstGeom>
+          <a:noFill/>
+          <a:ln/>
+        </p:spPr>
+        <p:txBody>
+          <a:bodyPr wrap="square" lIns="0" tIns="0" rIns="0" bIns="0" rtlCol="0" anchor="ctr"/>
+          <a:lstStyle/>
+          <a:p>
+            <a:pPr algn="ctr" indent="0" marL="0">
+              <a:buNone/>
+            </a:pPr>
+            <a:r>
+              <a:rPr lang="en-US" sz="1600" b="1" dirty="0">
+                <a:solidFill>
+                  <a:srgbClr val="FFFFFF"/>
+                </a:solidFill>
+                <a:latin typeface="Meiryo" pitchFamily="34" charset="0"/>
+                <a:ea typeface="Meiryo" pitchFamily="34" charset="-122"/>
+                <a:cs typeface="Meiryo" pitchFamily="34" charset="-120"/>
+              </a:rPr>
+              <a:t>1</a:t>
+            </a:r>
+            <a:endParaRPr lang="en-US" sz="1600" dirty="0"/>
+          </a:p>
+        </p:txBody>
+      </p:sp>
+      <p:sp>
+        <p:nvSpPr>
+          <p:cNvPr id="10" name="Text 8"/>
+          <p:cNvSpPr/>
+          <p:nvPr/>
+        </p:nvSpPr>
+        <p:spPr>
+          <a:xfrm>
+            <a:off x="1344168" y="3703320"/>
+            <a:ext cx="9601200" cy="384048"/>
+          </a:xfrm>
+          <a:prstGeom prst="rect">
+            <a:avLst/>
+          </a:prstGeom>
+          <a:noFill/>
+          <a:ln/>
+        </p:spPr>
+        <p:txBody>
+          <a:bodyPr wrap="square" lIns="0" tIns="0" rIns="0" bIns="0" rtlCol="0" anchor="ctr"/>
+          <a:lstStyle/>
+          <a:p>
+            <a:pPr indent="0" marL="0">
+              <a:buNone/>
+            </a:pPr>
+            <a:r>
+              <a:rPr lang="en-US" sz="1700" dirty="0">
+                <a:solidFill>
+                  <a:srgbClr val="1E2D34"/>
+                </a:solidFill>
+                <a:latin typeface="Meiryo" pitchFamily="34" charset="0"/>
+                <a:ea typeface="Meiryo" pitchFamily="34" charset="-122"/>
+                <a:cs typeface="Meiryo" pitchFamily="34" charset="-120"/>
+              </a:rPr>
+              <a:t>5分ほど待って、もう一度ひらく</a:t>
+            </a:r>
+            <a:endParaRPr lang="en-US" sz="1700" dirty="0"/>
+          </a:p>
+        </p:txBody>
+      </p:sp>
+      <p:sp>
+        <p:nvSpPr>
+          <p:cNvPr id="11" name="Shape 9"/>
+          <p:cNvSpPr/>
+          <p:nvPr/>
+        </p:nvSpPr>
+        <p:spPr>
+          <a:xfrm>
+            <a:off x="685800" y="4389120"/>
+            <a:ext cx="457200" cy="457200"/>
+          </a:xfrm>
+          <a:prstGeom prst="ellipse">
+            <a:avLst/>
+          </a:prstGeom>
+          <a:solidFill>
+            <a:srgbClr val="DD8236"/>
+          </a:solidFill>
+          <a:ln/>
+        </p:spPr>
+      </p:sp>
+      <p:sp>
+        <p:nvSpPr>
+          <p:cNvPr id="12" name="Text 10"/>
+          <p:cNvSpPr/>
+          <p:nvPr/>
+        </p:nvSpPr>
+        <p:spPr>
+          <a:xfrm>
+            <a:off x="685800" y="4443984"/>
+            <a:ext cx="457200" cy="347472"/>
+          </a:xfrm>
+          <a:prstGeom prst="rect">
+            <a:avLst/>
+          </a:prstGeom>
+          <a:noFill/>
+          <a:ln/>
+        </p:spPr>
+        <p:txBody>
+          <a:bodyPr wrap="square" lIns="0" tIns="0" rIns="0" bIns="0" rtlCol="0" anchor="ctr"/>
+          <a:lstStyle/>
+          <a:p>
+            <a:pPr algn="ctr" indent="0" marL="0">
+              <a:buNone/>
+            </a:pPr>
+            <a:r>
+              <a:rPr lang="en-US" sz="1600" b="1" dirty="0">
+                <a:solidFill>
+                  <a:srgbClr val="FFFFFF"/>
+                </a:solidFill>
+                <a:latin typeface="Meiryo" pitchFamily="34" charset="0"/>
+                <a:ea typeface="Meiryo" pitchFamily="34" charset="-122"/>
+                <a:cs typeface="Meiryo" pitchFamily="34" charset="-120"/>
+              </a:rPr>
+              <a:t>2</a:t>
+            </a:r>
+            <a:endParaRPr lang="en-US" sz="1600" dirty="0"/>
+          </a:p>
+        </p:txBody>
+      </p:sp>
+      <p:sp>
+        <p:nvSpPr>
+          <p:cNvPr id="13" name="Text 11"/>
+          <p:cNvSpPr/>
+          <p:nvPr/>
+        </p:nvSpPr>
+        <p:spPr>
+          <a:xfrm>
+            <a:off x="1344168" y="4434840"/>
+            <a:ext cx="9601200" cy="384048"/>
+          </a:xfrm>
+          <a:prstGeom prst="rect">
+            <a:avLst/>
+          </a:prstGeom>
+          <a:noFill/>
+          <a:ln/>
+        </p:spPr>
+        <p:txBody>
+          <a:bodyPr wrap="square" lIns="0" tIns="0" rIns="0" bIns="0" rtlCol="0" anchor="ctr"/>
+          <a:lstStyle/>
+          <a:p>
+            <a:pPr indent="0" marL="0">
+              <a:buNone/>
+            </a:pPr>
+            <a:r>
+              <a:rPr lang="en-US" sz="1700" dirty="0">
+                <a:solidFill>
+                  <a:srgbClr val="1E2D34"/>
+                </a:solidFill>
+                <a:latin typeface="Meiryo" pitchFamily="34" charset="0"/>
+                <a:ea typeface="Meiryo" pitchFamily="34" charset="-122"/>
+                <a:cs typeface="Meiryo" pitchFamily="34" charset="-120"/>
+              </a:rPr>
+              <a:t>Ctrl を押しながら F5</a:t>
+            </a:r>
+            <a:endParaRPr lang="en-US" sz="1700" dirty="0"/>
+          </a:p>
+        </p:txBody>
+      </p:sp>
+      <p:sp>
+        <p:nvSpPr>
+          <p:cNvPr id="14" name="Shape 12"/>
+          <p:cNvSpPr/>
+          <p:nvPr/>
+        </p:nvSpPr>
+        <p:spPr>
+          <a:xfrm>
+            <a:off x="685800" y="5120640"/>
+            <a:ext cx="457200" cy="457200"/>
+          </a:xfrm>
+          <a:prstGeom prst="ellipse">
+            <a:avLst/>
+          </a:prstGeom>
+          <a:solidFill>
+            <a:srgbClr val="DD8236"/>
+          </a:solidFill>
+          <a:ln/>
+        </p:spPr>
+      </p:sp>
+      <p:sp>
+        <p:nvSpPr>
+          <p:cNvPr id="15" name="Text 13"/>
+          <p:cNvSpPr/>
+          <p:nvPr/>
+        </p:nvSpPr>
+        <p:spPr>
+          <a:xfrm>
+            <a:off x="685800" y="5175504"/>
+            <a:ext cx="457200" cy="347472"/>
+          </a:xfrm>
+          <a:prstGeom prst="rect">
+            <a:avLst/>
+          </a:prstGeom>
+          <a:noFill/>
+          <a:ln/>
+        </p:spPr>
+        <p:txBody>
+          <a:bodyPr wrap="square" lIns="0" tIns="0" rIns="0" bIns="0" rtlCol="0" anchor="ctr"/>
+          <a:lstStyle/>
+          <a:p>
+            <a:pPr algn="ctr" indent="0" marL="0">
+              <a:buNone/>
+            </a:pPr>
+            <a:r>
+              <a:rPr lang="en-US" sz="1600" b="1" dirty="0">
+                <a:solidFill>
+                  <a:srgbClr val="FFFFFF"/>
+                </a:solidFill>
+                <a:latin typeface="Meiryo" pitchFamily="34" charset="0"/>
+                <a:ea typeface="Meiryo" pitchFamily="34" charset="-122"/>
+                <a:cs typeface="Meiryo" pitchFamily="34" charset="-120"/>
+              </a:rPr>
+              <a:t>3</a:t>
+            </a:r>
+            <a:endParaRPr lang="en-US" sz="1600" dirty="0"/>
+          </a:p>
+        </p:txBody>
+      </p:sp>
+      <p:sp>
+        <p:nvSpPr>
+          <p:cNvPr id="16" name="Text 14"/>
+          <p:cNvSpPr/>
+          <p:nvPr/>
+        </p:nvSpPr>
+        <p:spPr>
+          <a:xfrm>
+            <a:off x="1344168" y="5166360"/>
+            <a:ext cx="9601200" cy="384048"/>
+          </a:xfrm>
+          <a:prstGeom prst="rect">
+            <a:avLst/>
+          </a:prstGeom>
+          <a:noFill/>
+          <a:ln/>
+        </p:spPr>
+        <p:txBody>
+          <a:bodyPr wrap="square" lIns="0" tIns="0" rIns="0" bIns="0" rtlCol="0" anchor="ctr"/>
+          <a:lstStyle/>
+          <a:p>
+            <a:pPr indent="0" marL="0">
+              <a:buNone/>
+            </a:pPr>
+            <a:r>
+              <a:rPr lang="en-US" sz="1700" dirty="0">
+                <a:solidFill>
+                  <a:srgbClr val="1E2D34"/>
+                </a:solidFill>
+                <a:latin typeface="Meiryo" pitchFamily="34" charset="0"/>
+                <a:ea typeface="Meiryo" pitchFamily="34" charset="-122"/>
+                <a:cs typeface="Meiryo" pitchFamily="34" charset="-120"/>
+              </a:rPr>
+              <a:t>URLの最後に ?v=2 を付けてひらく</a:t>
+            </a:r>
+            <a:endParaRPr lang="en-US" sz="1700" dirty="0"/>
+          </a:p>
+        </p:txBody>
+      </p:sp>
+      <p:sp>
+        <p:nvSpPr>
+          <p:cNvPr id="17" name="Shape 15"/>
+          <p:cNvSpPr/>
+          <p:nvPr/>
+        </p:nvSpPr>
+        <p:spPr>
+          <a:xfrm>
+            <a:off x="640080" y="5623560"/>
+            <a:ext cx="11064240" cy="685800"/>
+          </a:xfrm>
+          <a:prstGeom prst="roundRect">
+            <a:avLst>
+              <a:gd name="adj" fmla="val 13333"/>
+            </a:avLst>
+          </a:prstGeom>
+          <a:solidFill>
+            <a:srgbClr val="EDF6EE"/>
+          </a:solidFill>
+          <a:ln/>
+        </p:spPr>
+      </p:sp>
+      <p:sp>
+        <p:nvSpPr>
+          <p:cNvPr id="18" name="Text 16"/>
+          <p:cNvSpPr/>
+          <p:nvPr/>
+        </p:nvSpPr>
+        <p:spPr>
+          <a:xfrm>
+            <a:off x="868680" y="5788152"/>
+            <a:ext cx="10607040" cy="356616"/>
+          </a:xfrm>
+          <a:prstGeom prst="rect">
+            <a:avLst/>
+          </a:prstGeom>
+          <a:noFill/>
+          <a:ln/>
+        </p:spPr>
+        <p:txBody>
+          <a:bodyPr wrap="square" lIns="0" tIns="0" rIns="0" bIns="0" rtlCol="0" anchor="ctr"/>
+          <a:lstStyle/>
+          <a:p>
+            <a:pPr indent="0" marL="0">
+              <a:lnSpc>
+                <a:spcPts val="2100"/>
+              </a:lnSpc>
+              <a:buNone/>
+            </a:pPr>
+            <a:r>
+              <a:rPr lang="en-US" sz="1600" b="1" dirty="0">
+                <a:solidFill>
+                  <a:srgbClr val="2E7D32"/>
+                </a:solidFill>
+                <a:latin typeface="Meiryo" pitchFamily="34" charset="0"/>
+                <a:ea typeface="Meiryo" pitchFamily="34" charset="-122"/>
+                <a:cs typeface="Meiryo" pitchFamily="34" charset="-120"/>
+              </a:rPr>
+              <a:t>②③で新しくなっていれば、更新は成功しています。</a:t>
+            </a:r>
+            <a:endParaRPr lang="en-US" sz="1600" dirty="0"/>
+          </a:p>
+        </p:txBody>
+      </p:sp>
+    </p:spTree>
+  </p:cSld>
+  <p:clrMapOvr>
+    <a:masterClrMapping/>
+  </p:clrMapOvr>
+</p:sld>
+</file>
+
+<file path=ppt/slides/slide14.xml><?xml version="1.0" encoding="utf-8"?>
+<p:sld xmlns:a="http://schemas.openxmlformats.org/drawingml/2006/main" xmlns:r="http://schemas.openxmlformats.org/officeDocument/2006/relationships" xmlns:p="http://schemas.openxmlformats.org/presentationml/2006/main">
+  <p:cSld name="Slide 14">
+    <p:bg>
+      <p:bgPr>
+        <a:solidFill>
+          <a:srgbClr val="FFFFFF"/>
+        </a:solidFill>
+      </p:bgPr>
+    </p:bg>
+    <p:spTree>
+      <p:nvGrpSpPr>
+        <p:cNvPr id="1" name=""/>
+        <p:cNvGrpSpPr/>
+        <p:nvPr/>
+      </p:nvGrpSpPr>
+      <p:grpSpPr>
+        <a:xfrm>
+          <a:off x="0" y="0"/>
+          <a:ext cx="0" cy="0"/>
+          <a:chOff x="0" y="0"/>
+          <a:chExt cx="0" cy="0"/>
+        </a:xfrm>
+      </p:grpSpPr>
+      <p:sp>
+        <p:nvSpPr>
+          <p:cNvPr id="2" name="Text 0"/>
+          <p:cNvSpPr/>
+          <p:nvPr/>
+        </p:nvSpPr>
+        <p:spPr>
+          <a:xfrm>
+            <a:off x="548640" y="274320"/>
+            <a:ext cx="11064240" cy="731520"/>
+          </a:xfrm>
+          <a:prstGeom prst="rect">
+            <a:avLst/>
+          </a:prstGeom>
+          <a:noFill/>
+          <a:ln/>
+        </p:spPr>
+        <p:txBody>
+          <a:bodyPr wrap="square" lIns="0" tIns="0" rIns="0" bIns="0" rtlCol="0" anchor="ctr"/>
+          <a:lstStyle/>
+          <a:p>
+            <a:pPr indent="0" marL="0">
+              <a:buNone/>
+            </a:pPr>
+            <a:r>
+              <a:rPr lang="en-US" sz="3400" b="1" dirty="0">
+                <a:solidFill>
+                  <a:srgbClr val="264653"/>
+                </a:solidFill>
+                <a:latin typeface="Meiryo" pitchFamily="34" charset="0"/>
+                <a:ea typeface="Meiryo" pitchFamily="34" charset="-122"/>
+                <a:cs typeface="Meiryo" pitchFamily="34" charset="-120"/>
+              </a:rPr>
+              <a:t>⑦ 間違えたときは</a:t>
+            </a:r>
+            <a:endParaRPr lang="en-US" sz="3400" dirty="0"/>
+          </a:p>
+        </p:txBody>
+      </p:sp>
+      <p:sp>
+        <p:nvSpPr>
+          <p:cNvPr id="3" name="Text 1"/>
+          <p:cNvSpPr/>
+          <p:nvPr/>
+        </p:nvSpPr>
+        <p:spPr>
+          <a:xfrm>
+            <a:off x="566928" y="1024128"/>
+            <a:ext cx="11064240" cy="365760"/>
+          </a:xfrm>
+          <a:prstGeom prst="rect">
+            <a:avLst/>
+          </a:prstGeom>
+          <a:noFill/>
+          <a:ln/>
+        </p:spPr>
+        <p:txBody>
+          <a:bodyPr wrap="square" lIns="0" tIns="0" rIns="0" bIns="0" rtlCol="0" anchor="ctr"/>
+          <a:lstStyle/>
+          <a:p>
+            <a:pPr indent="0" marL="0">
+              <a:buNone/>
+            </a:pPr>
+            <a:r>
+              <a:rPr lang="en-US" sz="1600" dirty="0">
+                <a:solidFill>
+                  <a:srgbClr val="5E7681"/>
+                </a:solidFill>
+                <a:latin typeface="Meiryo" pitchFamily="34" charset="0"/>
+                <a:ea typeface="Meiryo" pitchFamily="34" charset="-122"/>
+                <a:cs typeface="Meiryo" pitchFamily="34" charset="-120"/>
+              </a:rPr>
+              <a:t>元に戻せなくなることはありません</a:t>
+            </a:r>
+            <a:endParaRPr lang="en-US" sz="1600" dirty="0"/>
+          </a:p>
+        </p:txBody>
+      </p:sp>
+      <p:sp>
+        <p:nvSpPr>
+          <p:cNvPr id="4" name="Text 2"/>
+          <p:cNvSpPr/>
+          <p:nvPr/>
+        </p:nvSpPr>
+        <p:spPr>
+          <a:xfrm>
+            <a:off x="11338560" y="6309360"/>
+            <a:ext cx="457200" cy="274320"/>
+          </a:xfrm>
+          <a:prstGeom prst="rect">
+            <a:avLst/>
+          </a:prstGeom>
+          <a:noFill/>
+          <a:ln/>
+        </p:spPr>
+        <p:txBody>
+          <a:bodyPr wrap="square" lIns="0" tIns="0" rIns="0" bIns="0" rtlCol="0" anchor="ctr"/>
+          <a:lstStyle/>
+          <a:p>
+            <a:pPr algn="r" indent="0" marL="0">
+              <a:buNone/>
+            </a:pPr>
+            <a:r>
+              <a:rPr lang="en-US" sz="1100" dirty="0">
+                <a:solidFill>
+                  <a:srgbClr val="A8B4B8"/>
+                </a:solidFill>
+                <a:latin typeface="Meiryo" pitchFamily="34" charset="0"/>
+                <a:ea typeface="Meiryo" pitchFamily="34" charset="-122"/>
+                <a:cs typeface="Meiryo" pitchFamily="34" charset="-120"/>
+              </a:rPr>
+              <a:t>13</a:t>
+            </a:r>
+            <a:endParaRPr lang="en-US" sz="1100" dirty="0"/>
+          </a:p>
+        </p:txBody>
+      </p:sp>
       <p:graphicFrame>
         <p:nvGraphicFramePr>
-          <p:cNvPr id="11" name="Table 0"/>
+          <p:cNvPr id="15" name="Table 0"/>
           <p:cNvGraphicFramePr>
             <a:graphicFrameLocks noGrp="1"/>
           </p:cNvGraphicFramePr>
@@ -3024,9 +5849,9 @@
 </p:sld>
 </file>
 
-<file path=ppt/slides/slide11.xml><?xml version="1.0" encoding="utf-8"?>
+<file path=ppt/slides/slide15.xml><?xml version="1.0" encoding="utf-8"?>
 <p:sld xmlns:a="http://schemas.openxmlformats.org/drawingml/2006/main" xmlns:r="http://schemas.openxmlformats.org/officeDocument/2006/relationships" xmlns:p="http://schemas.openxmlformats.org/presentationml/2006/main">
-  <p:cSld name="Slide 11">
+  <p:cSld name="Slide 15">
     <p:bg>
       <p:bgPr>
         <a:solidFill>
@@ -3159,7 +5984,7 @@
                 <a:ea typeface="Meiryo" pitchFamily="34" charset="-122"/>
                 <a:cs typeface="Meiryo" pitchFamily="34" charset="-120"/>
               </a:rPr>
-              <a:t>10</a:t>
+              <a:t>14</a:t>
             </a:r>
             <a:endParaRPr lang="en-US" sz="1100" dirty="0"/>
           </a:p>
@@ -3650,9 +6475,9 @@
 </p:sld>
 </file>
 
-<file path=ppt/slides/slide12.xml><?xml version="1.0" encoding="utf-8"?>
+<file path=ppt/slides/slide16.xml><?xml version="1.0" encoding="utf-8"?>
 <p:sld xmlns:a="http://schemas.openxmlformats.org/drawingml/2006/main" xmlns:r="http://schemas.openxmlformats.org/officeDocument/2006/relationships" xmlns:p="http://schemas.openxmlformats.org/presentationml/2006/main">
-  <p:cSld name="Slide 12">
+  <p:cSld name="Slide 16">
     <p:bg>
       <p:bgPr>
         <a:solidFill>
@@ -3785,7 +6610,7 @@
                 <a:ea typeface="Meiryo" pitchFamily="34" charset="-122"/>
                 <a:cs typeface="Meiryo" pitchFamily="34" charset="-120"/>
               </a:rPr>
-              <a:t>11</a:t>
+              <a:t>15</a:t>
             </a:r>
             <a:endParaRPr lang="en-US" sz="1100" dirty="0"/>
           </a:p>
@@ -7504,7 +10329,7 @@
                 <a:ea typeface="Meiryo" pitchFamily="34" charset="-122"/>
                 <a:cs typeface="Meiryo" pitchFamily="34" charset="-120"/>
               </a:rPr>
-              <a:t>⑤ 写真を差し替える</a:t>
+              <a:t>ページ全体の地図</a:t>
             </a:r>
             <a:endParaRPr lang="en-US" sz="3400" dirty="0"/>
           </a:p>
@@ -7513,6 +10338,45 @@
       <p:sp>
         <p:nvSpPr>
           <p:cNvPr id="3" name="Text 1"/>
+          <p:cNvSpPr/>
+          <p:nvPr/>
+        </p:nvSpPr>
+        <p:spPr>
+          <a:xfrm>
+            <a:off x="566928" y="1024128"/>
+            <a:ext cx="11064240" cy="365760"/>
+          </a:xfrm>
+          <a:prstGeom prst="rect">
+            <a:avLst/>
+          </a:prstGeom>
+          <a:noFill/>
+          <a:ln/>
+        </p:spPr>
+        <p:txBody>
+          <a:bodyPr wrap="square" lIns="0" tIns="0" rIns="0" bIns="0" rtlCol="0" anchor="ctr"/>
+          <a:lstStyle/>
+          <a:p>
+            <a:pPr indent="0" marL="0">
+              <a:buNone/>
+            </a:pPr>
+            <a:r>
+              <a:rPr lang="en-US" sz="1600" dirty="0">
+                <a:solidFill>
+                  <a:srgbClr val="5E7681"/>
+                </a:solidFill>
+                <a:latin typeface="Meiryo" pitchFamily="34" charset="0"/>
+                <a:ea typeface="Meiryo" pitchFamily="34" charset="-122"/>
+                <a:cs typeface="Meiryo" pitchFamily="34" charset="-120"/>
+              </a:rPr>
+              <a:t>緑＝ご自身で直せる　オレンジ＝ご連絡ください</a:t>
+            </a:r>
+            <a:endParaRPr lang="en-US" sz="1600" dirty="0"/>
+          </a:p>
+        </p:txBody>
+      </p:sp>
+      <p:sp>
+        <p:nvSpPr>
+          <p:cNvPr id="4" name="Text 2"/>
           <p:cNvSpPr/>
           <p:nvPr/>
         </p:nvSpPr>
@@ -7549,430 +10413,1717 @@
           </a:p>
         </p:txBody>
       </p:sp>
-      <p:sp>
-        <p:nvSpPr>
-          <p:cNvPr id="4" name="Shape 2"/>
-          <p:cNvSpPr/>
-          <p:nvPr/>
-        </p:nvSpPr>
-        <p:spPr>
-          <a:xfrm>
-            <a:off x="685800" y="1828800"/>
-            <a:ext cx="457200" cy="457200"/>
-          </a:xfrm>
-          <a:prstGeom prst="ellipse">
-            <a:avLst/>
-          </a:prstGeom>
-          <a:solidFill>
-            <a:srgbClr val="2E7D32"/>
-          </a:solidFill>
-          <a:ln/>
-        </p:spPr>
-      </p:sp>
-      <p:sp>
-        <p:nvSpPr>
-          <p:cNvPr id="5" name="Text 3"/>
-          <p:cNvSpPr/>
-          <p:nvPr/>
-        </p:nvSpPr>
-        <p:spPr>
-          <a:xfrm>
-            <a:off x="685800" y="1883664"/>
-            <a:ext cx="457200" cy="347472"/>
-          </a:xfrm>
-          <a:prstGeom prst="rect">
-            <a:avLst/>
-          </a:prstGeom>
-          <a:noFill/>
-          <a:ln/>
-        </p:spPr>
-        <p:txBody>
-          <a:bodyPr wrap="square" lIns="0" tIns="0" rIns="0" bIns="0" rtlCol="0" anchor="ctr"/>
-          <a:lstStyle/>
-          <a:p>
-            <a:pPr algn="ctr" indent="0" marL="0">
-              <a:buNone/>
-            </a:pPr>
-            <a:r>
-              <a:rPr lang="en-US" sz="1600" b="1" dirty="0">
-                <a:solidFill>
-                  <a:srgbClr val="FFFFFF"/>
-                </a:solidFill>
-                <a:latin typeface="Meiryo" pitchFamily="34" charset="0"/>
-                <a:ea typeface="Meiryo" pitchFamily="34" charset="-122"/>
-                <a:cs typeface="Meiryo" pitchFamily="34" charset="-120"/>
-              </a:rPr>
-              <a:t>1</a:t>
-            </a:r>
-            <a:endParaRPr lang="en-US" sz="1600" dirty="0"/>
-          </a:p>
-        </p:txBody>
-      </p:sp>
-      <p:sp>
-        <p:nvSpPr>
-          <p:cNvPr id="6" name="Text 4"/>
-          <p:cNvSpPr/>
-          <p:nvPr/>
-        </p:nvSpPr>
-        <p:spPr>
-          <a:xfrm>
-            <a:off x="1344168" y="1874520"/>
-            <a:ext cx="9601200" cy="384048"/>
-          </a:xfrm>
-          <a:prstGeom prst="rect">
-            <a:avLst/>
-          </a:prstGeom>
-          <a:noFill/>
-          <a:ln/>
-        </p:spPr>
-        <p:txBody>
-          <a:bodyPr wrap="square" lIns="0" tIns="0" rIns="0" bIns="0" rtlCol="0" anchor="ctr"/>
-          <a:lstStyle/>
-          <a:p>
-            <a:pPr indent="0" marL="0">
-              <a:buNone/>
-            </a:pPr>
-            <a:r>
-              <a:rPr lang="en-US" sz="1900" dirty="0">
-                <a:solidFill>
-                  <a:srgbClr val="1E2D34"/>
-                </a:solidFill>
-                <a:latin typeface="Meiryo" pitchFamily="34" charset="0"/>
-                <a:ea typeface="Meiryo" pitchFamily="34" charset="-122"/>
-                <a:cs typeface="Meiryo" pitchFamily="34" charset="-120"/>
-              </a:rPr>
-              <a:t>写真をクリック</a:t>
-            </a:r>
-            <a:endParaRPr lang="en-US" sz="1900" dirty="0"/>
-          </a:p>
-        </p:txBody>
-      </p:sp>
-      <p:sp>
-        <p:nvSpPr>
-          <p:cNvPr id="7" name="Shape 5"/>
-          <p:cNvSpPr/>
-          <p:nvPr/>
-        </p:nvSpPr>
-        <p:spPr>
-          <a:xfrm>
-            <a:off x="685800" y="2560320"/>
-            <a:ext cx="457200" cy="457200"/>
-          </a:xfrm>
-          <a:prstGeom prst="ellipse">
-            <a:avLst/>
-          </a:prstGeom>
-          <a:solidFill>
-            <a:srgbClr val="2E7D32"/>
-          </a:solidFill>
-          <a:ln/>
-        </p:spPr>
-      </p:sp>
-      <p:sp>
-        <p:nvSpPr>
-          <p:cNvPr id="8" name="Text 6"/>
-          <p:cNvSpPr/>
-          <p:nvPr/>
-        </p:nvSpPr>
-        <p:spPr>
-          <a:xfrm>
-            <a:off x="685800" y="2615184"/>
-            <a:ext cx="457200" cy="347472"/>
-          </a:xfrm>
-          <a:prstGeom prst="rect">
-            <a:avLst/>
-          </a:prstGeom>
-          <a:noFill/>
-          <a:ln/>
-        </p:spPr>
-        <p:txBody>
-          <a:bodyPr wrap="square" lIns="0" tIns="0" rIns="0" bIns="0" rtlCol="0" anchor="ctr"/>
-          <a:lstStyle/>
-          <a:p>
-            <a:pPr algn="ctr" indent="0" marL="0">
-              <a:buNone/>
-            </a:pPr>
-            <a:r>
-              <a:rPr lang="en-US" sz="1600" b="1" dirty="0">
-                <a:solidFill>
-                  <a:srgbClr val="FFFFFF"/>
-                </a:solidFill>
-                <a:latin typeface="Meiryo" pitchFamily="34" charset="0"/>
-                <a:ea typeface="Meiryo" pitchFamily="34" charset="-122"/>
-                <a:cs typeface="Meiryo" pitchFamily="34" charset="-120"/>
-              </a:rPr>
-              <a:t>2</a:t>
-            </a:r>
-            <a:endParaRPr lang="en-US" sz="1600" dirty="0"/>
-          </a:p>
-        </p:txBody>
-      </p:sp>
-      <p:sp>
-        <p:nvSpPr>
-          <p:cNvPr id="9" name="Text 7"/>
-          <p:cNvSpPr/>
-          <p:nvPr/>
-        </p:nvSpPr>
-        <p:spPr>
-          <a:xfrm>
-            <a:off x="1344168" y="2606040"/>
-            <a:ext cx="9601200" cy="384048"/>
-          </a:xfrm>
-          <a:prstGeom prst="rect">
-            <a:avLst/>
-          </a:prstGeom>
-          <a:noFill/>
-          <a:ln/>
-        </p:spPr>
-        <p:txBody>
-          <a:bodyPr wrap="square" lIns="0" tIns="0" rIns="0" bIns="0" rtlCol="0" anchor="ctr"/>
-          <a:lstStyle/>
-          <a:p>
-            <a:pPr indent="0" marL="0">
-              <a:buNone/>
-            </a:pPr>
-            <a:r>
-              <a:rPr lang="en-US" sz="1900" dirty="0">
-                <a:solidFill>
-                  <a:srgbClr val="1E2D34"/>
-                </a:solidFill>
-                <a:latin typeface="Meiryo" pitchFamily="34" charset="0"/>
-                <a:ea typeface="Meiryo" pitchFamily="34" charset="-122"/>
-                <a:cs typeface="Meiryo" pitchFamily="34" charset="-120"/>
-              </a:rPr>
-              <a:t>出てきたメニューの【置換】</a:t>
-            </a:r>
-            <a:endParaRPr lang="en-US" sz="1900" dirty="0"/>
-          </a:p>
-        </p:txBody>
-      </p:sp>
-      <p:sp>
-        <p:nvSpPr>
-          <p:cNvPr id="10" name="Shape 8"/>
-          <p:cNvSpPr/>
-          <p:nvPr/>
-        </p:nvSpPr>
-        <p:spPr>
-          <a:xfrm>
-            <a:off x="685800" y="3291840"/>
-            <a:ext cx="457200" cy="457200"/>
-          </a:xfrm>
-          <a:prstGeom prst="ellipse">
-            <a:avLst/>
-          </a:prstGeom>
-          <a:solidFill>
-            <a:srgbClr val="2E7D32"/>
-          </a:solidFill>
-          <a:ln/>
-        </p:spPr>
-      </p:sp>
-      <p:sp>
-        <p:nvSpPr>
-          <p:cNvPr id="11" name="Text 9"/>
-          <p:cNvSpPr/>
-          <p:nvPr/>
-        </p:nvSpPr>
-        <p:spPr>
-          <a:xfrm>
-            <a:off x="685800" y="3346704"/>
-            <a:ext cx="457200" cy="347472"/>
-          </a:xfrm>
-          <a:prstGeom prst="rect">
-            <a:avLst/>
-          </a:prstGeom>
-          <a:noFill/>
-          <a:ln/>
-        </p:spPr>
-        <p:txBody>
-          <a:bodyPr wrap="square" lIns="0" tIns="0" rIns="0" bIns="0" rtlCol="0" anchor="ctr"/>
-          <a:lstStyle/>
-          <a:p>
-            <a:pPr algn="ctr" indent="0" marL="0">
-              <a:buNone/>
-            </a:pPr>
-            <a:r>
-              <a:rPr lang="en-US" sz="1600" b="1" dirty="0">
-                <a:solidFill>
-                  <a:srgbClr val="FFFFFF"/>
-                </a:solidFill>
-                <a:latin typeface="Meiryo" pitchFamily="34" charset="0"/>
-                <a:ea typeface="Meiryo" pitchFamily="34" charset="-122"/>
-                <a:cs typeface="Meiryo" pitchFamily="34" charset="-120"/>
-              </a:rPr>
-              <a:t>3</a:t>
-            </a:r>
-            <a:endParaRPr lang="en-US" sz="1600" dirty="0"/>
-          </a:p>
-        </p:txBody>
-      </p:sp>
-      <p:sp>
-        <p:nvSpPr>
-          <p:cNvPr id="12" name="Text 10"/>
-          <p:cNvSpPr/>
-          <p:nvPr/>
-        </p:nvSpPr>
-        <p:spPr>
-          <a:xfrm>
-            <a:off x="1344168" y="3337560"/>
-            <a:ext cx="9601200" cy="384048"/>
-          </a:xfrm>
-          <a:prstGeom prst="rect">
-            <a:avLst/>
-          </a:prstGeom>
-          <a:noFill/>
-          <a:ln/>
-        </p:spPr>
-        <p:txBody>
-          <a:bodyPr wrap="square" lIns="0" tIns="0" rIns="0" bIns="0" rtlCol="0" anchor="ctr"/>
-          <a:lstStyle/>
-          <a:p>
-            <a:pPr indent="0" marL="0">
-              <a:buNone/>
-            </a:pPr>
-            <a:r>
-              <a:rPr lang="en-US" sz="1900" dirty="0">
-                <a:solidFill>
-                  <a:srgbClr val="1E2D34"/>
-                </a:solidFill>
-                <a:latin typeface="Meiryo" pitchFamily="34" charset="0"/>
-                <a:ea typeface="Meiryo" pitchFamily="34" charset="-122"/>
-                <a:cs typeface="Meiryo" pitchFamily="34" charset="-120"/>
-              </a:rPr>
-              <a:t>「アップロード」で新しい写真を選ぶ</a:t>
-            </a:r>
-            <a:endParaRPr lang="en-US" sz="1900" dirty="0"/>
-          </a:p>
-        </p:txBody>
-      </p:sp>
-      <p:sp>
-        <p:nvSpPr>
-          <p:cNvPr id="13" name="Shape 11"/>
-          <p:cNvSpPr/>
-          <p:nvPr/>
-        </p:nvSpPr>
-        <p:spPr>
-          <a:xfrm>
-            <a:off x="685800" y="4023360"/>
-            <a:ext cx="457200" cy="457200"/>
-          </a:xfrm>
-          <a:prstGeom prst="ellipse">
-            <a:avLst/>
-          </a:prstGeom>
-          <a:solidFill>
-            <a:srgbClr val="2E7D32"/>
-          </a:solidFill>
-          <a:ln/>
-        </p:spPr>
-      </p:sp>
-      <p:sp>
-        <p:nvSpPr>
-          <p:cNvPr id="14" name="Text 12"/>
-          <p:cNvSpPr/>
-          <p:nvPr/>
-        </p:nvSpPr>
-        <p:spPr>
-          <a:xfrm>
-            <a:off x="685800" y="4078224"/>
-            <a:ext cx="457200" cy="347472"/>
-          </a:xfrm>
-          <a:prstGeom prst="rect">
-            <a:avLst/>
-          </a:prstGeom>
-          <a:noFill/>
-          <a:ln/>
-        </p:spPr>
-        <p:txBody>
-          <a:bodyPr wrap="square" lIns="0" tIns="0" rIns="0" bIns="0" rtlCol="0" anchor="ctr"/>
-          <a:lstStyle/>
-          <a:p>
-            <a:pPr algn="ctr" indent="0" marL="0">
-              <a:buNone/>
-            </a:pPr>
-            <a:r>
-              <a:rPr lang="en-US" sz="1600" b="1" dirty="0">
-                <a:solidFill>
-                  <a:srgbClr val="FFFFFF"/>
-                </a:solidFill>
-                <a:latin typeface="Meiryo" pitchFamily="34" charset="0"/>
-                <a:ea typeface="Meiryo" pitchFamily="34" charset="-122"/>
-                <a:cs typeface="Meiryo" pitchFamily="34" charset="-120"/>
-              </a:rPr>
-              <a:t>4</a:t>
-            </a:r>
-            <a:endParaRPr lang="en-US" sz="1600" dirty="0"/>
-          </a:p>
-        </p:txBody>
-      </p:sp>
-      <p:sp>
-        <p:nvSpPr>
-          <p:cNvPr id="15" name="Text 13"/>
-          <p:cNvSpPr/>
-          <p:nvPr/>
-        </p:nvSpPr>
-        <p:spPr>
-          <a:xfrm>
-            <a:off x="1344168" y="4069080"/>
-            <a:ext cx="9601200" cy="384048"/>
-          </a:xfrm>
-          <a:prstGeom prst="rect">
-            <a:avLst/>
-          </a:prstGeom>
-          <a:noFill/>
-          <a:ln/>
-        </p:spPr>
-        <p:txBody>
-          <a:bodyPr wrap="square" lIns="0" tIns="0" rIns="0" bIns="0" rtlCol="0" anchor="ctr"/>
-          <a:lstStyle/>
-          <a:p>
-            <a:pPr indent="0" marL="0">
-              <a:buNone/>
-            </a:pPr>
-            <a:r>
-              <a:rPr lang="en-US" sz="1900" dirty="0">
-                <a:solidFill>
-                  <a:srgbClr val="1E2D34"/>
-                </a:solidFill>
-                <a:latin typeface="Meiryo" pitchFamily="34" charset="0"/>
-                <a:ea typeface="Meiryo" pitchFamily="34" charset="-122"/>
-                <a:cs typeface="Meiryo" pitchFamily="34" charset="-120"/>
-              </a:rPr>
-              <a:t>右上の【保存】</a:t>
-            </a:r>
-            <a:endParaRPr lang="en-US" sz="1900" dirty="0"/>
-          </a:p>
-        </p:txBody>
-      </p:sp>
-      <p:sp>
-        <p:nvSpPr>
-          <p:cNvPr id="16" name="Shape 14"/>
-          <p:cNvSpPr/>
-          <p:nvPr/>
-        </p:nvSpPr>
-        <p:spPr>
-          <a:xfrm>
-            <a:off x="640080" y="4937760"/>
-            <a:ext cx="11064240" cy="1097280"/>
+      <p:graphicFrame>
+        <p:nvGraphicFramePr>
+          <p:cNvPr id="9" name="Table 0"/>
+          <p:cNvGraphicFramePr>
+            <a:graphicFrameLocks noGrp="1"/>
+          </p:cNvGraphicFramePr>
+          <p:nvPr>
+            <p:extLst>
+              <p:ext uri="{D42A27DB-BD31-4B8C-83A1-F6EECF244321}">
+                <p14:modId xmlns:p14="http://schemas.microsoft.com/office/powerpoint/2010/main" val="1579011935"/>
+              </p:ext>
+            </p:extLst>
+          </p:nvPr>
+        </p:nvGraphicFramePr>
+        <p:xfrm>
+          <a:off x="640080" y="1783080"/>
+          <a:ext cx="11064240" cy="914400"/>
+        </p:xfrm>
+        <a:graphic>
+          <a:graphicData uri="http://schemas.openxmlformats.org/drawingml/2006/table">
+            <a:tbl>
+              <a:tblPr/>
+              <a:tblGrid>
+                <a:gridCol w="3291840"/>
+                <a:gridCol w="3566160"/>
+                <a:gridCol w="4206240"/>
+              </a:tblGrid>
+              <a:tr h="548640">
+                <a:tc>
+                  <a:txBody>
+                    <a:bodyPr/>
+                    <a:lstStyle/>
+                    <a:p>
+                      <a:pPr indent="0" marL="0">
+                        <a:buNone/>
+                      </a:pPr>
+                      <a:r>
+                        <a:rPr lang="en-US" sz="1500" b="1" dirty="0">
+                          <a:solidFill>
+                            <a:srgbClr val="1E2D34"/>
+                          </a:solidFill>
+                          <a:latin typeface="Meiryo" pitchFamily="34" charset="0"/>
+                          <a:ea typeface="Meiryo" pitchFamily="34" charset="-122"/>
+                          <a:cs typeface="Meiryo" pitchFamily="34" charset="-120"/>
+                        </a:rPr>
+                        <a:t>場所</a:t>
+                      </a:r>
+                      <a:endParaRPr lang="en-US" sz="1500" dirty="0">
+                        <a:latin typeface="Meiryo" charset="0"/>
+                        <a:ea typeface="Meiryo" charset="0"/>
+                        <a:cs typeface="Meiryo" charset="0"/>
+                      </a:endParaRPr>
+                    </a:p>
+                  </a:txBody>
+                  <a:tcPr marL="91440" marR="91440" marT="45720" marB="45720" anchor="ctr">
+                    <a:lnL w="12700" cap="flat" cmpd="sng" algn="ctr">
+                      <a:solidFill>
+                        <a:srgbClr val="E2E6E8"/>
+                      </a:solidFill>
+                      <a:prstDash val="solid"/>
+                      <a:round/>
+                      <a:headEnd type="none" w="med" len="med"/>
+                      <a:tailEnd type="none" w="med" len="med"/>
+                    </a:lnL>
+                    <a:lnR w="12700" cap="flat" cmpd="sng" algn="ctr">
+                      <a:solidFill>
+                        <a:srgbClr val="E2E6E8"/>
+                      </a:solidFill>
+                      <a:prstDash val="solid"/>
+                      <a:round/>
+                      <a:headEnd type="none" w="med" len="med"/>
+                      <a:tailEnd type="none" w="med" len="med"/>
+                    </a:lnR>
+                    <a:lnT w="12700" cap="flat" cmpd="sng" algn="ctr">
+                      <a:solidFill>
+                        <a:srgbClr val="E2E6E8"/>
+                      </a:solidFill>
+                      <a:prstDash val="solid"/>
+                      <a:round/>
+                      <a:headEnd type="none" w="med" len="med"/>
+                      <a:tailEnd type="none" w="med" len="med"/>
+                    </a:lnT>
+                    <a:lnB w="12700" cap="flat" cmpd="sng" algn="ctr">
+                      <a:solidFill>
+                        <a:srgbClr val="E2E6E8"/>
+                      </a:solidFill>
+                      <a:prstDash val="solid"/>
+                      <a:round/>
+                      <a:headEnd type="none" w="med" len="med"/>
+                      <a:tailEnd type="none" w="med" len="med"/>
+                    </a:lnB>
+                    <a:solidFill>
+                      <a:srgbClr val="FFFFFF"/>
+                    </a:solidFill>
+                  </a:tcPr>
+                </a:tc>
+                <a:tc>
+                  <a:txBody>
+                    <a:bodyPr/>
+                    <a:lstStyle/>
+                    <a:p>
+                      <a:pPr indent="0" marL="0">
+                        <a:buNone/>
+                      </a:pPr>
+                      <a:r>
+                        <a:rPr lang="en-US" sz="1500" b="1" dirty="0">
+                          <a:solidFill>
+                            <a:srgbClr val="2E7D32"/>
+                          </a:solidFill>
+                          <a:latin typeface="Meiryo" pitchFamily="34" charset="0"/>
+                          <a:ea typeface="Meiryo" pitchFamily="34" charset="-122"/>
+                          <a:cs typeface="Meiryo" pitchFamily="34" charset="-120"/>
+                        </a:rPr>
+                        <a:t>直せるもの</a:t>
+                      </a:r>
+                      <a:endParaRPr lang="en-US" sz="1500" dirty="0">
+                        <a:latin typeface="Meiryo" charset="0"/>
+                        <a:ea typeface="Meiryo" charset="0"/>
+                        <a:cs typeface="Meiryo" charset="0"/>
+                      </a:endParaRPr>
+                    </a:p>
+                  </a:txBody>
+                  <a:tcPr marL="91440" marR="91440" marT="45720" marB="45720" anchor="ctr">
+                    <a:lnL w="12700" cap="flat" cmpd="sng" algn="ctr">
+                      <a:solidFill>
+                        <a:srgbClr val="E2E6E8"/>
+                      </a:solidFill>
+                      <a:prstDash val="solid"/>
+                      <a:round/>
+                      <a:headEnd type="none" w="med" len="med"/>
+                      <a:tailEnd type="none" w="med" len="med"/>
+                    </a:lnL>
+                    <a:lnR w="12700" cap="flat" cmpd="sng" algn="ctr">
+                      <a:solidFill>
+                        <a:srgbClr val="E2E6E8"/>
+                      </a:solidFill>
+                      <a:prstDash val="solid"/>
+                      <a:round/>
+                      <a:headEnd type="none" w="med" len="med"/>
+                      <a:tailEnd type="none" w="med" len="med"/>
+                    </a:lnR>
+                    <a:lnT w="12700" cap="flat" cmpd="sng" algn="ctr">
+                      <a:solidFill>
+                        <a:srgbClr val="E2E6E8"/>
+                      </a:solidFill>
+                      <a:prstDash val="solid"/>
+                      <a:round/>
+                      <a:headEnd type="none" w="med" len="med"/>
+                      <a:tailEnd type="none" w="med" len="med"/>
+                    </a:lnT>
+                    <a:lnB w="12700" cap="flat" cmpd="sng" algn="ctr">
+                      <a:solidFill>
+                        <a:srgbClr val="E2E6E8"/>
+                      </a:solidFill>
+                      <a:prstDash val="solid"/>
+                      <a:round/>
+                      <a:headEnd type="none" w="med" len="med"/>
+                      <a:tailEnd type="none" w="med" len="med"/>
+                    </a:lnB>
+                    <a:solidFill>
+                      <a:srgbClr val="FFFFFF"/>
+                    </a:solidFill>
+                  </a:tcPr>
+                </a:tc>
+                <a:tc>
+                  <a:txBody>
+                    <a:bodyPr/>
+                    <a:lstStyle/>
+                    <a:p>
+                      <a:pPr indent="0" marL="0">
+                        <a:buNone/>
+                      </a:pPr>
+                      <a:r>
+                        <a:rPr lang="en-US" sz="1500" b="1" dirty="0">
+                          <a:solidFill>
+                            <a:srgbClr val="DD8236"/>
+                          </a:solidFill>
+                          <a:latin typeface="Meiryo" pitchFamily="34" charset="0"/>
+                          <a:ea typeface="Meiryo" pitchFamily="34" charset="-122"/>
+                          <a:cs typeface="Meiryo" pitchFamily="34" charset="-120"/>
+                        </a:rPr>
+                        <a:t>触らないもの</a:t>
+                      </a:r>
+                      <a:endParaRPr lang="en-US" sz="1500" dirty="0">
+                        <a:latin typeface="Meiryo" charset="0"/>
+                        <a:ea typeface="Meiryo" charset="0"/>
+                        <a:cs typeface="Meiryo" charset="0"/>
+                      </a:endParaRPr>
+                    </a:p>
+                  </a:txBody>
+                  <a:tcPr marL="91440" marR="91440" marT="45720" marB="45720" anchor="ctr">
+                    <a:lnL w="12700" cap="flat" cmpd="sng" algn="ctr">
+                      <a:solidFill>
+                        <a:srgbClr val="E2E6E8"/>
+                      </a:solidFill>
+                      <a:prstDash val="solid"/>
+                      <a:round/>
+                      <a:headEnd type="none" w="med" len="med"/>
+                      <a:tailEnd type="none" w="med" len="med"/>
+                    </a:lnL>
+                    <a:lnR w="12700" cap="flat" cmpd="sng" algn="ctr">
+                      <a:solidFill>
+                        <a:srgbClr val="E2E6E8"/>
+                      </a:solidFill>
+                      <a:prstDash val="solid"/>
+                      <a:round/>
+                      <a:headEnd type="none" w="med" len="med"/>
+                      <a:tailEnd type="none" w="med" len="med"/>
+                    </a:lnR>
+                    <a:lnT w="12700" cap="flat" cmpd="sng" algn="ctr">
+                      <a:solidFill>
+                        <a:srgbClr val="E2E6E8"/>
+                      </a:solidFill>
+                      <a:prstDash val="solid"/>
+                      <a:round/>
+                      <a:headEnd type="none" w="med" len="med"/>
+                      <a:tailEnd type="none" w="med" len="med"/>
+                    </a:lnT>
+                    <a:lnB w="12700" cap="flat" cmpd="sng" algn="ctr">
+                      <a:solidFill>
+                        <a:srgbClr val="E2E6E8"/>
+                      </a:solidFill>
+                      <a:prstDash val="solid"/>
+                      <a:round/>
+                      <a:headEnd type="none" w="med" len="med"/>
+                      <a:tailEnd type="none" w="med" len="med"/>
+                    </a:lnB>
+                    <a:solidFill>
+                      <a:srgbClr val="FFFFFF"/>
+                    </a:solidFill>
+                  </a:tcPr>
+                </a:tc>
+              </a:tr>
+              <a:tr h="548640">
+                <a:tc>
+                  <a:txBody>
+                    <a:bodyPr/>
+                    <a:lstStyle/>
+                    <a:p>
+                      <a:pPr indent="0" marL="0">
+                        <a:buNone/>
+                      </a:pPr>
+                      <a:r>
+                        <a:rPr lang="en-US" sz="1500" dirty="0">
+                          <a:solidFill>
+                            <a:srgbClr val="1E2D34"/>
+                          </a:solidFill>
+                          <a:latin typeface="Meiryo" pitchFamily="34" charset="0"/>
+                          <a:ea typeface="Meiryo" pitchFamily="34" charset="-122"/>
+                          <a:cs typeface="Meiryo" pitchFamily="34" charset="-120"/>
+                        </a:rPr>
+                        <a:t>ASPATHの由来</a:t>
+                      </a:r>
+                      <a:endParaRPr lang="en-US" sz="1500" dirty="0">
+                        <a:latin typeface="Meiryo" charset="0"/>
+                        <a:ea typeface="Meiryo" charset="0"/>
+                        <a:cs typeface="Meiryo" charset="0"/>
+                      </a:endParaRPr>
+                    </a:p>
+                  </a:txBody>
+                  <a:tcPr marL="91440" marR="91440" marT="45720" marB="45720" anchor="ctr">
+                    <a:lnL w="12700" cap="flat" cmpd="sng" algn="ctr">
+                      <a:solidFill>
+                        <a:srgbClr val="E2E6E8"/>
+                      </a:solidFill>
+                      <a:prstDash val="solid"/>
+                      <a:round/>
+                      <a:headEnd type="none" w="med" len="med"/>
+                      <a:tailEnd type="none" w="med" len="med"/>
+                    </a:lnL>
+                    <a:lnR w="12700" cap="flat" cmpd="sng" algn="ctr">
+                      <a:solidFill>
+                        <a:srgbClr val="E2E6E8"/>
+                      </a:solidFill>
+                      <a:prstDash val="solid"/>
+                      <a:round/>
+                      <a:headEnd type="none" w="med" len="med"/>
+                      <a:tailEnd type="none" w="med" len="med"/>
+                    </a:lnR>
+                    <a:lnT w="12700" cap="flat" cmpd="sng" algn="ctr">
+                      <a:solidFill>
+                        <a:srgbClr val="E2E6E8"/>
+                      </a:solidFill>
+                      <a:prstDash val="solid"/>
+                      <a:round/>
+                      <a:headEnd type="none" w="med" len="med"/>
+                      <a:tailEnd type="none" w="med" len="med"/>
+                    </a:lnT>
+                    <a:lnB w="12700" cap="flat" cmpd="sng" algn="ctr">
+                      <a:solidFill>
+                        <a:srgbClr val="E2E6E8"/>
+                      </a:solidFill>
+                      <a:prstDash val="solid"/>
+                      <a:round/>
+                      <a:headEnd type="none" w="med" len="med"/>
+                      <a:tailEnd type="none" w="med" len="med"/>
+                    </a:lnB>
+                    <a:solidFill>
+                      <a:srgbClr val="FFFFFF"/>
+                    </a:solidFill>
+                  </a:tcPr>
+                </a:tc>
+                <a:tc>
+                  <a:txBody>
+                    <a:bodyPr/>
+                    <a:lstStyle/>
+                    <a:p>
+                      <a:pPr indent="0" marL="0">
+                        <a:buNone/>
+                      </a:pPr>
+                      <a:r>
+                        <a:rPr lang="en-US" sz="1500" dirty="0">
+                          <a:solidFill>
+                            <a:srgbClr val="1E2D34"/>
+                          </a:solidFill>
+                          <a:latin typeface="Meiryo" pitchFamily="34" charset="0"/>
+                          <a:ea typeface="Meiryo" pitchFamily="34" charset="-122"/>
+                          <a:cs typeface="Meiryo" pitchFamily="34" charset="-120"/>
+                        </a:rPr>
+                        <a:t>見出し1・文章3</a:t>
+                      </a:r>
+                      <a:endParaRPr lang="en-US" sz="1500" dirty="0">
+                        <a:latin typeface="Meiryo" charset="0"/>
+                        <a:ea typeface="Meiryo" charset="0"/>
+                        <a:cs typeface="Meiryo" charset="0"/>
+                      </a:endParaRPr>
+                    </a:p>
+                  </a:txBody>
+                  <a:tcPr marL="91440" marR="91440" marT="45720" marB="45720" anchor="ctr">
+                    <a:lnL w="12700" cap="flat" cmpd="sng" algn="ctr">
+                      <a:solidFill>
+                        <a:srgbClr val="E2E6E8"/>
+                      </a:solidFill>
+                      <a:prstDash val="solid"/>
+                      <a:round/>
+                      <a:headEnd type="none" w="med" len="med"/>
+                      <a:tailEnd type="none" w="med" len="med"/>
+                    </a:lnL>
+                    <a:lnR w="12700" cap="flat" cmpd="sng" algn="ctr">
+                      <a:solidFill>
+                        <a:srgbClr val="E2E6E8"/>
+                      </a:solidFill>
+                      <a:prstDash val="solid"/>
+                      <a:round/>
+                      <a:headEnd type="none" w="med" len="med"/>
+                      <a:tailEnd type="none" w="med" len="med"/>
+                    </a:lnR>
+                    <a:lnT w="12700" cap="flat" cmpd="sng" algn="ctr">
+                      <a:solidFill>
+                        <a:srgbClr val="E2E6E8"/>
+                      </a:solidFill>
+                      <a:prstDash val="solid"/>
+                      <a:round/>
+                      <a:headEnd type="none" w="med" len="med"/>
+                      <a:tailEnd type="none" w="med" len="med"/>
+                    </a:lnT>
+                    <a:lnB w="12700" cap="flat" cmpd="sng" algn="ctr">
+                      <a:solidFill>
+                        <a:srgbClr val="E2E6E8"/>
+                      </a:solidFill>
+                      <a:prstDash val="solid"/>
+                      <a:round/>
+                      <a:headEnd type="none" w="med" len="med"/>
+                      <a:tailEnd type="none" w="med" len="med"/>
+                    </a:lnB>
+                    <a:solidFill>
+                      <a:srgbClr val="FFFFFF"/>
+                    </a:solidFill>
+                  </a:tcPr>
+                </a:tc>
+                <a:tc>
+                  <a:txBody>
+                    <a:bodyPr/>
+                    <a:lstStyle/>
+                    <a:p>
+                      <a:pPr indent="0" marL="0">
+                        <a:buNone/>
+                      </a:pPr>
+                      <a:r>
+                        <a:rPr lang="en-US" sz="1500" dirty="0">
+                          <a:solidFill>
+                            <a:srgbClr val="1E2D34"/>
+                          </a:solidFill>
+                          <a:latin typeface="Meiryo" pitchFamily="34" charset="0"/>
+                          <a:ea typeface="Meiryo" pitchFamily="34" charset="-122"/>
+                          <a:cs typeface="Meiryo" pitchFamily="34" charset="-120"/>
+                        </a:rPr>
+                        <a:t>A S P A T H の一覧</a:t>
+                      </a:r>
+                      <a:endParaRPr lang="en-US" sz="1500" dirty="0">
+                        <a:latin typeface="Meiryo" charset="0"/>
+                        <a:ea typeface="Meiryo" charset="0"/>
+                        <a:cs typeface="Meiryo" charset="0"/>
+                      </a:endParaRPr>
+                    </a:p>
+                  </a:txBody>
+                  <a:tcPr marL="91440" marR="91440" marT="45720" marB="45720" anchor="ctr">
+                    <a:lnL w="12700" cap="flat" cmpd="sng" algn="ctr">
+                      <a:solidFill>
+                        <a:srgbClr val="E2E6E8"/>
+                      </a:solidFill>
+                      <a:prstDash val="solid"/>
+                      <a:round/>
+                      <a:headEnd type="none" w="med" len="med"/>
+                      <a:tailEnd type="none" w="med" len="med"/>
+                    </a:lnL>
+                    <a:lnR w="12700" cap="flat" cmpd="sng" algn="ctr">
+                      <a:solidFill>
+                        <a:srgbClr val="E2E6E8"/>
+                      </a:solidFill>
+                      <a:prstDash val="solid"/>
+                      <a:round/>
+                      <a:headEnd type="none" w="med" len="med"/>
+                      <a:tailEnd type="none" w="med" len="med"/>
+                    </a:lnR>
+                    <a:lnT w="12700" cap="flat" cmpd="sng" algn="ctr">
+                      <a:solidFill>
+                        <a:srgbClr val="E2E6E8"/>
+                      </a:solidFill>
+                      <a:prstDash val="solid"/>
+                      <a:round/>
+                      <a:headEnd type="none" w="med" len="med"/>
+                      <a:tailEnd type="none" w="med" len="med"/>
+                    </a:lnT>
+                    <a:lnB w="12700" cap="flat" cmpd="sng" algn="ctr">
+                      <a:solidFill>
+                        <a:srgbClr val="E2E6E8"/>
+                      </a:solidFill>
+                      <a:prstDash val="solid"/>
+                      <a:round/>
+                      <a:headEnd type="none" w="med" len="med"/>
+                      <a:tailEnd type="none" w="med" len="med"/>
+                    </a:lnB>
+                    <a:solidFill>
+                      <a:srgbClr val="FFFFFF"/>
+                    </a:solidFill>
+                  </a:tcPr>
+                </a:tc>
+              </a:tr>
+              <a:tr h="548640">
+                <a:tc>
+                  <a:txBody>
+                    <a:bodyPr/>
+                    <a:lstStyle/>
+                    <a:p>
+                      <a:pPr indent="0" marL="0">
+                        <a:buNone/>
+                      </a:pPr>
+                      <a:r>
+                        <a:rPr lang="en-US" sz="1500" dirty="0">
+                          <a:solidFill>
+                            <a:srgbClr val="1E2D34"/>
+                          </a:solidFill>
+                          <a:latin typeface="Meiryo" pitchFamily="34" charset="0"/>
+                          <a:ea typeface="Meiryo" pitchFamily="34" charset="-122"/>
+                          <a:cs typeface="Meiryo" pitchFamily="34" charset="-120"/>
+                        </a:rPr>
+                        <a:t>ASPATHの特徴</a:t>
+                      </a:r>
+                      <a:endParaRPr lang="en-US" sz="1500" dirty="0">
+                        <a:latin typeface="Meiryo" charset="0"/>
+                        <a:ea typeface="Meiryo" charset="0"/>
+                        <a:cs typeface="Meiryo" charset="0"/>
+                      </a:endParaRPr>
+                    </a:p>
+                  </a:txBody>
+                  <a:tcPr marL="91440" marR="91440" marT="45720" marB="45720" anchor="ctr">
+                    <a:lnL w="12700" cap="flat" cmpd="sng" algn="ctr">
+                      <a:solidFill>
+                        <a:srgbClr val="E2E6E8"/>
+                      </a:solidFill>
+                      <a:prstDash val="solid"/>
+                      <a:round/>
+                      <a:headEnd type="none" w="med" len="med"/>
+                      <a:tailEnd type="none" w="med" len="med"/>
+                    </a:lnL>
+                    <a:lnR w="12700" cap="flat" cmpd="sng" algn="ctr">
+                      <a:solidFill>
+                        <a:srgbClr val="E2E6E8"/>
+                      </a:solidFill>
+                      <a:prstDash val="solid"/>
+                      <a:round/>
+                      <a:headEnd type="none" w="med" len="med"/>
+                      <a:tailEnd type="none" w="med" len="med"/>
+                    </a:lnR>
+                    <a:lnT w="12700" cap="flat" cmpd="sng" algn="ctr">
+                      <a:solidFill>
+                        <a:srgbClr val="E2E6E8"/>
+                      </a:solidFill>
+                      <a:prstDash val="solid"/>
+                      <a:round/>
+                      <a:headEnd type="none" w="med" len="med"/>
+                      <a:tailEnd type="none" w="med" len="med"/>
+                    </a:lnT>
+                    <a:lnB w="12700" cap="flat" cmpd="sng" algn="ctr">
+                      <a:solidFill>
+                        <a:srgbClr val="E2E6E8"/>
+                      </a:solidFill>
+                      <a:prstDash val="solid"/>
+                      <a:round/>
+                      <a:headEnd type="none" w="med" len="med"/>
+                      <a:tailEnd type="none" w="med" len="med"/>
+                    </a:lnB>
+                    <a:solidFill>
+                      <a:srgbClr val="FFFFFF"/>
+                    </a:solidFill>
+                  </a:tcPr>
+                </a:tc>
+                <a:tc>
+                  <a:txBody>
+                    <a:bodyPr/>
+                    <a:lstStyle/>
+                    <a:p>
+                      <a:pPr indent="0" marL="0">
+                        <a:buNone/>
+                      </a:pPr>
+                      <a:r>
+                        <a:rPr lang="en-US" sz="1500" dirty="0">
+                          <a:solidFill>
+                            <a:srgbClr val="1E2D34"/>
+                          </a:solidFill>
+                          <a:latin typeface="Meiryo" pitchFamily="34" charset="0"/>
+                          <a:ea typeface="Meiryo" pitchFamily="34" charset="-122"/>
+                          <a:cs typeface="Meiryo" pitchFamily="34" charset="-120"/>
+                        </a:rPr>
+                        <a:t>見出し1・文章1</a:t>
+                      </a:r>
+                      <a:endParaRPr lang="en-US" sz="1500" dirty="0">
+                        <a:latin typeface="Meiryo" charset="0"/>
+                        <a:ea typeface="Meiryo" charset="0"/>
+                        <a:cs typeface="Meiryo" charset="0"/>
+                      </a:endParaRPr>
+                    </a:p>
+                  </a:txBody>
+                  <a:tcPr marL="91440" marR="91440" marT="45720" marB="45720" anchor="ctr">
+                    <a:lnL w="12700" cap="flat" cmpd="sng" algn="ctr">
+                      <a:solidFill>
+                        <a:srgbClr val="E2E6E8"/>
+                      </a:solidFill>
+                      <a:prstDash val="solid"/>
+                      <a:round/>
+                      <a:headEnd type="none" w="med" len="med"/>
+                      <a:tailEnd type="none" w="med" len="med"/>
+                    </a:lnL>
+                    <a:lnR w="12700" cap="flat" cmpd="sng" algn="ctr">
+                      <a:solidFill>
+                        <a:srgbClr val="E2E6E8"/>
+                      </a:solidFill>
+                      <a:prstDash val="solid"/>
+                      <a:round/>
+                      <a:headEnd type="none" w="med" len="med"/>
+                      <a:tailEnd type="none" w="med" len="med"/>
+                    </a:lnR>
+                    <a:lnT w="12700" cap="flat" cmpd="sng" algn="ctr">
+                      <a:solidFill>
+                        <a:srgbClr val="E2E6E8"/>
+                      </a:solidFill>
+                      <a:prstDash val="solid"/>
+                      <a:round/>
+                      <a:headEnd type="none" w="med" len="med"/>
+                      <a:tailEnd type="none" w="med" len="med"/>
+                    </a:lnT>
+                    <a:lnB w="12700" cap="flat" cmpd="sng" algn="ctr">
+                      <a:solidFill>
+                        <a:srgbClr val="E2E6E8"/>
+                      </a:solidFill>
+                      <a:prstDash val="solid"/>
+                      <a:round/>
+                      <a:headEnd type="none" w="med" len="med"/>
+                      <a:tailEnd type="none" w="med" len="med"/>
+                    </a:lnB>
+                    <a:solidFill>
+                      <a:srgbClr val="FFFFFF"/>
+                    </a:solidFill>
+                  </a:tcPr>
+                </a:tc>
+                <a:tc>
+                  <a:txBody>
+                    <a:bodyPr/>
+                    <a:lstStyle/>
+                    <a:p>
+                      <a:pPr indent="0" marL="0">
+                        <a:buNone/>
+                      </a:pPr>
+                      <a:r>
+                        <a:rPr lang="en-US" sz="1500" dirty="0">
+                          <a:solidFill>
+                            <a:srgbClr val="1E2D34"/>
+                          </a:solidFill>
+                          <a:latin typeface="Meiryo" pitchFamily="34" charset="0"/>
+                          <a:ea typeface="Meiryo" pitchFamily="34" charset="-122"/>
+                          <a:cs typeface="Meiryo" pitchFamily="34" charset="-120"/>
+                        </a:rPr>
+                        <a:t>特徴3カード／帯／4つの理念</a:t>
+                      </a:r>
+                      <a:endParaRPr lang="en-US" sz="1500" dirty="0">
+                        <a:latin typeface="Meiryo" charset="0"/>
+                        <a:ea typeface="Meiryo" charset="0"/>
+                        <a:cs typeface="Meiryo" charset="0"/>
+                      </a:endParaRPr>
+                    </a:p>
+                  </a:txBody>
+                  <a:tcPr marL="91440" marR="91440" marT="45720" marB="45720" anchor="ctr">
+                    <a:lnL w="12700" cap="flat" cmpd="sng" algn="ctr">
+                      <a:solidFill>
+                        <a:srgbClr val="E2E6E8"/>
+                      </a:solidFill>
+                      <a:prstDash val="solid"/>
+                      <a:round/>
+                      <a:headEnd type="none" w="med" len="med"/>
+                      <a:tailEnd type="none" w="med" len="med"/>
+                    </a:lnL>
+                    <a:lnR w="12700" cap="flat" cmpd="sng" algn="ctr">
+                      <a:solidFill>
+                        <a:srgbClr val="E2E6E8"/>
+                      </a:solidFill>
+                      <a:prstDash val="solid"/>
+                      <a:round/>
+                      <a:headEnd type="none" w="med" len="med"/>
+                      <a:tailEnd type="none" w="med" len="med"/>
+                    </a:lnR>
+                    <a:lnT w="12700" cap="flat" cmpd="sng" algn="ctr">
+                      <a:solidFill>
+                        <a:srgbClr val="E2E6E8"/>
+                      </a:solidFill>
+                      <a:prstDash val="solid"/>
+                      <a:round/>
+                      <a:headEnd type="none" w="med" len="med"/>
+                      <a:tailEnd type="none" w="med" len="med"/>
+                    </a:lnT>
+                    <a:lnB w="12700" cap="flat" cmpd="sng" algn="ctr">
+                      <a:solidFill>
+                        <a:srgbClr val="E2E6E8"/>
+                      </a:solidFill>
+                      <a:prstDash val="solid"/>
+                      <a:round/>
+                      <a:headEnd type="none" w="med" len="med"/>
+                      <a:tailEnd type="none" w="med" len="med"/>
+                    </a:lnB>
+                    <a:solidFill>
+                      <a:srgbClr val="FFFFFF"/>
+                    </a:solidFill>
+                  </a:tcPr>
+                </a:tc>
+              </a:tr>
+              <a:tr h="548640">
+                <a:tc>
+                  <a:txBody>
+                    <a:bodyPr/>
+                    <a:lstStyle/>
+                    <a:p>
+                      <a:pPr indent="0" marL="0">
+                        <a:buNone/>
+                      </a:pPr>
+                      <a:r>
+                        <a:rPr lang="en-US" sz="1500" dirty="0">
+                          <a:solidFill>
+                            <a:srgbClr val="1E2D34"/>
+                          </a:solidFill>
+                          <a:latin typeface="Meiryo" pitchFamily="34" charset="0"/>
+                          <a:ea typeface="Meiryo" pitchFamily="34" charset="-122"/>
+                          <a:cs typeface="Meiryo" pitchFamily="34" charset="-120"/>
+                        </a:rPr>
+                        <a:t>01　3つの芯</a:t>
+                      </a:r>
+                      <a:endParaRPr lang="en-US" sz="1500" dirty="0">
+                        <a:latin typeface="Meiryo" charset="0"/>
+                        <a:ea typeface="Meiryo" charset="0"/>
+                        <a:cs typeface="Meiryo" charset="0"/>
+                      </a:endParaRPr>
+                    </a:p>
+                  </a:txBody>
+                  <a:tcPr marL="91440" marR="91440" marT="45720" marB="45720" anchor="ctr">
+                    <a:lnL w="12700" cap="flat" cmpd="sng" algn="ctr">
+                      <a:solidFill>
+                        <a:srgbClr val="E2E6E8"/>
+                      </a:solidFill>
+                      <a:prstDash val="solid"/>
+                      <a:round/>
+                      <a:headEnd type="none" w="med" len="med"/>
+                      <a:tailEnd type="none" w="med" len="med"/>
+                    </a:lnL>
+                    <a:lnR w="12700" cap="flat" cmpd="sng" algn="ctr">
+                      <a:solidFill>
+                        <a:srgbClr val="E2E6E8"/>
+                      </a:solidFill>
+                      <a:prstDash val="solid"/>
+                      <a:round/>
+                      <a:headEnd type="none" w="med" len="med"/>
+                      <a:tailEnd type="none" w="med" len="med"/>
+                    </a:lnR>
+                    <a:lnT w="12700" cap="flat" cmpd="sng" algn="ctr">
+                      <a:solidFill>
+                        <a:srgbClr val="E2E6E8"/>
+                      </a:solidFill>
+                      <a:prstDash val="solid"/>
+                      <a:round/>
+                      <a:headEnd type="none" w="med" len="med"/>
+                      <a:tailEnd type="none" w="med" len="med"/>
+                    </a:lnT>
+                    <a:lnB w="12700" cap="flat" cmpd="sng" algn="ctr">
+                      <a:solidFill>
+                        <a:srgbClr val="E2E6E8"/>
+                      </a:solidFill>
+                      <a:prstDash val="solid"/>
+                      <a:round/>
+                      <a:headEnd type="none" w="med" len="med"/>
+                      <a:tailEnd type="none" w="med" len="med"/>
+                    </a:lnB>
+                    <a:solidFill>
+                      <a:srgbClr val="FFFFFF"/>
+                    </a:solidFill>
+                  </a:tcPr>
+                </a:tc>
+                <a:tc>
+                  <a:txBody>
+                    <a:bodyPr/>
+                    <a:lstStyle/>
+                    <a:p>
+                      <a:pPr indent="0" marL="0">
+                        <a:buNone/>
+                      </a:pPr>
+                      <a:r>
+                        <a:rPr lang="en-US" sz="1500" dirty="0">
+                          <a:solidFill>
+                            <a:srgbClr val="1E2D34"/>
+                          </a:solidFill>
+                          <a:latin typeface="Meiryo" pitchFamily="34" charset="0"/>
+                          <a:ea typeface="Meiryo" pitchFamily="34" charset="-122"/>
+                          <a:cs typeface="Meiryo" pitchFamily="34" charset="-120"/>
+                        </a:rPr>
+                        <a:t>見出し1・文章17</a:t>
+                      </a:r>
+                      <a:endParaRPr lang="en-US" sz="1500" dirty="0">
+                        <a:latin typeface="Meiryo" charset="0"/>
+                        <a:ea typeface="Meiryo" charset="0"/>
+                        <a:cs typeface="Meiryo" charset="0"/>
+                      </a:endParaRPr>
+                    </a:p>
+                  </a:txBody>
+                  <a:tcPr marL="91440" marR="91440" marT="45720" marB="45720" anchor="ctr">
+                    <a:lnL w="12700" cap="flat" cmpd="sng" algn="ctr">
+                      <a:solidFill>
+                        <a:srgbClr val="E2E6E8"/>
+                      </a:solidFill>
+                      <a:prstDash val="solid"/>
+                      <a:round/>
+                      <a:headEnd type="none" w="med" len="med"/>
+                      <a:tailEnd type="none" w="med" len="med"/>
+                    </a:lnL>
+                    <a:lnR w="12700" cap="flat" cmpd="sng" algn="ctr">
+                      <a:solidFill>
+                        <a:srgbClr val="E2E6E8"/>
+                      </a:solidFill>
+                      <a:prstDash val="solid"/>
+                      <a:round/>
+                      <a:headEnd type="none" w="med" len="med"/>
+                      <a:tailEnd type="none" w="med" len="med"/>
+                    </a:lnR>
+                    <a:lnT w="12700" cap="flat" cmpd="sng" algn="ctr">
+                      <a:solidFill>
+                        <a:srgbClr val="E2E6E8"/>
+                      </a:solidFill>
+                      <a:prstDash val="solid"/>
+                      <a:round/>
+                      <a:headEnd type="none" w="med" len="med"/>
+                      <a:tailEnd type="none" w="med" len="med"/>
+                    </a:lnT>
+                    <a:lnB w="12700" cap="flat" cmpd="sng" algn="ctr">
+                      <a:solidFill>
+                        <a:srgbClr val="E2E6E8"/>
+                      </a:solidFill>
+                      <a:prstDash val="solid"/>
+                      <a:round/>
+                      <a:headEnd type="none" w="med" len="med"/>
+                      <a:tailEnd type="none" w="med" len="med"/>
+                    </a:lnB>
+                    <a:solidFill>
+                      <a:srgbClr val="FFFFFF"/>
+                    </a:solidFill>
+                  </a:tcPr>
+                </a:tc>
+                <a:tc>
+                  <a:txBody>
+                    <a:bodyPr/>
+                    <a:lstStyle/>
+                    <a:p>
+                      <a:pPr indent="0" marL="0">
+                        <a:buNone/>
+                      </a:pPr>
+                      <a:r>
+                        <a:rPr lang="en-US" sz="1500" dirty="0">
+                          <a:solidFill>
+                            <a:srgbClr val="1E2D34"/>
+                          </a:solidFill>
+                          <a:latin typeface="Meiryo" pitchFamily="34" charset="0"/>
+                          <a:ea typeface="Meiryo" pitchFamily="34" charset="-122"/>
+                          <a:cs typeface="Meiryo" pitchFamily="34" charset="-120"/>
+                        </a:rPr>
+                        <a:t>3つの芯の図</a:t>
+                      </a:r>
+                      <a:endParaRPr lang="en-US" sz="1500" dirty="0">
+                        <a:latin typeface="Meiryo" charset="0"/>
+                        <a:ea typeface="Meiryo" charset="0"/>
+                        <a:cs typeface="Meiryo" charset="0"/>
+                      </a:endParaRPr>
+                    </a:p>
+                  </a:txBody>
+                  <a:tcPr marL="91440" marR="91440" marT="45720" marB="45720" anchor="ctr">
+                    <a:lnL w="12700" cap="flat" cmpd="sng" algn="ctr">
+                      <a:solidFill>
+                        <a:srgbClr val="E2E6E8"/>
+                      </a:solidFill>
+                      <a:prstDash val="solid"/>
+                      <a:round/>
+                      <a:headEnd type="none" w="med" len="med"/>
+                      <a:tailEnd type="none" w="med" len="med"/>
+                    </a:lnL>
+                    <a:lnR w="12700" cap="flat" cmpd="sng" algn="ctr">
+                      <a:solidFill>
+                        <a:srgbClr val="E2E6E8"/>
+                      </a:solidFill>
+                      <a:prstDash val="solid"/>
+                      <a:round/>
+                      <a:headEnd type="none" w="med" len="med"/>
+                      <a:tailEnd type="none" w="med" len="med"/>
+                    </a:lnR>
+                    <a:lnT w="12700" cap="flat" cmpd="sng" algn="ctr">
+                      <a:solidFill>
+                        <a:srgbClr val="E2E6E8"/>
+                      </a:solidFill>
+                      <a:prstDash val="solid"/>
+                      <a:round/>
+                      <a:headEnd type="none" w="med" len="med"/>
+                      <a:tailEnd type="none" w="med" len="med"/>
+                    </a:lnT>
+                    <a:lnB w="12700" cap="flat" cmpd="sng" algn="ctr">
+                      <a:solidFill>
+                        <a:srgbClr val="E2E6E8"/>
+                      </a:solidFill>
+                      <a:prstDash val="solid"/>
+                      <a:round/>
+                      <a:headEnd type="none" w="med" len="med"/>
+                      <a:tailEnd type="none" w="med" len="med"/>
+                    </a:lnB>
+                    <a:solidFill>
+                      <a:srgbClr val="FFFFFF"/>
+                    </a:solidFill>
+                  </a:tcPr>
+                </a:tc>
+              </a:tr>
+              <a:tr h="548640">
+                <a:tc>
+                  <a:txBody>
+                    <a:bodyPr/>
+                    <a:lstStyle/>
+                    <a:p>
+                      <a:pPr indent="0" marL="0">
+                        <a:buNone/>
+                      </a:pPr>
+                      <a:r>
+                        <a:rPr lang="en-US" sz="1500" dirty="0">
+                          <a:solidFill>
+                            <a:srgbClr val="1E2D34"/>
+                          </a:solidFill>
+                          <a:latin typeface="Meiryo" pitchFamily="34" charset="0"/>
+                          <a:ea typeface="Meiryo" pitchFamily="34" charset="-122"/>
+                          <a:cs typeface="Meiryo" pitchFamily="34" charset="-120"/>
+                        </a:rPr>
+                        <a:t>02　人生を豊かに</a:t>
+                      </a:r>
+                      <a:endParaRPr lang="en-US" sz="1500" dirty="0">
+                        <a:latin typeface="Meiryo" charset="0"/>
+                        <a:ea typeface="Meiryo" charset="0"/>
+                        <a:cs typeface="Meiryo" charset="0"/>
+                      </a:endParaRPr>
+                    </a:p>
+                  </a:txBody>
+                  <a:tcPr marL="91440" marR="91440" marT="45720" marB="45720" anchor="ctr">
+                    <a:lnL w="12700" cap="flat" cmpd="sng" algn="ctr">
+                      <a:solidFill>
+                        <a:srgbClr val="E2E6E8"/>
+                      </a:solidFill>
+                      <a:prstDash val="solid"/>
+                      <a:round/>
+                      <a:headEnd type="none" w="med" len="med"/>
+                      <a:tailEnd type="none" w="med" len="med"/>
+                    </a:lnL>
+                    <a:lnR w="12700" cap="flat" cmpd="sng" algn="ctr">
+                      <a:solidFill>
+                        <a:srgbClr val="E2E6E8"/>
+                      </a:solidFill>
+                      <a:prstDash val="solid"/>
+                      <a:round/>
+                      <a:headEnd type="none" w="med" len="med"/>
+                      <a:tailEnd type="none" w="med" len="med"/>
+                    </a:lnR>
+                    <a:lnT w="12700" cap="flat" cmpd="sng" algn="ctr">
+                      <a:solidFill>
+                        <a:srgbClr val="E2E6E8"/>
+                      </a:solidFill>
+                      <a:prstDash val="solid"/>
+                      <a:round/>
+                      <a:headEnd type="none" w="med" len="med"/>
+                      <a:tailEnd type="none" w="med" len="med"/>
+                    </a:lnT>
+                    <a:lnB w="12700" cap="flat" cmpd="sng" algn="ctr">
+                      <a:solidFill>
+                        <a:srgbClr val="E2E6E8"/>
+                      </a:solidFill>
+                      <a:prstDash val="solid"/>
+                      <a:round/>
+                      <a:headEnd type="none" w="med" len="med"/>
+                      <a:tailEnd type="none" w="med" len="med"/>
+                    </a:lnB>
+                    <a:solidFill>
+                      <a:srgbClr val="FFFFFF"/>
+                    </a:solidFill>
+                  </a:tcPr>
+                </a:tc>
+                <a:tc>
+                  <a:txBody>
+                    <a:bodyPr/>
+                    <a:lstStyle/>
+                    <a:p>
+                      <a:pPr indent="0" marL="0">
+                        <a:buNone/>
+                      </a:pPr>
+                      <a:r>
+                        <a:rPr lang="en-US" sz="1500" dirty="0">
+                          <a:solidFill>
+                            <a:srgbClr val="1E2D34"/>
+                          </a:solidFill>
+                          <a:latin typeface="Meiryo" pitchFamily="34" charset="0"/>
+                          <a:ea typeface="Meiryo" pitchFamily="34" charset="-122"/>
+                          <a:cs typeface="Meiryo" pitchFamily="34" charset="-120"/>
+                        </a:rPr>
+                        <a:t>見出し1・文章5</a:t>
+                      </a:r>
+                      <a:endParaRPr lang="en-US" sz="1500" dirty="0">
+                        <a:latin typeface="Meiryo" charset="0"/>
+                        <a:ea typeface="Meiryo" charset="0"/>
+                        <a:cs typeface="Meiryo" charset="0"/>
+                      </a:endParaRPr>
+                    </a:p>
+                  </a:txBody>
+                  <a:tcPr marL="91440" marR="91440" marT="45720" marB="45720" anchor="ctr">
+                    <a:lnL w="12700" cap="flat" cmpd="sng" algn="ctr">
+                      <a:solidFill>
+                        <a:srgbClr val="E2E6E8"/>
+                      </a:solidFill>
+                      <a:prstDash val="solid"/>
+                      <a:round/>
+                      <a:headEnd type="none" w="med" len="med"/>
+                      <a:tailEnd type="none" w="med" len="med"/>
+                    </a:lnL>
+                    <a:lnR w="12700" cap="flat" cmpd="sng" algn="ctr">
+                      <a:solidFill>
+                        <a:srgbClr val="E2E6E8"/>
+                      </a:solidFill>
+                      <a:prstDash val="solid"/>
+                      <a:round/>
+                      <a:headEnd type="none" w="med" len="med"/>
+                      <a:tailEnd type="none" w="med" len="med"/>
+                    </a:lnR>
+                    <a:lnT w="12700" cap="flat" cmpd="sng" algn="ctr">
+                      <a:solidFill>
+                        <a:srgbClr val="E2E6E8"/>
+                      </a:solidFill>
+                      <a:prstDash val="solid"/>
+                      <a:round/>
+                      <a:headEnd type="none" w="med" len="med"/>
+                      <a:tailEnd type="none" w="med" len="med"/>
+                    </a:lnT>
+                    <a:lnB w="12700" cap="flat" cmpd="sng" algn="ctr">
+                      <a:solidFill>
+                        <a:srgbClr val="E2E6E8"/>
+                      </a:solidFill>
+                      <a:prstDash val="solid"/>
+                      <a:round/>
+                      <a:headEnd type="none" w="med" len="med"/>
+                      <a:tailEnd type="none" w="med" len="med"/>
+                    </a:lnB>
+                    <a:solidFill>
+                      <a:srgbClr val="FFFFFF"/>
+                    </a:solidFill>
+                  </a:tcPr>
+                </a:tc>
+                <a:tc>
+                  <a:txBody>
+                    <a:bodyPr/>
+                    <a:lstStyle/>
+                    <a:p>
+                      <a:pPr indent="0" marL="0">
+                        <a:buNone/>
+                      </a:pPr>
+                      <a:r>
+                        <a:rPr lang="en-US" sz="1500" dirty="0">
+                          <a:solidFill>
+                            <a:srgbClr val="1E2D34"/>
+                          </a:solidFill>
+                          <a:latin typeface="Meiryo" pitchFamily="34" charset="0"/>
+                          <a:ea typeface="Meiryo" pitchFamily="34" charset="-122"/>
+                          <a:cs typeface="Meiryo" pitchFamily="34" charset="-120"/>
+                        </a:rPr>
+                        <a:t>大きな写真</a:t>
+                      </a:r>
+                      <a:endParaRPr lang="en-US" sz="1500" dirty="0">
+                        <a:latin typeface="Meiryo" charset="0"/>
+                        <a:ea typeface="Meiryo" charset="0"/>
+                        <a:cs typeface="Meiryo" charset="0"/>
+                      </a:endParaRPr>
+                    </a:p>
+                  </a:txBody>
+                  <a:tcPr marL="91440" marR="91440" marT="45720" marB="45720" anchor="ctr">
+                    <a:lnL w="12700" cap="flat" cmpd="sng" algn="ctr">
+                      <a:solidFill>
+                        <a:srgbClr val="E2E6E8"/>
+                      </a:solidFill>
+                      <a:prstDash val="solid"/>
+                      <a:round/>
+                      <a:headEnd type="none" w="med" len="med"/>
+                      <a:tailEnd type="none" w="med" len="med"/>
+                    </a:lnL>
+                    <a:lnR w="12700" cap="flat" cmpd="sng" algn="ctr">
+                      <a:solidFill>
+                        <a:srgbClr val="E2E6E8"/>
+                      </a:solidFill>
+                      <a:prstDash val="solid"/>
+                      <a:round/>
+                      <a:headEnd type="none" w="med" len="med"/>
+                      <a:tailEnd type="none" w="med" len="med"/>
+                    </a:lnR>
+                    <a:lnT w="12700" cap="flat" cmpd="sng" algn="ctr">
+                      <a:solidFill>
+                        <a:srgbClr val="E2E6E8"/>
+                      </a:solidFill>
+                      <a:prstDash val="solid"/>
+                      <a:round/>
+                      <a:headEnd type="none" w="med" len="med"/>
+                      <a:tailEnd type="none" w="med" len="med"/>
+                    </a:lnT>
+                    <a:lnB w="12700" cap="flat" cmpd="sng" algn="ctr">
+                      <a:solidFill>
+                        <a:srgbClr val="E2E6E8"/>
+                      </a:solidFill>
+                      <a:prstDash val="solid"/>
+                      <a:round/>
+                      <a:headEnd type="none" w="med" len="med"/>
+                      <a:tailEnd type="none" w="med" len="med"/>
+                    </a:lnB>
+                    <a:solidFill>
+                      <a:srgbClr val="FFFFFF"/>
+                    </a:solidFill>
+                  </a:tcPr>
+                </a:tc>
+              </a:tr>
+              <a:tr h="548640">
+                <a:tc>
+                  <a:txBody>
+                    <a:bodyPr/>
+                    <a:lstStyle/>
+                    <a:p>
+                      <a:pPr indent="0" marL="0">
+                        <a:buNone/>
+                      </a:pPr>
+                      <a:r>
+                        <a:rPr lang="en-US" sz="1500" dirty="0">
+                          <a:solidFill>
+                            <a:srgbClr val="1E2D34"/>
+                          </a:solidFill>
+                          <a:latin typeface="Meiryo" pitchFamily="34" charset="0"/>
+                          <a:ea typeface="Meiryo" pitchFamily="34" charset="-122"/>
+                          <a:cs typeface="Meiryo" pitchFamily="34" charset="-120"/>
+                        </a:rPr>
+                        <a:t>03　第3の居場所</a:t>
+                      </a:r>
+                      <a:endParaRPr lang="en-US" sz="1500" dirty="0">
+                        <a:latin typeface="Meiryo" charset="0"/>
+                        <a:ea typeface="Meiryo" charset="0"/>
+                        <a:cs typeface="Meiryo" charset="0"/>
+                      </a:endParaRPr>
+                    </a:p>
+                  </a:txBody>
+                  <a:tcPr marL="91440" marR="91440" marT="45720" marB="45720" anchor="ctr">
+                    <a:lnL w="12700" cap="flat" cmpd="sng" algn="ctr">
+                      <a:solidFill>
+                        <a:srgbClr val="E2E6E8"/>
+                      </a:solidFill>
+                      <a:prstDash val="solid"/>
+                      <a:round/>
+                      <a:headEnd type="none" w="med" len="med"/>
+                      <a:tailEnd type="none" w="med" len="med"/>
+                    </a:lnL>
+                    <a:lnR w="12700" cap="flat" cmpd="sng" algn="ctr">
+                      <a:solidFill>
+                        <a:srgbClr val="E2E6E8"/>
+                      </a:solidFill>
+                      <a:prstDash val="solid"/>
+                      <a:round/>
+                      <a:headEnd type="none" w="med" len="med"/>
+                      <a:tailEnd type="none" w="med" len="med"/>
+                    </a:lnR>
+                    <a:lnT w="12700" cap="flat" cmpd="sng" algn="ctr">
+                      <a:solidFill>
+                        <a:srgbClr val="E2E6E8"/>
+                      </a:solidFill>
+                      <a:prstDash val="solid"/>
+                      <a:round/>
+                      <a:headEnd type="none" w="med" len="med"/>
+                      <a:tailEnd type="none" w="med" len="med"/>
+                    </a:lnT>
+                    <a:lnB w="12700" cap="flat" cmpd="sng" algn="ctr">
+                      <a:solidFill>
+                        <a:srgbClr val="E2E6E8"/>
+                      </a:solidFill>
+                      <a:prstDash val="solid"/>
+                      <a:round/>
+                      <a:headEnd type="none" w="med" len="med"/>
+                      <a:tailEnd type="none" w="med" len="med"/>
+                    </a:lnB>
+                    <a:solidFill>
+                      <a:srgbClr val="FFFFFF"/>
+                    </a:solidFill>
+                  </a:tcPr>
+                </a:tc>
+                <a:tc>
+                  <a:txBody>
+                    <a:bodyPr/>
+                    <a:lstStyle/>
+                    <a:p>
+                      <a:pPr indent="0" marL="0">
+                        <a:buNone/>
+                      </a:pPr>
+                      <a:r>
+                        <a:rPr lang="en-US" sz="1500" dirty="0">
+                          <a:solidFill>
+                            <a:srgbClr val="1E2D34"/>
+                          </a:solidFill>
+                          <a:latin typeface="Meiryo" pitchFamily="34" charset="0"/>
+                          <a:ea typeface="Meiryo" pitchFamily="34" charset="-122"/>
+                          <a:cs typeface="Meiryo" pitchFamily="34" charset="-120"/>
+                        </a:rPr>
+                        <a:t>見出し1・文章6</a:t>
+                      </a:r>
+                      <a:endParaRPr lang="en-US" sz="1500" dirty="0">
+                        <a:latin typeface="Meiryo" charset="0"/>
+                        <a:ea typeface="Meiryo" charset="0"/>
+                        <a:cs typeface="Meiryo" charset="0"/>
+                      </a:endParaRPr>
+                    </a:p>
+                  </a:txBody>
+                  <a:tcPr marL="91440" marR="91440" marT="45720" marB="45720" anchor="ctr">
+                    <a:lnL w="12700" cap="flat" cmpd="sng" algn="ctr">
+                      <a:solidFill>
+                        <a:srgbClr val="E2E6E8"/>
+                      </a:solidFill>
+                      <a:prstDash val="solid"/>
+                      <a:round/>
+                      <a:headEnd type="none" w="med" len="med"/>
+                      <a:tailEnd type="none" w="med" len="med"/>
+                    </a:lnL>
+                    <a:lnR w="12700" cap="flat" cmpd="sng" algn="ctr">
+                      <a:solidFill>
+                        <a:srgbClr val="E2E6E8"/>
+                      </a:solidFill>
+                      <a:prstDash val="solid"/>
+                      <a:round/>
+                      <a:headEnd type="none" w="med" len="med"/>
+                      <a:tailEnd type="none" w="med" len="med"/>
+                    </a:lnR>
+                    <a:lnT w="12700" cap="flat" cmpd="sng" algn="ctr">
+                      <a:solidFill>
+                        <a:srgbClr val="E2E6E8"/>
+                      </a:solidFill>
+                      <a:prstDash val="solid"/>
+                      <a:round/>
+                      <a:headEnd type="none" w="med" len="med"/>
+                      <a:tailEnd type="none" w="med" len="med"/>
+                    </a:lnT>
+                    <a:lnB w="12700" cap="flat" cmpd="sng" algn="ctr">
+                      <a:solidFill>
+                        <a:srgbClr val="E2E6E8"/>
+                      </a:solidFill>
+                      <a:prstDash val="solid"/>
+                      <a:round/>
+                      <a:headEnd type="none" w="med" len="med"/>
+                      <a:tailEnd type="none" w="med" len="med"/>
+                    </a:lnB>
+                    <a:solidFill>
+                      <a:srgbClr val="FFFFFF"/>
+                    </a:solidFill>
+                  </a:tcPr>
+                </a:tc>
+                <a:tc>
+                  <a:txBody>
+                    <a:bodyPr/>
+                    <a:lstStyle/>
+                    <a:p>
+                      <a:pPr indent="0" marL="0">
+                        <a:buNone/>
+                      </a:pPr>
+                      <a:r>
+                        <a:rPr lang="en-US" sz="1500" dirty="0">
+                          <a:solidFill>
+                            <a:srgbClr val="1E2D34"/>
+                          </a:solidFill>
+                          <a:latin typeface="Meiryo" pitchFamily="34" charset="0"/>
+                          <a:ea typeface="Meiryo" pitchFamily="34" charset="-122"/>
+                          <a:cs typeface="Meiryo" pitchFamily="34" charset="-120"/>
+                        </a:rPr>
+                        <a:t>大きな写真</a:t>
+                      </a:r>
+                      <a:endParaRPr lang="en-US" sz="1500" dirty="0">
+                        <a:latin typeface="Meiryo" charset="0"/>
+                        <a:ea typeface="Meiryo" charset="0"/>
+                        <a:cs typeface="Meiryo" charset="0"/>
+                      </a:endParaRPr>
+                    </a:p>
+                  </a:txBody>
+                  <a:tcPr marL="91440" marR="91440" marT="45720" marB="45720" anchor="ctr">
+                    <a:lnL w="12700" cap="flat" cmpd="sng" algn="ctr">
+                      <a:solidFill>
+                        <a:srgbClr val="E2E6E8"/>
+                      </a:solidFill>
+                      <a:prstDash val="solid"/>
+                      <a:round/>
+                      <a:headEnd type="none" w="med" len="med"/>
+                      <a:tailEnd type="none" w="med" len="med"/>
+                    </a:lnL>
+                    <a:lnR w="12700" cap="flat" cmpd="sng" algn="ctr">
+                      <a:solidFill>
+                        <a:srgbClr val="E2E6E8"/>
+                      </a:solidFill>
+                      <a:prstDash val="solid"/>
+                      <a:round/>
+                      <a:headEnd type="none" w="med" len="med"/>
+                      <a:tailEnd type="none" w="med" len="med"/>
+                    </a:lnR>
+                    <a:lnT w="12700" cap="flat" cmpd="sng" algn="ctr">
+                      <a:solidFill>
+                        <a:srgbClr val="E2E6E8"/>
+                      </a:solidFill>
+                      <a:prstDash val="solid"/>
+                      <a:round/>
+                      <a:headEnd type="none" w="med" len="med"/>
+                      <a:tailEnd type="none" w="med" len="med"/>
+                    </a:lnT>
+                    <a:lnB w="12700" cap="flat" cmpd="sng" algn="ctr">
+                      <a:solidFill>
+                        <a:srgbClr val="E2E6E8"/>
+                      </a:solidFill>
+                      <a:prstDash val="solid"/>
+                      <a:round/>
+                      <a:headEnd type="none" w="med" len="med"/>
+                      <a:tailEnd type="none" w="med" len="med"/>
+                    </a:lnB>
+                    <a:solidFill>
+                      <a:srgbClr val="FFFFFF"/>
+                    </a:solidFill>
+                  </a:tcPr>
+                </a:tc>
+              </a:tr>
+              <a:tr h="548640">
+                <a:tc>
+                  <a:txBody>
+                    <a:bodyPr/>
+                    <a:lstStyle/>
+                    <a:p>
+                      <a:pPr indent="0" marL="0">
+                        <a:buNone/>
+                      </a:pPr>
+                      <a:r>
+                        <a:rPr lang="en-US" sz="1500" dirty="0">
+                          <a:solidFill>
+                            <a:srgbClr val="1E2D34"/>
+                          </a:solidFill>
+                          <a:latin typeface="Meiryo" pitchFamily="34" charset="0"/>
+                          <a:ea typeface="Meiryo" pitchFamily="34" charset="-122"/>
+                          <a:cs typeface="Meiryo" pitchFamily="34" charset="-120"/>
+                        </a:rPr>
+                        <a:t>04　エビデンスと共同研究</a:t>
+                      </a:r>
+                      <a:endParaRPr lang="en-US" sz="1500" dirty="0">
+                        <a:latin typeface="Meiryo" charset="0"/>
+                        <a:ea typeface="Meiryo" charset="0"/>
+                        <a:cs typeface="Meiryo" charset="0"/>
+                      </a:endParaRPr>
+                    </a:p>
+                  </a:txBody>
+                  <a:tcPr marL="91440" marR="91440" marT="45720" marB="45720" anchor="ctr">
+                    <a:lnL w="12700" cap="flat" cmpd="sng" algn="ctr">
+                      <a:solidFill>
+                        <a:srgbClr val="E2E6E8"/>
+                      </a:solidFill>
+                      <a:prstDash val="solid"/>
+                      <a:round/>
+                      <a:headEnd type="none" w="med" len="med"/>
+                      <a:tailEnd type="none" w="med" len="med"/>
+                    </a:lnL>
+                    <a:lnR w="12700" cap="flat" cmpd="sng" algn="ctr">
+                      <a:solidFill>
+                        <a:srgbClr val="E2E6E8"/>
+                      </a:solidFill>
+                      <a:prstDash val="solid"/>
+                      <a:round/>
+                      <a:headEnd type="none" w="med" len="med"/>
+                      <a:tailEnd type="none" w="med" len="med"/>
+                    </a:lnR>
+                    <a:lnT w="12700" cap="flat" cmpd="sng" algn="ctr">
+                      <a:solidFill>
+                        <a:srgbClr val="E2E6E8"/>
+                      </a:solidFill>
+                      <a:prstDash val="solid"/>
+                      <a:round/>
+                      <a:headEnd type="none" w="med" len="med"/>
+                      <a:tailEnd type="none" w="med" len="med"/>
+                    </a:lnT>
+                    <a:lnB w="12700" cap="flat" cmpd="sng" algn="ctr">
+                      <a:solidFill>
+                        <a:srgbClr val="E2E6E8"/>
+                      </a:solidFill>
+                      <a:prstDash val="solid"/>
+                      <a:round/>
+                      <a:headEnd type="none" w="med" len="med"/>
+                      <a:tailEnd type="none" w="med" len="med"/>
+                    </a:lnB>
+                    <a:solidFill>
+                      <a:srgbClr val="FFFFFF"/>
+                    </a:solidFill>
+                  </a:tcPr>
+                </a:tc>
+                <a:tc>
+                  <a:txBody>
+                    <a:bodyPr/>
+                    <a:lstStyle/>
+                    <a:p>
+                      <a:pPr indent="0" marL="0">
+                        <a:buNone/>
+                      </a:pPr>
+                      <a:r>
+                        <a:rPr lang="en-US" sz="1500" dirty="0">
+                          <a:solidFill>
+                            <a:srgbClr val="1E2D34"/>
+                          </a:solidFill>
+                          <a:latin typeface="Meiryo" pitchFamily="34" charset="0"/>
+                          <a:ea typeface="Meiryo" pitchFamily="34" charset="-122"/>
+                          <a:cs typeface="Meiryo" pitchFamily="34" charset="-120"/>
+                        </a:rPr>
+                        <a:t>見出し1・文章10</a:t>
+                      </a:r>
+                      <a:endParaRPr lang="en-US" sz="1500" dirty="0">
+                        <a:latin typeface="Meiryo" charset="0"/>
+                        <a:ea typeface="Meiryo" charset="0"/>
+                        <a:cs typeface="Meiryo" charset="0"/>
+                      </a:endParaRPr>
+                    </a:p>
+                  </a:txBody>
+                  <a:tcPr marL="91440" marR="91440" marT="45720" marB="45720" anchor="ctr">
+                    <a:lnL w="12700" cap="flat" cmpd="sng" algn="ctr">
+                      <a:solidFill>
+                        <a:srgbClr val="E2E6E8"/>
+                      </a:solidFill>
+                      <a:prstDash val="solid"/>
+                      <a:round/>
+                      <a:headEnd type="none" w="med" len="med"/>
+                      <a:tailEnd type="none" w="med" len="med"/>
+                    </a:lnL>
+                    <a:lnR w="12700" cap="flat" cmpd="sng" algn="ctr">
+                      <a:solidFill>
+                        <a:srgbClr val="E2E6E8"/>
+                      </a:solidFill>
+                      <a:prstDash val="solid"/>
+                      <a:round/>
+                      <a:headEnd type="none" w="med" len="med"/>
+                      <a:tailEnd type="none" w="med" len="med"/>
+                    </a:lnR>
+                    <a:lnT w="12700" cap="flat" cmpd="sng" algn="ctr">
+                      <a:solidFill>
+                        <a:srgbClr val="E2E6E8"/>
+                      </a:solidFill>
+                      <a:prstDash val="solid"/>
+                      <a:round/>
+                      <a:headEnd type="none" w="med" len="med"/>
+                      <a:tailEnd type="none" w="med" len="med"/>
+                    </a:lnT>
+                    <a:lnB w="12700" cap="flat" cmpd="sng" algn="ctr">
+                      <a:solidFill>
+                        <a:srgbClr val="E2E6E8"/>
+                      </a:solidFill>
+                      <a:prstDash val="solid"/>
+                      <a:round/>
+                      <a:headEnd type="none" w="med" len="med"/>
+                      <a:tailEnd type="none" w="med" len="med"/>
+                    </a:lnB>
+                    <a:solidFill>
+                      <a:srgbClr val="FFFFFF"/>
+                    </a:solidFill>
+                  </a:tcPr>
+                </a:tc>
+                <a:tc>
+                  <a:txBody>
+                    <a:bodyPr/>
+                    <a:lstStyle/>
+                    <a:p>
+                      <a:pPr indent="0" marL="0">
+                        <a:buNone/>
+                      </a:pPr>
+                      <a:r>
+                        <a:rPr lang="en-US" sz="1500" dirty="0">
+                          <a:solidFill>
+                            <a:srgbClr val="1E2D34"/>
+                          </a:solidFill>
+                          <a:latin typeface="Meiryo" pitchFamily="34" charset="0"/>
+                          <a:ea typeface="Meiryo" pitchFamily="34" charset="-122"/>
+                          <a:cs typeface="Meiryo" pitchFamily="34" charset="-120"/>
+                        </a:rPr>
+                        <a:t>大きな写真2点</a:t>
+                      </a:r>
+                      <a:endParaRPr lang="en-US" sz="1500" dirty="0">
+                        <a:latin typeface="Meiryo" charset="0"/>
+                        <a:ea typeface="Meiryo" charset="0"/>
+                        <a:cs typeface="Meiryo" charset="0"/>
+                      </a:endParaRPr>
+                    </a:p>
+                  </a:txBody>
+                  <a:tcPr marL="91440" marR="91440" marT="45720" marB="45720" anchor="ctr">
+                    <a:lnL w="12700" cap="flat" cmpd="sng" algn="ctr">
+                      <a:solidFill>
+                        <a:srgbClr val="E2E6E8"/>
+                      </a:solidFill>
+                      <a:prstDash val="solid"/>
+                      <a:round/>
+                      <a:headEnd type="none" w="med" len="med"/>
+                      <a:tailEnd type="none" w="med" len="med"/>
+                    </a:lnL>
+                    <a:lnR w="12700" cap="flat" cmpd="sng" algn="ctr">
+                      <a:solidFill>
+                        <a:srgbClr val="E2E6E8"/>
+                      </a:solidFill>
+                      <a:prstDash val="solid"/>
+                      <a:round/>
+                      <a:headEnd type="none" w="med" len="med"/>
+                      <a:tailEnd type="none" w="med" len="med"/>
+                    </a:lnR>
+                    <a:lnT w="12700" cap="flat" cmpd="sng" algn="ctr">
+                      <a:solidFill>
+                        <a:srgbClr val="E2E6E8"/>
+                      </a:solidFill>
+                      <a:prstDash val="solid"/>
+                      <a:round/>
+                      <a:headEnd type="none" w="med" len="med"/>
+                      <a:tailEnd type="none" w="med" len="med"/>
+                    </a:lnT>
+                    <a:lnB w="12700" cap="flat" cmpd="sng" algn="ctr">
+                      <a:solidFill>
+                        <a:srgbClr val="E2E6E8"/>
+                      </a:solidFill>
+                      <a:prstDash val="solid"/>
+                      <a:round/>
+                      <a:headEnd type="none" w="med" len="med"/>
+                      <a:tailEnd type="none" w="med" len="med"/>
+                    </a:lnB>
+                    <a:solidFill>
+                      <a:srgbClr val="FFFFFF"/>
+                    </a:solidFill>
+                  </a:tcPr>
+                </a:tc>
+              </a:tr>
+              <a:tr h="548640">
+                <a:tc>
+                  <a:txBody>
+                    <a:bodyPr/>
+                    <a:lstStyle/>
+                    <a:p>
+                      <a:pPr indent="0" marL="0">
+                        <a:buNone/>
+                      </a:pPr>
+                      <a:r>
+                        <a:rPr lang="en-US" sz="1500" dirty="0">
+                          <a:solidFill>
+                            <a:srgbClr val="1E2D34"/>
+                          </a:solidFill>
+                          <a:latin typeface="Meiryo" pitchFamily="34" charset="0"/>
+                          <a:ea typeface="Meiryo" pitchFamily="34" charset="-122"/>
+                          <a:cs typeface="Meiryo" pitchFamily="34" charset="-120"/>
+                        </a:rPr>
+                        <a:t>締めくくり</a:t>
+                      </a:r>
+                      <a:endParaRPr lang="en-US" sz="1500" dirty="0">
+                        <a:latin typeface="Meiryo" charset="0"/>
+                        <a:ea typeface="Meiryo" charset="0"/>
+                        <a:cs typeface="Meiryo" charset="0"/>
+                      </a:endParaRPr>
+                    </a:p>
+                  </a:txBody>
+                  <a:tcPr marL="91440" marR="91440" marT="45720" marB="45720" anchor="ctr">
+                    <a:lnL w="12700" cap="flat" cmpd="sng" algn="ctr">
+                      <a:solidFill>
+                        <a:srgbClr val="E2E6E8"/>
+                      </a:solidFill>
+                      <a:prstDash val="solid"/>
+                      <a:round/>
+                      <a:headEnd type="none" w="med" len="med"/>
+                      <a:tailEnd type="none" w="med" len="med"/>
+                    </a:lnL>
+                    <a:lnR w="12700" cap="flat" cmpd="sng" algn="ctr">
+                      <a:solidFill>
+                        <a:srgbClr val="E2E6E8"/>
+                      </a:solidFill>
+                      <a:prstDash val="solid"/>
+                      <a:round/>
+                      <a:headEnd type="none" w="med" len="med"/>
+                      <a:tailEnd type="none" w="med" len="med"/>
+                    </a:lnR>
+                    <a:lnT w="12700" cap="flat" cmpd="sng" algn="ctr">
+                      <a:solidFill>
+                        <a:srgbClr val="E2E6E8"/>
+                      </a:solidFill>
+                      <a:prstDash val="solid"/>
+                      <a:round/>
+                      <a:headEnd type="none" w="med" len="med"/>
+                      <a:tailEnd type="none" w="med" len="med"/>
+                    </a:lnT>
+                    <a:lnB w="12700" cap="flat" cmpd="sng" algn="ctr">
+                      <a:solidFill>
+                        <a:srgbClr val="E2E6E8"/>
+                      </a:solidFill>
+                      <a:prstDash val="solid"/>
+                      <a:round/>
+                      <a:headEnd type="none" w="med" len="med"/>
+                      <a:tailEnd type="none" w="med" len="med"/>
+                    </a:lnB>
+                    <a:solidFill>
+                      <a:srgbClr val="FFFFFF"/>
+                    </a:solidFill>
+                  </a:tcPr>
+                </a:tc>
+                <a:tc>
+                  <a:txBody>
+                    <a:bodyPr/>
+                    <a:lstStyle/>
+                    <a:p>
+                      <a:pPr indent="0" marL="0">
+                        <a:buNone/>
+                      </a:pPr>
+                      <a:r>
+                        <a:rPr lang="en-US" sz="1500" dirty="0">
+                          <a:solidFill>
+                            <a:srgbClr val="1E2D34"/>
+                          </a:solidFill>
+                          <a:latin typeface="Meiryo" pitchFamily="34" charset="0"/>
+                          <a:ea typeface="Meiryo" pitchFamily="34" charset="-122"/>
+                          <a:cs typeface="Meiryo" pitchFamily="34" charset="-120"/>
+                        </a:rPr>
+                        <a:t>文章4</a:t>
+                      </a:r>
+                      <a:endParaRPr lang="en-US" sz="1500" dirty="0">
+                        <a:latin typeface="Meiryo" charset="0"/>
+                        <a:ea typeface="Meiryo" charset="0"/>
+                        <a:cs typeface="Meiryo" charset="0"/>
+                      </a:endParaRPr>
+                    </a:p>
+                  </a:txBody>
+                  <a:tcPr marL="91440" marR="91440" marT="45720" marB="45720" anchor="ctr">
+                    <a:lnL w="12700" cap="flat" cmpd="sng" algn="ctr">
+                      <a:solidFill>
+                        <a:srgbClr val="E2E6E8"/>
+                      </a:solidFill>
+                      <a:prstDash val="solid"/>
+                      <a:round/>
+                      <a:headEnd type="none" w="med" len="med"/>
+                      <a:tailEnd type="none" w="med" len="med"/>
+                    </a:lnL>
+                    <a:lnR w="12700" cap="flat" cmpd="sng" algn="ctr">
+                      <a:solidFill>
+                        <a:srgbClr val="E2E6E8"/>
+                      </a:solidFill>
+                      <a:prstDash val="solid"/>
+                      <a:round/>
+                      <a:headEnd type="none" w="med" len="med"/>
+                      <a:tailEnd type="none" w="med" len="med"/>
+                    </a:lnR>
+                    <a:lnT w="12700" cap="flat" cmpd="sng" algn="ctr">
+                      <a:solidFill>
+                        <a:srgbClr val="E2E6E8"/>
+                      </a:solidFill>
+                      <a:prstDash val="solid"/>
+                      <a:round/>
+                      <a:headEnd type="none" w="med" len="med"/>
+                      <a:tailEnd type="none" w="med" len="med"/>
+                    </a:lnT>
+                    <a:lnB w="12700" cap="flat" cmpd="sng" algn="ctr">
+                      <a:solidFill>
+                        <a:srgbClr val="E2E6E8"/>
+                      </a:solidFill>
+                      <a:prstDash val="solid"/>
+                      <a:round/>
+                      <a:headEnd type="none" w="med" len="med"/>
+                      <a:tailEnd type="none" w="med" len="med"/>
+                    </a:lnB>
+                    <a:solidFill>
+                      <a:srgbClr val="FFFFFF"/>
+                    </a:solidFill>
+                  </a:tcPr>
+                </a:tc>
+                <a:tc>
+                  <a:txBody>
+                    <a:bodyPr/>
+                    <a:lstStyle/>
+                    <a:p>
+                      <a:pPr indent="0" marL="0">
+                        <a:buNone/>
+                      </a:pPr>
+                      <a:r>
+                        <a:rPr lang="en-US" sz="1500" dirty="0">
+                          <a:solidFill>
+                            <a:srgbClr val="1E2D34"/>
+                          </a:solidFill>
+                          <a:latin typeface="Meiryo" pitchFamily="34" charset="0"/>
+                          <a:ea typeface="Meiryo" pitchFamily="34" charset="-122"/>
+                          <a:cs typeface="Meiryo" pitchFamily="34" charset="-120"/>
+                        </a:rPr>
+                        <a:t>—</a:t>
+                      </a:r>
+                      <a:endParaRPr lang="en-US" sz="1500" dirty="0">
+                        <a:latin typeface="Meiryo" charset="0"/>
+                        <a:ea typeface="Meiryo" charset="0"/>
+                        <a:cs typeface="Meiryo" charset="0"/>
+                      </a:endParaRPr>
+                    </a:p>
+                  </a:txBody>
+                  <a:tcPr marL="91440" marR="91440" marT="45720" marB="45720" anchor="ctr">
+                    <a:lnL w="12700" cap="flat" cmpd="sng" algn="ctr">
+                      <a:solidFill>
+                        <a:srgbClr val="E2E6E8"/>
+                      </a:solidFill>
+                      <a:prstDash val="solid"/>
+                      <a:round/>
+                      <a:headEnd type="none" w="med" len="med"/>
+                      <a:tailEnd type="none" w="med" len="med"/>
+                    </a:lnL>
+                    <a:lnR w="12700" cap="flat" cmpd="sng" algn="ctr">
+                      <a:solidFill>
+                        <a:srgbClr val="E2E6E8"/>
+                      </a:solidFill>
+                      <a:prstDash val="solid"/>
+                      <a:round/>
+                      <a:headEnd type="none" w="med" len="med"/>
+                      <a:tailEnd type="none" w="med" len="med"/>
+                    </a:lnR>
+                    <a:lnT w="12700" cap="flat" cmpd="sng" algn="ctr">
+                      <a:solidFill>
+                        <a:srgbClr val="E2E6E8"/>
+                      </a:solidFill>
+                      <a:prstDash val="solid"/>
+                      <a:round/>
+                      <a:headEnd type="none" w="med" len="med"/>
+                      <a:tailEnd type="none" w="med" len="med"/>
+                    </a:lnT>
+                    <a:lnB w="12700" cap="flat" cmpd="sng" algn="ctr">
+                      <a:solidFill>
+                        <a:srgbClr val="E2E6E8"/>
+                      </a:solidFill>
+                      <a:prstDash val="solid"/>
+                      <a:round/>
+                      <a:headEnd type="none" w="med" len="med"/>
+                      <a:tailEnd type="none" w="med" len="med"/>
+                    </a:lnB>
+                    <a:solidFill>
+                      <a:srgbClr val="FFFFFF"/>
+                    </a:solidFill>
+                  </a:tcPr>
+                </a:tc>
+              </a:tr>
+            </a:tbl>
+          </a:graphicData>
+        </a:graphic>
+      </p:graphicFrame>
+      <p:sp>
+        <p:nvSpPr>
+          <p:cNvPr id="6" name="Shape 3"/>
+          <p:cNvSpPr/>
+          <p:nvPr/>
+        </p:nvSpPr>
+        <p:spPr>
+          <a:xfrm>
+            <a:off x="640080" y="5486400"/>
+            <a:ext cx="11064240" cy="777240"/>
           </a:xfrm>
           <a:prstGeom prst="roundRect">
             <a:avLst>
-              <a:gd name="adj" fmla="val 8333"/>
+              <a:gd name="adj" fmla="val 11765"/>
             </a:avLst>
           </a:prstGeom>
           <a:solidFill>
-            <a:srgbClr val="F2F5F6"/>
+            <a:srgbClr val="EDF6EE"/>
           </a:solidFill>
           <a:ln/>
         </p:spPr>
       </p:sp>
       <p:sp>
         <p:nvSpPr>
-          <p:cNvPr id="17" name="Text 15"/>
-          <p:cNvSpPr/>
-          <p:nvPr/>
-        </p:nvSpPr>
-        <p:spPr>
-          <a:xfrm>
-            <a:off x="868680" y="5102352"/>
-            <a:ext cx="10607040" cy="768096"/>
+          <p:cNvPr id="7" name="Text 4"/>
+          <p:cNvSpPr/>
+          <p:nvPr/>
+        </p:nvSpPr>
+        <p:spPr>
+          <a:xfrm>
+            <a:off x="868680" y="5650992"/>
+            <a:ext cx="10607040" cy="448056"/>
           </a:xfrm>
           <a:prstGeom prst="rect">
             <a:avLst/>
@@ -7991,37 +12142,17 @@
               <a:buNone/>
             </a:pPr>
             <a:r>
-              <a:rPr lang="en-US" sz="1600" b="1" dirty="0">
-                <a:solidFill>
-                  <a:srgbClr val="264653"/>
-                </a:solidFill>
-                <a:latin typeface="Meiryo" pitchFamily="34" charset="0"/>
-                <a:ea typeface="Meiryo" pitchFamily="34" charset="-122"/>
-                <a:cs typeface="Meiryo" pitchFamily="34" charset="-120"/>
-              </a:rPr>
-              <a:t>写真は横1200ピクセルくらいがおすすめです。</a:t>
-            </a:r>
-            <a:endParaRPr lang="en-US" sz="1600" dirty="0"/>
-          </a:p>
-          <a:p>
-            <a:pPr indent="0" marL="0">
-              <a:lnSpc>
-                <a:spcPts val="2100"/>
-              </a:lnSpc>
-              <a:buNone/>
-            </a:pPr>
-            <a:r>
-              <a:rPr lang="en-US" sz="1600" b="1" dirty="0">
-                <a:solidFill>
-                  <a:srgbClr val="264653"/>
-                </a:solidFill>
-                <a:latin typeface="Meiryo" pitchFamily="34" charset="0"/>
-                <a:ea typeface="Meiryo" pitchFamily="34" charset="-122"/>
-                <a:cs typeface="Meiryo" pitchFamily="34" charset="-120"/>
-              </a:rPr>
-              <a:t>スマホで撮ったままでも表示はされますが、ページが重くなります。</a:t>
-            </a:r>
-            <a:endParaRPr lang="en-US" sz="1600" dirty="0"/>
+              <a:rPr lang="en-US" sz="1700" b="1" dirty="0">
+                <a:solidFill>
+                  <a:srgbClr val="2E7D32"/>
+                </a:solidFill>
+                <a:latin typeface="Meiryo" pitchFamily="34" charset="0"/>
+                <a:ea typeface="Meiryo" pitchFamily="34" charset="-122"/>
+                <a:cs typeface="Meiryo" pitchFamily="34" charset="-120"/>
+              </a:rPr>
+              <a:t>全部で 文章52か所が直せます。触らないのは飾りの9か所だけです。</a:t>
+            </a:r>
+            <a:endParaRPr lang="en-US" sz="1700" dirty="0"/>
           </a:p>
         </p:txBody>
       </p:sp>
@@ -8090,7 +12221,7 @@
                 <a:ea typeface="Meiryo" pitchFamily="34" charset="-122"/>
                 <a:cs typeface="Meiryo" pitchFamily="34" charset="-120"/>
               </a:rPr>
-              <a:t>⑥ 保存する前に確認する</a:t>
+              <a:t>どこが直せるか（前半）</a:t>
             </a:r>
             <a:endParaRPr lang="en-US" sz="3400" dirty="0"/>
           </a:p>
@@ -8129,7 +12260,7 @@
                 <a:ea typeface="Meiryo" pitchFamily="34" charset="-122"/>
                 <a:cs typeface="Meiryo" pitchFamily="34" charset="-120"/>
               </a:rPr>
-              <a:t>お客様に見える形で見られます</a:t>
+              <a:t>ASPATHの由来 ／ ASPATHの特徴</a:t>
             </a:r>
             <a:endParaRPr lang="en-US" sz="1600" dirty="0"/>
           </a:p>
@@ -8174,20 +12305,392 @@
           </a:p>
         </p:txBody>
       </p:sp>
-      <p:sp>
-        <p:nvSpPr>
-          <p:cNvPr id="5" name="Shape 3"/>
-          <p:cNvSpPr/>
-          <p:nvPr/>
-        </p:nvSpPr>
-        <p:spPr>
-          <a:xfrm>
-            <a:off x="640080" y="1783080"/>
-            <a:ext cx="11064240" cy="1188720"/>
+      <p:pic>
+        <p:nvPicPr>
+          <p:cNvPr id="5" name="Image 0" descr="/sessions/compassionate-sweet-heisenberg/mnt/dev-aspath-life-main/_wp移行素材/★引継ぎ資料/画像/M1_由来と特徴.jpg">    </p:cNvPr>
+          <p:cNvPicPr>
+            <a:picLocks noChangeAspect="1"/>
+          </p:cNvPicPr>
+          <p:nvPr/>
+        </p:nvPicPr>
+        <p:blipFill>
+          <a:blip r:embed="rId1"/>
+          <a:stretch>
+            <a:fillRect/>
+          </a:stretch>
+        </p:blipFill>
+        <p:spPr>
+          <a:xfrm>
+            <a:off x="822960" y="1645920"/>
+            <a:ext cx="2834640" cy="4629912"/>
+          </a:xfrm>
+          <a:prstGeom prst="rect">
+            <a:avLst/>
+          </a:prstGeom>
+        </p:spPr>
+      </p:pic>
+      <p:pic>
+        <p:nvPicPr>
+          <p:cNvPr id="6" name="Image 1" descr="/sessions/compassionate-sweet-heisenberg/mnt/dev-aspath-life-main/_wp移行素材/★引継ぎ資料/画像/M2_01_3つの芯.jpg">    </p:cNvPr>
+          <p:cNvPicPr>
+            <a:picLocks noChangeAspect="1"/>
+          </p:cNvPicPr>
+          <p:nvPr/>
+        </p:nvPicPr>
+        <p:blipFill>
+          <a:blip r:embed="rId2"/>
+          <a:stretch>
+            <a:fillRect/>
+          </a:stretch>
+        </p:blipFill>
+        <p:spPr>
+          <a:xfrm>
+            <a:off x="3931920" y="1645920"/>
+            <a:ext cx="2834640" cy="4629912"/>
+          </a:xfrm>
+          <a:prstGeom prst="rect">
+            <a:avLst/>
+          </a:prstGeom>
+        </p:spPr>
+      </p:pic>
+      <p:sp>
+        <p:nvSpPr>
+          <p:cNvPr id="7" name="Text 3"/>
+          <p:cNvSpPr/>
+          <p:nvPr/>
+        </p:nvSpPr>
+        <p:spPr>
+          <a:xfrm>
+            <a:off x="822960" y="6263640"/>
+            <a:ext cx="2834640" cy="274320"/>
+          </a:xfrm>
+          <a:prstGeom prst="rect">
+            <a:avLst/>
+          </a:prstGeom>
+          <a:noFill/>
+          <a:ln/>
+        </p:spPr>
+        <p:txBody>
+          <a:bodyPr wrap="square" lIns="0" tIns="0" rIns="0" bIns="0" rtlCol="0" anchor="ctr"/>
+          <a:lstStyle/>
+          <a:p>
+            <a:pPr algn="ctr" indent="0" marL="0">
+              <a:buNone/>
+            </a:pPr>
+            <a:r>
+              <a:rPr lang="en-US" sz="1300" dirty="0">
+                <a:solidFill>
+                  <a:srgbClr val="5E7681"/>
+                </a:solidFill>
+                <a:latin typeface="Meiryo" pitchFamily="34" charset="0"/>
+                <a:ea typeface="Meiryo" pitchFamily="34" charset="-122"/>
+                <a:cs typeface="Meiryo" pitchFamily="34" charset="-120"/>
+              </a:rPr>
+              <a:t>ASPATHの由来・特徴</a:t>
+            </a:r>
+            <a:endParaRPr lang="en-US" sz="1300" dirty="0"/>
+          </a:p>
+        </p:txBody>
+      </p:sp>
+      <p:sp>
+        <p:nvSpPr>
+          <p:cNvPr id="8" name="Text 4"/>
+          <p:cNvSpPr/>
+          <p:nvPr/>
+        </p:nvSpPr>
+        <p:spPr>
+          <a:xfrm>
+            <a:off x="3931920" y="6263640"/>
+            <a:ext cx="2834640" cy="274320"/>
+          </a:xfrm>
+          <a:prstGeom prst="rect">
+            <a:avLst/>
+          </a:prstGeom>
+          <a:noFill/>
+          <a:ln/>
+        </p:spPr>
+        <p:txBody>
+          <a:bodyPr wrap="square" lIns="0" tIns="0" rIns="0" bIns="0" rtlCol="0" anchor="ctr"/>
+          <a:lstStyle/>
+          <a:p>
+            <a:pPr algn="ctr" indent="0" marL="0">
+              <a:buNone/>
+            </a:pPr>
+            <a:r>
+              <a:rPr lang="en-US" sz="1300" dirty="0">
+                <a:solidFill>
+                  <a:srgbClr val="5E7681"/>
+                </a:solidFill>
+                <a:latin typeface="Meiryo" pitchFamily="34" charset="0"/>
+                <a:ea typeface="Meiryo" pitchFamily="34" charset="-122"/>
+                <a:cs typeface="Meiryo" pitchFamily="34" charset="-120"/>
+              </a:rPr>
+              <a:t>01　3つの芯</a:t>
+            </a:r>
+            <a:endParaRPr lang="en-US" sz="1300" dirty="0"/>
+          </a:p>
+        </p:txBody>
+      </p:sp>
+      <p:sp>
+        <p:nvSpPr>
+          <p:cNvPr id="9" name="Shape 5"/>
+          <p:cNvSpPr/>
+          <p:nvPr/>
+        </p:nvSpPr>
+        <p:spPr>
+          <a:xfrm>
+            <a:off x="7223760" y="1691640"/>
+            <a:ext cx="4480560" cy="1371600"/>
           </a:xfrm>
           <a:prstGeom prst="roundRect">
             <a:avLst>
-              <a:gd name="adj" fmla="val 9231"/>
+              <a:gd name="adj" fmla="val 8000"/>
+            </a:avLst>
+          </a:prstGeom>
+          <a:solidFill>
+            <a:srgbClr val="EDF6EE"/>
+          </a:solidFill>
+          <a:ln/>
+        </p:spPr>
+      </p:sp>
+      <p:sp>
+        <p:nvSpPr>
+          <p:cNvPr id="10" name="Text 6"/>
+          <p:cNvSpPr/>
+          <p:nvPr/>
+        </p:nvSpPr>
+        <p:spPr>
+          <a:xfrm>
+            <a:off x="7498080" y="1874520"/>
+            <a:ext cx="3931920" cy="320040"/>
+          </a:xfrm>
+          <a:prstGeom prst="rect">
+            <a:avLst/>
+          </a:prstGeom>
+          <a:noFill/>
+          <a:ln/>
+        </p:spPr>
+        <p:txBody>
+          <a:bodyPr wrap="square" lIns="0" tIns="0" rIns="0" bIns="0" rtlCol="0" anchor="ctr"/>
+          <a:lstStyle/>
+          <a:p>
+            <a:pPr indent="0" marL="0">
+              <a:buNone/>
+            </a:pPr>
+            <a:r>
+              <a:rPr lang="en-US" sz="1900" b="1" dirty="0">
+                <a:solidFill>
+                  <a:srgbClr val="2E7D32"/>
+                </a:solidFill>
+                <a:latin typeface="Meiryo" pitchFamily="34" charset="0"/>
+                <a:ea typeface="Meiryo" pitchFamily="34" charset="-122"/>
+                <a:cs typeface="Meiryo" pitchFamily="34" charset="-120"/>
+              </a:rPr>
+              <a:t>緑のところ</a:t>
+            </a:r>
+            <a:endParaRPr lang="en-US" sz="1900" dirty="0"/>
+          </a:p>
+        </p:txBody>
+      </p:sp>
+      <p:sp>
+        <p:nvSpPr>
+          <p:cNvPr id="11" name="Text 7"/>
+          <p:cNvSpPr/>
+          <p:nvPr/>
+        </p:nvSpPr>
+        <p:spPr>
+          <a:xfrm>
+            <a:off x="7498080" y="2286000"/>
+            <a:ext cx="3931920" cy="640080"/>
+          </a:xfrm>
+          <a:prstGeom prst="rect">
+            <a:avLst/>
+          </a:prstGeom>
+          <a:noFill/>
+          <a:ln/>
+        </p:spPr>
+        <p:txBody>
+          <a:bodyPr wrap="square" lIns="0" tIns="0" rIns="0" bIns="0" rtlCol="0" anchor="ctr"/>
+          <a:lstStyle/>
+          <a:p>
+            <a:pPr indent="0" marL="0">
+              <a:lnSpc>
+                <a:spcPts val="2200"/>
+              </a:lnSpc>
+              <a:buNone/>
+            </a:pPr>
+            <a:r>
+              <a:rPr lang="en-US" sz="1500" dirty="0">
+                <a:solidFill>
+                  <a:srgbClr val="1E2D34"/>
+                </a:solidFill>
+                <a:latin typeface="Meiryo" pitchFamily="34" charset="0"/>
+                <a:ea typeface="Meiryo" pitchFamily="34" charset="-122"/>
+                <a:cs typeface="Meiryo" pitchFamily="34" charset="-120"/>
+              </a:rPr>
+              <a:t>見出しと文章。クリックして</a:t>
+            </a:r>
+            <a:endParaRPr lang="en-US" sz="1500" dirty="0"/>
+          </a:p>
+          <a:p>
+            <a:pPr indent="0" marL="0">
+              <a:lnSpc>
+                <a:spcPts val="2200"/>
+              </a:lnSpc>
+              <a:buNone/>
+            </a:pPr>
+            <a:r>
+              <a:rPr lang="en-US" sz="1500" dirty="0">
+                <a:solidFill>
+                  <a:srgbClr val="1E2D34"/>
+                </a:solidFill>
+                <a:latin typeface="Meiryo" pitchFamily="34" charset="0"/>
+                <a:ea typeface="Meiryo" pitchFamily="34" charset="-122"/>
+                <a:cs typeface="Meiryo" pitchFamily="34" charset="-120"/>
+              </a:rPr>
+              <a:t>そのまま書き換えられます。</a:t>
+            </a:r>
+            <a:endParaRPr lang="en-US" sz="1500" dirty="0"/>
+          </a:p>
+        </p:txBody>
+      </p:sp>
+      <p:sp>
+        <p:nvSpPr>
+          <p:cNvPr id="12" name="Shape 8"/>
+          <p:cNvSpPr/>
+          <p:nvPr/>
+        </p:nvSpPr>
+        <p:spPr>
+          <a:xfrm>
+            <a:off x="7223760" y="3200400"/>
+            <a:ext cx="4480560" cy="1371600"/>
+          </a:xfrm>
+          <a:prstGeom prst="roundRect">
+            <a:avLst>
+              <a:gd name="adj" fmla="val 8000"/>
+            </a:avLst>
+          </a:prstGeom>
+          <a:solidFill>
+            <a:srgbClr val="FFF4EA"/>
+          </a:solidFill>
+          <a:ln/>
+        </p:spPr>
+      </p:sp>
+      <p:sp>
+        <p:nvSpPr>
+          <p:cNvPr id="13" name="Text 9"/>
+          <p:cNvSpPr/>
+          <p:nvPr/>
+        </p:nvSpPr>
+        <p:spPr>
+          <a:xfrm>
+            <a:off x="7498080" y="3383280"/>
+            <a:ext cx="3931920" cy="320040"/>
+          </a:xfrm>
+          <a:prstGeom prst="rect">
+            <a:avLst/>
+          </a:prstGeom>
+          <a:noFill/>
+          <a:ln/>
+        </p:spPr>
+        <p:txBody>
+          <a:bodyPr wrap="square" lIns="0" tIns="0" rIns="0" bIns="0" rtlCol="0" anchor="ctr"/>
+          <a:lstStyle/>
+          <a:p>
+            <a:pPr indent="0" marL="0">
+              <a:buNone/>
+            </a:pPr>
+            <a:r>
+              <a:rPr lang="en-US" sz="1900" b="1" dirty="0">
+                <a:solidFill>
+                  <a:srgbClr val="DD8236"/>
+                </a:solidFill>
+                <a:latin typeface="Meiryo" pitchFamily="34" charset="0"/>
+                <a:ea typeface="Meiryo" pitchFamily="34" charset="-122"/>
+                <a:cs typeface="Meiryo" pitchFamily="34" charset="-120"/>
+              </a:rPr>
+              <a:t>オレンジのところ</a:t>
+            </a:r>
+            <a:endParaRPr lang="en-US" sz="1900" dirty="0"/>
+          </a:p>
+        </p:txBody>
+      </p:sp>
+      <p:sp>
+        <p:nvSpPr>
+          <p:cNvPr id="14" name="Text 10"/>
+          <p:cNvSpPr/>
+          <p:nvPr/>
+        </p:nvSpPr>
+        <p:spPr>
+          <a:xfrm>
+            <a:off x="7498080" y="3794760"/>
+            <a:ext cx="3931920" cy="640080"/>
+          </a:xfrm>
+          <a:prstGeom prst="rect">
+            <a:avLst/>
+          </a:prstGeom>
+          <a:noFill/>
+          <a:ln/>
+        </p:spPr>
+        <p:txBody>
+          <a:bodyPr wrap="square" lIns="0" tIns="0" rIns="0" bIns="0" rtlCol="0" anchor="ctr"/>
+          <a:lstStyle/>
+          <a:p>
+            <a:pPr indent="0" marL="0">
+              <a:lnSpc>
+                <a:spcPts val="2200"/>
+              </a:lnSpc>
+              <a:buNone/>
+            </a:pPr>
+            <a:r>
+              <a:rPr lang="en-US" sz="1500" dirty="0">
+                <a:solidFill>
+                  <a:srgbClr val="1E2D34"/>
+                </a:solidFill>
+                <a:latin typeface="Meiryo" pitchFamily="34" charset="0"/>
+                <a:ea typeface="Meiryo" pitchFamily="34" charset="-122"/>
+                <a:cs typeface="Meiryo" pitchFamily="34" charset="-120"/>
+              </a:rPr>
+              <a:t>図やカード。クリックすると</a:t>
+            </a:r>
+            <a:endParaRPr lang="en-US" sz="1500" dirty="0"/>
+          </a:p>
+          <a:p>
+            <a:pPr indent="0" marL="0">
+              <a:lnSpc>
+                <a:spcPts val="2200"/>
+              </a:lnSpc>
+              <a:buNone/>
+            </a:pPr>
+            <a:r>
+              <a:rPr lang="en-US" sz="1500" dirty="0">
+                <a:solidFill>
+                  <a:srgbClr val="1E2D34"/>
+                </a:solidFill>
+                <a:latin typeface="Meiryo" pitchFamily="34" charset="0"/>
+                <a:ea typeface="Meiryo" pitchFamily="34" charset="-122"/>
+                <a:cs typeface="Meiryo" pitchFamily="34" charset="-120"/>
+              </a:rPr>
+              <a:t>「カスタム HTML」と出ます。</a:t>
+            </a:r>
+            <a:endParaRPr lang="en-US" sz="1500" dirty="0"/>
+          </a:p>
+        </p:txBody>
+      </p:sp>
+      <p:sp>
+        <p:nvSpPr>
+          <p:cNvPr id="15" name="Shape 11"/>
+          <p:cNvSpPr/>
+          <p:nvPr/>
+        </p:nvSpPr>
+        <p:spPr>
+          <a:xfrm>
+            <a:off x="7223760" y="4754880"/>
+            <a:ext cx="4480560" cy="1371600"/>
+          </a:xfrm>
+          <a:prstGeom prst="roundRect">
+            <a:avLst>
+              <a:gd name="adj" fmla="val 6667"/>
             </a:avLst>
           </a:prstGeom>
           <a:solidFill>
@@ -8198,408 +12701,14 @@
       </p:sp>
       <p:sp>
         <p:nvSpPr>
-          <p:cNvPr id="6" name="Text 4"/>
-          <p:cNvSpPr/>
-          <p:nvPr/>
-        </p:nvSpPr>
-        <p:spPr>
-          <a:xfrm>
-            <a:off x="960120" y="2148840"/>
-            <a:ext cx="10515600" cy="457200"/>
-          </a:xfrm>
-          <a:prstGeom prst="rect">
-            <a:avLst/>
-          </a:prstGeom>
-          <a:noFill/>
-          <a:ln/>
-        </p:spPr>
-        <p:txBody>
-          <a:bodyPr wrap="square" lIns="0" tIns="0" rIns="0" bIns="0" rtlCol="0" anchor="ctr"/>
-          <a:lstStyle/>
-          <a:p>
-            <a:pPr indent="0" marL="0">
-              <a:buNone/>
-            </a:pPr>
-            <a:r>
-              <a:rPr lang="en-US" sz="2200" b="1" dirty="0">
-                <a:solidFill>
-                  <a:srgbClr val="264653"/>
-                </a:solidFill>
-                <a:latin typeface="Meiryo" pitchFamily="34" charset="0"/>
-                <a:ea typeface="Meiryo" pitchFamily="34" charset="-122"/>
-                <a:cs typeface="Meiryo" pitchFamily="34" charset="-120"/>
-              </a:rPr>
-              <a:t>右上の【プレビュー】 →「新しいタブでプレビュー」</a:t>
-            </a:r>
-            <a:endParaRPr lang="en-US" sz="2200" dirty="0"/>
-          </a:p>
-        </p:txBody>
-      </p:sp>
-      <p:sp>
-        <p:nvSpPr>
-          <p:cNvPr id="7" name="Text 5"/>
-          <p:cNvSpPr/>
-          <p:nvPr/>
-        </p:nvSpPr>
-        <p:spPr>
-          <a:xfrm>
-            <a:off x="685800" y="3200400"/>
-            <a:ext cx="10972800" cy="365760"/>
-          </a:xfrm>
-          <a:prstGeom prst="rect">
-            <a:avLst/>
-          </a:prstGeom>
-          <a:noFill/>
-          <a:ln/>
-        </p:spPr>
-        <p:txBody>
-          <a:bodyPr wrap="square" lIns="0" tIns="0" rIns="0" bIns="0" rtlCol="0" anchor="ctr"/>
-          <a:lstStyle/>
-          <a:p>
-            <a:pPr indent="0" marL="0">
-              <a:buNone/>
-            </a:pPr>
-            <a:r>
-              <a:rPr lang="en-US" sz="2000" b="1" dirty="0">
-                <a:solidFill>
-                  <a:srgbClr val="264653"/>
-                </a:solidFill>
-                <a:latin typeface="Meiryo" pitchFamily="34" charset="0"/>
-                <a:ea typeface="Meiryo" pitchFamily="34" charset="-122"/>
-                <a:cs typeface="Meiryo" pitchFamily="34" charset="-120"/>
-              </a:rPr>
-              <a:t>反映されないと感じたときは</a:t>
-            </a:r>
-            <a:endParaRPr lang="en-US" sz="2000" dirty="0"/>
-          </a:p>
-        </p:txBody>
-      </p:sp>
-      <p:sp>
-        <p:nvSpPr>
-          <p:cNvPr id="8" name="Shape 6"/>
-          <p:cNvSpPr/>
-          <p:nvPr/>
-        </p:nvSpPr>
-        <p:spPr>
-          <a:xfrm>
-            <a:off x="685800" y="3657600"/>
-            <a:ext cx="457200" cy="457200"/>
-          </a:xfrm>
-          <a:prstGeom prst="ellipse">
-            <a:avLst/>
-          </a:prstGeom>
-          <a:solidFill>
-            <a:srgbClr val="DD8236"/>
-          </a:solidFill>
-          <a:ln/>
-        </p:spPr>
-      </p:sp>
-      <p:sp>
-        <p:nvSpPr>
-          <p:cNvPr id="9" name="Text 7"/>
-          <p:cNvSpPr/>
-          <p:nvPr/>
-        </p:nvSpPr>
-        <p:spPr>
-          <a:xfrm>
-            <a:off x="685800" y="3712464"/>
-            <a:ext cx="457200" cy="347472"/>
-          </a:xfrm>
-          <a:prstGeom prst="rect">
-            <a:avLst/>
-          </a:prstGeom>
-          <a:noFill/>
-          <a:ln/>
-        </p:spPr>
-        <p:txBody>
-          <a:bodyPr wrap="square" lIns="0" tIns="0" rIns="0" bIns="0" rtlCol="0" anchor="ctr"/>
-          <a:lstStyle/>
-          <a:p>
-            <a:pPr algn="ctr" indent="0" marL="0">
-              <a:buNone/>
-            </a:pPr>
-            <a:r>
-              <a:rPr lang="en-US" sz="1600" b="1" dirty="0">
-                <a:solidFill>
-                  <a:srgbClr val="FFFFFF"/>
-                </a:solidFill>
-                <a:latin typeface="Meiryo" pitchFamily="34" charset="0"/>
-                <a:ea typeface="Meiryo" pitchFamily="34" charset="-122"/>
-                <a:cs typeface="Meiryo" pitchFamily="34" charset="-120"/>
-              </a:rPr>
-              <a:t>1</a:t>
-            </a:r>
-            <a:endParaRPr lang="en-US" sz="1600" dirty="0"/>
-          </a:p>
-        </p:txBody>
-      </p:sp>
-      <p:sp>
-        <p:nvSpPr>
-          <p:cNvPr id="10" name="Text 8"/>
-          <p:cNvSpPr/>
-          <p:nvPr/>
-        </p:nvSpPr>
-        <p:spPr>
-          <a:xfrm>
-            <a:off x="1344168" y="3703320"/>
-            <a:ext cx="9601200" cy="384048"/>
-          </a:xfrm>
-          <a:prstGeom prst="rect">
-            <a:avLst/>
-          </a:prstGeom>
-          <a:noFill/>
-          <a:ln/>
-        </p:spPr>
-        <p:txBody>
-          <a:bodyPr wrap="square" lIns="0" tIns="0" rIns="0" bIns="0" rtlCol="0" anchor="ctr"/>
-          <a:lstStyle/>
-          <a:p>
-            <a:pPr indent="0" marL="0">
-              <a:buNone/>
-            </a:pPr>
-            <a:r>
-              <a:rPr lang="en-US" sz="1700" dirty="0">
-                <a:solidFill>
-                  <a:srgbClr val="1E2D34"/>
-                </a:solidFill>
-                <a:latin typeface="Meiryo" pitchFamily="34" charset="0"/>
-                <a:ea typeface="Meiryo" pitchFamily="34" charset="-122"/>
-                <a:cs typeface="Meiryo" pitchFamily="34" charset="-120"/>
-              </a:rPr>
-              <a:t>5分ほど待って、もう一度ひらく</a:t>
-            </a:r>
-            <a:endParaRPr lang="en-US" sz="1700" dirty="0"/>
-          </a:p>
-        </p:txBody>
-      </p:sp>
-      <p:sp>
-        <p:nvSpPr>
-          <p:cNvPr id="11" name="Shape 9"/>
-          <p:cNvSpPr/>
-          <p:nvPr/>
-        </p:nvSpPr>
-        <p:spPr>
-          <a:xfrm>
-            <a:off x="685800" y="4389120"/>
-            <a:ext cx="457200" cy="457200"/>
-          </a:xfrm>
-          <a:prstGeom prst="ellipse">
-            <a:avLst/>
-          </a:prstGeom>
-          <a:solidFill>
-            <a:srgbClr val="DD8236"/>
-          </a:solidFill>
-          <a:ln/>
-        </p:spPr>
-      </p:sp>
-      <p:sp>
-        <p:nvSpPr>
-          <p:cNvPr id="12" name="Text 10"/>
-          <p:cNvSpPr/>
-          <p:nvPr/>
-        </p:nvSpPr>
-        <p:spPr>
-          <a:xfrm>
-            <a:off x="685800" y="4443984"/>
-            <a:ext cx="457200" cy="347472"/>
-          </a:xfrm>
-          <a:prstGeom prst="rect">
-            <a:avLst/>
-          </a:prstGeom>
-          <a:noFill/>
-          <a:ln/>
-        </p:spPr>
-        <p:txBody>
-          <a:bodyPr wrap="square" lIns="0" tIns="0" rIns="0" bIns="0" rtlCol="0" anchor="ctr"/>
-          <a:lstStyle/>
-          <a:p>
-            <a:pPr algn="ctr" indent="0" marL="0">
-              <a:buNone/>
-            </a:pPr>
-            <a:r>
-              <a:rPr lang="en-US" sz="1600" b="1" dirty="0">
-                <a:solidFill>
-                  <a:srgbClr val="FFFFFF"/>
-                </a:solidFill>
-                <a:latin typeface="Meiryo" pitchFamily="34" charset="0"/>
-                <a:ea typeface="Meiryo" pitchFamily="34" charset="-122"/>
-                <a:cs typeface="Meiryo" pitchFamily="34" charset="-120"/>
-              </a:rPr>
-              <a:t>2</a:t>
-            </a:r>
-            <a:endParaRPr lang="en-US" sz="1600" dirty="0"/>
-          </a:p>
-        </p:txBody>
-      </p:sp>
-      <p:sp>
-        <p:nvSpPr>
-          <p:cNvPr id="13" name="Text 11"/>
-          <p:cNvSpPr/>
-          <p:nvPr/>
-        </p:nvSpPr>
-        <p:spPr>
-          <a:xfrm>
-            <a:off x="1344168" y="4434840"/>
-            <a:ext cx="9601200" cy="384048"/>
-          </a:xfrm>
-          <a:prstGeom prst="rect">
-            <a:avLst/>
-          </a:prstGeom>
-          <a:noFill/>
-          <a:ln/>
-        </p:spPr>
-        <p:txBody>
-          <a:bodyPr wrap="square" lIns="0" tIns="0" rIns="0" bIns="0" rtlCol="0" anchor="ctr"/>
-          <a:lstStyle/>
-          <a:p>
-            <a:pPr indent="0" marL="0">
-              <a:buNone/>
-            </a:pPr>
-            <a:r>
-              <a:rPr lang="en-US" sz="1700" dirty="0">
-                <a:solidFill>
-                  <a:srgbClr val="1E2D34"/>
-                </a:solidFill>
-                <a:latin typeface="Meiryo" pitchFamily="34" charset="0"/>
-                <a:ea typeface="Meiryo" pitchFamily="34" charset="-122"/>
-                <a:cs typeface="Meiryo" pitchFamily="34" charset="-120"/>
-              </a:rPr>
-              <a:t>Ctrl を押しながら F5</a:t>
-            </a:r>
-            <a:endParaRPr lang="en-US" sz="1700" dirty="0"/>
-          </a:p>
-        </p:txBody>
-      </p:sp>
-      <p:sp>
-        <p:nvSpPr>
-          <p:cNvPr id="14" name="Shape 12"/>
-          <p:cNvSpPr/>
-          <p:nvPr/>
-        </p:nvSpPr>
-        <p:spPr>
-          <a:xfrm>
-            <a:off x="685800" y="5120640"/>
-            <a:ext cx="457200" cy="457200"/>
-          </a:xfrm>
-          <a:prstGeom prst="ellipse">
-            <a:avLst/>
-          </a:prstGeom>
-          <a:solidFill>
-            <a:srgbClr val="DD8236"/>
-          </a:solidFill>
-          <a:ln/>
-        </p:spPr>
-      </p:sp>
-      <p:sp>
-        <p:nvSpPr>
-          <p:cNvPr id="15" name="Text 13"/>
-          <p:cNvSpPr/>
-          <p:nvPr/>
-        </p:nvSpPr>
-        <p:spPr>
-          <a:xfrm>
-            <a:off x="685800" y="5175504"/>
-            <a:ext cx="457200" cy="347472"/>
-          </a:xfrm>
-          <a:prstGeom prst="rect">
-            <a:avLst/>
-          </a:prstGeom>
-          <a:noFill/>
-          <a:ln/>
-        </p:spPr>
-        <p:txBody>
-          <a:bodyPr wrap="square" lIns="0" tIns="0" rIns="0" bIns="0" rtlCol="0" anchor="ctr"/>
-          <a:lstStyle/>
-          <a:p>
-            <a:pPr algn="ctr" indent="0" marL="0">
-              <a:buNone/>
-            </a:pPr>
-            <a:r>
-              <a:rPr lang="en-US" sz="1600" b="1" dirty="0">
-                <a:solidFill>
-                  <a:srgbClr val="FFFFFF"/>
-                </a:solidFill>
-                <a:latin typeface="Meiryo" pitchFamily="34" charset="0"/>
-                <a:ea typeface="Meiryo" pitchFamily="34" charset="-122"/>
-                <a:cs typeface="Meiryo" pitchFamily="34" charset="-120"/>
-              </a:rPr>
-              <a:t>3</a:t>
-            </a:r>
-            <a:endParaRPr lang="en-US" sz="1600" dirty="0"/>
-          </a:p>
-        </p:txBody>
-      </p:sp>
-      <p:sp>
-        <p:nvSpPr>
-          <p:cNvPr id="16" name="Text 14"/>
-          <p:cNvSpPr/>
-          <p:nvPr/>
-        </p:nvSpPr>
-        <p:spPr>
-          <a:xfrm>
-            <a:off x="1344168" y="5166360"/>
-            <a:ext cx="9601200" cy="384048"/>
-          </a:xfrm>
-          <a:prstGeom prst="rect">
-            <a:avLst/>
-          </a:prstGeom>
-          <a:noFill/>
-          <a:ln/>
-        </p:spPr>
-        <p:txBody>
-          <a:bodyPr wrap="square" lIns="0" tIns="0" rIns="0" bIns="0" rtlCol="0" anchor="ctr"/>
-          <a:lstStyle/>
-          <a:p>
-            <a:pPr indent="0" marL="0">
-              <a:buNone/>
-            </a:pPr>
-            <a:r>
-              <a:rPr lang="en-US" sz="1700" dirty="0">
-                <a:solidFill>
-                  <a:srgbClr val="1E2D34"/>
-                </a:solidFill>
-                <a:latin typeface="Meiryo" pitchFamily="34" charset="0"/>
-                <a:ea typeface="Meiryo" pitchFamily="34" charset="-122"/>
-                <a:cs typeface="Meiryo" pitchFamily="34" charset="-120"/>
-              </a:rPr>
-              <a:t>URLの最後に ?v=2 を付けてひらく</a:t>
-            </a:r>
-            <a:endParaRPr lang="en-US" sz="1700" dirty="0"/>
-          </a:p>
-        </p:txBody>
-      </p:sp>
-      <p:sp>
-        <p:nvSpPr>
-          <p:cNvPr id="17" name="Shape 15"/>
-          <p:cNvSpPr/>
-          <p:nvPr/>
-        </p:nvSpPr>
-        <p:spPr>
-          <a:xfrm>
-            <a:off x="640080" y="5623560"/>
-            <a:ext cx="11064240" cy="685800"/>
-          </a:xfrm>
-          <a:prstGeom prst="roundRect">
-            <a:avLst>
-              <a:gd name="adj" fmla="val 13333"/>
-            </a:avLst>
-          </a:prstGeom>
-          <a:solidFill>
-            <a:srgbClr val="EDF6EE"/>
-          </a:solidFill>
-          <a:ln/>
-        </p:spPr>
-      </p:sp>
-      <p:sp>
-        <p:nvSpPr>
-          <p:cNvPr id="18" name="Text 16"/>
-          <p:cNvSpPr/>
-          <p:nvPr/>
-        </p:nvSpPr>
-        <p:spPr>
-          <a:xfrm>
-            <a:off x="868680" y="5788152"/>
-            <a:ext cx="10607040" cy="356616"/>
+          <p:cNvPr id="16" name="Text 12"/>
+          <p:cNvSpPr/>
+          <p:nvPr/>
+        </p:nvSpPr>
+        <p:spPr>
+          <a:xfrm>
+            <a:off x="7452360" y="4919472"/>
+            <a:ext cx="4023360" cy="1042416"/>
           </a:xfrm>
           <a:prstGeom prst="rect">
             <a:avLst/>
@@ -8618,17 +12727,57 @@
               <a:buNone/>
             </a:pPr>
             <a:r>
-              <a:rPr lang="en-US" sz="1600" b="1" dirty="0">
-                <a:solidFill>
-                  <a:srgbClr val="2E7D32"/>
-                </a:solidFill>
-                <a:latin typeface="Meiryo" pitchFamily="34" charset="0"/>
-                <a:ea typeface="Meiryo" pitchFamily="34" charset="-122"/>
-                <a:cs typeface="Meiryo" pitchFamily="34" charset="-120"/>
-              </a:rPr>
-              <a:t>②③で新しくなっていれば、更新は成功しています。</a:t>
-            </a:r>
-            <a:endParaRPr lang="en-US" sz="1600" dirty="0"/>
+              <a:rPr lang="en-US" sz="1500" b="1" dirty="0">
+                <a:solidFill>
+                  <a:srgbClr val="264653"/>
+                </a:solidFill>
+                <a:latin typeface="Meiryo" pitchFamily="34" charset="0"/>
+                <a:ea typeface="Meiryo" pitchFamily="34" charset="-122"/>
+                <a:cs typeface="Meiryo" pitchFamily="34" charset="-120"/>
+              </a:rPr>
+              <a:t>01「3つの芯」がいちばん</a:t>
+            </a:r>
+            <a:endParaRPr lang="en-US" sz="1500" dirty="0"/>
+          </a:p>
+          <a:p>
+            <a:pPr indent="0" marL="0">
+              <a:lnSpc>
+                <a:spcPts val="2100"/>
+              </a:lnSpc>
+              <a:buNone/>
+            </a:pPr>
+            <a:r>
+              <a:rPr lang="en-US" sz="1500" b="1" dirty="0">
+                <a:solidFill>
+                  <a:srgbClr val="264653"/>
+                </a:solidFill>
+                <a:latin typeface="Meiryo" pitchFamily="34" charset="0"/>
+                <a:ea typeface="Meiryo" pitchFamily="34" charset="-122"/>
+                <a:cs typeface="Meiryo" pitchFamily="34" charset="-120"/>
+              </a:rPr>
+              <a:t>文章が多い場所です。</a:t>
+            </a:r>
+            <a:endParaRPr lang="en-US" sz="1500" dirty="0"/>
+          </a:p>
+          <a:p>
+            <a:pPr indent="0" marL="0">
+              <a:lnSpc>
+                <a:spcPts val="2100"/>
+              </a:lnSpc>
+              <a:buNone/>
+            </a:pPr>
+            <a:r>
+              <a:rPr lang="en-US" sz="1500" b="1" dirty="0">
+                <a:solidFill>
+                  <a:srgbClr val="264653"/>
+                </a:solidFill>
+                <a:latin typeface="Meiryo" pitchFamily="34" charset="0"/>
+                <a:ea typeface="Meiryo" pitchFamily="34" charset="-122"/>
+                <a:cs typeface="Meiryo" pitchFamily="34" charset="-120"/>
+              </a:rPr>
+              <a:t>17か所を直せます。</a:t>
+            </a:r>
+            <a:endParaRPr lang="en-US" sz="1500" dirty="0"/>
           </a:p>
         </p:txBody>
       </p:sp>

--- a/_wp移行素材/★引継ぎ資料/★山口様向け_ASPATHについて_文章の直し方.pptx
+++ b/_wp移行素材/★引継ぎ資料/★山口様向け_ASPATHについて_文章の直し方.pptx
@@ -21,9 +21,10 @@
     <p:sldId id="269" r:id="rId15"/>
     <p:sldId id="270" r:id="rId16"/>
     <p:sldId id="271" r:id="rId17"/>
+    <p:sldId id="272" r:id="rId18"/>
   </p:sldIdLst>
   <p:notesMasterIdLst>
-    <p:notesMasterId r:id="rId18"/>
+    <p:notesMasterId r:id="rId19"/>
   </p:notesMasterIdLst>
   <p:sldSz cx="12192000" cy="6858000"/>
   <p:notesSz cx="6858000" cy="12192000"/>
@@ -1157,6 +1158,94 @@
             <a:fld id="{F7021451-1387-4CA6-816F-3879F97B5CBC}" type="slidenum">
               <a:rPr lang="en-US"/>
               <a:t>16</a:t>
+            </a:fld>
+            <a:endParaRPr lang="en-US"/>
+          </a:p>
+        </p:txBody>
+      </p:sp>
+    </p:spTree>
+    <p:extLst>
+      <p:ext uri="{BB962C8B-B14F-4D97-AF65-F5344CB8AC3E}">
+        <p14:creationId xmlns:p14="http://schemas.microsoft.com/office/powerpoint/2010/main" val="1024086991"/>
+      </p:ext>
+    </p:extLst>
+  </p:cSld>
+  <p:clrMapOvr>
+    <a:masterClrMapping/>
+  </p:clrMapOvr>
+</p:notes>
+</file>
+
+<file path=ppt/notesSlides/notesSlide17.xml><?xml version="1.0" encoding="utf-8"?>
+<p:notes xmlns:a="http://schemas.openxmlformats.org/drawingml/2006/main" xmlns:r="http://schemas.openxmlformats.org/officeDocument/2006/relationships" xmlns:p="http://schemas.openxmlformats.org/presentationml/2006/main">
+  <p:cSld>
+    <p:spTree>
+      <p:nvGrpSpPr>
+        <p:cNvPr id="1" name=""/>
+        <p:cNvGrpSpPr/>
+        <p:nvPr/>
+      </p:nvGrpSpPr>
+      <p:grpSpPr>
+        <a:xfrm>
+          <a:off x="0" y="0"/>
+          <a:ext cx="0" cy="0"/>
+          <a:chOff x="0" y="0"/>
+          <a:chExt cx="0" cy="0"/>
+        </a:xfrm>
+      </p:grpSpPr>
+      <p:sp>
+        <p:nvSpPr>
+          <p:cNvPr id="2" name="Slide Image Placeholder 1"/>
+          <p:cNvSpPr>
+            <a:spLocks noGrp="1" noRot="1" noChangeAspect="1"/>
+          </p:cNvSpPr>
+          <p:nvPr>
+            <p:ph type="sldImg"/>
+          </p:nvPr>
+        </p:nvSpPr>
+        <p:spPr/>
+      </p:sp>
+      <p:sp>
+        <p:nvSpPr>
+          <p:cNvPr id="3" name="Notes Placeholder 2"/>
+          <p:cNvSpPr>
+            <a:spLocks noGrp="1"/>
+          </p:cNvSpPr>
+          <p:nvPr>
+            <p:ph type="body" idx="1"/>
+          </p:nvPr>
+        </p:nvSpPr>
+        <p:spPr/>
+        <p:txBody>
+          <a:bodyPr/>
+          <a:lstStyle/>
+          <a:p>
+            <a:r>
+              <a:rPr lang="en-US" dirty="0"/>
+              <a:t/>
+            </a:r>
+            <a:endParaRPr lang="en-US" dirty="0"/>
+          </a:p>
+        </p:txBody>
+      </p:sp>
+      <p:sp>
+        <p:nvSpPr>
+          <p:cNvPr id="4" name="Slide Number Placeholder 3"/>
+          <p:cNvSpPr>
+            <a:spLocks noGrp="1"/>
+          </p:cNvSpPr>
+          <p:nvPr>
+            <p:ph type="sldNum" sz="quarter" idx="10"/>
+          </p:nvPr>
+        </p:nvSpPr>
+        <p:spPr/>
+        <p:txBody>
+          <a:bodyPr/>
+          <a:lstStyle/>
+          <a:p>
+            <a:fld id="{F7021451-1387-4CA6-816F-3879F97B5CBC}" type="slidenum">
+              <a:rPr lang="en-US"/>
+              <a:t>17</a:t>
             </a:fld>
             <a:endParaRPr lang="en-US"/>
           </a:p>
@@ -2460,7 +2549,7 @@
                 <a:ea typeface="Meiryo" pitchFamily="34" charset="-122"/>
                 <a:cs typeface="Meiryo" pitchFamily="34" charset="-120"/>
               </a:rPr>
-              <a:t>どこが直せるか（後半）</a:t>
+              <a:t>どこが直せるか（前半）</a:t>
             </a:r>
             <a:endParaRPr lang="en-US" sz="3400" dirty="0"/>
           </a:p>
@@ -2499,7 +2588,7 @@
                 <a:ea typeface="Meiryo" pitchFamily="34" charset="-122"/>
                 <a:cs typeface="Meiryo" pitchFamily="34" charset="-120"/>
               </a:rPr>
-              <a:t>02〜04 ／ 締めくくり</a:t>
+              <a:t>編集画面での見え方　緑＝直せる／オレンジ＝触らない</a:t>
             </a:r>
             <a:endParaRPr lang="en-US" sz="1600" dirty="0"/>
           </a:p>
@@ -2544,9 +2633,110 @@
           </a:p>
         </p:txBody>
       </p:sp>
+      <p:sp>
+        <p:nvSpPr>
+          <p:cNvPr id="5" name="Text 3"/>
+          <p:cNvSpPr/>
+          <p:nvPr/>
+        </p:nvSpPr>
+        <p:spPr>
+          <a:xfrm>
+            <a:off x="640080" y="1691640"/>
+            <a:ext cx="5212080" cy="320040"/>
+          </a:xfrm>
+          <a:prstGeom prst="rect">
+            <a:avLst/>
+          </a:prstGeom>
+          <a:noFill/>
+          <a:ln/>
+        </p:spPr>
+        <p:txBody>
+          <a:bodyPr wrap="square" lIns="0" tIns="0" rIns="0" bIns="0" rtlCol="0" anchor="ctr"/>
+          <a:lstStyle/>
+          <a:p>
+            <a:pPr indent="0" marL="0">
+              <a:buNone/>
+            </a:pPr>
+            <a:r>
+              <a:rPr lang="en-US" sz="1800" b="1" dirty="0">
+                <a:solidFill>
+                  <a:srgbClr val="264653"/>
+                </a:solidFill>
+                <a:latin typeface="Meiryo" pitchFamily="34" charset="0"/>
+                <a:ea typeface="Meiryo" pitchFamily="34" charset="-122"/>
+                <a:cs typeface="Meiryo" pitchFamily="34" charset="-120"/>
+              </a:rPr>
+              <a:t>ASPATHの由来 ／ ASPATHの特徴</a:t>
+            </a:r>
+            <a:endParaRPr lang="en-US" sz="1800" dirty="0"/>
+          </a:p>
+        </p:txBody>
+      </p:sp>
+      <p:sp>
+        <p:nvSpPr>
+          <p:cNvPr id="6" name="Text 4"/>
+          <p:cNvSpPr/>
+          <p:nvPr/>
+        </p:nvSpPr>
+        <p:spPr>
+          <a:xfrm>
+            <a:off x="640080" y="2103120"/>
+            <a:ext cx="5212080" cy="685800"/>
+          </a:xfrm>
+          <a:prstGeom prst="rect">
+            <a:avLst/>
+          </a:prstGeom>
+          <a:noFill/>
+          <a:ln/>
+        </p:spPr>
+        <p:txBody>
+          <a:bodyPr wrap="square" lIns="0" tIns="0" rIns="0" bIns="0" rtlCol="0" anchor="ctr"/>
+          <a:lstStyle/>
+          <a:p>
+            <a:pPr indent="0" marL="0">
+              <a:lnSpc>
+                <a:spcPts val="2200"/>
+              </a:lnSpc>
+              <a:buNone/>
+            </a:pPr>
+            <a:r>
+              <a:rPr lang="en-US" sz="1400" dirty="0">
+                <a:solidFill>
+                  <a:srgbClr val="1E2D34"/>
+                </a:solidFill>
+                <a:latin typeface="Meiryo" pitchFamily="34" charset="0"/>
+                <a:ea typeface="Meiryo" pitchFamily="34" charset="-122"/>
+                <a:cs typeface="Meiryo" pitchFamily="34" charset="-120"/>
+              </a:rPr>
+              <a:t>見出しと文章が緑。A S P A T H の一覧は</a:t>
+            </a:r>
+            <a:endParaRPr lang="en-US" sz="1400" dirty="0"/>
+          </a:p>
+          <a:p>
+            <a:pPr indent="0" marL="0">
+              <a:lnSpc>
+                <a:spcPts val="2200"/>
+              </a:lnSpc>
+              <a:buNone/>
+            </a:pPr>
+            <a:r>
+              <a:rPr lang="en-US" sz="1400" dirty="0">
+                <a:solidFill>
+                  <a:srgbClr val="1E2D34"/>
+                </a:solidFill>
+                <a:latin typeface="Meiryo" pitchFamily="34" charset="0"/>
+                <a:ea typeface="Meiryo" pitchFamily="34" charset="-122"/>
+                <a:cs typeface="Meiryo" pitchFamily="34" charset="-120"/>
+              </a:rPr>
+              <a:t>ひとつのオレンジの箱になっています。</a:t>
+            </a:r>
+            <a:endParaRPr lang="en-US" sz="1400" dirty="0"/>
+          </a:p>
+        </p:txBody>
+      </p:sp>
       <p:pic>
         <p:nvPicPr>
-          <p:cNvPr id="5" name="Image 0" descr="/sessions/compassionate-sweet-heisenberg/mnt/dev-aspath-life-main/_wp移行素材/★引継ぎ資料/画像/M3_02と03.jpg">    </p:cNvPr>
+          <p:cNvPr id="7" name="Image 0" descr="/sessions/compassionate-sweet-heisenberg/mnt/dev-aspath-life-main/_wp移行素材/★引継ぎ資料/画像/E1_編集画面_由来と特徴.jpg">    </p:cNvPr>
           <p:cNvPicPr>
             <a:picLocks noChangeAspect="1"/>
           </p:cNvPicPr>
@@ -2560,17 +2750,118 @@
         </p:blipFill>
         <p:spPr>
           <a:xfrm>
-            <a:off x="822960" y="1645920"/>
-            <a:ext cx="2834640" cy="4629912"/>
+            <a:off x="640080" y="2880360"/>
+            <a:ext cx="4754880" cy="3045260"/>
           </a:xfrm>
           <a:prstGeom prst="rect">
             <a:avLst/>
           </a:prstGeom>
         </p:spPr>
       </p:pic>
+      <p:sp>
+        <p:nvSpPr>
+          <p:cNvPr id="8" name="Text 5"/>
+          <p:cNvSpPr/>
+          <p:nvPr/>
+        </p:nvSpPr>
+        <p:spPr>
+          <a:xfrm>
+            <a:off x="6492240" y="1691640"/>
+            <a:ext cx="5212080" cy="320040"/>
+          </a:xfrm>
+          <a:prstGeom prst="rect">
+            <a:avLst/>
+          </a:prstGeom>
+          <a:noFill/>
+          <a:ln/>
+        </p:spPr>
+        <p:txBody>
+          <a:bodyPr wrap="square" lIns="0" tIns="0" rIns="0" bIns="0" rtlCol="0" anchor="ctr"/>
+          <a:lstStyle/>
+          <a:p>
+            <a:pPr indent="0" marL="0">
+              <a:buNone/>
+            </a:pPr>
+            <a:r>
+              <a:rPr lang="en-US" sz="1800" b="1" dirty="0">
+                <a:solidFill>
+                  <a:srgbClr val="264653"/>
+                </a:solidFill>
+                <a:latin typeface="Meiryo" pitchFamily="34" charset="0"/>
+                <a:ea typeface="Meiryo" pitchFamily="34" charset="-122"/>
+                <a:cs typeface="Meiryo" pitchFamily="34" charset="-120"/>
+              </a:rPr>
+              <a:t>01「3つの芯」</a:t>
+            </a:r>
+            <a:endParaRPr lang="en-US" sz="1800" dirty="0"/>
+          </a:p>
+        </p:txBody>
+      </p:sp>
+      <p:sp>
+        <p:nvSpPr>
+          <p:cNvPr id="9" name="Text 6"/>
+          <p:cNvSpPr/>
+          <p:nvPr/>
+        </p:nvSpPr>
+        <p:spPr>
+          <a:xfrm>
+            <a:off x="6492240" y="2103120"/>
+            <a:ext cx="5212080" cy="685800"/>
+          </a:xfrm>
+          <a:prstGeom prst="rect">
+            <a:avLst/>
+          </a:prstGeom>
+          <a:noFill/>
+          <a:ln/>
+        </p:spPr>
+        <p:txBody>
+          <a:bodyPr wrap="square" lIns="0" tIns="0" rIns="0" bIns="0" rtlCol="0" anchor="ctr"/>
+          <a:lstStyle/>
+          <a:p>
+            <a:pPr indent="0" marL="0">
+              <a:lnSpc>
+                <a:spcPts val="2200"/>
+              </a:lnSpc>
+              <a:buNone/>
+            </a:pPr>
+            <a:r>
+              <a:rPr lang="en-US" sz="1400" dirty="0">
+                <a:solidFill>
+                  <a:srgbClr val="1E2D34"/>
+                </a:solidFill>
+                <a:latin typeface="Meiryo" pitchFamily="34" charset="0"/>
+                <a:ea typeface="Meiryo" pitchFamily="34" charset="-122"/>
+                <a:cs typeface="Meiryo" pitchFamily="34" charset="-120"/>
+              </a:rPr>
+              <a:t>「01」も「① 身体の芯…」も緑。真ん中の</a:t>
+            </a:r>
+            <a:endParaRPr lang="en-US" sz="1400" dirty="0"/>
+          </a:p>
+          <a:p>
+            <a:pPr indent="0" marL="0">
+              <a:lnSpc>
+                <a:spcPts val="2200"/>
+              </a:lnSpc>
+              <a:buNone/>
+            </a:pPr>
+            <a:r>
+              <a:rPr lang="en-US" sz="1400" dirty="0">
+                <a:solidFill>
+                  <a:srgbClr val="1E2D34"/>
+                </a:solidFill>
+                <a:latin typeface="Meiryo" pitchFamily="34" charset="0"/>
+                <a:ea typeface="Meiryo" pitchFamily="34" charset="-122"/>
+                <a:cs typeface="Meiryo" pitchFamily="34" charset="-120"/>
+              </a:rPr>
+              <a:t>大きな図だけがオレンジ。17か所を直せます。</a:t>
+            </a:r>
+            <a:endParaRPr lang="en-US" sz="1400" dirty="0"/>
+          </a:p>
+        </p:txBody>
+      </p:sp>
       <p:pic>
         <p:nvPicPr>
-          <p:cNvPr id="6" name="Image 1" descr="/sessions/compassionate-sweet-heisenberg/mnt/dev-aspath-life-main/_wp移行素材/★引継ぎ資料/画像/M4_04と締めくくり.jpg">    </p:cNvPr>
+          <p:cNvPr id="10" name="Image 1" descr="/sessions/compassionate-sweet-heisenberg/mnt/dev-aspath-life-main/_wp移行素材/★引継ぎ資料/画像/E2_編集画面_01_3つの芯.jpg">    </p:cNvPr>
           <p:cNvPicPr>
             <a:picLocks noChangeAspect="1"/>
           </p:cNvPicPr>
@@ -2584,8 +2875,8 @@
         </p:blipFill>
         <p:spPr>
           <a:xfrm>
-            <a:off x="3931920" y="1645920"/>
-            <a:ext cx="2834640" cy="4629912"/>
+            <a:off x="6492240" y="2880360"/>
+            <a:ext cx="4754880" cy="3045260"/>
           </a:xfrm>
           <a:prstGeom prst="rect">
             <a:avLst/>
@@ -2594,14 +2885,14 @@
       </p:pic>
       <p:sp>
         <p:nvSpPr>
-          <p:cNvPr id="7" name="Text 3"/>
-          <p:cNvSpPr/>
-          <p:nvPr/>
-        </p:nvSpPr>
-        <p:spPr>
-          <a:xfrm>
-            <a:off x="822960" y="6263640"/>
-            <a:ext cx="2834640" cy="274320"/>
+          <p:cNvPr id="11" name="Text 7"/>
+          <p:cNvSpPr/>
+          <p:nvPr/>
+        </p:nvSpPr>
+        <p:spPr>
+          <a:xfrm>
+            <a:off x="640080" y="6035040"/>
+            <a:ext cx="4754880" cy="274320"/>
           </a:xfrm>
           <a:prstGeom prst="rect">
             <a:avLst/>
@@ -2625,7 +2916,7 @@
                 <a:ea typeface="Meiryo" pitchFamily="34" charset="-122"/>
                 <a:cs typeface="Meiryo" pitchFamily="34" charset="-120"/>
               </a:rPr>
-              <a:t>02 人生を豊かに ／ 03 第3の居場所</a:t>
+              <a:t>編集画面での見え方</a:t>
             </a:r>
             <a:endParaRPr lang="en-US" sz="1200" dirty="0"/>
           </a:p>
@@ -2633,14 +2924,14 @@
       </p:sp>
       <p:sp>
         <p:nvSpPr>
-          <p:cNvPr id="8" name="Text 4"/>
-          <p:cNvSpPr/>
-          <p:nvPr/>
-        </p:nvSpPr>
-        <p:spPr>
-          <a:xfrm>
-            <a:off x="3931920" y="6263640"/>
-            <a:ext cx="2834640" cy="274320"/>
+          <p:cNvPr id="12" name="Text 8"/>
+          <p:cNvSpPr/>
+          <p:nvPr/>
+        </p:nvSpPr>
+        <p:spPr>
+          <a:xfrm>
+            <a:off x="6492240" y="6035040"/>
+            <a:ext cx="4754880" cy="274320"/>
           </a:xfrm>
           <a:prstGeom prst="rect">
             <a:avLst/>
@@ -2664,320 +2955,9 @@
                 <a:ea typeface="Meiryo" pitchFamily="34" charset="-122"/>
                 <a:cs typeface="Meiryo" pitchFamily="34" charset="-120"/>
               </a:rPr>
-              <a:t>04 エビデンス ／ 締めくくり</a:t>
+              <a:t>編集画面での見え方</a:t>
             </a:r>
             <a:endParaRPr lang="en-US" sz="1200" dirty="0"/>
-          </a:p>
-        </p:txBody>
-      </p:sp>
-      <p:sp>
-        <p:nvSpPr>
-          <p:cNvPr id="9" name="Shape 5"/>
-          <p:cNvSpPr/>
-          <p:nvPr/>
-        </p:nvSpPr>
-        <p:spPr>
-          <a:xfrm>
-            <a:off x="7223760" y="1691640"/>
-            <a:ext cx="4480560" cy="2103120"/>
-          </a:xfrm>
-          <a:prstGeom prst="roundRect">
-            <a:avLst>
-              <a:gd name="adj" fmla="val 5217"/>
-            </a:avLst>
-          </a:prstGeom>
-          <a:solidFill>
-            <a:srgbClr val="F2F5F6"/>
-          </a:solidFill>
-          <a:ln/>
-        </p:spPr>
-      </p:sp>
-      <p:sp>
-        <p:nvSpPr>
-          <p:cNvPr id="10" name="Text 6"/>
-          <p:cNvSpPr/>
-          <p:nvPr/>
-        </p:nvSpPr>
-        <p:spPr>
-          <a:xfrm>
-            <a:off x="7498080" y="1874520"/>
-            <a:ext cx="3931920" cy="320040"/>
-          </a:xfrm>
-          <a:prstGeom prst="rect">
-            <a:avLst/>
-          </a:prstGeom>
-          <a:noFill/>
-          <a:ln/>
-        </p:spPr>
-        <p:txBody>
-          <a:bodyPr wrap="square" lIns="0" tIns="0" rIns="0" bIns="0" rtlCol="0" anchor="ctr"/>
-          <a:lstStyle/>
-          <a:p>
-            <a:pPr indent="0" marL="0">
-              <a:buNone/>
-            </a:pPr>
-            <a:r>
-              <a:rPr lang="en-US" sz="1900" b="1" dirty="0">
-                <a:solidFill>
-                  <a:srgbClr val="264653"/>
-                </a:solidFill>
-                <a:latin typeface="Meiryo" pitchFamily="34" charset="0"/>
-                <a:ea typeface="Meiryo" pitchFamily="34" charset="-122"/>
-                <a:cs typeface="Meiryo" pitchFamily="34" charset="-120"/>
-              </a:rPr>
-              <a:t>02・03・04 は同じ形</a:t>
-            </a:r>
-            <a:endParaRPr lang="en-US" sz="1900" dirty="0"/>
-          </a:p>
-        </p:txBody>
-      </p:sp>
-      <p:sp>
-        <p:nvSpPr>
-          <p:cNvPr id="11" name="Text 7"/>
-          <p:cNvSpPr/>
-          <p:nvPr/>
-        </p:nvSpPr>
-        <p:spPr>
-          <a:xfrm>
-            <a:off x="7498080" y="2286000"/>
-            <a:ext cx="3931920" cy="1371600"/>
-          </a:xfrm>
-          <a:prstGeom prst="rect">
-            <a:avLst/>
-          </a:prstGeom>
-          <a:noFill/>
-          <a:ln/>
-        </p:spPr>
-        <p:txBody>
-          <a:bodyPr wrap="square" lIns="0" tIns="0" rIns="0" bIns="0" rtlCol="0" anchor="ctr"/>
-          <a:lstStyle/>
-          <a:p>
-            <a:pPr indent="0" marL="0">
-              <a:lnSpc>
-                <a:spcPts val="2400"/>
-              </a:lnSpc>
-              <a:buNone/>
-            </a:pPr>
-            <a:r>
-              <a:rPr lang="en-US" sz="1500" dirty="0">
-                <a:solidFill>
-                  <a:srgbClr val="1E2D34"/>
-                </a:solidFill>
-                <a:latin typeface="Meiryo" pitchFamily="34" charset="0"/>
-                <a:ea typeface="Meiryo" pitchFamily="34" charset="-122"/>
-                <a:cs typeface="Meiryo" pitchFamily="34" charset="-120"/>
-              </a:rPr>
-              <a:t>番号（02）</a:t>
-            </a:r>
-            <a:endParaRPr lang="en-US" sz="1500" dirty="0"/>
-          </a:p>
-          <a:p>
-            <a:pPr indent="0" marL="0">
-              <a:lnSpc>
-                <a:spcPts val="2400"/>
-              </a:lnSpc>
-              <a:buNone/>
-            </a:pPr>
-            <a:r>
-              <a:rPr lang="en-US" sz="1500" dirty="0">
-                <a:solidFill>
-                  <a:srgbClr val="1E2D34"/>
-                </a:solidFill>
-                <a:latin typeface="Meiryo" pitchFamily="34" charset="0"/>
-                <a:ea typeface="Meiryo" pitchFamily="34" charset="-122"/>
-                <a:cs typeface="Meiryo" pitchFamily="34" charset="-120"/>
-              </a:rPr>
-              <a:t>→ 見出し</a:t>
-            </a:r>
-            <a:endParaRPr lang="en-US" sz="1500" dirty="0"/>
-          </a:p>
-          <a:p>
-            <a:pPr indent="0" marL="0">
-              <a:lnSpc>
-                <a:spcPts val="2400"/>
-              </a:lnSpc>
-              <a:buNone/>
-            </a:pPr>
-            <a:r>
-              <a:rPr lang="en-US" sz="1500" dirty="0">
-                <a:solidFill>
-                  <a:srgbClr val="1E2D34"/>
-                </a:solidFill>
-                <a:latin typeface="Meiryo" pitchFamily="34" charset="0"/>
-                <a:ea typeface="Meiryo" pitchFamily="34" charset="-122"/>
-                <a:cs typeface="Meiryo" pitchFamily="34" charset="-120"/>
-              </a:rPr>
-              <a:t>→ 大きな写真（触らない）</a:t>
-            </a:r>
-            <a:endParaRPr lang="en-US" sz="1500" dirty="0"/>
-          </a:p>
-          <a:p>
-            <a:pPr indent="0" marL="0">
-              <a:lnSpc>
-                <a:spcPts val="2400"/>
-              </a:lnSpc>
-              <a:buNone/>
-            </a:pPr>
-            <a:r>
-              <a:rPr lang="en-US" sz="1500" dirty="0">
-                <a:solidFill>
-                  <a:srgbClr val="1E2D34"/>
-                </a:solidFill>
-                <a:latin typeface="Meiryo" pitchFamily="34" charset="0"/>
-                <a:ea typeface="Meiryo" pitchFamily="34" charset="-122"/>
-                <a:cs typeface="Meiryo" pitchFamily="34" charset="-120"/>
-              </a:rPr>
-              <a:t>→ 文章がいくつか</a:t>
-            </a:r>
-            <a:endParaRPr lang="en-US" sz="1500" dirty="0"/>
-          </a:p>
-        </p:txBody>
-      </p:sp>
-      <p:sp>
-        <p:nvSpPr>
-          <p:cNvPr id="12" name="Shape 8"/>
-          <p:cNvSpPr/>
-          <p:nvPr/>
-        </p:nvSpPr>
-        <p:spPr>
-          <a:xfrm>
-            <a:off x="7223760" y="3977640"/>
-            <a:ext cx="4480560" cy="1188720"/>
-          </a:xfrm>
-          <a:prstGeom prst="roundRect">
-            <a:avLst>
-              <a:gd name="adj" fmla="val 7692"/>
-            </a:avLst>
-          </a:prstGeom>
-          <a:solidFill>
-            <a:srgbClr val="EDF6EE"/>
-          </a:solidFill>
-          <a:ln/>
-        </p:spPr>
-      </p:sp>
-      <p:sp>
-        <p:nvSpPr>
-          <p:cNvPr id="13" name="Text 9"/>
-          <p:cNvSpPr/>
-          <p:nvPr/>
-        </p:nvSpPr>
-        <p:spPr>
-          <a:xfrm>
-            <a:off x="7452360" y="4142232"/>
-            <a:ext cx="4023360" cy="859536"/>
-          </a:xfrm>
-          <a:prstGeom prst="rect">
-            <a:avLst/>
-          </a:prstGeom>
-          <a:noFill/>
-          <a:ln/>
-        </p:spPr>
-        <p:txBody>
-          <a:bodyPr wrap="square" lIns="0" tIns="0" rIns="0" bIns="0" rtlCol="0" anchor="ctr"/>
-          <a:lstStyle/>
-          <a:p>
-            <a:pPr indent="0" marL="0">
-              <a:lnSpc>
-                <a:spcPts val="2100"/>
-              </a:lnSpc>
-              <a:buNone/>
-            </a:pPr>
-            <a:r>
-              <a:rPr lang="en-US" sz="1500" b="1" dirty="0">
-                <a:solidFill>
-                  <a:srgbClr val="2E7D32"/>
-                </a:solidFill>
-                <a:latin typeface="Meiryo" pitchFamily="34" charset="0"/>
-                <a:ea typeface="Meiryo" pitchFamily="34" charset="-122"/>
-                <a:cs typeface="Meiryo" pitchFamily="34" charset="-120"/>
-              </a:rPr>
-              <a:t>1か所の直し方が分かれば</a:t>
-            </a:r>
-            <a:endParaRPr lang="en-US" sz="1500" dirty="0"/>
-          </a:p>
-          <a:p>
-            <a:pPr indent="0" marL="0">
-              <a:lnSpc>
-                <a:spcPts val="2100"/>
-              </a:lnSpc>
-              <a:buNone/>
-            </a:pPr>
-            <a:r>
-              <a:rPr lang="en-US" sz="1500" b="1" dirty="0">
-                <a:solidFill>
-                  <a:srgbClr val="2E7D32"/>
-                </a:solidFill>
-                <a:latin typeface="Meiryo" pitchFamily="34" charset="0"/>
-                <a:ea typeface="Meiryo" pitchFamily="34" charset="-122"/>
-                <a:cs typeface="Meiryo" pitchFamily="34" charset="-120"/>
-              </a:rPr>
-              <a:t>残りも同じ手順です。</a:t>
-            </a:r>
-            <a:endParaRPr lang="en-US" sz="1500" dirty="0"/>
-          </a:p>
-        </p:txBody>
-      </p:sp>
-      <p:sp>
-        <p:nvSpPr>
-          <p:cNvPr id="14" name="Shape 10"/>
-          <p:cNvSpPr/>
-          <p:nvPr/>
-        </p:nvSpPr>
-        <p:spPr>
-          <a:xfrm>
-            <a:off x="7223760" y="5349240"/>
-            <a:ext cx="4480560" cy="777240"/>
-          </a:xfrm>
-          <a:prstGeom prst="roundRect">
-            <a:avLst>
-              <a:gd name="adj" fmla="val 11765"/>
-            </a:avLst>
-          </a:prstGeom>
-          <a:solidFill>
-            <a:srgbClr val="F2F5F6"/>
-          </a:solidFill>
-          <a:ln/>
-        </p:spPr>
-      </p:sp>
-      <p:sp>
-        <p:nvSpPr>
-          <p:cNvPr id="15" name="Text 11"/>
-          <p:cNvSpPr/>
-          <p:nvPr/>
-        </p:nvSpPr>
-        <p:spPr>
-          <a:xfrm>
-            <a:off x="7452360" y="5513832"/>
-            <a:ext cx="4023360" cy="448056"/>
-          </a:xfrm>
-          <a:prstGeom prst="rect">
-            <a:avLst/>
-          </a:prstGeom>
-          <a:noFill/>
-          <a:ln/>
-        </p:spPr>
-        <p:txBody>
-          <a:bodyPr wrap="square" lIns="0" tIns="0" rIns="0" bIns="0" rtlCol="0" anchor="ctr"/>
-          <a:lstStyle/>
-          <a:p>
-            <a:pPr indent="0" marL="0">
-              <a:lnSpc>
-                <a:spcPts val="2100"/>
-              </a:lnSpc>
-              <a:buNone/>
-            </a:pPr>
-            <a:r>
-              <a:rPr lang="en-US" sz="1500" b="1" dirty="0">
-                <a:solidFill>
-                  <a:srgbClr val="264653"/>
-                </a:solidFill>
-                <a:latin typeface="Meiryo" pitchFamily="34" charset="0"/>
-                <a:ea typeface="Meiryo" pitchFamily="34" charset="-122"/>
-                <a:cs typeface="Meiryo" pitchFamily="34" charset="-120"/>
-              </a:rPr>
-              <a:t>締めくくりの4行も直せます。</a:t>
-            </a:r>
-            <a:endParaRPr lang="en-US" sz="1500" dirty="0"/>
           </a:p>
         </p:txBody>
       </p:sp>
@@ -3046,7 +3026,7 @@
                 <a:ea typeface="Meiryo" pitchFamily="34" charset="-122"/>
                 <a:cs typeface="Meiryo" pitchFamily="34" charset="-120"/>
               </a:rPr>
-              <a:t>直せますが、変えないほうがよいもの</a:t>
+              <a:t>どこが直せるか（後半）</a:t>
             </a:r>
             <a:endParaRPr lang="en-US" sz="3400" dirty="0"/>
           </a:p>
@@ -3085,7 +3065,7 @@
                 <a:ea typeface="Meiryo" pitchFamily="34" charset="-122"/>
                 <a:cs typeface="Meiryo" pitchFamily="34" charset="-120"/>
               </a:rPr>
-              <a:t>クリックできてしまうので、ご注意ください</a:t>
+              <a:t>02・03・04 はすべて同じ形です</a:t>
             </a:r>
             <a:endParaRPr lang="en-US" sz="1600" dirty="0"/>
           </a:p>
@@ -3130,497 +3110,83 @@
           </a:p>
         </p:txBody>
       </p:sp>
-      <p:sp>
-        <p:nvSpPr>
-          <p:cNvPr id="5" name="Shape 3"/>
-          <p:cNvSpPr/>
-          <p:nvPr/>
-        </p:nvSpPr>
-        <p:spPr>
-          <a:xfrm>
-            <a:off x="640080" y="1828800"/>
-            <a:ext cx="11064240" cy="1280160"/>
+      <p:pic>
+        <p:nvPicPr>
+          <p:cNvPr id="5" name="Image 0" descr="/sessions/compassionate-sweet-heisenberg/mnt/dev-aspath-life-main/_wp移行素材/★引継ぎ資料/画像/E3_編集画面_04.jpg">    </p:cNvPr>
+          <p:cNvPicPr>
+            <a:picLocks noChangeAspect="1"/>
+          </p:cNvPicPr>
+          <p:nvPr/>
+        </p:nvPicPr>
+        <p:blipFill>
+          <a:blip r:embed="rId1"/>
+          <a:stretch>
+            <a:fillRect/>
+          </a:stretch>
+        </p:blipFill>
+        <p:spPr>
+          <a:xfrm>
+            <a:off x="640080" y="1737360"/>
+            <a:ext cx="6217920" cy="3982263"/>
+          </a:xfrm>
+          <a:prstGeom prst="rect">
+            <a:avLst/>
+          </a:prstGeom>
+        </p:spPr>
+      </p:pic>
+      <p:sp>
+        <p:nvSpPr>
+          <p:cNvPr id="6" name="Text 3"/>
+          <p:cNvSpPr/>
+          <p:nvPr/>
+        </p:nvSpPr>
+        <p:spPr>
+          <a:xfrm>
+            <a:off x="7132320" y="1828800"/>
+            <a:ext cx="4572000" cy="365760"/>
+          </a:xfrm>
+          <a:prstGeom prst="rect">
+            <a:avLst/>
+          </a:prstGeom>
+          <a:noFill/>
+          <a:ln/>
+        </p:spPr>
+        <p:txBody>
+          <a:bodyPr wrap="square" lIns="0" tIns="0" rIns="0" bIns="0" rtlCol="0" anchor="ctr"/>
+          <a:lstStyle/>
+          <a:p>
+            <a:pPr indent="0" marL="0">
+              <a:buNone/>
+            </a:pPr>
+            <a:r>
+              <a:rPr lang="en-US" sz="2000" b="1" dirty="0">
+                <a:solidFill>
+                  <a:srgbClr val="264653"/>
+                </a:solidFill>
+                <a:latin typeface="Meiryo" pitchFamily="34" charset="0"/>
+                <a:ea typeface="Meiryo" pitchFamily="34" charset="-122"/>
+                <a:cs typeface="Meiryo" pitchFamily="34" charset="-120"/>
+              </a:rPr>
+              <a:t>くり返しの形</a:t>
+            </a:r>
+            <a:endParaRPr lang="en-US" sz="2000" dirty="0"/>
+          </a:p>
+        </p:txBody>
+      </p:sp>
+      <p:sp>
+        <p:nvSpPr>
+          <p:cNvPr id="7" name="Shape 4"/>
+          <p:cNvSpPr/>
+          <p:nvPr/>
+        </p:nvSpPr>
+        <p:spPr>
+          <a:xfrm>
+            <a:off x="7132320" y="2331720"/>
+            <a:ext cx="4572000" cy="566928"/>
           </a:xfrm>
           <a:prstGeom prst="roundRect">
             <a:avLst>
-              <a:gd name="adj" fmla="val 8571"/>
-            </a:avLst>
-          </a:prstGeom>
-          <a:solidFill>
-            <a:srgbClr val="F2F5F6"/>
-          </a:solidFill>
-          <a:ln/>
-        </p:spPr>
-      </p:sp>
-      <p:sp>
-        <p:nvSpPr>
-          <p:cNvPr id="6" name="Shape 4"/>
-          <p:cNvSpPr/>
-          <p:nvPr/>
-        </p:nvSpPr>
-        <p:spPr>
-          <a:xfrm>
-            <a:off x="914400" y="2212848"/>
-            <a:ext cx="512064" cy="512064"/>
-          </a:xfrm>
-          <a:prstGeom prst="ellipse">
-            <a:avLst/>
-          </a:prstGeom>
-          <a:solidFill>
-            <a:srgbClr val="DD8236"/>
-          </a:solidFill>
-          <a:ln/>
-        </p:spPr>
-      </p:sp>
-      <p:sp>
-        <p:nvSpPr>
-          <p:cNvPr id="7" name="Text 5"/>
-          <p:cNvSpPr/>
-          <p:nvPr/>
-        </p:nvSpPr>
-        <p:spPr>
-          <a:xfrm>
-            <a:off x="914400" y="2249424"/>
-            <a:ext cx="512064" cy="411480"/>
-          </a:xfrm>
-          <a:prstGeom prst="rect">
-            <a:avLst/>
-          </a:prstGeom>
-          <a:noFill/>
-          <a:ln/>
-        </p:spPr>
-        <p:txBody>
-          <a:bodyPr wrap="square" lIns="0" tIns="0" rIns="0" bIns="0" rtlCol="0" anchor="ctr"/>
-          <a:lstStyle/>
-          <a:p>
-            <a:pPr algn="ctr" indent="0" marL="0">
-              <a:buNone/>
-            </a:pPr>
-            <a:r>
-              <a:rPr lang="en-US" sz="2000" b="1" dirty="0">
-                <a:solidFill>
-                  <a:srgbClr val="FFFFFF"/>
-                </a:solidFill>
-                <a:latin typeface="Meiryo" pitchFamily="34" charset="0"/>
-                <a:ea typeface="Meiryo" pitchFamily="34" charset="-122"/>
-                <a:cs typeface="Meiryo" pitchFamily="34" charset="-120"/>
-              </a:rPr>
-              <a:t>!</a:t>
-            </a:r>
-            <a:endParaRPr lang="en-US" sz="2000" dirty="0"/>
-          </a:p>
-        </p:txBody>
-      </p:sp>
-      <p:sp>
-        <p:nvSpPr>
-          <p:cNvPr id="8" name="Text 6"/>
-          <p:cNvSpPr/>
-          <p:nvPr/>
-        </p:nvSpPr>
-        <p:spPr>
-          <a:xfrm>
-            <a:off x="1691640" y="2011680"/>
-            <a:ext cx="9601200" cy="365760"/>
-          </a:xfrm>
-          <a:prstGeom prst="rect">
-            <a:avLst/>
-          </a:prstGeom>
-          <a:noFill/>
-          <a:ln/>
-        </p:spPr>
-        <p:txBody>
-          <a:bodyPr wrap="square" lIns="0" tIns="0" rIns="0" bIns="0" rtlCol="0" anchor="ctr"/>
-          <a:lstStyle/>
-          <a:p>
-            <a:pPr indent="0" marL="0">
-              <a:buNone/>
-            </a:pPr>
-            <a:r>
-              <a:rPr lang="en-US" sz="1900" b="1" dirty="0">
-                <a:solidFill>
-                  <a:srgbClr val="264653"/>
-                </a:solidFill>
-                <a:latin typeface="Meiryo" pitchFamily="34" charset="0"/>
-                <a:ea typeface="Meiryo" pitchFamily="34" charset="-122"/>
-                <a:cs typeface="Meiryo" pitchFamily="34" charset="-120"/>
-              </a:rPr>
-              <a:t>「01」「02」などの番号</a:t>
-            </a:r>
-            <a:endParaRPr lang="en-US" sz="1900" dirty="0"/>
-          </a:p>
-        </p:txBody>
-      </p:sp>
-      <p:sp>
-        <p:nvSpPr>
-          <p:cNvPr id="9" name="Text 7"/>
-          <p:cNvSpPr/>
-          <p:nvPr/>
-        </p:nvSpPr>
-        <p:spPr>
-          <a:xfrm>
-            <a:off x="1691640" y="2450592"/>
-            <a:ext cx="9601200" cy="457200"/>
-          </a:xfrm>
-          <a:prstGeom prst="rect">
-            <a:avLst/>
-          </a:prstGeom>
-          <a:noFill/>
-          <a:ln/>
-        </p:spPr>
-        <p:txBody>
-          <a:bodyPr wrap="square" lIns="0" tIns="0" rIns="0" bIns="0" rtlCol="0" anchor="ctr"/>
-          <a:lstStyle/>
-          <a:p>
-            <a:pPr indent="0" marL="0">
-              <a:buNone/>
-            </a:pPr>
-            <a:r>
-              <a:rPr lang="en-US" sz="1500" dirty="0">
-                <a:solidFill>
-                  <a:srgbClr val="5E7681"/>
-                </a:solidFill>
-                <a:latin typeface="Meiryo" pitchFamily="34" charset="0"/>
-                <a:ea typeface="Meiryo" pitchFamily="34" charset="-122"/>
-                <a:cs typeface="Meiryo" pitchFamily="34" charset="-120"/>
-              </a:rPr>
-              <a:t>章の順番を表しています。文章を足しても番号は自動で増えません</a:t>
-            </a:r>
-            <a:endParaRPr lang="en-US" sz="1500" dirty="0"/>
-          </a:p>
-        </p:txBody>
-      </p:sp>
-      <p:sp>
-        <p:nvSpPr>
-          <p:cNvPr id="10" name="Shape 8"/>
-          <p:cNvSpPr/>
-          <p:nvPr/>
-        </p:nvSpPr>
-        <p:spPr>
-          <a:xfrm>
-            <a:off x="640080" y="3246120"/>
-            <a:ext cx="11064240" cy="1280160"/>
-          </a:xfrm>
-          <a:prstGeom prst="roundRect">
-            <a:avLst>
-              <a:gd name="adj" fmla="val 8571"/>
-            </a:avLst>
-          </a:prstGeom>
-          <a:solidFill>
-            <a:srgbClr val="F2F5F6"/>
-          </a:solidFill>
-          <a:ln/>
-        </p:spPr>
-      </p:sp>
-      <p:sp>
-        <p:nvSpPr>
-          <p:cNvPr id="11" name="Shape 9"/>
-          <p:cNvSpPr/>
-          <p:nvPr/>
-        </p:nvSpPr>
-        <p:spPr>
-          <a:xfrm>
-            <a:off x="914400" y="3630168"/>
-            <a:ext cx="512064" cy="512064"/>
-          </a:xfrm>
-          <a:prstGeom prst="ellipse">
-            <a:avLst/>
-          </a:prstGeom>
-          <a:solidFill>
-            <a:srgbClr val="DD8236"/>
-          </a:solidFill>
-          <a:ln/>
-        </p:spPr>
-      </p:sp>
-      <p:sp>
-        <p:nvSpPr>
-          <p:cNvPr id="12" name="Text 10"/>
-          <p:cNvSpPr/>
-          <p:nvPr/>
-        </p:nvSpPr>
-        <p:spPr>
-          <a:xfrm>
-            <a:off x="914400" y="3666744"/>
-            <a:ext cx="512064" cy="411480"/>
-          </a:xfrm>
-          <a:prstGeom prst="rect">
-            <a:avLst/>
-          </a:prstGeom>
-          <a:noFill/>
-          <a:ln/>
-        </p:spPr>
-        <p:txBody>
-          <a:bodyPr wrap="square" lIns="0" tIns="0" rIns="0" bIns="0" rtlCol="0" anchor="ctr"/>
-          <a:lstStyle/>
-          <a:p>
-            <a:pPr algn="ctr" indent="0" marL="0">
-              <a:buNone/>
-            </a:pPr>
-            <a:r>
-              <a:rPr lang="en-US" sz="2000" b="1" dirty="0">
-                <a:solidFill>
-                  <a:srgbClr val="FFFFFF"/>
-                </a:solidFill>
-                <a:latin typeface="Meiryo" pitchFamily="34" charset="0"/>
-                <a:ea typeface="Meiryo" pitchFamily="34" charset="-122"/>
-                <a:cs typeface="Meiryo" pitchFamily="34" charset="-120"/>
-              </a:rPr>
-              <a:t>!</a:t>
-            </a:r>
-            <a:endParaRPr lang="en-US" sz="2000" dirty="0"/>
-          </a:p>
-        </p:txBody>
-      </p:sp>
-      <p:sp>
-        <p:nvSpPr>
-          <p:cNvPr id="13" name="Text 11"/>
-          <p:cNvSpPr/>
-          <p:nvPr/>
-        </p:nvSpPr>
-        <p:spPr>
-          <a:xfrm>
-            <a:off x="1691640" y="3429000"/>
-            <a:ext cx="9601200" cy="365760"/>
-          </a:xfrm>
-          <a:prstGeom prst="rect">
-            <a:avLst/>
-          </a:prstGeom>
-          <a:noFill/>
-          <a:ln/>
-        </p:spPr>
-        <p:txBody>
-          <a:bodyPr wrap="square" lIns="0" tIns="0" rIns="0" bIns="0" rtlCol="0" anchor="ctr"/>
-          <a:lstStyle/>
-          <a:p>
-            <a:pPr indent="0" marL="0">
-              <a:buNone/>
-            </a:pPr>
-            <a:r>
-              <a:rPr lang="en-US" sz="1900" b="1" dirty="0">
-                <a:solidFill>
-                  <a:srgbClr val="264653"/>
-                </a:solidFill>
-                <a:latin typeface="Meiryo" pitchFamily="34" charset="0"/>
-                <a:ea typeface="Meiryo" pitchFamily="34" charset="-122"/>
-                <a:cs typeface="Meiryo" pitchFamily="34" charset="-120"/>
-              </a:rPr>
-              <a:t>「① 身体の芯（体幹）を…」のラベル</a:t>
-            </a:r>
-            <a:endParaRPr lang="en-US" sz="1900" dirty="0"/>
-          </a:p>
-        </p:txBody>
-      </p:sp>
-      <p:sp>
-        <p:nvSpPr>
-          <p:cNvPr id="14" name="Text 12"/>
-          <p:cNvSpPr/>
-          <p:nvPr/>
-        </p:nvSpPr>
-        <p:spPr>
-          <a:xfrm>
-            <a:off x="1691640" y="3867912"/>
-            <a:ext cx="9601200" cy="457200"/>
-          </a:xfrm>
-          <a:prstGeom prst="rect">
-            <a:avLst/>
-          </a:prstGeom>
-          <a:noFill/>
-          <a:ln/>
-        </p:spPr>
-        <p:txBody>
-          <a:bodyPr wrap="square" lIns="0" tIns="0" rIns="0" bIns="0" rtlCol="0" anchor="ctr"/>
-          <a:lstStyle/>
-          <a:p>
-            <a:pPr indent="0" marL="0">
-              <a:buNone/>
-            </a:pPr>
-            <a:r>
-              <a:rPr lang="en-US" sz="1500" dirty="0">
-                <a:solidFill>
-                  <a:srgbClr val="5E7681"/>
-                </a:solidFill>
-                <a:latin typeface="Meiryo" pitchFamily="34" charset="0"/>
-                <a:ea typeface="Meiryo" pitchFamily="34" charset="-122"/>
-                <a:cs typeface="Meiryo" pitchFamily="34" charset="-120"/>
-              </a:rPr>
-              <a:t>①②③ の並びが崩れると読みにくくなります</a:t>
-            </a:r>
-            <a:endParaRPr lang="en-US" sz="1500" dirty="0"/>
-          </a:p>
-        </p:txBody>
-      </p:sp>
-      <p:sp>
-        <p:nvSpPr>
-          <p:cNvPr id="15" name="Shape 13"/>
-          <p:cNvSpPr/>
-          <p:nvPr/>
-        </p:nvSpPr>
-        <p:spPr>
-          <a:xfrm>
-            <a:off x="640080" y="4663440"/>
-            <a:ext cx="11064240" cy="1280160"/>
-          </a:xfrm>
-          <a:prstGeom prst="roundRect">
-            <a:avLst>
-              <a:gd name="adj" fmla="val 8571"/>
-            </a:avLst>
-          </a:prstGeom>
-          <a:solidFill>
-            <a:srgbClr val="F2F5F6"/>
-          </a:solidFill>
-          <a:ln/>
-        </p:spPr>
-      </p:sp>
-      <p:sp>
-        <p:nvSpPr>
-          <p:cNvPr id="16" name="Shape 14"/>
-          <p:cNvSpPr/>
-          <p:nvPr/>
-        </p:nvSpPr>
-        <p:spPr>
-          <a:xfrm>
-            <a:off x="914400" y="5047488"/>
-            <a:ext cx="512064" cy="512064"/>
-          </a:xfrm>
-          <a:prstGeom prst="ellipse">
-            <a:avLst/>
-          </a:prstGeom>
-          <a:solidFill>
-            <a:srgbClr val="DD8236"/>
-          </a:solidFill>
-          <a:ln/>
-        </p:spPr>
-      </p:sp>
-      <p:sp>
-        <p:nvSpPr>
-          <p:cNvPr id="17" name="Text 15"/>
-          <p:cNvSpPr/>
-          <p:nvPr/>
-        </p:nvSpPr>
-        <p:spPr>
-          <a:xfrm>
-            <a:off x="914400" y="5084064"/>
-            <a:ext cx="512064" cy="411480"/>
-          </a:xfrm>
-          <a:prstGeom prst="rect">
-            <a:avLst/>
-          </a:prstGeom>
-          <a:noFill/>
-          <a:ln/>
-        </p:spPr>
-        <p:txBody>
-          <a:bodyPr wrap="square" lIns="0" tIns="0" rIns="0" bIns="0" rtlCol="0" anchor="ctr"/>
-          <a:lstStyle/>
-          <a:p>
-            <a:pPr algn="ctr" indent="0" marL="0">
-              <a:buNone/>
-            </a:pPr>
-            <a:r>
-              <a:rPr lang="en-US" sz="2000" b="1" dirty="0">
-                <a:solidFill>
-                  <a:srgbClr val="FFFFFF"/>
-                </a:solidFill>
-                <a:latin typeface="Meiryo" pitchFamily="34" charset="0"/>
-                <a:ea typeface="Meiryo" pitchFamily="34" charset="-122"/>
-                <a:cs typeface="Meiryo" pitchFamily="34" charset="-120"/>
-              </a:rPr>
-              <a:t>!</a:t>
-            </a:r>
-            <a:endParaRPr lang="en-US" sz="2000" dirty="0"/>
-          </a:p>
-        </p:txBody>
-      </p:sp>
-      <p:sp>
-        <p:nvSpPr>
-          <p:cNvPr id="18" name="Text 16"/>
-          <p:cNvSpPr/>
-          <p:nvPr/>
-        </p:nvSpPr>
-        <p:spPr>
-          <a:xfrm>
-            <a:off x="1691640" y="4846320"/>
-            <a:ext cx="9601200" cy="365760"/>
-          </a:xfrm>
-          <a:prstGeom prst="rect">
-            <a:avLst/>
-          </a:prstGeom>
-          <a:noFill/>
-          <a:ln/>
-        </p:spPr>
-        <p:txBody>
-          <a:bodyPr wrap="square" lIns="0" tIns="0" rIns="0" bIns="0" rtlCol="0" anchor="ctr"/>
-          <a:lstStyle/>
-          <a:p>
-            <a:pPr indent="0" marL="0">
-              <a:buNone/>
-            </a:pPr>
-            <a:r>
-              <a:rPr lang="en-US" sz="1900" b="1" dirty="0">
-                <a:solidFill>
-                  <a:srgbClr val="264653"/>
-                </a:solidFill>
-                <a:latin typeface="Meiryo" pitchFamily="34" charset="0"/>
-                <a:ea typeface="Meiryo" pitchFamily="34" charset="-122"/>
-                <a:cs typeface="Meiryo" pitchFamily="34" charset="-120"/>
-              </a:rPr>
-              <a:t>見出しの文字（青い大きな字）</a:t>
-            </a:r>
-            <a:endParaRPr lang="en-US" sz="1900" dirty="0"/>
-          </a:p>
-        </p:txBody>
-      </p:sp>
-      <p:sp>
-        <p:nvSpPr>
-          <p:cNvPr id="19" name="Text 17"/>
-          <p:cNvSpPr/>
-          <p:nvPr/>
-        </p:nvSpPr>
-        <p:spPr>
-          <a:xfrm>
-            <a:off x="1691640" y="5285232"/>
-            <a:ext cx="9601200" cy="457200"/>
-          </a:xfrm>
-          <a:prstGeom prst="rect">
-            <a:avLst/>
-          </a:prstGeom>
-          <a:noFill/>
-          <a:ln/>
-        </p:spPr>
-        <p:txBody>
-          <a:bodyPr wrap="square" lIns="0" tIns="0" rIns="0" bIns="0" rtlCol="0" anchor="ctr"/>
-          <a:lstStyle/>
-          <a:p>
-            <a:pPr indent="0" marL="0">
-              <a:buNone/>
-            </a:pPr>
-            <a:r>
-              <a:rPr lang="en-US" sz="1500" dirty="0">
-                <a:solidFill>
-                  <a:srgbClr val="5E7681"/>
-                </a:solidFill>
-                <a:latin typeface="Meiryo" pitchFamily="34" charset="0"/>
-                <a:ea typeface="Meiryo" pitchFamily="34" charset="-122"/>
-                <a:cs typeface="Meiryo" pitchFamily="34" charset="-120"/>
-              </a:rPr>
-              <a:t>変えるとページ内リンクがずれることがあります。変えたいときはご連絡ください</a:t>
-            </a:r>
-            <a:endParaRPr lang="en-US" sz="1500" dirty="0"/>
-          </a:p>
-        </p:txBody>
-      </p:sp>
-      <p:sp>
-        <p:nvSpPr>
-          <p:cNvPr id="20" name="Shape 18"/>
-          <p:cNvSpPr/>
-          <p:nvPr/>
-        </p:nvSpPr>
-        <p:spPr>
-          <a:xfrm>
-            <a:off x="640080" y="5623560"/>
-            <a:ext cx="11064240" cy="731520"/>
-          </a:xfrm>
-          <a:prstGeom prst="roundRect">
-            <a:avLst>
-              <a:gd name="adj" fmla="val 12500"/>
+              <a:gd name="adj" fmla="val 12903"/>
             </a:avLst>
           </a:prstGeom>
           <a:solidFill>
@@ -3631,14 +3197,414 @@
       </p:sp>
       <p:sp>
         <p:nvSpPr>
-          <p:cNvPr id="21" name="Text 19"/>
-          <p:cNvSpPr/>
-          <p:nvPr/>
-        </p:nvSpPr>
-        <p:spPr>
-          <a:xfrm>
-            <a:off x="868680" y="5788152"/>
-            <a:ext cx="10607040" cy="402336"/>
+          <p:cNvPr id="8" name="Text 5"/>
+          <p:cNvSpPr/>
+          <p:nvPr/>
+        </p:nvSpPr>
+        <p:spPr>
+          <a:xfrm>
+            <a:off x="7360920" y="2468880"/>
+            <a:ext cx="3108960" cy="320040"/>
+          </a:xfrm>
+          <a:prstGeom prst="rect">
+            <a:avLst/>
+          </a:prstGeom>
+          <a:noFill/>
+          <a:ln/>
+        </p:spPr>
+        <p:txBody>
+          <a:bodyPr wrap="square" lIns="0" tIns="0" rIns="0" bIns="0" rtlCol="0" anchor="ctr"/>
+          <a:lstStyle/>
+          <a:p>
+            <a:pPr indent="0" marL="0">
+              <a:buNone/>
+            </a:pPr>
+            <a:r>
+              <a:rPr lang="en-US" sz="1600" dirty="0">
+                <a:solidFill>
+                  <a:srgbClr val="1E2D34"/>
+                </a:solidFill>
+                <a:latin typeface="Meiryo" pitchFamily="34" charset="0"/>
+                <a:ea typeface="Meiryo" pitchFamily="34" charset="-122"/>
+                <a:cs typeface="Meiryo" pitchFamily="34" charset="-120"/>
+              </a:rPr>
+              <a:t>番号（02・03・04）</a:t>
+            </a:r>
+            <a:endParaRPr lang="en-US" sz="1600" dirty="0"/>
+          </a:p>
+        </p:txBody>
+      </p:sp>
+      <p:sp>
+        <p:nvSpPr>
+          <p:cNvPr id="9" name="Text 6"/>
+          <p:cNvSpPr/>
+          <p:nvPr/>
+        </p:nvSpPr>
+        <p:spPr>
+          <a:xfrm>
+            <a:off x="10332720" y="2468880"/>
+            <a:ext cx="1188720" cy="320040"/>
+          </a:xfrm>
+          <a:prstGeom prst="rect">
+            <a:avLst/>
+          </a:prstGeom>
+          <a:noFill/>
+          <a:ln/>
+        </p:spPr>
+        <p:txBody>
+          <a:bodyPr wrap="square" lIns="0" tIns="0" rIns="0" bIns="0" rtlCol="0" anchor="ctr"/>
+          <a:lstStyle/>
+          <a:p>
+            <a:pPr algn="r" indent="0" marL="0">
+              <a:buNone/>
+            </a:pPr>
+            <a:r>
+              <a:rPr lang="en-US" sz="1500" b="1" dirty="0">
+                <a:solidFill>
+                  <a:srgbClr val="2E7D32"/>
+                </a:solidFill>
+                <a:latin typeface="Meiryo" pitchFamily="34" charset="0"/>
+                <a:ea typeface="Meiryo" pitchFamily="34" charset="-122"/>
+                <a:cs typeface="Meiryo" pitchFamily="34" charset="-120"/>
+              </a:rPr>
+              <a:t>緑</a:t>
+            </a:r>
+            <a:endParaRPr lang="en-US" sz="1500" dirty="0"/>
+          </a:p>
+        </p:txBody>
+      </p:sp>
+      <p:sp>
+        <p:nvSpPr>
+          <p:cNvPr id="10" name="Shape 7"/>
+          <p:cNvSpPr/>
+          <p:nvPr/>
+        </p:nvSpPr>
+        <p:spPr>
+          <a:xfrm>
+            <a:off x="7132320" y="2990088"/>
+            <a:ext cx="4572000" cy="566928"/>
+          </a:xfrm>
+          <a:prstGeom prst="roundRect">
+            <a:avLst>
+              <a:gd name="adj" fmla="val 12903"/>
+            </a:avLst>
+          </a:prstGeom>
+          <a:solidFill>
+            <a:srgbClr val="EDF6EE"/>
+          </a:solidFill>
+          <a:ln/>
+        </p:spPr>
+      </p:sp>
+      <p:sp>
+        <p:nvSpPr>
+          <p:cNvPr id="11" name="Text 8"/>
+          <p:cNvSpPr/>
+          <p:nvPr/>
+        </p:nvSpPr>
+        <p:spPr>
+          <a:xfrm>
+            <a:off x="7360920" y="3127248"/>
+            <a:ext cx="3108960" cy="320040"/>
+          </a:xfrm>
+          <a:prstGeom prst="rect">
+            <a:avLst/>
+          </a:prstGeom>
+          <a:noFill/>
+          <a:ln/>
+        </p:spPr>
+        <p:txBody>
+          <a:bodyPr wrap="square" lIns="0" tIns="0" rIns="0" bIns="0" rtlCol="0" anchor="ctr"/>
+          <a:lstStyle/>
+          <a:p>
+            <a:pPr indent="0" marL="0">
+              <a:buNone/>
+            </a:pPr>
+            <a:r>
+              <a:rPr lang="en-US" sz="1600" dirty="0">
+                <a:solidFill>
+                  <a:srgbClr val="1E2D34"/>
+                </a:solidFill>
+                <a:latin typeface="Meiryo" pitchFamily="34" charset="0"/>
+                <a:ea typeface="Meiryo" pitchFamily="34" charset="-122"/>
+                <a:cs typeface="Meiryo" pitchFamily="34" charset="-120"/>
+              </a:rPr>
+              <a:t>見出し</a:t>
+            </a:r>
+            <a:endParaRPr lang="en-US" sz="1600" dirty="0"/>
+          </a:p>
+        </p:txBody>
+      </p:sp>
+      <p:sp>
+        <p:nvSpPr>
+          <p:cNvPr id="12" name="Text 9"/>
+          <p:cNvSpPr/>
+          <p:nvPr/>
+        </p:nvSpPr>
+        <p:spPr>
+          <a:xfrm>
+            <a:off x="10332720" y="3127248"/>
+            <a:ext cx="1188720" cy="320040"/>
+          </a:xfrm>
+          <a:prstGeom prst="rect">
+            <a:avLst/>
+          </a:prstGeom>
+          <a:noFill/>
+          <a:ln/>
+        </p:spPr>
+        <p:txBody>
+          <a:bodyPr wrap="square" lIns="0" tIns="0" rIns="0" bIns="0" rtlCol="0" anchor="ctr"/>
+          <a:lstStyle/>
+          <a:p>
+            <a:pPr algn="r" indent="0" marL="0">
+              <a:buNone/>
+            </a:pPr>
+            <a:r>
+              <a:rPr lang="en-US" sz="1500" b="1" dirty="0">
+                <a:solidFill>
+                  <a:srgbClr val="2E7D32"/>
+                </a:solidFill>
+                <a:latin typeface="Meiryo" pitchFamily="34" charset="0"/>
+                <a:ea typeface="Meiryo" pitchFamily="34" charset="-122"/>
+                <a:cs typeface="Meiryo" pitchFamily="34" charset="-120"/>
+              </a:rPr>
+              <a:t>緑</a:t>
+            </a:r>
+            <a:endParaRPr lang="en-US" sz="1500" dirty="0"/>
+          </a:p>
+        </p:txBody>
+      </p:sp>
+      <p:sp>
+        <p:nvSpPr>
+          <p:cNvPr id="13" name="Shape 10"/>
+          <p:cNvSpPr/>
+          <p:nvPr/>
+        </p:nvSpPr>
+        <p:spPr>
+          <a:xfrm>
+            <a:off x="7132320" y="3648456"/>
+            <a:ext cx="4572000" cy="566928"/>
+          </a:xfrm>
+          <a:prstGeom prst="roundRect">
+            <a:avLst>
+              <a:gd name="adj" fmla="val 12903"/>
+            </a:avLst>
+          </a:prstGeom>
+          <a:solidFill>
+            <a:srgbClr val="FFF4EA"/>
+          </a:solidFill>
+          <a:ln/>
+        </p:spPr>
+      </p:sp>
+      <p:sp>
+        <p:nvSpPr>
+          <p:cNvPr id="14" name="Text 11"/>
+          <p:cNvSpPr/>
+          <p:nvPr/>
+        </p:nvSpPr>
+        <p:spPr>
+          <a:xfrm>
+            <a:off x="7360920" y="3785616"/>
+            <a:ext cx="3108960" cy="320040"/>
+          </a:xfrm>
+          <a:prstGeom prst="rect">
+            <a:avLst/>
+          </a:prstGeom>
+          <a:noFill/>
+          <a:ln/>
+        </p:spPr>
+        <p:txBody>
+          <a:bodyPr wrap="square" lIns="0" tIns="0" rIns="0" bIns="0" rtlCol="0" anchor="ctr"/>
+          <a:lstStyle/>
+          <a:p>
+            <a:pPr indent="0" marL="0">
+              <a:buNone/>
+            </a:pPr>
+            <a:r>
+              <a:rPr lang="en-US" sz="1600" dirty="0">
+                <a:solidFill>
+                  <a:srgbClr val="1E2D34"/>
+                </a:solidFill>
+                <a:latin typeface="Meiryo" pitchFamily="34" charset="0"/>
+                <a:ea typeface="Meiryo" pitchFamily="34" charset="-122"/>
+                <a:cs typeface="Meiryo" pitchFamily="34" charset="-120"/>
+              </a:rPr>
+              <a:t>大きな写真</a:t>
+            </a:r>
+            <a:endParaRPr lang="en-US" sz="1600" dirty="0"/>
+          </a:p>
+        </p:txBody>
+      </p:sp>
+      <p:sp>
+        <p:nvSpPr>
+          <p:cNvPr id="15" name="Text 12"/>
+          <p:cNvSpPr/>
+          <p:nvPr/>
+        </p:nvSpPr>
+        <p:spPr>
+          <a:xfrm>
+            <a:off x="10332720" y="3785616"/>
+            <a:ext cx="1188720" cy="320040"/>
+          </a:xfrm>
+          <a:prstGeom prst="rect">
+            <a:avLst/>
+          </a:prstGeom>
+          <a:noFill/>
+          <a:ln/>
+        </p:spPr>
+        <p:txBody>
+          <a:bodyPr wrap="square" lIns="0" tIns="0" rIns="0" bIns="0" rtlCol="0" anchor="ctr"/>
+          <a:lstStyle/>
+          <a:p>
+            <a:pPr algn="r" indent="0" marL="0">
+              <a:buNone/>
+            </a:pPr>
+            <a:r>
+              <a:rPr lang="en-US" sz="1500" b="1" dirty="0">
+                <a:solidFill>
+                  <a:srgbClr val="DD8236"/>
+                </a:solidFill>
+                <a:latin typeface="Meiryo" pitchFamily="34" charset="0"/>
+                <a:ea typeface="Meiryo" pitchFamily="34" charset="-122"/>
+                <a:cs typeface="Meiryo" pitchFamily="34" charset="-120"/>
+              </a:rPr>
+              <a:t>オレンジ</a:t>
+            </a:r>
+            <a:endParaRPr lang="en-US" sz="1500" dirty="0"/>
+          </a:p>
+        </p:txBody>
+      </p:sp>
+      <p:sp>
+        <p:nvSpPr>
+          <p:cNvPr id="16" name="Shape 13"/>
+          <p:cNvSpPr/>
+          <p:nvPr/>
+        </p:nvSpPr>
+        <p:spPr>
+          <a:xfrm>
+            <a:off x="7132320" y="4306824"/>
+            <a:ext cx="4572000" cy="566928"/>
+          </a:xfrm>
+          <a:prstGeom prst="roundRect">
+            <a:avLst>
+              <a:gd name="adj" fmla="val 12903"/>
+            </a:avLst>
+          </a:prstGeom>
+          <a:solidFill>
+            <a:srgbClr val="EDF6EE"/>
+          </a:solidFill>
+          <a:ln/>
+        </p:spPr>
+      </p:sp>
+      <p:sp>
+        <p:nvSpPr>
+          <p:cNvPr id="17" name="Text 14"/>
+          <p:cNvSpPr/>
+          <p:nvPr/>
+        </p:nvSpPr>
+        <p:spPr>
+          <a:xfrm>
+            <a:off x="7360920" y="4443984"/>
+            <a:ext cx="3108960" cy="320040"/>
+          </a:xfrm>
+          <a:prstGeom prst="rect">
+            <a:avLst/>
+          </a:prstGeom>
+          <a:noFill/>
+          <a:ln/>
+        </p:spPr>
+        <p:txBody>
+          <a:bodyPr wrap="square" lIns="0" tIns="0" rIns="0" bIns="0" rtlCol="0" anchor="ctr"/>
+          <a:lstStyle/>
+          <a:p>
+            <a:pPr indent="0" marL="0">
+              <a:buNone/>
+            </a:pPr>
+            <a:r>
+              <a:rPr lang="en-US" sz="1600" dirty="0">
+                <a:solidFill>
+                  <a:srgbClr val="1E2D34"/>
+                </a:solidFill>
+                <a:latin typeface="Meiryo" pitchFamily="34" charset="0"/>
+                <a:ea typeface="Meiryo" pitchFamily="34" charset="-122"/>
+                <a:cs typeface="Meiryo" pitchFamily="34" charset="-120"/>
+              </a:rPr>
+              <a:t>文章がいくつか</a:t>
+            </a:r>
+            <a:endParaRPr lang="en-US" sz="1600" dirty="0"/>
+          </a:p>
+        </p:txBody>
+      </p:sp>
+      <p:sp>
+        <p:nvSpPr>
+          <p:cNvPr id="18" name="Text 15"/>
+          <p:cNvSpPr/>
+          <p:nvPr/>
+        </p:nvSpPr>
+        <p:spPr>
+          <a:xfrm>
+            <a:off x="10332720" y="4443984"/>
+            <a:ext cx="1188720" cy="320040"/>
+          </a:xfrm>
+          <a:prstGeom prst="rect">
+            <a:avLst/>
+          </a:prstGeom>
+          <a:noFill/>
+          <a:ln/>
+        </p:spPr>
+        <p:txBody>
+          <a:bodyPr wrap="square" lIns="0" tIns="0" rIns="0" bIns="0" rtlCol="0" anchor="ctr"/>
+          <a:lstStyle/>
+          <a:p>
+            <a:pPr algn="r" indent="0" marL="0">
+              <a:buNone/>
+            </a:pPr>
+            <a:r>
+              <a:rPr lang="en-US" sz="1500" b="1" dirty="0">
+                <a:solidFill>
+                  <a:srgbClr val="2E7D32"/>
+                </a:solidFill>
+                <a:latin typeface="Meiryo" pitchFamily="34" charset="0"/>
+                <a:ea typeface="Meiryo" pitchFamily="34" charset="-122"/>
+                <a:cs typeface="Meiryo" pitchFamily="34" charset="-120"/>
+              </a:rPr>
+              <a:t>緑</a:t>
+            </a:r>
+            <a:endParaRPr lang="en-US" sz="1500" dirty="0"/>
+          </a:p>
+        </p:txBody>
+      </p:sp>
+      <p:sp>
+        <p:nvSpPr>
+          <p:cNvPr id="19" name="Shape 16"/>
+          <p:cNvSpPr/>
+          <p:nvPr/>
+        </p:nvSpPr>
+        <p:spPr>
+          <a:xfrm>
+            <a:off x="7132320" y="5029200"/>
+            <a:ext cx="4572000" cy="1005840"/>
+          </a:xfrm>
+          <a:prstGeom prst="roundRect">
+            <a:avLst>
+              <a:gd name="adj" fmla="val 9091"/>
+            </a:avLst>
+          </a:prstGeom>
+          <a:solidFill>
+            <a:srgbClr val="EDF6EE"/>
+          </a:solidFill>
+          <a:ln/>
+        </p:spPr>
+      </p:sp>
+      <p:sp>
+        <p:nvSpPr>
+          <p:cNvPr id="20" name="Text 17"/>
+          <p:cNvSpPr/>
+          <p:nvPr/>
+        </p:nvSpPr>
+        <p:spPr>
+          <a:xfrm>
+            <a:off x="7360920" y="5193792"/>
+            <a:ext cx="4114800" cy="676656"/>
           </a:xfrm>
           <a:prstGeom prst="rect">
             <a:avLst/>
@@ -3665,9 +3631,68 @@
                 <a:ea typeface="Meiryo" pitchFamily="34" charset="-122"/>
                 <a:cs typeface="Meiryo" pitchFamily="34" charset="-120"/>
               </a:rPr>
-              <a:t>本文（普通の大きさの文章）は、どこでも自由に直していただいて大丈夫です。</a:t>
+              <a:t>1か所の直し方が分かれば、</a:t>
             </a:r>
             <a:endParaRPr lang="en-US" sz="1600" dirty="0"/>
+          </a:p>
+          <a:p>
+            <a:pPr indent="0" marL="0">
+              <a:lnSpc>
+                <a:spcPts val="2100"/>
+              </a:lnSpc>
+              <a:buNone/>
+            </a:pPr>
+            <a:r>
+              <a:rPr lang="en-US" sz="1600" b="1" dirty="0">
+                <a:solidFill>
+                  <a:srgbClr val="2E7D32"/>
+                </a:solidFill>
+                <a:latin typeface="Meiryo" pitchFamily="34" charset="0"/>
+                <a:ea typeface="Meiryo" pitchFamily="34" charset="-122"/>
+                <a:cs typeface="Meiryo" pitchFamily="34" charset="-120"/>
+              </a:rPr>
+              <a:t>残りも同じ手順です。</a:t>
+            </a:r>
+            <a:endParaRPr lang="en-US" sz="1600" dirty="0"/>
+          </a:p>
+        </p:txBody>
+      </p:sp>
+      <p:sp>
+        <p:nvSpPr>
+          <p:cNvPr id="21" name="Text 18"/>
+          <p:cNvSpPr/>
+          <p:nvPr/>
+        </p:nvSpPr>
+        <p:spPr>
+          <a:xfrm>
+            <a:off x="640080" y="5806440"/>
+            <a:ext cx="6217920" cy="274320"/>
+          </a:xfrm>
+          <a:prstGeom prst="rect">
+            <a:avLst/>
+          </a:prstGeom>
+          <a:noFill/>
+          <a:ln/>
+        </p:spPr>
+        <p:txBody>
+          <a:bodyPr wrap="square" lIns="0" tIns="0" rIns="0" bIns="0" rtlCol="0" anchor="ctr"/>
+          <a:lstStyle/>
+          <a:p>
+            <a:pPr algn="ctr" indent="0" marL="0">
+              <a:buNone/>
+            </a:pPr>
+            <a:r>
+              <a:rPr lang="en-US" sz="1300" dirty="0">
+                <a:solidFill>
+                  <a:srgbClr val="5E7681"/>
+                </a:solidFill>
+                <a:latin typeface="Meiryo" pitchFamily="34" charset="0"/>
+                <a:ea typeface="Meiryo" pitchFamily="34" charset="-122"/>
+                <a:cs typeface="Meiryo" pitchFamily="34" charset="-120"/>
+              </a:rPr>
+              <a:t>画面は 04 の部分</a:t>
+            </a:r>
+            <a:endParaRPr lang="en-US" sz="1300" dirty="0"/>
           </a:p>
         </p:txBody>
       </p:sp>
@@ -3736,7 +3761,7 @@
                 <a:ea typeface="Meiryo" pitchFamily="34" charset="-122"/>
                 <a:cs typeface="Meiryo" pitchFamily="34" charset="-120"/>
               </a:rPr>
-              <a:t>⑤ 写真を差し替える</a:t>
+              <a:t>直せますが、変えないほうがよいもの</a:t>
             </a:r>
             <a:endParaRPr lang="en-US" sz="3400" dirty="0"/>
           </a:p>
@@ -3745,6 +3770,45 @@
       <p:sp>
         <p:nvSpPr>
           <p:cNvPr id="3" name="Text 1"/>
+          <p:cNvSpPr/>
+          <p:nvPr/>
+        </p:nvSpPr>
+        <p:spPr>
+          <a:xfrm>
+            <a:off x="566928" y="1024128"/>
+            <a:ext cx="11064240" cy="365760"/>
+          </a:xfrm>
+          <a:prstGeom prst="rect">
+            <a:avLst/>
+          </a:prstGeom>
+          <a:noFill/>
+          <a:ln/>
+        </p:spPr>
+        <p:txBody>
+          <a:bodyPr wrap="square" lIns="0" tIns="0" rIns="0" bIns="0" rtlCol="0" anchor="ctr"/>
+          <a:lstStyle/>
+          <a:p>
+            <a:pPr indent="0" marL="0">
+              <a:buNone/>
+            </a:pPr>
+            <a:r>
+              <a:rPr lang="en-US" sz="1600" dirty="0">
+                <a:solidFill>
+                  <a:srgbClr val="5E7681"/>
+                </a:solidFill>
+                <a:latin typeface="Meiryo" pitchFamily="34" charset="0"/>
+                <a:ea typeface="Meiryo" pitchFamily="34" charset="-122"/>
+                <a:cs typeface="Meiryo" pitchFamily="34" charset="-120"/>
+              </a:rPr>
+              <a:t>クリックできてしまうので、ご注意ください</a:t>
+            </a:r>
+            <a:endParaRPr lang="en-US" sz="1600" dirty="0"/>
+          </a:p>
+        </p:txBody>
+      </p:sp>
+      <p:sp>
+        <p:nvSpPr>
+          <p:cNvPr id="4" name="Text 2"/>
           <p:cNvSpPr/>
           <p:nvPr/>
         </p:nvSpPr>
@@ -3783,410 +3847,18 @@
       </p:sp>
       <p:sp>
         <p:nvSpPr>
-          <p:cNvPr id="4" name="Shape 2"/>
-          <p:cNvSpPr/>
-          <p:nvPr/>
-        </p:nvSpPr>
-        <p:spPr>
-          <a:xfrm>
-            <a:off x="685800" y="1828800"/>
-            <a:ext cx="457200" cy="457200"/>
-          </a:xfrm>
-          <a:prstGeom prst="ellipse">
-            <a:avLst/>
-          </a:prstGeom>
-          <a:solidFill>
-            <a:srgbClr val="2E7D32"/>
-          </a:solidFill>
-          <a:ln/>
-        </p:spPr>
-      </p:sp>
-      <p:sp>
-        <p:nvSpPr>
-          <p:cNvPr id="5" name="Text 3"/>
-          <p:cNvSpPr/>
-          <p:nvPr/>
-        </p:nvSpPr>
-        <p:spPr>
-          <a:xfrm>
-            <a:off x="685800" y="1883664"/>
-            <a:ext cx="457200" cy="347472"/>
-          </a:xfrm>
-          <a:prstGeom prst="rect">
-            <a:avLst/>
-          </a:prstGeom>
-          <a:noFill/>
-          <a:ln/>
-        </p:spPr>
-        <p:txBody>
-          <a:bodyPr wrap="square" lIns="0" tIns="0" rIns="0" bIns="0" rtlCol="0" anchor="ctr"/>
-          <a:lstStyle/>
-          <a:p>
-            <a:pPr algn="ctr" indent="0" marL="0">
-              <a:buNone/>
-            </a:pPr>
-            <a:r>
-              <a:rPr lang="en-US" sz="1600" b="1" dirty="0">
-                <a:solidFill>
-                  <a:srgbClr val="FFFFFF"/>
-                </a:solidFill>
-                <a:latin typeface="Meiryo" pitchFamily="34" charset="0"/>
-                <a:ea typeface="Meiryo" pitchFamily="34" charset="-122"/>
-                <a:cs typeface="Meiryo" pitchFamily="34" charset="-120"/>
-              </a:rPr>
-              <a:t>1</a:t>
-            </a:r>
-            <a:endParaRPr lang="en-US" sz="1600" dirty="0"/>
-          </a:p>
-        </p:txBody>
-      </p:sp>
-      <p:sp>
-        <p:nvSpPr>
-          <p:cNvPr id="6" name="Text 4"/>
-          <p:cNvSpPr/>
-          <p:nvPr/>
-        </p:nvSpPr>
-        <p:spPr>
-          <a:xfrm>
-            <a:off x="1344168" y="1874520"/>
-            <a:ext cx="9601200" cy="384048"/>
-          </a:xfrm>
-          <a:prstGeom prst="rect">
-            <a:avLst/>
-          </a:prstGeom>
-          <a:noFill/>
-          <a:ln/>
-        </p:spPr>
-        <p:txBody>
-          <a:bodyPr wrap="square" lIns="0" tIns="0" rIns="0" bIns="0" rtlCol="0" anchor="ctr"/>
-          <a:lstStyle/>
-          <a:p>
-            <a:pPr indent="0" marL="0">
-              <a:buNone/>
-            </a:pPr>
-            <a:r>
-              <a:rPr lang="en-US" sz="1900" dirty="0">
-                <a:solidFill>
-                  <a:srgbClr val="1E2D34"/>
-                </a:solidFill>
-                <a:latin typeface="Meiryo" pitchFamily="34" charset="0"/>
-                <a:ea typeface="Meiryo" pitchFamily="34" charset="-122"/>
-                <a:cs typeface="Meiryo" pitchFamily="34" charset="-120"/>
-              </a:rPr>
-              <a:t>写真をクリック</a:t>
-            </a:r>
-            <a:endParaRPr lang="en-US" sz="1900" dirty="0"/>
-          </a:p>
-        </p:txBody>
-      </p:sp>
-      <p:sp>
-        <p:nvSpPr>
-          <p:cNvPr id="7" name="Shape 5"/>
-          <p:cNvSpPr/>
-          <p:nvPr/>
-        </p:nvSpPr>
-        <p:spPr>
-          <a:xfrm>
-            <a:off x="685800" y="2560320"/>
-            <a:ext cx="457200" cy="457200"/>
-          </a:xfrm>
-          <a:prstGeom prst="ellipse">
-            <a:avLst/>
-          </a:prstGeom>
-          <a:solidFill>
-            <a:srgbClr val="2E7D32"/>
-          </a:solidFill>
-          <a:ln/>
-        </p:spPr>
-      </p:sp>
-      <p:sp>
-        <p:nvSpPr>
-          <p:cNvPr id="8" name="Text 6"/>
-          <p:cNvSpPr/>
-          <p:nvPr/>
-        </p:nvSpPr>
-        <p:spPr>
-          <a:xfrm>
-            <a:off x="685800" y="2615184"/>
-            <a:ext cx="457200" cy="347472"/>
-          </a:xfrm>
-          <a:prstGeom prst="rect">
-            <a:avLst/>
-          </a:prstGeom>
-          <a:noFill/>
-          <a:ln/>
-        </p:spPr>
-        <p:txBody>
-          <a:bodyPr wrap="square" lIns="0" tIns="0" rIns="0" bIns="0" rtlCol="0" anchor="ctr"/>
-          <a:lstStyle/>
-          <a:p>
-            <a:pPr algn="ctr" indent="0" marL="0">
-              <a:buNone/>
-            </a:pPr>
-            <a:r>
-              <a:rPr lang="en-US" sz="1600" b="1" dirty="0">
-                <a:solidFill>
-                  <a:srgbClr val="FFFFFF"/>
-                </a:solidFill>
-                <a:latin typeface="Meiryo" pitchFamily="34" charset="0"/>
-                <a:ea typeface="Meiryo" pitchFamily="34" charset="-122"/>
-                <a:cs typeface="Meiryo" pitchFamily="34" charset="-120"/>
-              </a:rPr>
-              <a:t>2</a:t>
-            </a:r>
-            <a:endParaRPr lang="en-US" sz="1600" dirty="0"/>
-          </a:p>
-        </p:txBody>
-      </p:sp>
-      <p:sp>
-        <p:nvSpPr>
-          <p:cNvPr id="9" name="Text 7"/>
-          <p:cNvSpPr/>
-          <p:nvPr/>
-        </p:nvSpPr>
-        <p:spPr>
-          <a:xfrm>
-            <a:off x="1344168" y="2606040"/>
-            <a:ext cx="9601200" cy="384048"/>
-          </a:xfrm>
-          <a:prstGeom prst="rect">
-            <a:avLst/>
-          </a:prstGeom>
-          <a:noFill/>
-          <a:ln/>
-        </p:spPr>
-        <p:txBody>
-          <a:bodyPr wrap="square" lIns="0" tIns="0" rIns="0" bIns="0" rtlCol="0" anchor="ctr"/>
-          <a:lstStyle/>
-          <a:p>
-            <a:pPr indent="0" marL="0">
-              <a:buNone/>
-            </a:pPr>
-            <a:r>
-              <a:rPr lang="en-US" sz="1900" dirty="0">
-                <a:solidFill>
-                  <a:srgbClr val="1E2D34"/>
-                </a:solidFill>
-                <a:latin typeface="Meiryo" pitchFamily="34" charset="0"/>
-                <a:ea typeface="Meiryo" pitchFamily="34" charset="-122"/>
-                <a:cs typeface="Meiryo" pitchFamily="34" charset="-120"/>
-              </a:rPr>
-              <a:t>出てきたメニューの【置換】</a:t>
-            </a:r>
-            <a:endParaRPr lang="en-US" sz="1900" dirty="0"/>
-          </a:p>
-        </p:txBody>
-      </p:sp>
-      <p:sp>
-        <p:nvSpPr>
-          <p:cNvPr id="10" name="Shape 8"/>
-          <p:cNvSpPr/>
-          <p:nvPr/>
-        </p:nvSpPr>
-        <p:spPr>
-          <a:xfrm>
-            <a:off x="685800" y="3291840"/>
-            <a:ext cx="457200" cy="457200"/>
-          </a:xfrm>
-          <a:prstGeom prst="ellipse">
-            <a:avLst/>
-          </a:prstGeom>
-          <a:solidFill>
-            <a:srgbClr val="2E7D32"/>
-          </a:solidFill>
-          <a:ln/>
-        </p:spPr>
-      </p:sp>
-      <p:sp>
-        <p:nvSpPr>
-          <p:cNvPr id="11" name="Text 9"/>
-          <p:cNvSpPr/>
-          <p:nvPr/>
-        </p:nvSpPr>
-        <p:spPr>
-          <a:xfrm>
-            <a:off x="685800" y="3346704"/>
-            <a:ext cx="457200" cy="347472"/>
-          </a:xfrm>
-          <a:prstGeom prst="rect">
-            <a:avLst/>
-          </a:prstGeom>
-          <a:noFill/>
-          <a:ln/>
-        </p:spPr>
-        <p:txBody>
-          <a:bodyPr wrap="square" lIns="0" tIns="0" rIns="0" bIns="0" rtlCol="0" anchor="ctr"/>
-          <a:lstStyle/>
-          <a:p>
-            <a:pPr algn="ctr" indent="0" marL="0">
-              <a:buNone/>
-            </a:pPr>
-            <a:r>
-              <a:rPr lang="en-US" sz="1600" b="1" dirty="0">
-                <a:solidFill>
-                  <a:srgbClr val="FFFFFF"/>
-                </a:solidFill>
-                <a:latin typeface="Meiryo" pitchFamily="34" charset="0"/>
-                <a:ea typeface="Meiryo" pitchFamily="34" charset="-122"/>
-                <a:cs typeface="Meiryo" pitchFamily="34" charset="-120"/>
-              </a:rPr>
-              <a:t>3</a:t>
-            </a:r>
-            <a:endParaRPr lang="en-US" sz="1600" dirty="0"/>
-          </a:p>
-        </p:txBody>
-      </p:sp>
-      <p:sp>
-        <p:nvSpPr>
-          <p:cNvPr id="12" name="Text 10"/>
-          <p:cNvSpPr/>
-          <p:nvPr/>
-        </p:nvSpPr>
-        <p:spPr>
-          <a:xfrm>
-            <a:off x="1344168" y="3337560"/>
-            <a:ext cx="9601200" cy="384048"/>
-          </a:xfrm>
-          <a:prstGeom prst="rect">
-            <a:avLst/>
-          </a:prstGeom>
-          <a:noFill/>
-          <a:ln/>
-        </p:spPr>
-        <p:txBody>
-          <a:bodyPr wrap="square" lIns="0" tIns="0" rIns="0" bIns="0" rtlCol="0" anchor="ctr"/>
-          <a:lstStyle/>
-          <a:p>
-            <a:pPr indent="0" marL="0">
-              <a:buNone/>
-            </a:pPr>
-            <a:r>
-              <a:rPr lang="en-US" sz="1900" dirty="0">
-                <a:solidFill>
-                  <a:srgbClr val="1E2D34"/>
-                </a:solidFill>
-                <a:latin typeface="Meiryo" pitchFamily="34" charset="0"/>
-                <a:ea typeface="Meiryo" pitchFamily="34" charset="-122"/>
-                <a:cs typeface="Meiryo" pitchFamily="34" charset="-120"/>
-              </a:rPr>
-              <a:t>「アップロード」で新しい写真を選ぶ</a:t>
-            </a:r>
-            <a:endParaRPr lang="en-US" sz="1900" dirty="0"/>
-          </a:p>
-        </p:txBody>
-      </p:sp>
-      <p:sp>
-        <p:nvSpPr>
-          <p:cNvPr id="13" name="Shape 11"/>
-          <p:cNvSpPr/>
-          <p:nvPr/>
-        </p:nvSpPr>
-        <p:spPr>
-          <a:xfrm>
-            <a:off x="685800" y="4023360"/>
-            <a:ext cx="457200" cy="457200"/>
-          </a:xfrm>
-          <a:prstGeom prst="ellipse">
-            <a:avLst/>
-          </a:prstGeom>
-          <a:solidFill>
-            <a:srgbClr val="2E7D32"/>
-          </a:solidFill>
-          <a:ln/>
-        </p:spPr>
-      </p:sp>
-      <p:sp>
-        <p:nvSpPr>
-          <p:cNvPr id="14" name="Text 12"/>
-          <p:cNvSpPr/>
-          <p:nvPr/>
-        </p:nvSpPr>
-        <p:spPr>
-          <a:xfrm>
-            <a:off x="685800" y="4078224"/>
-            <a:ext cx="457200" cy="347472"/>
-          </a:xfrm>
-          <a:prstGeom prst="rect">
-            <a:avLst/>
-          </a:prstGeom>
-          <a:noFill/>
-          <a:ln/>
-        </p:spPr>
-        <p:txBody>
-          <a:bodyPr wrap="square" lIns="0" tIns="0" rIns="0" bIns="0" rtlCol="0" anchor="ctr"/>
-          <a:lstStyle/>
-          <a:p>
-            <a:pPr algn="ctr" indent="0" marL="0">
-              <a:buNone/>
-            </a:pPr>
-            <a:r>
-              <a:rPr lang="en-US" sz="1600" b="1" dirty="0">
-                <a:solidFill>
-                  <a:srgbClr val="FFFFFF"/>
-                </a:solidFill>
-                <a:latin typeface="Meiryo" pitchFamily="34" charset="0"/>
-                <a:ea typeface="Meiryo" pitchFamily="34" charset="-122"/>
-                <a:cs typeface="Meiryo" pitchFamily="34" charset="-120"/>
-              </a:rPr>
-              <a:t>4</a:t>
-            </a:r>
-            <a:endParaRPr lang="en-US" sz="1600" dirty="0"/>
-          </a:p>
-        </p:txBody>
-      </p:sp>
-      <p:sp>
-        <p:nvSpPr>
-          <p:cNvPr id="15" name="Text 13"/>
-          <p:cNvSpPr/>
-          <p:nvPr/>
-        </p:nvSpPr>
-        <p:spPr>
-          <a:xfrm>
-            <a:off x="1344168" y="4069080"/>
-            <a:ext cx="9601200" cy="384048"/>
-          </a:xfrm>
-          <a:prstGeom prst="rect">
-            <a:avLst/>
-          </a:prstGeom>
-          <a:noFill/>
-          <a:ln/>
-        </p:spPr>
-        <p:txBody>
-          <a:bodyPr wrap="square" lIns="0" tIns="0" rIns="0" bIns="0" rtlCol="0" anchor="ctr"/>
-          <a:lstStyle/>
-          <a:p>
-            <a:pPr indent="0" marL="0">
-              <a:buNone/>
-            </a:pPr>
-            <a:r>
-              <a:rPr lang="en-US" sz="1900" dirty="0">
-                <a:solidFill>
-                  <a:srgbClr val="1E2D34"/>
-                </a:solidFill>
-                <a:latin typeface="Meiryo" pitchFamily="34" charset="0"/>
-                <a:ea typeface="Meiryo" pitchFamily="34" charset="-122"/>
-                <a:cs typeface="Meiryo" pitchFamily="34" charset="-120"/>
-              </a:rPr>
-              <a:t>右上の【保存】</a:t>
-            </a:r>
-            <a:endParaRPr lang="en-US" sz="1900" dirty="0"/>
-          </a:p>
-        </p:txBody>
-      </p:sp>
-      <p:sp>
-        <p:nvSpPr>
-          <p:cNvPr id="16" name="Shape 14"/>
-          <p:cNvSpPr/>
-          <p:nvPr/>
-        </p:nvSpPr>
-        <p:spPr>
-          <a:xfrm>
-            <a:off x="640080" y="4937760"/>
-            <a:ext cx="11064240" cy="1097280"/>
+          <p:cNvPr id="5" name="Shape 3"/>
+          <p:cNvSpPr/>
+          <p:nvPr/>
+        </p:nvSpPr>
+        <p:spPr>
+          <a:xfrm>
+            <a:off x="640080" y="1828800"/>
+            <a:ext cx="11064240" cy="1280160"/>
           </a:xfrm>
           <a:prstGeom prst="roundRect">
             <a:avLst>
-              <a:gd name="adj" fmla="val 8333"/>
+              <a:gd name="adj" fmla="val 8571"/>
             </a:avLst>
           </a:prstGeom>
           <a:solidFill>
@@ -4197,14 +3869,491 @@
       </p:sp>
       <p:sp>
         <p:nvSpPr>
+          <p:cNvPr id="6" name="Shape 4"/>
+          <p:cNvSpPr/>
+          <p:nvPr/>
+        </p:nvSpPr>
+        <p:spPr>
+          <a:xfrm>
+            <a:off x="914400" y="2212848"/>
+            <a:ext cx="512064" cy="512064"/>
+          </a:xfrm>
+          <a:prstGeom prst="ellipse">
+            <a:avLst/>
+          </a:prstGeom>
+          <a:solidFill>
+            <a:srgbClr val="DD8236"/>
+          </a:solidFill>
+          <a:ln/>
+        </p:spPr>
+      </p:sp>
+      <p:sp>
+        <p:nvSpPr>
+          <p:cNvPr id="7" name="Text 5"/>
+          <p:cNvSpPr/>
+          <p:nvPr/>
+        </p:nvSpPr>
+        <p:spPr>
+          <a:xfrm>
+            <a:off x="914400" y="2249424"/>
+            <a:ext cx="512064" cy="411480"/>
+          </a:xfrm>
+          <a:prstGeom prst="rect">
+            <a:avLst/>
+          </a:prstGeom>
+          <a:noFill/>
+          <a:ln/>
+        </p:spPr>
+        <p:txBody>
+          <a:bodyPr wrap="square" lIns="0" tIns="0" rIns="0" bIns="0" rtlCol="0" anchor="ctr"/>
+          <a:lstStyle/>
+          <a:p>
+            <a:pPr algn="ctr" indent="0" marL="0">
+              <a:buNone/>
+            </a:pPr>
+            <a:r>
+              <a:rPr lang="en-US" sz="2000" b="1" dirty="0">
+                <a:solidFill>
+                  <a:srgbClr val="FFFFFF"/>
+                </a:solidFill>
+                <a:latin typeface="Meiryo" pitchFamily="34" charset="0"/>
+                <a:ea typeface="Meiryo" pitchFamily="34" charset="-122"/>
+                <a:cs typeface="Meiryo" pitchFamily="34" charset="-120"/>
+              </a:rPr>
+              <a:t>!</a:t>
+            </a:r>
+            <a:endParaRPr lang="en-US" sz="2000" dirty="0"/>
+          </a:p>
+        </p:txBody>
+      </p:sp>
+      <p:sp>
+        <p:nvSpPr>
+          <p:cNvPr id="8" name="Text 6"/>
+          <p:cNvSpPr/>
+          <p:nvPr/>
+        </p:nvSpPr>
+        <p:spPr>
+          <a:xfrm>
+            <a:off x="1691640" y="2011680"/>
+            <a:ext cx="9601200" cy="365760"/>
+          </a:xfrm>
+          <a:prstGeom prst="rect">
+            <a:avLst/>
+          </a:prstGeom>
+          <a:noFill/>
+          <a:ln/>
+        </p:spPr>
+        <p:txBody>
+          <a:bodyPr wrap="square" lIns="0" tIns="0" rIns="0" bIns="0" rtlCol="0" anchor="ctr"/>
+          <a:lstStyle/>
+          <a:p>
+            <a:pPr indent="0" marL="0">
+              <a:buNone/>
+            </a:pPr>
+            <a:r>
+              <a:rPr lang="en-US" sz="1900" b="1" dirty="0">
+                <a:solidFill>
+                  <a:srgbClr val="264653"/>
+                </a:solidFill>
+                <a:latin typeface="Meiryo" pitchFamily="34" charset="0"/>
+                <a:ea typeface="Meiryo" pitchFamily="34" charset="-122"/>
+                <a:cs typeface="Meiryo" pitchFamily="34" charset="-120"/>
+              </a:rPr>
+              <a:t>「01」「02」などの番号</a:t>
+            </a:r>
+            <a:endParaRPr lang="en-US" sz="1900" dirty="0"/>
+          </a:p>
+        </p:txBody>
+      </p:sp>
+      <p:sp>
+        <p:nvSpPr>
+          <p:cNvPr id="9" name="Text 7"/>
+          <p:cNvSpPr/>
+          <p:nvPr/>
+        </p:nvSpPr>
+        <p:spPr>
+          <a:xfrm>
+            <a:off x="1691640" y="2450592"/>
+            <a:ext cx="9601200" cy="457200"/>
+          </a:xfrm>
+          <a:prstGeom prst="rect">
+            <a:avLst/>
+          </a:prstGeom>
+          <a:noFill/>
+          <a:ln/>
+        </p:spPr>
+        <p:txBody>
+          <a:bodyPr wrap="square" lIns="0" tIns="0" rIns="0" bIns="0" rtlCol="0" anchor="ctr"/>
+          <a:lstStyle/>
+          <a:p>
+            <a:pPr indent="0" marL="0">
+              <a:buNone/>
+            </a:pPr>
+            <a:r>
+              <a:rPr lang="en-US" sz="1500" dirty="0">
+                <a:solidFill>
+                  <a:srgbClr val="5E7681"/>
+                </a:solidFill>
+                <a:latin typeface="Meiryo" pitchFamily="34" charset="0"/>
+                <a:ea typeface="Meiryo" pitchFamily="34" charset="-122"/>
+                <a:cs typeface="Meiryo" pitchFamily="34" charset="-120"/>
+              </a:rPr>
+              <a:t>章の順番を表しています。文章を足しても番号は自動で増えません</a:t>
+            </a:r>
+            <a:endParaRPr lang="en-US" sz="1500" dirty="0"/>
+          </a:p>
+        </p:txBody>
+      </p:sp>
+      <p:sp>
+        <p:nvSpPr>
+          <p:cNvPr id="10" name="Shape 8"/>
+          <p:cNvSpPr/>
+          <p:nvPr/>
+        </p:nvSpPr>
+        <p:spPr>
+          <a:xfrm>
+            <a:off x="640080" y="3246120"/>
+            <a:ext cx="11064240" cy="1280160"/>
+          </a:xfrm>
+          <a:prstGeom prst="roundRect">
+            <a:avLst>
+              <a:gd name="adj" fmla="val 8571"/>
+            </a:avLst>
+          </a:prstGeom>
+          <a:solidFill>
+            <a:srgbClr val="F2F5F6"/>
+          </a:solidFill>
+          <a:ln/>
+        </p:spPr>
+      </p:sp>
+      <p:sp>
+        <p:nvSpPr>
+          <p:cNvPr id="11" name="Shape 9"/>
+          <p:cNvSpPr/>
+          <p:nvPr/>
+        </p:nvSpPr>
+        <p:spPr>
+          <a:xfrm>
+            <a:off x="914400" y="3630168"/>
+            <a:ext cx="512064" cy="512064"/>
+          </a:xfrm>
+          <a:prstGeom prst="ellipse">
+            <a:avLst/>
+          </a:prstGeom>
+          <a:solidFill>
+            <a:srgbClr val="DD8236"/>
+          </a:solidFill>
+          <a:ln/>
+        </p:spPr>
+      </p:sp>
+      <p:sp>
+        <p:nvSpPr>
+          <p:cNvPr id="12" name="Text 10"/>
+          <p:cNvSpPr/>
+          <p:nvPr/>
+        </p:nvSpPr>
+        <p:spPr>
+          <a:xfrm>
+            <a:off x="914400" y="3666744"/>
+            <a:ext cx="512064" cy="411480"/>
+          </a:xfrm>
+          <a:prstGeom prst="rect">
+            <a:avLst/>
+          </a:prstGeom>
+          <a:noFill/>
+          <a:ln/>
+        </p:spPr>
+        <p:txBody>
+          <a:bodyPr wrap="square" lIns="0" tIns="0" rIns="0" bIns="0" rtlCol="0" anchor="ctr"/>
+          <a:lstStyle/>
+          <a:p>
+            <a:pPr algn="ctr" indent="0" marL="0">
+              <a:buNone/>
+            </a:pPr>
+            <a:r>
+              <a:rPr lang="en-US" sz="2000" b="1" dirty="0">
+                <a:solidFill>
+                  <a:srgbClr val="FFFFFF"/>
+                </a:solidFill>
+                <a:latin typeface="Meiryo" pitchFamily="34" charset="0"/>
+                <a:ea typeface="Meiryo" pitchFamily="34" charset="-122"/>
+                <a:cs typeface="Meiryo" pitchFamily="34" charset="-120"/>
+              </a:rPr>
+              <a:t>!</a:t>
+            </a:r>
+            <a:endParaRPr lang="en-US" sz="2000" dirty="0"/>
+          </a:p>
+        </p:txBody>
+      </p:sp>
+      <p:sp>
+        <p:nvSpPr>
+          <p:cNvPr id="13" name="Text 11"/>
+          <p:cNvSpPr/>
+          <p:nvPr/>
+        </p:nvSpPr>
+        <p:spPr>
+          <a:xfrm>
+            <a:off x="1691640" y="3429000"/>
+            <a:ext cx="9601200" cy="365760"/>
+          </a:xfrm>
+          <a:prstGeom prst="rect">
+            <a:avLst/>
+          </a:prstGeom>
+          <a:noFill/>
+          <a:ln/>
+        </p:spPr>
+        <p:txBody>
+          <a:bodyPr wrap="square" lIns="0" tIns="0" rIns="0" bIns="0" rtlCol="0" anchor="ctr"/>
+          <a:lstStyle/>
+          <a:p>
+            <a:pPr indent="0" marL="0">
+              <a:buNone/>
+            </a:pPr>
+            <a:r>
+              <a:rPr lang="en-US" sz="1900" b="1" dirty="0">
+                <a:solidFill>
+                  <a:srgbClr val="264653"/>
+                </a:solidFill>
+                <a:latin typeface="Meiryo" pitchFamily="34" charset="0"/>
+                <a:ea typeface="Meiryo" pitchFamily="34" charset="-122"/>
+                <a:cs typeface="Meiryo" pitchFamily="34" charset="-120"/>
+              </a:rPr>
+              <a:t>「① 身体の芯（体幹）を…」のラベル</a:t>
+            </a:r>
+            <a:endParaRPr lang="en-US" sz="1900" dirty="0"/>
+          </a:p>
+        </p:txBody>
+      </p:sp>
+      <p:sp>
+        <p:nvSpPr>
+          <p:cNvPr id="14" name="Text 12"/>
+          <p:cNvSpPr/>
+          <p:nvPr/>
+        </p:nvSpPr>
+        <p:spPr>
+          <a:xfrm>
+            <a:off x="1691640" y="3867912"/>
+            <a:ext cx="9601200" cy="457200"/>
+          </a:xfrm>
+          <a:prstGeom prst="rect">
+            <a:avLst/>
+          </a:prstGeom>
+          <a:noFill/>
+          <a:ln/>
+        </p:spPr>
+        <p:txBody>
+          <a:bodyPr wrap="square" lIns="0" tIns="0" rIns="0" bIns="0" rtlCol="0" anchor="ctr"/>
+          <a:lstStyle/>
+          <a:p>
+            <a:pPr indent="0" marL="0">
+              <a:buNone/>
+            </a:pPr>
+            <a:r>
+              <a:rPr lang="en-US" sz="1500" dirty="0">
+                <a:solidFill>
+                  <a:srgbClr val="5E7681"/>
+                </a:solidFill>
+                <a:latin typeface="Meiryo" pitchFamily="34" charset="0"/>
+                <a:ea typeface="Meiryo" pitchFamily="34" charset="-122"/>
+                <a:cs typeface="Meiryo" pitchFamily="34" charset="-120"/>
+              </a:rPr>
+              <a:t>①②③ の並びが崩れると読みにくくなります</a:t>
+            </a:r>
+            <a:endParaRPr lang="en-US" sz="1500" dirty="0"/>
+          </a:p>
+        </p:txBody>
+      </p:sp>
+      <p:sp>
+        <p:nvSpPr>
+          <p:cNvPr id="15" name="Shape 13"/>
+          <p:cNvSpPr/>
+          <p:nvPr/>
+        </p:nvSpPr>
+        <p:spPr>
+          <a:xfrm>
+            <a:off x="640080" y="4663440"/>
+            <a:ext cx="11064240" cy="1280160"/>
+          </a:xfrm>
+          <a:prstGeom prst="roundRect">
+            <a:avLst>
+              <a:gd name="adj" fmla="val 8571"/>
+            </a:avLst>
+          </a:prstGeom>
+          <a:solidFill>
+            <a:srgbClr val="F2F5F6"/>
+          </a:solidFill>
+          <a:ln/>
+        </p:spPr>
+      </p:sp>
+      <p:sp>
+        <p:nvSpPr>
+          <p:cNvPr id="16" name="Shape 14"/>
+          <p:cNvSpPr/>
+          <p:nvPr/>
+        </p:nvSpPr>
+        <p:spPr>
+          <a:xfrm>
+            <a:off x="914400" y="5047488"/>
+            <a:ext cx="512064" cy="512064"/>
+          </a:xfrm>
+          <a:prstGeom prst="ellipse">
+            <a:avLst/>
+          </a:prstGeom>
+          <a:solidFill>
+            <a:srgbClr val="DD8236"/>
+          </a:solidFill>
+          <a:ln/>
+        </p:spPr>
+      </p:sp>
+      <p:sp>
+        <p:nvSpPr>
           <p:cNvPr id="17" name="Text 15"/>
           <p:cNvSpPr/>
           <p:nvPr/>
         </p:nvSpPr>
         <p:spPr>
           <a:xfrm>
-            <a:off x="868680" y="5102352"/>
-            <a:ext cx="10607040" cy="768096"/>
+            <a:off x="914400" y="5084064"/>
+            <a:ext cx="512064" cy="411480"/>
+          </a:xfrm>
+          <a:prstGeom prst="rect">
+            <a:avLst/>
+          </a:prstGeom>
+          <a:noFill/>
+          <a:ln/>
+        </p:spPr>
+        <p:txBody>
+          <a:bodyPr wrap="square" lIns="0" tIns="0" rIns="0" bIns="0" rtlCol="0" anchor="ctr"/>
+          <a:lstStyle/>
+          <a:p>
+            <a:pPr algn="ctr" indent="0" marL="0">
+              <a:buNone/>
+            </a:pPr>
+            <a:r>
+              <a:rPr lang="en-US" sz="2000" b="1" dirty="0">
+                <a:solidFill>
+                  <a:srgbClr val="FFFFFF"/>
+                </a:solidFill>
+                <a:latin typeface="Meiryo" pitchFamily="34" charset="0"/>
+                <a:ea typeface="Meiryo" pitchFamily="34" charset="-122"/>
+                <a:cs typeface="Meiryo" pitchFamily="34" charset="-120"/>
+              </a:rPr>
+              <a:t>!</a:t>
+            </a:r>
+            <a:endParaRPr lang="en-US" sz="2000" dirty="0"/>
+          </a:p>
+        </p:txBody>
+      </p:sp>
+      <p:sp>
+        <p:nvSpPr>
+          <p:cNvPr id="18" name="Text 16"/>
+          <p:cNvSpPr/>
+          <p:nvPr/>
+        </p:nvSpPr>
+        <p:spPr>
+          <a:xfrm>
+            <a:off x="1691640" y="4846320"/>
+            <a:ext cx="9601200" cy="365760"/>
+          </a:xfrm>
+          <a:prstGeom prst="rect">
+            <a:avLst/>
+          </a:prstGeom>
+          <a:noFill/>
+          <a:ln/>
+        </p:spPr>
+        <p:txBody>
+          <a:bodyPr wrap="square" lIns="0" tIns="0" rIns="0" bIns="0" rtlCol="0" anchor="ctr"/>
+          <a:lstStyle/>
+          <a:p>
+            <a:pPr indent="0" marL="0">
+              <a:buNone/>
+            </a:pPr>
+            <a:r>
+              <a:rPr lang="en-US" sz="1900" b="1" dirty="0">
+                <a:solidFill>
+                  <a:srgbClr val="264653"/>
+                </a:solidFill>
+                <a:latin typeface="Meiryo" pitchFamily="34" charset="0"/>
+                <a:ea typeface="Meiryo" pitchFamily="34" charset="-122"/>
+                <a:cs typeface="Meiryo" pitchFamily="34" charset="-120"/>
+              </a:rPr>
+              <a:t>見出しの文字（青い大きな字）</a:t>
+            </a:r>
+            <a:endParaRPr lang="en-US" sz="1900" dirty="0"/>
+          </a:p>
+        </p:txBody>
+      </p:sp>
+      <p:sp>
+        <p:nvSpPr>
+          <p:cNvPr id="19" name="Text 17"/>
+          <p:cNvSpPr/>
+          <p:nvPr/>
+        </p:nvSpPr>
+        <p:spPr>
+          <a:xfrm>
+            <a:off x="1691640" y="5285232"/>
+            <a:ext cx="9601200" cy="457200"/>
+          </a:xfrm>
+          <a:prstGeom prst="rect">
+            <a:avLst/>
+          </a:prstGeom>
+          <a:noFill/>
+          <a:ln/>
+        </p:spPr>
+        <p:txBody>
+          <a:bodyPr wrap="square" lIns="0" tIns="0" rIns="0" bIns="0" rtlCol="0" anchor="ctr"/>
+          <a:lstStyle/>
+          <a:p>
+            <a:pPr indent="0" marL="0">
+              <a:buNone/>
+            </a:pPr>
+            <a:r>
+              <a:rPr lang="en-US" sz="1500" dirty="0">
+                <a:solidFill>
+                  <a:srgbClr val="5E7681"/>
+                </a:solidFill>
+                <a:latin typeface="Meiryo" pitchFamily="34" charset="0"/>
+                <a:ea typeface="Meiryo" pitchFamily="34" charset="-122"/>
+                <a:cs typeface="Meiryo" pitchFamily="34" charset="-120"/>
+              </a:rPr>
+              <a:t>変えるとページ内リンクがずれることがあります。変えたいときはご連絡ください</a:t>
+            </a:r>
+            <a:endParaRPr lang="en-US" sz="1500" dirty="0"/>
+          </a:p>
+        </p:txBody>
+      </p:sp>
+      <p:sp>
+        <p:nvSpPr>
+          <p:cNvPr id="20" name="Shape 18"/>
+          <p:cNvSpPr/>
+          <p:nvPr/>
+        </p:nvSpPr>
+        <p:spPr>
+          <a:xfrm>
+            <a:off x="640080" y="5623560"/>
+            <a:ext cx="11064240" cy="731520"/>
+          </a:xfrm>
+          <a:prstGeom prst="roundRect">
+            <a:avLst>
+              <a:gd name="adj" fmla="val 12500"/>
+            </a:avLst>
+          </a:prstGeom>
+          <a:solidFill>
+            <a:srgbClr val="EDF6EE"/>
+          </a:solidFill>
+          <a:ln/>
+        </p:spPr>
+      </p:sp>
+      <p:sp>
+        <p:nvSpPr>
+          <p:cNvPr id="21" name="Text 19"/>
+          <p:cNvSpPr/>
+          <p:nvPr/>
+        </p:nvSpPr>
+        <p:spPr>
+          <a:xfrm>
+            <a:off x="868680" y="5788152"/>
+            <a:ext cx="10607040" cy="402336"/>
           </a:xfrm>
           <a:prstGeom prst="rect">
             <a:avLst/>
@@ -4225,33 +4374,13 @@
             <a:r>
               <a:rPr lang="en-US" sz="1600" b="1" dirty="0">
                 <a:solidFill>
-                  <a:srgbClr val="264653"/>
-                </a:solidFill>
-                <a:latin typeface="Meiryo" pitchFamily="34" charset="0"/>
-                <a:ea typeface="Meiryo" pitchFamily="34" charset="-122"/>
-                <a:cs typeface="Meiryo" pitchFamily="34" charset="-120"/>
-              </a:rPr>
-              <a:t>写真は横1200ピクセルくらいがおすすめです。</a:t>
-            </a:r>
-            <a:endParaRPr lang="en-US" sz="1600" dirty="0"/>
-          </a:p>
-          <a:p>
-            <a:pPr indent="0" marL="0">
-              <a:lnSpc>
-                <a:spcPts val="2100"/>
-              </a:lnSpc>
-              <a:buNone/>
-            </a:pPr>
-            <a:r>
-              <a:rPr lang="en-US" sz="1600" b="1" dirty="0">
-                <a:solidFill>
-                  <a:srgbClr val="264653"/>
-                </a:solidFill>
-                <a:latin typeface="Meiryo" pitchFamily="34" charset="0"/>
-                <a:ea typeface="Meiryo" pitchFamily="34" charset="-122"/>
-                <a:cs typeface="Meiryo" pitchFamily="34" charset="-120"/>
-              </a:rPr>
-              <a:t>スマホで撮ったままでも表示はされますが、ページが重くなります。</a:t>
+                  <a:srgbClr val="2E7D32"/>
+                </a:solidFill>
+                <a:latin typeface="Meiryo" pitchFamily="34" charset="0"/>
+                <a:ea typeface="Meiryo" pitchFamily="34" charset="-122"/>
+                <a:cs typeface="Meiryo" pitchFamily="34" charset="-120"/>
+              </a:rPr>
+              <a:t>本文（普通の大きさの文章）は、どこでも自由に直していただいて大丈夫です。</a:t>
             </a:r>
             <a:endParaRPr lang="en-US" sz="1600" dirty="0"/>
           </a:p>
@@ -4322,7 +4451,7 @@
                 <a:ea typeface="Meiryo" pitchFamily="34" charset="-122"/>
                 <a:cs typeface="Meiryo" pitchFamily="34" charset="-120"/>
               </a:rPr>
-              <a:t>⑥ 保存する前に確認する</a:t>
+              <a:t>⑤ 写真を差し替える</a:t>
             </a:r>
             <a:endParaRPr lang="en-US" sz="3400" dirty="0"/>
           </a:p>
@@ -4331,45 +4460,6 @@
       <p:sp>
         <p:nvSpPr>
           <p:cNvPr id="3" name="Text 1"/>
-          <p:cNvSpPr/>
-          <p:nvPr/>
-        </p:nvSpPr>
-        <p:spPr>
-          <a:xfrm>
-            <a:off x="566928" y="1024128"/>
-            <a:ext cx="11064240" cy="365760"/>
-          </a:xfrm>
-          <a:prstGeom prst="rect">
-            <a:avLst/>
-          </a:prstGeom>
-          <a:noFill/>
-          <a:ln/>
-        </p:spPr>
-        <p:txBody>
-          <a:bodyPr wrap="square" lIns="0" tIns="0" rIns="0" bIns="0" rtlCol="0" anchor="ctr"/>
-          <a:lstStyle/>
-          <a:p>
-            <a:pPr indent="0" marL="0">
-              <a:buNone/>
-            </a:pPr>
-            <a:r>
-              <a:rPr lang="en-US" sz="1600" dirty="0">
-                <a:solidFill>
-                  <a:srgbClr val="5E7681"/>
-                </a:solidFill>
-                <a:latin typeface="Meiryo" pitchFamily="34" charset="0"/>
-                <a:ea typeface="Meiryo" pitchFamily="34" charset="-122"/>
-                <a:cs typeface="Meiryo" pitchFamily="34" charset="-120"/>
-              </a:rPr>
-              <a:t>お客様に見える形で見られます</a:t>
-            </a:r>
-            <a:endParaRPr lang="en-US" sz="1600" dirty="0"/>
-          </a:p>
-        </p:txBody>
-      </p:sp>
-      <p:sp>
-        <p:nvSpPr>
-          <p:cNvPr id="4" name="Text 2"/>
           <p:cNvSpPr/>
           <p:nvPr/>
         </p:nvSpPr>
@@ -4408,18 +4498,410 @@
       </p:sp>
       <p:sp>
         <p:nvSpPr>
-          <p:cNvPr id="5" name="Shape 3"/>
-          <p:cNvSpPr/>
-          <p:nvPr/>
-        </p:nvSpPr>
-        <p:spPr>
-          <a:xfrm>
-            <a:off x="640080" y="1783080"/>
-            <a:ext cx="11064240" cy="1188720"/>
+          <p:cNvPr id="4" name="Shape 2"/>
+          <p:cNvSpPr/>
+          <p:nvPr/>
+        </p:nvSpPr>
+        <p:spPr>
+          <a:xfrm>
+            <a:off x="685800" y="1828800"/>
+            <a:ext cx="457200" cy="457200"/>
+          </a:xfrm>
+          <a:prstGeom prst="ellipse">
+            <a:avLst/>
+          </a:prstGeom>
+          <a:solidFill>
+            <a:srgbClr val="2E7D32"/>
+          </a:solidFill>
+          <a:ln/>
+        </p:spPr>
+      </p:sp>
+      <p:sp>
+        <p:nvSpPr>
+          <p:cNvPr id="5" name="Text 3"/>
+          <p:cNvSpPr/>
+          <p:nvPr/>
+        </p:nvSpPr>
+        <p:spPr>
+          <a:xfrm>
+            <a:off x="685800" y="1883664"/>
+            <a:ext cx="457200" cy="347472"/>
+          </a:xfrm>
+          <a:prstGeom prst="rect">
+            <a:avLst/>
+          </a:prstGeom>
+          <a:noFill/>
+          <a:ln/>
+        </p:spPr>
+        <p:txBody>
+          <a:bodyPr wrap="square" lIns="0" tIns="0" rIns="0" bIns="0" rtlCol="0" anchor="ctr"/>
+          <a:lstStyle/>
+          <a:p>
+            <a:pPr algn="ctr" indent="0" marL="0">
+              <a:buNone/>
+            </a:pPr>
+            <a:r>
+              <a:rPr lang="en-US" sz="1600" b="1" dirty="0">
+                <a:solidFill>
+                  <a:srgbClr val="FFFFFF"/>
+                </a:solidFill>
+                <a:latin typeface="Meiryo" pitchFamily="34" charset="0"/>
+                <a:ea typeface="Meiryo" pitchFamily="34" charset="-122"/>
+                <a:cs typeface="Meiryo" pitchFamily="34" charset="-120"/>
+              </a:rPr>
+              <a:t>1</a:t>
+            </a:r>
+            <a:endParaRPr lang="en-US" sz="1600" dirty="0"/>
+          </a:p>
+        </p:txBody>
+      </p:sp>
+      <p:sp>
+        <p:nvSpPr>
+          <p:cNvPr id="6" name="Text 4"/>
+          <p:cNvSpPr/>
+          <p:nvPr/>
+        </p:nvSpPr>
+        <p:spPr>
+          <a:xfrm>
+            <a:off x="1344168" y="1874520"/>
+            <a:ext cx="9601200" cy="384048"/>
+          </a:xfrm>
+          <a:prstGeom prst="rect">
+            <a:avLst/>
+          </a:prstGeom>
+          <a:noFill/>
+          <a:ln/>
+        </p:spPr>
+        <p:txBody>
+          <a:bodyPr wrap="square" lIns="0" tIns="0" rIns="0" bIns="0" rtlCol="0" anchor="ctr"/>
+          <a:lstStyle/>
+          <a:p>
+            <a:pPr indent="0" marL="0">
+              <a:buNone/>
+            </a:pPr>
+            <a:r>
+              <a:rPr lang="en-US" sz="1900" dirty="0">
+                <a:solidFill>
+                  <a:srgbClr val="1E2D34"/>
+                </a:solidFill>
+                <a:latin typeface="Meiryo" pitchFamily="34" charset="0"/>
+                <a:ea typeface="Meiryo" pitchFamily="34" charset="-122"/>
+                <a:cs typeface="Meiryo" pitchFamily="34" charset="-120"/>
+              </a:rPr>
+              <a:t>写真をクリック</a:t>
+            </a:r>
+            <a:endParaRPr lang="en-US" sz="1900" dirty="0"/>
+          </a:p>
+        </p:txBody>
+      </p:sp>
+      <p:sp>
+        <p:nvSpPr>
+          <p:cNvPr id="7" name="Shape 5"/>
+          <p:cNvSpPr/>
+          <p:nvPr/>
+        </p:nvSpPr>
+        <p:spPr>
+          <a:xfrm>
+            <a:off x="685800" y="2560320"/>
+            <a:ext cx="457200" cy="457200"/>
+          </a:xfrm>
+          <a:prstGeom prst="ellipse">
+            <a:avLst/>
+          </a:prstGeom>
+          <a:solidFill>
+            <a:srgbClr val="2E7D32"/>
+          </a:solidFill>
+          <a:ln/>
+        </p:spPr>
+      </p:sp>
+      <p:sp>
+        <p:nvSpPr>
+          <p:cNvPr id="8" name="Text 6"/>
+          <p:cNvSpPr/>
+          <p:nvPr/>
+        </p:nvSpPr>
+        <p:spPr>
+          <a:xfrm>
+            <a:off x="685800" y="2615184"/>
+            <a:ext cx="457200" cy="347472"/>
+          </a:xfrm>
+          <a:prstGeom prst="rect">
+            <a:avLst/>
+          </a:prstGeom>
+          <a:noFill/>
+          <a:ln/>
+        </p:spPr>
+        <p:txBody>
+          <a:bodyPr wrap="square" lIns="0" tIns="0" rIns="0" bIns="0" rtlCol="0" anchor="ctr"/>
+          <a:lstStyle/>
+          <a:p>
+            <a:pPr algn="ctr" indent="0" marL="0">
+              <a:buNone/>
+            </a:pPr>
+            <a:r>
+              <a:rPr lang="en-US" sz="1600" b="1" dirty="0">
+                <a:solidFill>
+                  <a:srgbClr val="FFFFFF"/>
+                </a:solidFill>
+                <a:latin typeface="Meiryo" pitchFamily="34" charset="0"/>
+                <a:ea typeface="Meiryo" pitchFamily="34" charset="-122"/>
+                <a:cs typeface="Meiryo" pitchFamily="34" charset="-120"/>
+              </a:rPr>
+              <a:t>2</a:t>
+            </a:r>
+            <a:endParaRPr lang="en-US" sz="1600" dirty="0"/>
+          </a:p>
+        </p:txBody>
+      </p:sp>
+      <p:sp>
+        <p:nvSpPr>
+          <p:cNvPr id="9" name="Text 7"/>
+          <p:cNvSpPr/>
+          <p:nvPr/>
+        </p:nvSpPr>
+        <p:spPr>
+          <a:xfrm>
+            <a:off x="1344168" y="2606040"/>
+            <a:ext cx="9601200" cy="384048"/>
+          </a:xfrm>
+          <a:prstGeom prst="rect">
+            <a:avLst/>
+          </a:prstGeom>
+          <a:noFill/>
+          <a:ln/>
+        </p:spPr>
+        <p:txBody>
+          <a:bodyPr wrap="square" lIns="0" tIns="0" rIns="0" bIns="0" rtlCol="0" anchor="ctr"/>
+          <a:lstStyle/>
+          <a:p>
+            <a:pPr indent="0" marL="0">
+              <a:buNone/>
+            </a:pPr>
+            <a:r>
+              <a:rPr lang="en-US" sz="1900" dirty="0">
+                <a:solidFill>
+                  <a:srgbClr val="1E2D34"/>
+                </a:solidFill>
+                <a:latin typeface="Meiryo" pitchFamily="34" charset="0"/>
+                <a:ea typeface="Meiryo" pitchFamily="34" charset="-122"/>
+                <a:cs typeface="Meiryo" pitchFamily="34" charset="-120"/>
+              </a:rPr>
+              <a:t>出てきたメニューの【置換】</a:t>
+            </a:r>
+            <a:endParaRPr lang="en-US" sz="1900" dirty="0"/>
+          </a:p>
+        </p:txBody>
+      </p:sp>
+      <p:sp>
+        <p:nvSpPr>
+          <p:cNvPr id="10" name="Shape 8"/>
+          <p:cNvSpPr/>
+          <p:nvPr/>
+        </p:nvSpPr>
+        <p:spPr>
+          <a:xfrm>
+            <a:off x="685800" y="3291840"/>
+            <a:ext cx="457200" cy="457200"/>
+          </a:xfrm>
+          <a:prstGeom prst="ellipse">
+            <a:avLst/>
+          </a:prstGeom>
+          <a:solidFill>
+            <a:srgbClr val="2E7D32"/>
+          </a:solidFill>
+          <a:ln/>
+        </p:spPr>
+      </p:sp>
+      <p:sp>
+        <p:nvSpPr>
+          <p:cNvPr id="11" name="Text 9"/>
+          <p:cNvSpPr/>
+          <p:nvPr/>
+        </p:nvSpPr>
+        <p:spPr>
+          <a:xfrm>
+            <a:off x="685800" y="3346704"/>
+            <a:ext cx="457200" cy="347472"/>
+          </a:xfrm>
+          <a:prstGeom prst="rect">
+            <a:avLst/>
+          </a:prstGeom>
+          <a:noFill/>
+          <a:ln/>
+        </p:spPr>
+        <p:txBody>
+          <a:bodyPr wrap="square" lIns="0" tIns="0" rIns="0" bIns="0" rtlCol="0" anchor="ctr"/>
+          <a:lstStyle/>
+          <a:p>
+            <a:pPr algn="ctr" indent="0" marL="0">
+              <a:buNone/>
+            </a:pPr>
+            <a:r>
+              <a:rPr lang="en-US" sz="1600" b="1" dirty="0">
+                <a:solidFill>
+                  <a:srgbClr val="FFFFFF"/>
+                </a:solidFill>
+                <a:latin typeface="Meiryo" pitchFamily="34" charset="0"/>
+                <a:ea typeface="Meiryo" pitchFamily="34" charset="-122"/>
+                <a:cs typeface="Meiryo" pitchFamily="34" charset="-120"/>
+              </a:rPr>
+              <a:t>3</a:t>
+            </a:r>
+            <a:endParaRPr lang="en-US" sz="1600" dirty="0"/>
+          </a:p>
+        </p:txBody>
+      </p:sp>
+      <p:sp>
+        <p:nvSpPr>
+          <p:cNvPr id="12" name="Text 10"/>
+          <p:cNvSpPr/>
+          <p:nvPr/>
+        </p:nvSpPr>
+        <p:spPr>
+          <a:xfrm>
+            <a:off x="1344168" y="3337560"/>
+            <a:ext cx="9601200" cy="384048"/>
+          </a:xfrm>
+          <a:prstGeom prst="rect">
+            <a:avLst/>
+          </a:prstGeom>
+          <a:noFill/>
+          <a:ln/>
+        </p:spPr>
+        <p:txBody>
+          <a:bodyPr wrap="square" lIns="0" tIns="0" rIns="0" bIns="0" rtlCol="0" anchor="ctr"/>
+          <a:lstStyle/>
+          <a:p>
+            <a:pPr indent="0" marL="0">
+              <a:buNone/>
+            </a:pPr>
+            <a:r>
+              <a:rPr lang="en-US" sz="1900" dirty="0">
+                <a:solidFill>
+                  <a:srgbClr val="1E2D34"/>
+                </a:solidFill>
+                <a:latin typeface="Meiryo" pitchFamily="34" charset="0"/>
+                <a:ea typeface="Meiryo" pitchFamily="34" charset="-122"/>
+                <a:cs typeface="Meiryo" pitchFamily="34" charset="-120"/>
+              </a:rPr>
+              <a:t>「アップロード」で新しい写真を選ぶ</a:t>
+            </a:r>
+            <a:endParaRPr lang="en-US" sz="1900" dirty="0"/>
+          </a:p>
+        </p:txBody>
+      </p:sp>
+      <p:sp>
+        <p:nvSpPr>
+          <p:cNvPr id="13" name="Shape 11"/>
+          <p:cNvSpPr/>
+          <p:nvPr/>
+        </p:nvSpPr>
+        <p:spPr>
+          <a:xfrm>
+            <a:off x="685800" y="4023360"/>
+            <a:ext cx="457200" cy="457200"/>
+          </a:xfrm>
+          <a:prstGeom prst="ellipse">
+            <a:avLst/>
+          </a:prstGeom>
+          <a:solidFill>
+            <a:srgbClr val="2E7D32"/>
+          </a:solidFill>
+          <a:ln/>
+        </p:spPr>
+      </p:sp>
+      <p:sp>
+        <p:nvSpPr>
+          <p:cNvPr id="14" name="Text 12"/>
+          <p:cNvSpPr/>
+          <p:nvPr/>
+        </p:nvSpPr>
+        <p:spPr>
+          <a:xfrm>
+            <a:off x="685800" y="4078224"/>
+            <a:ext cx="457200" cy="347472"/>
+          </a:xfrm>
+          <a:prstGeom prst="rect">
+            <a:avLst/>
+          </a:prstGeom>
+          <a:noFill/>
+          <a:ln/>
+        </p:spPr>
+        <p:txBody>
+          <a:bodyPr wrap="square" lIns="0" tIns="0" rIns="0" bIns="0" rtlCol="0" anchor="ctr"/>
+          <a:lstStyle/>
+          <a:p>
+            <a:pPr algn="ctr" indent="0" marL="0">
+              <a:buNone/>
+            </a:pPr>
+            <a:r>
+              <a:rPr lang="en-US" sz="1600" b="1" dirty="0">
+                <a:solidFill>
+                  <a:srgbClr val="FFFFFF"/>
+                </a:solidFill>
+                <a:latin typeface="Meiryo" pitchFamily="34" charset="0"/>
+                <a:ea typeface="Meiryo" pitchFamily="34" charset="-122"/>
+                <a:cs typeface="Meiryo" pitchFamily="34" charset="-120"/>
+              </a:rPr>
+              <a:t>4</a:t>
+            </a:r>
+            <a:endParaRPr lang="en-US" sz="1600" dirty="0"/>
+          </a:p>
+        </p:txBody>
+      </p:sp>
+      <p:sp>
+        <p:nvSpPr>
+          <p:cNvPr id="15" name="Text 13"/>
+          <p:cNvSpPr/>
+          <p:nvPr/>
+        </p:nvSpPr>
+        <p:spPr>
+          <a:xfrm>
+            <a:off x="1344168" y="4069080"/>
+            <a:ext cx="9601200" cy="384048"/>
+          </a:xfrm>
+          <a:prstGeom prst="rect">
+            <a:avLst/>
+          </a:prstGeom>
+          <a:noFill/>
+          <a:ln/>
+        </p:spPr>
+        <p:txBody>
+          <a:bodyPr wrap="square" lIns="0" tIns="0" rIns="0" bIns="0" rtlCol="0" anchor="ctr"/>
+          <a:lstStyle/>
+          <a:p>
+            <a:pPr indent="0" marL="0">
+              <a:buNone/>
+            </a:pPr>
+            <a:r>
+              <a:rPr lang="en-US" sz="1900" dirty="0">
+                <a:solidFill>
+                  <a:srgbClr val="1E2D34"/>
+                </a:solidFill>
+                <a:latin typeface="Meiryo" pitchFamily="34" charset="0"/>
+                <a:ea typeface="Meiryo" pitchFamily="34" charset="-122"/>
+                <a:cs typeface="Meiryo" pitchFamily="34" charset="-120"/>
+              </a:rPr>
+              <a:t>右上の【保存】</a:t>
+            </a:r>
+            <a:endParaRPr lang="en-US" sz="1900" dirty="0"/>
+          </a:p>
+        </p:txBody>
+      </p:sp>
+      <p:sp>
+        <p:nvSpPr>
+          <p:cNvPr id="16" name="Shape 14"/>
+          <p:cNvSpPr/>
+          <p:nvPr/>
+        </p:nvSpPr>
+        <p:spPr>
+          <a:xfrm>
+            <a:off x="640080" y="4937760"/>
+            <a:ext cx="11064240" cy="1097280"/>
           </a:xfrm>
           <a:prstGeom prst="roundRect">
             <a:avLst>
-              <a:gd name="adj" fmla="val 9231"/>
+              <a:gd name="adj" fmla="val 8333"/>
             </a:avLst>
           </a:prstGeom>
           <a:solidFill>
@@ -4430,408 +4912,14 @@
       </p:sp>
       <p:sp>
         <p:nvSpPr>
-          <p:cNvPr id="6" name="Text 4"/>
-          <p:cNvSpPr/>
-          <p:nvPr/>
-        </p:nvSpPr>
-        <p:spPr>
-          <a:xfrm>
-            <a:off x="960120" y="2148840"/>
-            <a:ext cx="10515600" cy="457200"/>
-          </a:xfrm>
-          <a:prstGeom prst="rect">
-            <a:avLst/>
-          </a:prstGeom>
-          <a:noFill/>
-          <a:ln/>
-        </p:spPr>
-        <p:txBody>
-          <a:bodyPr wrap="square" lIns="0" tIns="0" rIns="0" bIns="0" rtlCol="0" anchor="ctr"/>
-          <a:lstStyle/>
-          <a:p>
-            <a:pPr indent="0" marL="0">
-              <a:buNone/>
-            </a:pPr>
-            <a:r>
-              <a:rPr lang="en-US" sz="2200" b="1" dirty="0">
-                <a:solidFill>
-                  <a:srgbClr val="264653"/>
-                </a:solidFill>
-                <a:latin typeface="Meiryo" pitchFamily="34" charset="0"/>
-                <a:ea typeface="Meiryo" pitchFamily="34" charset="-122"/>
-                <a:cs typeface="Meiryo" pitchFamily="34" charset="-120"/>
-              </a:rPr>
-              <a:t>右上の【プレビュー】 →「新しいタブでプレビュー」</a:t>
-            </a:r>
-            <a:endParaRPr lang="en-US" sz="2200" dirty="0"/>
-          </a:p>
-        </p:txBody>
-      </p:sp>
-      <p:sp>
-        <p:nvSpPr>
-          <p:cNvPr id="7" name="Text 5"/>
-          <p:cNvSpPr/>
-          <p:nvPr/>
-        </p:nvSpPr>
-        <p:spPr>
-          <a:xfrm>
-            <a:off x="685800" y="3200400"/>
-            <a:ext cx="10972800" cy="365760"/>
-          </a:xfrm>
-          <a:prstGeom prst="rect">
-            <a:avLst/>
-          </a:prstGeom>
-          <a:noFill/>
-          <a:ln/>
-        </p:spPr>
-        <p:txBody>
-          <a:bodyPr wrap="square" lIns="0" tIns="0" rIns="0" bIns="0" rtlCol="0" anchor="ctr"/>
-          <a:lstStyle/>
-          <a:p>
-            <a:pPr indent="0" marL="0">
-              <a:buNone/>
-            </a:pPr>
-            <a:r>
-              <a:rPr lang="en-US" sz="2000" b="1" dirty="0">
-                <a:solidFill>
-                  <a:srgbClr val="264653"/>
-                </a:solidFill>
-                <a:latin typeface="Meiryo" pitchFamily="34" charset="0"/>
-                <a:ea typeface="Meiryo" pitchFamily="34" charset="-122"/>
-                <a:cs typeface="Meiryo" pitchFamily="34" charset="-120"/>
-              </a:rPr>
-              <a:t>反映されないと感じたときは</a:t>
-            </a:r>
-            <a:endParaRPr lang="en-US" sz="2000" dirty="0"/>
-          </a:p>
-        </p:txBody>
-      </p:sp>
-      <p:sp>
-        <p:nvSpPr>
-          <p:cNvPr id="8" name="Shape 6"/>
-          <p:cNvSpPr/>
-          <p:nvPr/>
-        </p:nvSpPr>
-        <p:spPr>
-          <a:xfrm>
-            <a:off x="685800" y="3657600"/>
-            <a:ext cx="457200" cy="457200"/>
-          </a:xfrm>
-          <a:prstGeom prst="ellipse">
-            <a:avLst/>
-          </a:prstGeom>
-          <a:solidFill>
-            <a:srgbClr val="DD8236"/>
-          </a:solidFill>
-          <a:ln/>
-        </p:spPr>
-      </p:sp>
-      <p:sp>
-        <p:nvSpPr>
-          <p:cNvPr id="9" name="Text 7"/>
-          <p:cNvSpPr/>
-          <p:nvPr/>
-        </p:nvSpPr>
-        <p:spPr>
-          <a:xfrm>
-            <a:off x="685800" y="3712464"/>
-            <a:ext cx="457200" cy="347472"/>
-          </a:xfrm>
-          <a:prstGeom prst="rect">
-            <a:avLst/>
-          </a:prstGeom>
-          <a:noFill/>
-          <a:ln/>
-        </p:spPr>
-        <p:txBody>
-          <a:bodyPr wrap="square" lIns="0" tIns="0" rIns="0" bIns="0" rtlCol="0" anchor="ctr"/>
-          <a:lstStyle/>
-          <a:p>
-            <a:pPr algn="ctr" indent="0" marL="0">
-              <a:buNone/>
-            </a:pPr>
-            <a:r>
-              <a:rPr lang="en-US" sz="1600" b="1" dirty="0">
-                <a:solidFill>
-                  <a:srgbClr val="FFFFFF"/>
-                </a:solidFill>
-                <a:latin typeface="Meiryo" pitchFamily="34" charset="0"/>
-                <a:ea typeface="Meiryo" pitchFamily="34" charset="-122"/>
-                <a:cs typeface="Meiryo" pitchFamily="34" charset="-120"/>
-              </a:rPr>
-              <a:t>1</a:t>
-            </a:r>
-            <a:endParaRPr lang="en-US" sz="1600" dirty="0"/>
-          </a:p>
-        </p:txBody>
-      </p:sp>
-      <p:sp>
-        <p:nvSpPr>
-          <p:cNvPr id="10" name="Text 8"/>
-          <p:cNvSpPr/>
-          <p:nvPr/>
-        </p:nvSpPr>
-        <p:spPr>
-          <a:xfrm>
-            <a:off x="1344168" y="3703320"/>
-            <a:ext cx="9601200" cy="384048"/>
-          </a:xfrm>
-          <a:prstGeom prst="rect">
-            <a:avLst/>
-          </a:prstGeom>
-          <a:noFill/>
-          <a:ln/>
-        </p:spPr>
-        <p:txBody>
-          <a:bodyPr wrap="square" lIns="0" tIns="0" rIns="0" bIns="0" rtlCol="0" anchor="ctr"/>
-          <a:lstStyle/>
-          <a:p>
-            <a:pPr indent="0" marL="0">
-              <a:buNone/>
-            </a:pPr>
-            <a:r>
-              <a:rPr lang="en-US" sz="1700" dirty="0">
-                <a:solidFill>
-                  <a:srgbClr val="1E2D34"/>
-                </a:solidFill>
-                <a:latin typeface="Meiryo" pitchFamily="34" charset="0"/>
-                <a:ea typeface="Meiryo" pitchFamily="34" charset="-122"/>
-                <a:cs typeface="Meiryo" pitchFamily="34" charset="-120"/>
-              </a:rPr>
-              <a:t>5分ほど待って、もう一度ひらく</a:t>
-            </a:r>
-            <a:endParaRPr lang="en-US" sz="1700" dirty="0"/>
-          </a:p>
-        </p:txBody>
-      </p:sp>
-      <p:sp>
-        <p:nvSpPr>
-          <p:cNvPr id="11" name="Shape 9"/>
-          <p:cNvSpPr/>
-          <p:nvPr/>
-        </p:nvSpPr>
-        <p:spPr>
-          <a:xfrm>
-            <a:off x="685800" y="4389120"/>
-            <a:ext cx="457200" cy="457200"/>
-          </a:xfrm>
-          <a:prstGeom prst="ellipse">
-            <a:avLst/>
-          </a:prstGeom>
-          <a:solidFill>
-            <a:srgbClr val="DD8236"/>
-          </a:solidFill>
-          <a:ln/>
-        </p:spPr>
-      </p:sp>
-      <p:sp>
-        <p:nvSpPr>
-          <p:cNvPr id="12" name="Text 10"/>
-          <p:cNvSpPr/>
-          <p:nvPr/>
-        </p:nvSpPr>
-        <p:spPr>
-          <a:xfrm>
-            <a:off x="685800" y="4443984"/>
-            <a:ext cx="457200" cy="347472"/>
-          </a:xfrm>
-          <a:prstGeom prst="rect">
-            <a:avLst/>
-          </a:prstGeom>
-          <a:noFill/>
-          <a:ln/>
-        </p:spPr>
-        <p:txBody>
-          <a:bodyPr wrap="square" lIns="0" tIns="0" rIns="0" bIns="0" rtlCol="0" anchor="ctr"/>
-          <a:lstStyle/>
-          <a:p>
-            <a:pPr algn="ctr" indent="0" marL="0">
-              <a:buNone/>
-            </a:pPr>
-            <a:r>
-              <a:rPr lang="en-US" sz="1600" b="1" dirty="0">
-                <a:solidFill>
-                  <a:srgbClr val="FFFFFF"/>
-                </a:solidFill>
-                <a:latin typeface="Meiryo" pitchFamily="34" charset="0"/>
-                <a:ea typeface="Meiryo" pitchFamily="34" charset="-122"/>
-                <a:cs typeface="Meiryo" pitchFamily="34" charset="-120"/>
-              </a:rPr>
-              <a:t>2</a:t>
-            </a:r>
-            <a:endParaRPr lang="en-US" sz="1600" dirty="0"/>
-          </a:p>
-        </p:txBody>
-      </p:sp>
-      <p:sp>
-        <p:nvSpPr>
-          <p:cNvPr id="13" name="Text 11"/>
-          <p:cNvSpPr/>
-          <p:nvPr/>
-        </p:nvSpPr>
-        <p:spPr>
-          <a:xfrm>
-            <a:off x="1344168" y="4434840"/>
-            <a:ext cx="9601200" cy="384048"/>
-          </a:xfrm>
-          <a:prstGeom prst="rect">
-            <a:avLst/>
-          </a:prstGeom>
-          <a:noFill/>
-          <a:ln/>
-        </p:spPr>
-        <p:txBody>
-          <a:bodyPr wrap="square" lIns="0" tIns="0" rIns="0" bIns="0" rtlCol="0" anchor="ctr"/>
-          <a:lstStyle/>
-          <a:p>
-            <a:pPr indent="0" marL="0">
-              <a:buNone/>
-            </a:pPr>
-            <a:r>
-              <a:rPr lang="en-US" sz="1700" dirty="0">
-                <a:solidFill>
-                  <a:srgbClr val="1E2D34"/>
-                </a:solidFill>
-                <a:latin typeface="Meiryo" pitchFamily="34" charset="0"/>
-                <a:ea typeface="Meiryo" pitchFamily="34" charset="-122"/>
-                <a:cs typeface="Meiryo" pitchFamily="34" charset="-120"/>
-              </a:rPr>
-              <a:t>Ctrl を押しながら F5</a:t>
-            </a:r>
-            <a:endParaRPr lang="en-US" sz="1700" dirty="0"/>
-          </a:p>
-        </p:txBody>
-      </p:sp>
-      <p:sp>
-        <p:nvSpPr>
-          <p:cNvPr id="14" name="Shape 12"/>
-          <p:cNvSpPr/>
-          <p:nvPr/>
-        </p:nvSpPr>
-        <p:spPr>
-          <a:xfrm>
-            <a:off x="685800" y="5120640"/>
-            <a:ext cx="457200" cy="457200"/>
-          </a:xfrm>
-          <a:prstGeom prst="ellipse">
-            <a:avLst/>
-          </a:prstGeom>
-          <a:solidFill>
-            <a:srgbClr val="DD8236"/>
-          </a:solidFill>
-          <a:ln/>
-        </p:spPr>
-      </p:sp>
-      <p:sp>
-        <p:nvSpPr>
-          <p:cNvPr id="15" name="Text 13"/>
-          <p:cNvSpPr/>
-          <p:nvPr/>
-        </p:nvSpPr>
-        <p:spPr>
-          <a:xfrm>
-            <a:off x="685800" y="5175504"/>
-            <a:ext cx="457200" cy="347472"/>
-          </a:xfrm>
-          <a:prstGeom prst="rect">
-            <a:avLst/>
-          </a:prstGeom>
-          <a:noFill/>
-          <a:ln/>
-        </p:spPr>
-        <p:txBody>
-          <a:bodyPr wrap="square" lIns="0" tIns="0" rIns="0" bIns="0" rtlCol="0" anchor="ctr"/>
-          <a:lstStyle/>
-          <a:p>
-            <a:pPr algn="ctr" indent="0" marL="0">
-              <a:buNone/>
-            </a:pPr>
-            <a:r>
-              <a:rPr lang="en-US" sz="1600" b="1" dirty="0">
-                <a:solidFill>
-                  <a:srgbClr val="FFFFFF"/>
-                </a:solidFill>
-                <a:latin typeface="Meiryo" pitchFamily="34" charset="0"/>
-                <a:ea typeface="Meiryo" pitchFamily="34" charset="-122"/>
-                <a:cs typeface="Meiryo" pitchFamily="34" charset="-120"/>
-              </a:rPr>
-              <a:t>3</a:t>
-            </a:r>
-            <a:endParaRPr lang="en-US" sz="1600" dirty="0"/>
-          </a:p>
-        </p:txBody>
-      </p:sp>
-      <p:sp>
-        <p:nvSpPr>
-          <p:cNvPr id="16" name="Text 14"/>
-          <p:cNvSpPr/>
-          <p:nvPr/>
-        </p:nvSpPr>
-        <p:spPr>
-          <a:xfrm>
-            <a:off x="1344168" y="5166360"/>
-            <a:ext cx="9601200" cy="384048"/>
-          </a:xfrm>
-          <a:prstGeom prst="rect">
-            <a:avLst/>
-          </a:prstGeom>
-          <a:noFill/>
-          <a:ln/>
-        </p:spPr>
-        <p:txBody>
-          <a:bodyPr wrap="square" lIns="0" tIns="0" rIns="0" bIns="0" rtlCol="0" anchor="ctr"/>
-          <a:lstStyle/>
-          <a:p>
-            <a:pPr indent="0" marL="0">
-              <a:buNone/>
-            </a:pPr>
-            <a:r>
-              <a:rPr lang="en-US" sz="1700" dirty="0">
-                <a:solidFill>
-                  <a:srgbClr val="1E2D34"/>
-                </a:solidFill>
-                <a:latin typeface="Meiryo" pitchFamily="34" charset="0"/>
-                <a:ea typeface="Meiryo" pitchFamily="34" charset="-122"/>
-                <a:cs typeface="Meiryo" pitchFamily="34" charset="-120"/>
-              </a:rPr>
-              <a:t>URLの最後に ?v=2 を付けてひらく</a:t>
-            </a:r>
-            <a:endParaRPr lang="en-US" sz="1700" dirty="0"/>
-          </a:p>
-        </p:txBody>
-      </p:sp>
-      <p:sp>
-        <p:nvSpPr>
-          <p:cNvPr id="17" name="Shape 15"/>
-          <p:cNvSpPr/>
-          <p:nvPr/>
-        </p:nvSpPr>
-        <p:spPr>
-          <a:xfrm>
-            <a:off x="640080" y="5623560"/>
-            <a:ext cx="11064240" cy="685800"/>
-          </a:xfrm>
-          <a:prstGeom prst="roundRect">
-            <a:avLst>
-              <a:gd name="adj" fmla="val 13333"/>
-            </a:avLst>
-          </a:prstGeom>
-          <a:solidFill>
-            <a:srgbClr val="EDF6EE"/>
-          </a:solidFill>
-          <a:ln/>
-        </p:spPr>
-      </p:sp>
-      <p:sp>
-        <p:nvSpPr>
-          <p:cNvPr id="18" name="Text 16"/>
-          <p:cNvSpPr/>
-          <p:nvPr/>
-        </p:nvSpPr>
-        <p:spPr>
-          <a:xfrm>
-            <a:off x="868680" y="5788152"/>
-            <a:ext cx="10607040" cy="356616"/>
+          <p:cNvPr id="17" name="Text 15"/>
+          <p:cNvSpPr/>
+          <p:nvPr/>
+        </p:nvSpPr>
+        <p:spPr>
+          <a:xfrm>
+            <a:off x="868680" y="5102352"/>
+            <a:ext cx="10607040" cy="768096"/>
           </a:xfrm>
           <a:prstGeom prst="rect">
             <a:avLst/>
@@ -4852,13 +4940,33 @@
             <a:r>
               <a:rPr lang="en-US" sz="1600" b="1" dirty="0">
                 <a:solidFill>
-                  <a:srgbClr val="2E7D32"/>
-                </a:solidFill>
-                <a:latin typeface="Meiryo" pitchFamily="34" charset="0"/>
-                <a:ea typeface="Meiryo" pitchFamily="34" charset="-122"/>
-                <a:cs typeface="Meiryo" pitchFamily="34" charset="-120"/>
-              </a:rPr>
-              <a:t>②③で新しくなっていれば、更新は成功しています。</a:t>
+                  <a:srgbClr val="264653"/>
+                </a:solidFill>
+                <a:latin typeface="Meiryo" pitchFamily="34" charset="0"/>
+                <a:ea typeface="Meiryo" pitchFamily="34" charset="-122"/>
+                <a:cs typeface="Meiryo" pitchFamily="34" charset="-120"/>
+              </a:rPr>
+              <a:t>写真は横1200ピクセルくらいがおすすめです。</a:t>
+            </a:r>
+            <a:endParaRPr lang="en-US" sz="1600" dirty="0"/>
+          </a:p>
+          <a:p>
+            <a:pPr indent="0" marL="0">
+              <a:lnSpc>
+                <a:spcPts val="2100"/>
+              </a:lnSpc>
+              <a:buNone/>
+            </a:pPr>
+            <a:r>
+              <a:rPr lang="en-US" sz="1600" b="1" dirty="0">
+                <a:solidFill>
+                  <a:srgbClr val="264653"/>
+                </a:solidFill>
+                <a:latin typeface="Meiryo" pitchFamily="34" charset="0"/>
+                <a:ea typeface="Meiryo" pitchFamily="34" charset="-122"/>
+                <a:cs typeface="Meiryo" pitchFamily="34" charset="-120"/>
+              </a:rPr>
+              <a:t>スマホで撮ったままでも表示はされますが、ページが重くなります。</a:t>
             </a:r>
             <a:endParaRPr lang="en-US" sz="1600" dirty="0"/>
           </a:p>
@@ -4929,7 +5037,7 @@
                 <a:ea typeface="Meiryo" pitchFamily="34" charset="-122"/>
                 <a:cs typeface="Meiryo" pitchFamily="34" charset="-120"/>
               </a:rPr>
-              <a:t>⑦ 間違えたときは</a:t>
+              <a:t>⑥ 保存する前に確認する</a:t>
             </a:r>
             <a:endParaRPr lang="en-US" sz="3400" dirty="0"/>
           </a:p>
@@ -4968,7 +5076,7 @@
                 <a:ea typeface="Meiryo" pitchFamily="34" charset="-122"/>
                 <a:cs typeface="Meiryo" pitchFamily="34" charset="-120"/>
               </a:rPr>
-              <a:t>元に戻せなくなることはありません</a:t>
+              <a:t>お客様に見える形で見られます</a:t>
             </a:r>
             <a:endParaRPr lang="en-US" sz="1600" dirty="0"/>
           </a:p>
@@ -5013,9 +5121,616 @@
           </a:p>
         </p:txBody>
       </p:sp>
+      <p:sp>
+        <p:nvSpPr>
+          <p:cNvPr id="5" name="Shape 3"/>
+          <p:cNvSpPr/>
+          <p:nvPr/>
+        </p:nvSpPr>
+        <p:spPr>
+          <a:xfrm>
+            <a:off x="640080" y="1783080"/>
+            <a:ext cx="11064240" cy="1188720"/>
+          </a:xfrm>
+          <a:prstGeom prst="roundRect">
+            <a:avLst>
+              <a:gd name="adj" fmla="val 9231"/>
+            </a:avLst>
+          </a:prstGeom>
+          <a:solidFill>
+            <a:srgbClr val="F2F5F6"/>
+          </a:solidFill>
+          <a:ln/>
+        </p:spPr>
+      </p:sp>
+      <p:sp>
+        <p:nvSpPr>
+          <p:cNvPr id="6" name="Text 4"/>
+          <p:cNvSpPr/>
+          <p:nvPr/>
+        </p:nvSpPr>
+        <p:spPr>
+          <a:xfrm>
+            <a:off x="960120" y="2148840"/>
+            <a:ext cx="10515600" cy="457200"/>
+          </a:xfrm>
+          <a:prstGeom prst="rect">
+            <a:avLst/>
+          </a:prstGeom>
+          <a:noFill/>
+          <a:ln/>
+        </p:spPr>
+        <p:txBody>
+          <a:bodyPr wrap="square" lIns="0" tIns="0" rIns="0" bIns="0" rtlCol="0" anchor="ctr"/>
+          <a:lstStyle/>
+          <a:p>
+            <a:pPr indent="0" marL="0">
+              <a:buNone/>
+            </a:pPr>
+            <a:r>
+              <a:rPr lang="en-US" sz="2200" b="1" dirty="0">
+                <a:solidFill>
+                  <a:srgbClr val="264653"/>
+                </a:solidFill>
+                <a:latin typeface="Meiryo" pitchFamily="34" charset="0"/>
+                <a:ea typeface="Meiryo" pitchFamily="34" charset="-122"/>
+                <a:cs typeface="Meiryo" pitchFamily="34" charset="-120"/>
+              </a:rPr>
+              <a:t>右上の【プレビュー】 →「新しいタブでプレビュー」</a:t>
+            </a:r>
+            <a:endParaRPr lang="en-US" sz="2200" dirty="0"/>
+          </a:p>
+        </p:txBody>
+      </p:sp>
+      <p:sp>
+        <p:nvSpPr>
+          <p:cNvPr id="7" name="Text 5"/>
+          <p:cNvSpPr/>
+          <p:nvPr/>
+        </p:nvSpPr>
+        <p:spPr>
+          <a:xfrm>
+            <a:off x="685800" y="3200400"/>
+            <a:ext cx="10972800" cy="365760"/>
+          </a:xfrm>
+          <a:prstGeom prst="rect">
+            <a:avLst/>
+          </a:prstGeom>
+          <a:noFill/>
+          <a:ln/>
+        </p:spPr>
+        <p:txBody>
+          <a:bodyPr wrap="square" lIns="0" tIns="0" rIns="0" bIns="0" rtlCol="0" anchor="ctr"/>
+          <a:lstStyle/>
+          <a:p>
+            <a:pPr indent="0" marL="0">
+              <a:buNone/>
+            </a:pPr>
+            <a:r>
+              <a:rPr lang="en-US" sz="2000" b="1" dirty="0">
+                <a:solidFill>
+                  <a:srgbClr val="264653"/>
+                </a:solidFill>
+                <a:latin typeface="Meiryo" pitchFamily="34" charset="0"/>
+                <a:ea typeface="Meiryo" pitchFamily="34" charset="-122"/>
+                <a:cs typeface="Meiryo" pitchFamily="34" charset="-120"/>
+              </a:rPr>
+              <a:t>反映されないと感じたときは</a:t>
+            </a:r>
+            <a:endParaRPr lang="en-US" sz="2000" dirty="0"/>
+          </a:p>
+        </p:txBody>
+      </p:sp>
+      <p:sp>
+        <p:nvSpPr>
+          <p:cNvPr id="8" name="Shape 6"/>
+          <p:cNvSpPr/>
+          <p:nvPr/>
+        </p:nvSpPr>
+        <p:spPr>
+          <a:xfrm>
+            <a:off x="685800" y="3657600"/>
+            <a:ext cx="457200" cy="457200"/>
+          </a:xfrm>
+          <a:prstGeom prst="ellipse">
+            <a:avLst/>
+          </a:prstGeom>
+          <a:solidFill>
+            <a:srgbClr val="DD8236"/>
+          </a:solidFill>
+          <a:ln/>
+        </p:spPr>
+      </p:sp>
+      <p:sp>
+        <p:nvSpPr>
+          <p:cNvPr id="9" name="Text 7"/>
+          <p:cNvSpPr/>
+          <p:nvPr/>
+        </p:nvSpPr>
+        <p:spPr>
+          <a:xfrm>
+            <a:off x="685800" y="3712464"/>
+            <a:ext cx="457200" cy="347472"/>
+          </a:xfrm>
+          <a:prstGeom prst="rect">
+            <a:avLst/>
+          </a:prstGeom>
+          <a:noFill/>
+          <a:ln/>
+        </p:spPr>
+        <p:txBody>
+          <a:bodyPr wrap="square" lIns="0" tIns="0" rIns="0" bIns="0" rtlCol="0" anchor="ctr"/>
+          <a:lstStyle/>
+          <a:p>
+            <a:pPr algn="ctr" indent="0" marL="0">
+              <a:buNone/>
+            </a:pPr>
+            <a:r>
+              <a:rPr lang="en-US" sz="1600" b="1" dirty="0">
+                <a:solidFill>
+                  <a:srgbClr val="FFFFFF"/>
+                </a:solidFill>
+                <a:latin typeface="Meiryo" pitchFamily="34" charset="0"/>
+                <a:ea typeface="Meiryo" pitchFamily="34" charset="-122"/>
+                <a:cs typeface="Meiryo" pitchFamily="34" charset="-120"/>
+              </a:rPr>
+              <a:t>1</a:t>
+            </a:r>
+            <a:endParaRPr lang="en-US" sz="1600" dirty="0"/>
+          </a:p>
+        </p:txBody>
+      </p:sp>
+      <p:sp>
+        <p:nvSpPr>
+          <p:cNvPr id="10" name="Text 8"/>
+          <p:cNvSpPr/>
+          <p:nvPr/>
+        </p:nvSpPr>
+        <p:spPr>
+          <a:xfrm>
+            <a:off x="1344168" y="3703320"/>
+            <a:ext cx="9601200" cy="384048"/>
+          </a:xfrm>
+          <a:prstGeom prst="rect">
+            <a:avLst/>
+          </a:prstGeom>
+          <a:noFill/>
+          <a:ln/>
+        </p:spPr>
+        <p:txBody>
+          <a:bodyPr wrap="square" lIns="0" tIns="0" rIns="0" bIns="0" rtlCol="0" anchor="ctr"/>
+          <a:lstStyle/>
+          <a:p>
+            <a:pPr indent="0" marL="0">
+              <a:buNone/>
+            </a:pPr>
+            <a:r>
+              <a:rPr lang="en-US" sz="1700" dirty="0">
+                <a:solidFill>
+                  <a:srgbClr val="1E2D34"/>
+                </a:solidFill>
+                <a:latin typeface="Meiryo" pitchFamily="34" charset="0"/>
+                <a:ea typeface="Meiryo" pitchFamily="34" charset="-122"/>
+                <a:cs typeface="Meiryo" pitchFamily="34" charset="-120"/>
+              </a:rPr>
+              <a:t>5分ほど待って、もう一度ひらく</a:t>
+            </a:r>
+            <a:endParaRPr lang="en-US" sz="1700" dirty="0"/>
+          </a:p>
+        </p:txBody>
+      </p:sp>
+      <p:sp>
+        <p:nvSpPr>
+          <p:cNvPr id="11" name="Shape 9"/>
+          <p:cNvSpPr/>
+          <p:nvPr/>
+        </p:nvSpPr>
+        <p:spPr>
+          <a:xfrm>
+            <a:off x="685800" y="4389120"/>
+            <a:ext cx="457200" cy="457200"/>
+          </a:xfrm>
+          <a:prstGeom prst="ellipse">
+            <a:avLst/>
+          </a:prstGeom>
+          <a:solidFill>
+            <a:srgbClr val="DD8236"/>
+          </a:solidFill>
+          <a:ln/>
+        </p:spPr>
+      </p:sp>
+      <p:sp>
+        <p:nvSpPr>
+          <p:cNvPr id="12" name="Text 10"/>
+          <p:cNvSpPr/>
+          <p:nvPr/>
+        </p:nvSpPr>
+        <p:spPr>
+          <a:xfrm>
+            <a:off x="685800" y="4443984"/>
+            <a:ext cx="457200" cy="347472"/>
+          </a:xfrm>
+          <a:prstGeom prst="rect">
+            <a:avLst/>
+          </a:prstGeom>
+          <a:noFill/>
+          <a:ln/>
+        </p:spPr>
+        <p:txBody>
+          <a:bodyPr wrap="square" lIns="0" tIns="0" rIns="0" bIns="0" rtlCol="0" anchor="ctr"/>
+          <a:lstStyle/>
+          <a:p>
+            <a:pPr algn="ctr" indent="0" marL="0">
+              <a:buNone/>
+            </a:pPr>
+            <a:r>
+              <a:rPr lang="en-US" sz="1600" b="1" dirty="0">
+                <a:solidFill>
+                  <a:srgbClr val="FFFFFF"/>
+                </a:solidFill>
+                <a:latin typeface="Meiryo" pitchFamily="34" charset="0"/>
+                <a:ea typeface="Meiryo" pitchFamily="34" charset="-122"/>
+                <a:cs typeface="Meiryo" pitchFamily="34" charset="-120"/>
+              </a:rPr>
+              <a:t>2</a:t>
+            </a:r>
+            <a:endParaRPr lang="en-US" sz="1600" dirty="0"/>
+          </a:p>
+        </p:txBody>
+      </p:sp>
+      <p:sp>
+        <p:nvSpPr>
+          <p:cNvPr id="13" name="Text 11"/>
+          <p:cNvSpPr/>
+          <p:nvPr/>
+        </p:nvSpPr>
+        <p:spPr>
+          <a:xfrm>
+            <a:off x="1344168" y="4434840"/>
+            <a:ext cx="9601200" cy="384048"/>
+          </a:xfrm>
+          <a:prstGeom prst="rect">
+            <a:avLst/>
+          </a:prstGeom>
+          <a:noFill/>
+          <a:ln/>
+        </p:spPr>
+        <p:txBody>
+          <a:bodyPr wrap="square" lIns="0" tIns="0" rIns="0" bIns="0" rtlCol="0" anchor="ctr"/>
+          <a:lstStyle/>
+          <a:p>
+            <a:pPr indent="0" marL="0">
+              <a:buNone/>
+            </a:pPr>
+            <a:r>
+              <a:rPr lang="en-US" sz="1700" dirty="0">
+                <a:solidFill>
+                  <a:srgbClr val="1E2D34"/>
+                </a:solidFill>
+                <a:latin typeface="Meiryo" pitchFamily="34" charset="0"/>
+                <a:ea typeface="Meiryo" pitchFamily="34" charset="-122"/>
+                <a:cs typeface="Meiryo" pitchFamily="34" charset="-120"/>
+              </a:rPr>
+              <a:t>Ctrl を押しながら F5</a:t>
+            </a:r>
+            <a:endParaRPr lang="en-US" sz="1700" dirty="0"/>
+          </a:p>
+        </p:txBody>
+      </p:sp>
+      <p:sp>
+        <p:nvSpPr>
+          <p:cNvPr id="14" name="Shape 12"/>
+          <p:cNvSpPr/>
+          <p:nvPr/>
+        </p:nvSpPr>
+        <p:spPr>
+          <a:xfrm>
+            <a:off x="685800" y="5120640"/>
+            <a:ext cx="457200" cy="457200"/>
+          </a:xfrm>
+          <a:prstGeom prst="ellipse">
+            <a:avLst/>
+          </a:prstGeom>
+          <a:solidFill>
+            <a:srgbClr val="DD8236"/>
+          </a:solidFill>
+          <a:ln/>
+        </p:spPr>
+      </p:sp>
+      <p:sp>
+        <p:nvSpPr>
+          <p:cNvPr id="15" name="Text 13"/>
+          <p:cNvSpPr/>
+          <p:nvPr/>
+        </p:nvSpPr>
+        <p:spPr>
+          <a:xfrm>
+            <a:off x="685800" y="5175504"/>
+            <a:ext cx="457200" cy="347472"/>
+          </a:xfrm>
+          <a:prstGeom prst="rect">
+            <a:avLst/>
+          </a:prstGeom>
+          <a:noFill/>
+          <a:ln/>
+        </p:spPr>
+        <p:txBody>
+          <a:bodyPr wrap="square" lIns="0" tIns="0" rIns="0" bIns="0" rtlCol="0" anchor="ctr"/>
+          <a:lstStyle/>
+          <a:p>
+            <a:pPr algn="ctr" indent="0" marL="0">
+              <a:buNone/>
+            </a:pPr>
+            <a:r>
+              <a:rPr lang="en-US" sz="1600" b="1" dirty="0">
+                <a:solidFill>
+                  <a:srgbClr val="FFFFFF"/>
+                </a:solidFill>
+                <a:latin typeface="Meiryo" pitchFamily="34" charset="0"/>
+                <a:ea typeface="Meiryo" pitchFamily="34" charset="-122"/>
+                <a:cs typeface="Meiryo" pitchFamily="34" charset="-120"/>
+              </a:rPr>
+              <a:t>3</a:t>
+            </a:r>
+            <a:endParaRPr lang="en-US" sz="1600" dirty="0"/>
+          </a:p>
+        </p:txBody>
+      </p:sp>
+      <p:sp>
+        <p:nvSpPr>
+          <p:cNvPr id="16" name="Text 14"/>
+          <p:cNvSpPr/>
+          <p:nvPr/>
+        </p:nvSpPr>
+        <p:spPr>
+          <a:xfrm>
+            <a:off x="1344168" y="5166360"/>
+            <a:ext cx="9601200" cy="384048"/>
+          </a:xfrm>
+          <a:prstGeom prst="rect">
+            <a:avLst/>
+          </a:prstGeom>
+          <a:noFill/>
+          <a:ln/>
+        </p:spPr>
+        <p:txBody>
+          <a:bodyPr wrap="square" lIns="0" tIns="0" rIns="0" bIns="0" rtlCol="0" anchor="ctr"/>
+          <a:lstStyle/>
+          <a:p>
+            <a:pPr indent="0" marL="0">
+              <a:buNone/>
+            </a:pPr>
+            <a:r>
+              <a:rPr lang="en-US" sz="1700" dirty="0">
+                <a:solidFill>
+                  <a:srgbClr val="1E2D34"/>
+                </a:solidFill>
+                <a:latin typeface="Meiryo" pitchFamily="34" charset="0"/>
+                <a:ea typeface="Meiryo" pitchFamily="34" charset="-122"/>
+                <a:cs typeface="Meiryo" pitchFamily="34" charset="-120"/>
+              </a:rPr>
+              <a:t>URLの最後に ?v=2 を付けてひらく</a:t>
+            </a:r>
+            <a:endParaRPr lang="en-US" sz="1700" dirty="0"/>
+          </a:p>
+        </p:txBody>
+      </p:sp>
+      <p:sp>
+        <p:nvSpPr>
+          <p:cNvPr id="17" name="Shape 15"/>
+          <p:cNvSpPr/>
+          <p:nvPr/>
+        </p:nvSpPr>
+        <p:spPr>
+          <a:xfrm>
+            <a:off x="640080" y="5623560"/>
+            <a:ext cx="11064240" cy="685800"/>
+          </a:xfrm>
+          <a:prstGeom prst="roundRect">
+            <a:avLst>
+              <a:gd name="adj" fmla="val 13333"/>
+            </a:avLst>
+          </a:prstGeom>
+          <a:solidFill>
+            <a:srgbClr val="EDF6EE"/>
+          </a:solidFill>
+          <a:ln/>
+        </p:spPr>
+      </p:sp>
+      <p:sp>
+        <p:nvSpPr>
+          <p:cNvPr id="18" name="Text 16"/>
+          <p:cNvSpPr/>
+          <p:nvPr/>
+        </p:nvSpPr>
+        <p:spPr>
+          <a:xfrm>
+            <a:off x="868680" y="5788152"/>
+            <a:ext cx="10607040" cy="356616"/>
+          </a:xfrm>
+          <a:prstGeom prst="rect">
+            <a:avLst/>
+          </a:prstGeom>
+          <a:noFill/>
+          <a:ln/>
+        </p:spPr>
+        <p:txBody>
+          <a:bodyPr wrap="square" lIns="0" tIns="0" rIns="0" bIns="0" rtlCol="0" anchor="ctr"/>
+          <a:lstStyle/>
+          <a:p>
+            <a:pPr indent="0" marL="0">
+              <a:lnSpc>
+                <a:spcPts val="2100"/>
+              </a:lnSpc>
+              <a:buNone/>
+            </a:pPr>
+            <a:r>
+              <a:rPr lang="en-US" sz="1600" b="1" dirty="0">
+                <a:solidFill>
+                  <a:srgbClr val="2E7D32"/>
+                </a:solidFill>
+                <a:latin typeface="Meiryo" pitchFamily="34" charset="0"/>
+                <a:ea typeface="Meiryo" pitchFamily="34" charset="-122"/>
+                <a:cs typeface="Meiryo" pitchFamily="34" charset="-120"/>
+              </a:rPr>
+              <a:t>②③で新しくなっていれば、更新は成功しています。</a:t>
+            </a:r>
+            <a:endParaRPr lang="en-US" sz="1600" dirty="0"/>
+          </a:p>
+        </p:txBody>
+      </p:sp>
+    </p:spTree>
+  </p:cSld>
+  <p:clrMapOvr>
+    <a:masterClrMapping/>
+  </p:clrMapOvr>
+</p:sld>
+</file>
+
+<file path=ppt/slides/slide15.xml><?xml version="1.0" encoding="utf-8"?>
+<p:sld xmlns:a="http://schemas.openxmlformats.org/drawingml/2006/main" xmlns:r="http://schemas.openxmlformats.org/officeDocument/2006/relationships" xmlns:p="http://schemas.openxmlformats.org/presentationml/2006/main">
+  <p:cSld name="Slide 15">
+    <p:bg>
+      <p:bgPr>
+        <a:solidFill>
+          <a:srgbClr val="FFFFFF"/>
+        </a:solidFill>
+      </p:bgPr>
+    </p:bg>
+    <p:spTree>
+      <p:nvGrpSpPr>
+        <p:cNvPr id="1" name=""/>
+        <p:cNvGrpSpPr/>
+        <p:nvPr/>
+      </p:nvGrpSpPr>
+      <p:grpSpPr>
+        <a:xfrm>
+          <a:off x="0" y="0"/>
+          <a:ext cx="0" cy="0"/>
+          <a:chOff x="0" y="0"/>
+          <a:chExt cx="0" cy="0"/>
+        </a:xfrm>
+      </p:grpSpPr>
+      <p:sp>
+        <p:nvSpPr>
+          <p:cNvPr id="2" name="Text 0"/>
+          <p:cNvSpPr/>
+          <p:nvPr/>
+        </p:nvSpPr>
+        <p:spPr>
+          <a:xfrm>
+            <a:off x="548640" y="274320"/>
+            <a:ext cx="11064240" cy="731520"/>
+          </a:xfrm>
+          <a:prstGeom prst="rect">
+            <a:avLst/>
+          </a:prstGeom>
+          <a:noFill/>
+          <a:ln/>
+        </p:spPr>
+        <p:txBody>
+          <a:bodyPr wrap="square" lIns="0" tIns="0" rIns="0" bIns="0" rtlCol="0" anchor="ctr"/>
+          <a:lstStyle/>
+          <a:p>
+            <a:pPr indent="0" marL="0">
+              <a:buNone/>
+            </a:pPr>
+            <a:r>
+              <a:rPr lang="en-US" sz="3400" b="1" dirty="0">
+                <a:solidFill>
+                  <a:srgbClr val="264653"/>
+                </a:solidFill>
+                <a:latin typeface="Meiryo" pitchFamily="34" charset="0"/>
+                <a:ea typeface="Meiryo" pitchFamily="34" charset="-122"/>
+                <a:cs typeface="Meiryo" pitchFamily="34" charset="-120"/>
+              </a:rPr>
+              <a:t>⑦ 間違えたときは</a:t>
+            </a:r>
+            <a:endParaRPr lang="en-US" sz="3400" dirty="0"/>
+          </a:p>
+        </p:txBody>
+      </p:sp>
+      <p:sp>
+        <p:nvSpPr>
+          <p:cNvPr id="3" name="Text 1"/>
+          <p:cNvSpPr/>
+          <p:nvPr/>
+        </p:nvSpPr>
+        <p:spPr>
+          <a:xfrm>
+            <a:off x="566928" y="1024128"/>
+            <a:ext cx="11064240" cy="365760"/>
+          </a:xfrm>
+          <a:prstGeom prst="rect">
+            <a:avLst/>
+          </a:prstGeom>
+          <a:noFill/>
+          <a:ln/>
+        </p:spPr>
+        <p:txBody>
+          <a:bodyPr wrap="square" lIns="0" tIns="0" rIns="0" bIns="0" rtlCol="0" anchor="ctr"/>
+          <a:lstStyle/>
+          <a:p>
+            <a:pPr indent="0" marL="0">
+              <a:buNone/>
+            </a:pPr>
+            <a:r>
+              <a:rPr lang="en-US" sz="1600" dirty="0">
+                <a:solidFill>
+                  <a:srgbClr val="5E7681"/>
+                </a:solidFill>
+                <a:latin typeface="Meiryo" pitchFamily="34" charset="0"/>
+                <a:ea typeface="Meiryo" pitchFamily="34" charset="-122"/>
+                <a:cs typeface="Meiryo" pitchFamily="34" charset="-120"/>
+              </a:rPr>
+              <a:t>元に戻せなくなることはありません</a:t>
+            </a:r>
+            <a:endParaRPr lang="en-US" sz="1600" dirty="0"/>
+          </a:p>
+        </p:txBody>
+      </p:sp>
+      <p:sp>
+        <p:nvSpPr>
+          <p:cNvPr id="4" name="Text 2"/>
+          <p:cNvSpPr/>
+          <p:nvPr/>
+        </p:nvSpPr>
+        <p:spPr>
+          <a:xfrm>
+            <a:off x="11338560" y="6309360"/>
+            <a:ext cx="457200" cy="274320"/>
+          </a:xfrm>
+          <a:prstGeom prst="rect">
+            <a:avLst/>
+          </a:prstGeom>
+          <a:noFill/>
+          <a:ln/>
+        </p:spPr>
+        <p:txBody>
+          <a:bodyPr wrap="square" lIns="0" tIns="0" rIns="0" bIns="0" rtlCol="0" anchor="ctr"/>
+          <a:lstStyle/>
+          <a:p>
+            <a:pPr algn="r" indent="0" marL="0">
+              <a:buNone/>
+            </a:pPr>
+            <a:r>
+              <a:rPr lang="en-US" sz="1100" dirty="0">
+                <a:solidFill>
+                  <a:srgbClr val="A8B4B8"/>
+                </a:solidFill>
+                <a:latin typeface="Meiryo" pitchFamily="34" charset="0"/>
+                <a:ea typeface="Meiryo" pitchFamily="34" charset="-122"/>
+                <a:cs typeface="Meiryo" pitchFamily="34" charset="-120"/>
+              </a:rPr>
+              <a:t>14</a:t>
+            </a:r>
+            <a:endParaRPr lang="en-US" sz="1100" dirty="0"/>
+          </a:p>
+        </p:txBody>
+      </p:sp>
       <p:graphicFrame>
         <p:nvGraphicFramePr>
-          <p:cNvPr id="15" name="Table 0"/>
+          <p:cNvPr id="16" name="Table 0"/>
           <p:cNvGraphicFramePr>
             <a:graphicFrameLocks noGrp="1"/>
           </p:cNvGraphicFramePr>
@@ -5849,9 +6564,9 @@
 </p:sld>
 </file>
 
-<file path=ppt/slides/slide15.xml><?xml version="1.0" encoding="utf-8"?>
+<file path=ppt/slides/slide16.xml><?xml version="1.0" encoding="utf-8"?>
 <p:sld xmlns:a="http://schemas.openxmlformats.org/drawingml/2006/main" xmlns:r="http://schemas.openxmlformats.org/officeDocument/2006/relationships" xmlns:p="http://schemas.openxmlformats.org/presentationml/2006/main">
-  <p:cSld name="Slide 15">
+  <p:cSld name="Slide 16">
     <p:bg>
       <p:bgPr>
         <a:solidFill>
@@ -5984,7 +6699,7 @@
                 <a:ea typeface="Meiryo" pitchFamily="34" charset="-122"/>
                 <a:cs typeface="Meiryo" pitchFamily="34" charset="-120"/>
               </a:rPr>
-              <a:t>14</a:t>
+              <a:t>15</a:t>
             </a:r>
             <a:endParaRPr lang="en-US" sz="1100" dirty="0"/>
           </a:p>
@@ -6475,9 +7190,9 @@
 </p:sld>
 </file>
 
-<file path=ppt/slides/slide16.xml><?xml version="1.0" encoding="utf-8"?>
+<file path=ppt/slides/slide17.xml><?xml version="1.0" encoding="utf-8"?>
 <p:sld xmlns:a="http://schemas.openxmlformats.org/drawingml/2006/main" xmlns:r="http://schemas.openxmlformats.org/officeDocument/2006/relationships" xmlns:p="http://schemas.openxmlformats.org/presentationml/2006/main">
-  <p:cSld name="Slide 16">
+  <p:cSld name="Slide 17">
     <p:bg>
       <p:bgPr>
         <a:solidFill>
@@ -6610,7 +7325,7 @@
                 <a:ea typeface="Meiryo" pitchFamily="34" charset="-122"/>
                 <a:cs typeface="Meiryo" pitchFamily="34" charset="-120"/>
               </a:rPr>
-              <a:t>15</a:t>
+              <a:t>16</a:t>
             </a:r>
             <a:endParaRPr lang="en-US" sz="1100" dirty="0"/>
           </a:p>
@@ -12221,7 +12936,7 @@
                 <a:ea typeface="Meiryo" pitchFamily="34" charset="-122"/>
                 <a:cs typeface="Meiryo" pitchFamily="34" charset="-120"/>
               </a:rPr>
-              <a:t>どこが直せるか（前半）</a:t>
+              <a:t>編集画面は、サイトとは見た目が違います</a:t>
             </a:r>
             <a:endParaRPr lang="en-US" sz="3400" dirty="0"/>
           </a:p>
@@ -12260,7 +12975,7 @@
                 <a:ea typeface="Meiryo" pitchFamily="34" charset="-122"/>
                 <a:cs typeface="Meiryo" pitchFamily="34" charset="-120"/>
               </a:rPr>
-              <a:t>ASPATHの由来 ／ ASPATHの特徴</a:t>
+              <a:t>ここを先にお伝えします</a:t>
             </a:r>
             <a:endParaRPr lang="en-US" sz="1600" dirty="0"/>
           </a:p>
@@ -12307,7 +13022,7 @@
       </p:sp>
       <p:pic>
         <p:nvPicPr>
-          <p:cNvPr id="5" name="Image 0" descr="/sessions/compassionate-sweet-heisenberg/mnt/dev-aspath-life-main/_wp移行素材/★引継ぎ資料/画像/M1_由来と特徴.jpg">    </p:cNvPr>
+          <p:cNvPr id="5" name="Image 0" descr="/sessions/compassionate-sweet-heisenberg/mnt/dev-aspath-life-main/_wp移行素材/★引継ぎ資料/画像/E0_編集画面_色分け拡大.jpg">    </p:cNvPr>
           <p:cNvPicPr>
             <a:picLocks noChangeAspect="1"/>
           </p:cNvPicPr>
@@ -12321,253 +13036,28 @@
         </p:blipFill>
         <p:spPr>
           <a:xfrm>
-            <a:off x="822960" y="1645920"/>
-            <a:ext cx="2834640" cy="4629912"/>
+            <a:off x="731520" y="1691640"/>
+            <a:ext cx="6035040" cy="3652787"/>
           </a:xfrm>
           <a:prstGeom prst="rect">
             <a:avLst/>
           </a:prstGeom>
         </p:spPr>
       </p:pic>
-      <p:pic>
-        <p:nvPicPr>
-          <p:cNvPr id="6" name="Image 1" descr="/sessions/compassionate-sweet-heisenberg/mnt/dev-aspath-life-main/_wp移行素材/★引継ぎ資料/画像/M2_01_3つの芯.jpg">    </p:cNvPr>
-          <p:cNvPicPr>
-            <a:picLocks noChangeAspect="1"/>
-          </p:cNvPicPr>
-          <p:nvPr/>
-        </p:nvPicPr>
-        <p:blipFill>
-          <a:blip r:embed="rId2"/>
-          <a:stretch>
-            <a:fillRect/>
-          </a:stretch>
-        </p:blipFill>
-        <p:spPr>
-          <a:xfrm>
-            <a:off x="3931920" y="1645920"/>
-            <a:ext cx="2834640" cy="4629912"/>
-          </a:xfrm>
-          <a:prstGeom prst="rect">
-            <a:avLst/>
-          </a:prstGeom>
-        </p:spPr>
-      </p:pic>
-      <p:sp>
-        <p:nvSpPr>
-          <p:cNvPr id="7" name="Text 3"/>
-          <p:cNvSpPr/>
-          <p:nvPr/>
-        </p:nvSpPr>
-        <p:spPr>
-          <a:xfrm>
-            <a:off x="822960" y="6263640"/>
-            <a:ext cx="2834640" cy="274320"/>
-          </a:xfrm>
-          <a:prstGeom prst="rect">
-            <a:avLst/>
-          </a:prstGeom>
-          <a:noFill/>
-          <a:ln/>
-        </p:spPr>
-        <p:txBody>
-          <a:bodyPr wrap="square" lIns="0" tIns="0" rIns="0" bIns="0" rtlCol="0" anchor="ctr"/>
-          <a:lstStyle/>
-          <a:p>
-            <a:pPr algn="ctr" indent="0" marL="0">
-              <a:buNone/>
-            </a:pPr>
-            <a:r>
-              <a:rPr lang="en-US" sz="1300" dirty="0">
-                <a:solidFill>
-                  <a:srgbClr val="5E7681"/>
-                </a:solidFill>
-                <a:latin typeface="Meiryo" pitchFamily="34" charset="0"/>
-                <a:ea typeface="Meiryo" pitchFamily="34" charset="-122"/>
-                <a:cs typeface="Meiryo" pitchFamily="34" charset="-120"/>
-              </a:rPr>
-              <a:t>ASPATHの由来・特徴</a:t>
-            </a:r>
-            <a:endParaRPr lang="en-US" sz="1300" dirty="0"/>
-          </a:p>
-        </p:txBody>
-      </p:sp>
-      <p:sp>
-        <p:nvSpPr>
-          <p:cNvPr id="8" name="Text 4"/>
-          <p:cNvSpPr/>
-          <p:nvPr/>
-        </p:nvSpPr>
-        <p:spPr>
-          <a:xfrm>
-            <a:off x="3931920" y="6263640"/>
-            <a:ext cx="2834640" cy="274320"/>
-          </a:xfrm>
-          <a:prstGeom prst="rect">
-            <a:avLst/>
-          </a:prstGeom>
-          <a:noFill/>
-          <a:ln/>
-        </p:spPr>
-        <p:txBody>
-          <a:bodyPr wrap="square" lIns="0" tIns="0" rIns="0" bIns="0" rtlCol="0" anchor="ctr"/>
-          <a:lstStyle/>
-          <a:p>
-            <a:pPr algn="ctr" indent="0" marL="0">
-              <a:buNone/>
-            </a:pPr>
-            <a:r>
-              <a:rPr lang="en-US" sz="1300" dirty="0">
-                <a:solidFill>
-                  <a:srgbClr val="5E7681"/>
-                </a:solidFill>
-                <a:latin typeface="Meiryo" pitchFamily="34" charset="0"/>
-                <a:ea typeface="Meiryo" pitchFamily="34" charset="-122"/>
-                <a:cs typeface="Meiryo" pitchFamily="34" charset="-120"/>
-              </a:rPr>
-              <a:t>01　3つの芯</a:t>
-            </a:r>
-            <a:endParaRPr lang="en-US" sz="1300" dirty="0"/>
-          </a:p>
-        </p:txBody>
-      </p:sp>
-      <p:sp>
-        <p:nvSpPr>
-          <p:cNvPr id="9" name="Shape 5"/>
-          <p:cNvSpPr/>
-          <p:nvPr/>
-        </p:nvSpPr>
-        <p:spPr>
-          <a:xfrm>
-            <a:off x="7223760" y="1691640"/>
-            <a:ext cx="4480560" cy="1371600"/>
+      <p:sp>
+        <p:nvSpPr>
+          <p:cNvPr id="6" name="Shape 3"/>
+          <p:cNvSpPr/>
+          <p:nvPr/>
+        </p:nvSpPr>
+        <p:spPr>
+          <a:xfrm>
+            <a:off x="7040880" y="1691640"/>
+            <a:ext cx="4663440" cy="1828800"/>
           </a:xfrm>
           <a:prstGeom prst="roundRect">
             <a:avLst>
-              <a:gd name="adj" fmla="val 8000"/>
-            </a:avLst>
-          </a:prstGeom>
-          <a:solidFill>
-            <a:srgbClr val="EDF6EE"/>
-          </a:solidFill>
-          <a:ln/>
-        </p:spPr>
-      </p:sp>
-      <p:sp>
-        <p:nvSpPr>
-          <p:cNvPr id="10" name="Text 6"/>
-          <p:cNvSpPr/>
-          <p:nvPr/>
-        </p:nvSpPr>
-        <p:spPr>
-          <a:xfrm>
-            <a:off x="7498080" y="1874520"/>
-            <a:ext cx="3931920" cy="320040"/>
-          </a:xfrm>
-          <a:prstGeom prst="rect">
-            <a:avLst/>
-          </a:prstGeom>
-          <a:noFill/>
-          <a:ln/>
-        </p:spPr>
-        <p:txBody>
-          <a:bodyPr wrap="square" lIns="0" tIns="0" rIns="0" bIns="0" rtlCol="0" anchor="ctr"/>
-          <a:lstStyle/>
-          <a:p>
-            <a:pPr indent="0" marL="0">
-              <a:buNone/>
-            </a:pPr>
-            <a:r>
-              <a:rPr lang="en-US" sz="1900" b="1" dirty="0">
-                <a:solidFill>
-                  <a:srgbClr val="2E7D32"/>
-                </a:solidFill>
-                <a:latin typeface="Meiryo" pitchFamily="34" charset="0"/>
-                <a:ea typeface="Meiryo" pitchFamily="34" charset="-122"/>
-                <a:cs typeface="Meiryo" pitchFamily="34" charset="-120"/>
-              </a:rPr>
-              <a:t>緑のところ</a:t>
-            </a:r>
-            <a:endParaRPr lang="en-US" sz="1900" dirty="0"/>
-          </a:p>
-        </p:txBody>
-      </p:sp>
-      <p:sp>
-        <p:nvSpPr>
-          <p:cNvPr id="11" name="Text 7"/>
-          <p:cNvSpPr/>
-          <p:nvPr/>
-        </p:nvSpPr>
-        <p:spPr>
-          <a:xfrm>
-            <a:off x="7498080" y="2286000"/>
-            <a:ext cx="3931920" cy="640080"/>
-          </a:xfrm>
-          <a:prstGeom prst="rect">
-            <a:avLst/>
-          </a:prstGeom>
-          <a:noFill/>
-          <a:ln/>
-        </p:spPr>
-        <p:txBody>
-          <a:bodyPr wrap="square" lIns="0" tIns="0" rIns="0" bIns="0" rtlCol="0" anchor="ctr"/>
-          <a:lstStyle/>
-          <a:p>
-            <a:pPr indent="0" marL="0">
-              <a:lnSpc>
-                <a:spcPts val="2200"/>
-              </a:lnSpc>
-              <a:buNone/>
-            </a:pPr>
-            <a:r>
-              <a:rPr lang="en-US" sz="1500" dirty="0">
-                <a:solidFill>
-                  <a:srgbClr val="1E2D34"/>
-                </a:solidFill>
-                <a:latin typeface="Meiryo" pitchFamily="34" charset="0"/>
-                <a:ea typeface="Meiryo" pitchFamily="34" charset="-122"/>
-                <a:cs typeface="Meiryo" pitchFamily="34" charset="-120"/>
-              </a:rPr>
-              <a:t>見出しと文章。クリックして</a:t>
-            </a:r>
-            <a:endParaRPr lang="en-US" sz="1500" dirty="0"/>
-          </a:p>
-          <a:p>
-            <a:pPr indent="0" marL="0">
-              <a:lnSpc>
-                <a:spcPts val="2200"/>
-              </a:lnSpc>
-              <a:buNone/>
-            </a:pPr>
-            <a:r>
-              <a:rPr lang="en-US" sz="1500" dirty="0">
-                <a:solidFill>
-                  <a:srgbClr val="1E2D34"/>
-                </a:solidFill>
-                <a:latin typeface="Meiryo" pitchFamily="34" charset="0"/>
-                <a:ea typeface="Meiryo" pitchFamily="34" charset="-122"/>
-                <a:cs typeface="Meiryo" pitchFamily="34" charset="-120"/>
-              </a:rPr>
-              <a:t>そのまま書き換えられます。</a:t>
-            </a:r>
-            <a:endParaRPr lang="en-US" sz="1500" dirty="0"/>
-          </a:p>
-        </p:txBody>
-      </p:sp>
-      <p:sp>
-        <p:nvSpPr>
-          <p:cNvPr id="12" name="Shape 8"/>
-          <p:cNvSpPr/>
-          <p:nvPr/>
-        </p:nvSpPr>
-        <p:spPr>
-          <a:xfrm>
-            <a:off x="7223760" y="3200400"/>
-            <a:ext cx="4480560" cy="1371600"/>
-          </a:xfrm>
-          <a:prstGeom prst="roundRect">
-            <a:avLst>
-              <a:gd name="adj" fmla="val 8000"/>
+              <a:gd name="adj" fmla="val 6000"/>
             </a:avLst>
           </a:prstGeom>
           <a:solidFill>
@@ -12578,14 +13068,14 @@
       </p:sp>
       <p:sp>
         <p:nvSpPr>
-          <p:cNvPr id="13" name="Text 9"/>
-          <p:cNvSpPr/>
-          <p:nvPr/>
-        </p:nvSpPr>
-        <p:spPr>
-          <a:xfrm>
-            <a:off x="7498080" y="3383280"/>
-            <a:ext cx="3931920" cy="320040"/>
+          <p:cNvPr id="7" name="Text 4"/>
+          <p:cNvSpPr/>
+          <p:nvPr/>
+        </p:nvSpPr>
+        <p:spPr>
+          <a:xfrm>
+            <a:off x="7315200" y="1874520"/>
+            <a:ext cx="4114800" cy="365760"/>
           </a:xfrm>
           <a:prstGeom prst="rect">
             <a:avLst/>
@@ -12603,13 +13093,13 @@
             <a:r>
               <a:rPr lang="en-US" sz="1900" b="1" dirty="0">
                 <a:solidFill>
-                  <a:srgbClr val="DD8236"/>
-                </a:solidFill>
-                <a:latin typeface="Meiryo" pitchFamily="34" charset="0"/>
-                <a:ea typeface="Meiryo" pitchFamily="34" charset="-122"/>
-                <a:cs typeface="Meiryo" pitchFamily="34" charset="-120"/>
-              </a:rPr>
-              <a:t>オレンジのところ</a:t>
+                  <a:srgbClr val="B85042"/>
+                </a:solidFill>
+                <a:latin typeface="Meiryo" pitchFamily="34" charset="0"/>
+                <a:ea typeface="Meiryo" pitchFamily="34" charset="-122"/>
+                <a:cs typeface="Meiryo" pitchFamily="34" charset="-120"/>
+              </a:rPr>
+              <a:t>色も配置も付きません</a:t>
             </a:r>
             <a:endParaRPr lang="en-US" sz="1900" dirty="0"/>
           </a:p>
@@ -12617,14 +13107,14 @@
       </p:sp>
       <p:sp>
         <p:nvSpPr>
-          <p:cNvPr id="14" name="Text 10"/>
-          <p:cNvSpPr/>
-          <p:nvPr/>
-        </p:nvSpPr>
-        <p:spPr>
-          <a:xfrm>
-            <a:off x="7498080" y="3794760"/>
-            <a:ext cx="3931920" cy="640080"/>
+          <p:cNvPr id="8" name="Text 5"/>
+          <p:cNvSpPr/>
+          <p:nvPr/>
+        </p:nvSpPr>
+        <p:spPr>
+          <a:xfrm>
+            <a:off x="7315200" y="2331720"/>
+            <a:ext cx="4114800" cy="1005840"/>
           </a:xfrm>
           <a:prstGeom prst="rect">
             <a:avLst/>
@@ -12638,7 +13128,7 @@
           <a:p>
             <a:pPr indent="0" marL="0">
               <a:lnSpc>
-                <a:spcPts val="2200"/>
+                <a:spcPts val="2300"/>
               </a:lnSpc>
               <a:buNone/>
             </a:pPr>
@@ -12651,14 +13141,14 @@
                 <a:ea typeface="Meiryo" pitchFamily="34" charset="-122"/>
                 <a:cs typeface="Meiryo" pitchFamily="34" charset="-120"/>
               </a:rPr>
-              <a:t>図やカード。クリックすると</a:t>
+              <a:t>編集画面では、文字だけが</a:t>
             </a:r>
             <a:endParaRPr lang="en-US" sz="1500" dirty="0"/>
           </a:p>
           <a:p>
             <a:pPr indent="0" marL="0">
               <a:lnSpc>
-                <a:spcPts val="2200"/>
+                <a:spcPts val="2300"/>
               </a:lnSpc>
               <a:buNone/>
             </a:pPr>
@@ -12671,22 +13161,42 @@
                 <a:ea typeface="Meiryo" pitchFamily="34" charset="-122"/>
                 <a:cs typeface="Meiryo" pitchFamily="34" charset="-120"/>
               </a:rPr>
-              <a:t>「カスタム HTML」と出ます。</a:t>
+              <a:t>上から順に並んで見えます。</a:t>
             </a:r>
             <a:endParaRPr lang="en-US" sz="1500" dirty="0"/>
           </a:p>
-        </p:txBody>
-      </p:sp>
-      <p:sp>
-        <p:nvSpPr>
-          <p:cNvPr id="15" name="Shape 11"/>
-          <p:cNvSpPr/>
-          <p:nvPr/>
-        </p:nvSpPr>
-        <p:spPr>
-          <a:xfrm>
-            <a:off x="7223760" y="4754880"/>
-            <a:ext cx="4480560" cy="1371600"/>
+          <a:p>
+            <a:pPr indent="0" marL="0">
+              <a:lnSpc>
+                <a:spcPts val="2300"/>
+              </a:lnSpc>
+              <a:buNone/>
+            </a:pPr>
+            <a:r>
+              <a:rPr lang="en-US" sz="1500" dirty="0">
+                <a:solidFill>
+                  <a:srgbClr val="1E2D34"/>
+                </a:solidFill>
+                <a:latin typeface="Meiryo" pitchFamily="34" charset="0"/>
+                <a:ea typeface="Meiryo" pitchFamily="34" charset="-122"/>
+                <a:cs typeface="Meiryo" pitchFamily="34" charset="-120"/>
+              </a:rPr>
+              <a:t>サイトの見た目とは違います。</a:t>
+            </a:r>
+            <a:endParaRPr lang="en-US" sz="1500" dirty="0"/>
+          </a:p>
+        </p:txBody>
+      </p:sp>
+      <p:sp>
+        <p:nvSpPr>
+          <p:cNvPr id="9" name="Shape 6"/>
+          <p:cNvSpPr/>
+          <p:nvPr/>
+        </p:nvSpPr>
+        <p:spPr>
+          <a:xfrm>
+            <a:off x="7040880" y="3657600"/>
+            <a:ext cx="4663440" cy="1645920"/>
           </a:xfrm>
           <a:prstGeom prst="roundRect">
             <a:avLst>
@@ -12694,6 +13204,149 @@
             </a:avLst>
           </a:prstGeom>
           <a:solidFill>
+            <a:srgbClr val="EDF6EE"/>
+          </a:solidFill>
+          <a:ln/>
+        </p:spPr>
+      </p:sp>
+      <p:sp>
+        <p:nvSpPr>
+          <p:cNvPr id="10" name="Text 7"/>
+          <p:cNvSpPr/>
+          <p:nvPr/>
+        </p:nvSpPr>
+        <p:spPr>
+          <a:xfrm>
+            <a:off x="7315200" y="3840480"/>
+            <a:ext cx="4114800" cy="365760"/>
+          </a:xfrm>
+          <a:prstGeom prst="rect">
+            <a:avLst/>
+          </a:prstGeom>
+          <a:noFill/>
+          <a:ln/>
+        </p:spPr>
+        <p:txBody>
+          <a:bodyPr wrap="square" lIns="0" tIns="0" rIns="0" bIns="0" rtlCol="0" anchor="ctr"/>
+          <a:lstStyle/>
+          <a:p>
+            <a:pPr indent="0" marL="0">
+              <a:buNone/>
+            </a:pPr>
+            <a:r>
+              <a:rPr lang="en-US" sz="1900" b="1" dirty="0">
+                <a:solidFill>
+                  <a:srgbClr val="2E7D32"/>
+                </a:solidFill>
+                <a:latin typeface="Meiryo" pitchFamily="34" charset="0"/>
+                <a:ea typeface="Meiryo" pitchFamily="34" charset="-122"/>
+                <a:cs typeface="Meiryo" pitchFamily="34" charset="-120"/>
+              </a:rPr>
+              <a:t>でも中身は同じです</a:t>
+            </a:r>
+            <a:endParaRPr lang="en-US" sz="1900" dirty="0"/>
+          </a:p>
+        </p:txBody>
+      </p:sp>
+      <p:sp>
+        <p:nvSpPr>
+          <p:cNvPr id="11" name="Text 8"/>
+          <p:cNvSpPr/>
+          <p:nvPr/>
+        </p:nvSpPr>
+        <p:spPr>
+          <a:xfrm>
+            <a:off x="7315200" y="4297680"/>
+            <a:ext cx="4114800" cy="1005840"/>
+          </a:xfrm>
+          <a:prstGeom prst="rect">
+            <a:avLst/>
+          </a:prstGeom>
+          <a:noFill/>
+          <a:ln/>
+        </p:spPr>
+        <p:txBody>
+          <a:bodyPr wrap="square" lIns="0" tIns="0" rIns="0" bIns="0" rtlCol="0" anchor="ctr"/>
+          <a:lstStyle/>
+          <a:p>
+            <a:pPr indent="0" marL="0">
+              <a:lnSpc>
+                <a:spcPts val="2300"/>
+              </a:lnSpc>
+              <a:buNone/>
+            </a:pPr>
+            <a:r>
+              <a:rPr lang="en-US" sz="1500" dirty="0">
+                <a:solidFill>
+                  <a:srgbClr val="1E2D34"/>
+                </a:solidFill>
+                <a:latin typeface="Meiryo" pitchFamily="34" charset="0"/>
+                <a:ea typeface="Meiryo" pitchFamily="34" charset="-122"/>
+                <a:cs typeface="Meiryo" pitchFamily="34" charset="-120"/>
+              </a:rPr>
+              <a:t>文章の順番はサイトと同じ。</a:t>
+            </a:r>
+            <a:endParaRPr lang="en-US" sz="1500" dirty="0"/>
+          </a:p>
+          <a:p>
+            <a:pPr indent="0" marL="0">
+              <a:lnSpc>
+                <a:spcPts val="2300"/>
+              </a:lnSpc>
+              <a:buNone/>
+            </a:pPr>
+            <a:r>
+              <a:rPr lang="en-US" sz="1500" dirty="0">
+                <a:solidFill>
+                  <a:srgbClr val="1E2D34"/>
+                </a:solidFill>
+                <a:latin typeface="Meiryo" pitchFamily="34" charset="0"/>
+                <a:ea typeface="Meiryo" pitchFamily="34" charset="-122"/>
+                <a:cs typeface="Meiryo" pitchFamily="34" charset="-120"/>
+              </a:rPr>
+              <a:t>直したい文章を探すときは</a:t>
+            </a:r>
+            <a:endParaRPr lang="en-US" sz="1500" dirty="0"/>
+          </a:p>
+          <a:p>
+            <a:pPr indent="0" marL="0">
+              <a:lnSpc>
+                <a:spcPts val="2300"/>
+              </a:lnSpc>
+              <a:buNone/>
+            </a:pPr>
+            <a:r>
+              <a:rPr lang="en-US" sz="1500" dirty="0">
+                <a:solidFill>
+                  <a:srgbClr val="1E2D34"/>
+                </a:solidFill>
+                <a:latin typeface="Meiryo" pitchFamily="34" charset="0"/>
+                <a:ea typeface="Meiryo" pitchFamily="34" charset="-122"/>
+                <a:cs typeface="Meiryo" pitchFamily="34" charset="-120"/>
+              </a:rPr>
+              <a:t>文字を目印にしてください。</a:t>
+            </a:r>
+            <a:endParaRPr lang="en-US" sz="1500" dirty="0"/>
+          </a:p>
+        </p:txBody>
+      </p:sp>
+      <p:sp>
+        <p:nvSpPr>
+          <p:cNvPr id="12" name="Shape 9"/>
+          <p:cNvSpPr/>
+          <p:nvPr/>
+        </p:nvSpPr>
+        <p:spPr>
+          <a:xfrm>
+            <a:off x="731520" y="5577840"/>
+            <a:ext cx="10972800" cy="731520"/>
+          </a:xfrm>
+          <a:prstGeom prst="roundRect">
+            <a:avLst>
+              <a:gd name="adj" fmla="val 12500"/>
+            </a:avLst>
+          </a:prstGeom>
+          <a:solidFill>
             <a:srgbClr val="F2F5F6"/>
           </a:solidFill>
           <a:ln/>
@@ -12701,14 +13354,14 @@
       </p:sp>
       <p:sp>
         <p:nvSpPr>
-          <p:cNvPr id="16" name="Text 12"/>
-          <p:cNvSpPr/>
-          <p:nvPr/>
-        </p:nvSpPr>
-        <p:spPr>
-          <a:xfrm>
-            <a:off x="7452360" y="4919472"/>
-            <a:ext cx="4023360" cy="1042416"/>
+          <p:cNvPr id="13" name="Text 10"/>
+          <p:cNvSpPr/>
+          <p:nvPr/>
+        </p:nvSpPr>
+        <p:spPr>
+          <a:xfrm>
+            <a:off x="960120" y="5742432"/>
+            <a:ext cx="10515600" cy="402336"/>
           </a:xfrm>
           <a:prstGeom prst="rect">
             <a:avLst/>
@@ -12735,47 +13388,7 @@
                 <a:ea typeface="Meiryo" pitchFamily="34" charset="-122"/>
                 <a:cs typeface="Meiryo" pitchFamily="34" charset="-120"/>
               </a:rPr>
-              <a:t>01「3つの芯」がいちばん</a:t>
-            </a:r>
-            <a:endParaRPr lang="en-US" sz="1500" dirty="0"/>
-          </a:p>
-          <a:p>
-            <a:pPr indent="0" marL="0">
-              <a:lnSpc>
-                <a:spcPts val="2100"/>
-              </a:lnSpc>
-              <a:buNone/>
-            </a:pPr>
-            <a:r>
-              <a:rPr lang="en-US" sz="1500" b="1" dirty="0">
-                <a:solidFill>
-                  <a:srgbClr val="264653"/>
-                </a:solidFill>
-                <a:latin typeface="Meiryo" pitchFamily="34" charset="0"/>
-                <a:ea typeface="Meiryo" pitchFamily="34" charset="-122"/>
-                <a:cs typeface="Meiryo" pitchFamily="34" charset="-120"/>
-              </a:rPr>
-              <a:t>文章が多い場所です。</a:t>
-            </a:r>
-            <a:endParaRPr lang="en-US" sz="1500" dirty="0"/>
-          </a:p>
-          <a:p>
-            <a:pPr indent="0" marL="0">
-              <a:lnSpc>
-                <a:spcPts val="2100"/>
-              </a:lnSpc>
-              <a:buNone/>
-            </a:pPr>
-            <a:r>
-              <a:rPr lang="en-US" sz="1500" b="1" dirty="0">
-                <a:solidFill>
-                  <a:srgbClr val="264653"/>
-                </a:solidFill>
-                <a:latin typeface="Meiryo" pitchFamily="34" charset="0"/>
-                <a:ea typeface="Meiryo" pitchFamily="34" charset="-122"/>
-                <a:cs typeface="Meiryo" pitchFamily="34" charset="-120"/>
-              </a:rPr>
-              <a:t>17か所を直せます。</a:t>
+              <a:t>この資料の緑・オレンジの色は説明のために付けたものです。実際の画面には出ません。</a:t>
             </a:r>
             <a:endParaRPr lang="en-US" sz="1500" dirty="0"/>
           </a:p>

--- a/_wp移行素材/★引継ぎ資料/★山口様向け_ASPATHについて_文章の直し方.pptx
+++ b/_wp移行素材/★引継ぎ資料/★山口様向け_ASPATHについて_文章の直し方.pptx
@@ -2281,7 +2281,7 @@
     <p:bg>
       <p:bgPr>
         <a:solidFill>
-          <a:srgbClr val="264653"/>
+          <a:srgbClr val="F4E9D8"/>
         </a:solidFill>
       </p:bgPr>
     </p:bg>
@@ -2301,14 +2301,117 @@
       </p:grpSpPr>
       <p:sp>
         <p:nvSpPr>
-          <p:cNvPr id="2" name="Text 0"/>
-          <p:cNvSpPr/>
-          <p:nvPr/>
-        </p:nvSpPr>
-        <p:spPr>
-          <a:xfrm>
-            <a:off x="914400" y="1828800"/>
-            <a:ext cx="10332720" cy="1463040"/>
+          <p:cNvPr id="2" name="Shape 0"/>
+          <p:cNvSpPr/>
+          <p:nvPr/>
+        </p:nvSpPr>
+        <p:spPr>
+          <a:xfrm>
+            <a:off x="0" y="0"/>
+            <a:ext cx="12198096" cy="146304"/>
+          </a:xfrm>
+          <a:prstGeom prst="rect">
+            <a:avLst/>
+          </a:prstGeom>
+          <a:solidFill>
+            <a:srgbClr val="264653"/>
+          </a:solidFill>
+          <a:ln/>
+        </p:spPr>
+      </p:sp>
+      <p:sp>
+        <p:nvSpPr>
+          <p:cNvPr id="3" name="Shape 1"/>
+          <p:cNvSpPr/>
+          <p:nvPr/>
+        </p:nvSpPr>
+        <p:spPr>
+          <a:xfrm>
+            <a:off x="0" y="6711696"/>
+            <a:ext cx="12198096" cy="146304"/>
+          </a:xfrm>
+          <a:prstGeom prst="rect">
+            <a:avLst/>
+          </a:prstGeom>
+          <a:solidFill>
+            <a:srgbClr val="F4A261"/>
+          </a:solidFill>
+          <a:ln/>
+        </p:spPr>
+      </p:sp>
+      <p:pic>
+        <p:nvPicPr>
+          <p:cNvPr id="4" name="Image 0" descr="/sessions/compassionate-sweet-heisenberg/mnt/dev-aspath-life-main/tools/assets/logo-deck.png">    </p:cNvPr>
+          <p:cNvPicPr>
+            <a:picLocks noChangeAspect="1"/>
+          </p:cNvPicPr>
+          <p:nvPr/>
+        </p:nvPicPr>
+        <p:blipFill>
+          <a:blip r:embed="rId1"/>
+          <a:stretch>
+            <a:fillRect/>
+          </a:stretch>
+        </p:blipFill>
+        <p:spPr>
+          <a:xfrm>
+            <a:off x="1051560" y="1874520"/>
+            <a:ext cx="2320246" cy="2834640"/>
+          </a:xfrm>
+          <a:prstGeom prst="rect">
+            <a:avLst/>
+          </a:prstGeom>
+        </p:spPr>
+      </p:pic>
+      <p:sp>
+        <p:nvSpPr>
+          <p:cNvPr id="5" name="Text 2"/>
+          <p:cNvSpPr txBox="1"/>
+          <p:nvPr/>
+        </p:nvSpPr>
+        <p:spPr>
+          <a:xfrm>
+            <a:off x="4892040" y="1572768"/>
+            <a:ext cx="6675120" cy="384048"/>
+          </a:xfrm>
+          <a:prstGeom prst="rect">
+            <a:avLst/>
+          </a:prstGeom>
+          <a:noFill/>
+          <a:ln/>
+        </p:spPr>
+        <p:txBody>
+          <a:bodyPr wrap="square" lIns="0" tIns="0" rIns="0" bIns="0" rtlCol="0" anchor="ctr"/>
+          <a:lstStyle/>
+          <a:p>
+            <a:pPr indent="0" marL="0">
+              <a:buNone/>
+            </a:pPr>
+            <a:r>
+              <a:rPr lang="en-US" sz="1500" b="1" spc="600" kern="0" dirty="0">
+                <a:solidFill>
+                  <a:srgbClr val="F4A261"/>
+                </a:solidFill>
+                <a:latin typeface="Meiryo" pitchFamily="34" charset="0"/>
+                <a:ea typeface="Meiryo" pitchFamily="34" charset="-122"/>
+                <a:cs typeface="Meiryo" pitchFamily="34" charset="-120"/>
+              </a:rPr>
+              <a:t>ASPATH</a:t>
+            </a:r>
+            <a:endParaRPr lang="en-US" sz="1500" dirty="0"/>
+          </a:p>
+        </p:txBody>
+      </p:sp>
+      <p:sp>
+        <p:nvSpPr>
+          <p:cNvPr id="6" name="Text 3"/>
+          <p:cNvSpPr txBox="1"/>
+          <p:nvPr/>
+        </p:nvSpPr>
+        <p:spPr>
+          <a:xfrm>
+            <a:off x="4892040" y="1874520"/>
+            <a:ext cx="6675120" cy="1130808"/>
           </a:xfrm>
           <a:prstGeom prst="rect">
             <a:avLst/>
@@ -2322,14 +2425,14 @@
           <a:p>
             <a:pPr indent="0" marL="0">
               <a:lnSpc>
-                <a:spcPts val="5600"/>
+                <a:spcPct val="120000"/>
               </a:lnSpc>
               <a:buNone/>
             </a:pPr>
             <a:r>
-              <a:rPr lang="en-US" sz="4000" b="1" dirty="0">
-                <a:solidFill>
-                  <a:srgbClr val="FFFFFF"/>
+              <a:rPr lang="en-US" sz="3100" b="1" dirty="0">
+                <a:solidFill>
+                  <a:srgbClr val="264653"/>
                 </a:solidFill>
                 <a:latin typeface="Meiryo" pitchFamily="34" charset="0"/>
                 <a:ea typeface="Meiryo" pitchFamily="34" charset="-122"/>
@@ -2337,19 +2440,19 @@
               </a:rPr>
               <a:t>「ASPATHについて」ページの</a:t>
             </a:r>
-            <a:endParaRPr lang="en-US" sz="4000" dirty="0"/>
+            <a:endParaRPr lang="en-US" sz="3100" dirty="0"/>
           </a:p>
           <a:p>
             <a:pPr indent="0" marL="0">
               <a:lnSpc>
-                <a:spcPts val="5600"/>
+                <a:spcPct val="120000"/>
               </a:lnSpc>
               <a:buNone/>
             </a:pPr>
             <a:r>
-              <a:rPr lang="en-US" sz="4000" b="1" dirty="0">
-                <a:solidFill>
-                  <a:srgbClr val="FFFFFF"/>
+              <a:rPr lang="en-US" sz="3100" b="1" dirty="0">
+                <a:solidFill>
+                  <a:srgbClr val="264653"/>
                 </a:solidFill>
                 <a:latin typeface="Meiryo" pitchFamily="34" charset="0"/>
                 <a:ea typeface="Meiryo" pitchFamily="34" charset="-122"/>
@@ -2357,81 +2460,20 @@
               </a:rPr>
               <a:t>文章の直し方</a:t>
             </a:r>
-            <a:endParaRPr lang="en-US" sz="4000" dirty="0"/>
-          </a:p>
-        </p:txBody>
-      </p:sp>
-      <p:sp>
-        <p:nvSpPr>
-          <p:cNvPr id="3" name="Text 1"/>
-          <p:cNvSpPr/>
-          <p:nvPr/>
-        </p:nvSpPr>
-        <p:spPr>
-          <a:xfrm>
-            <a:off x="960120" y="3474720"/>
-            <a:ext cx="10058400" cy="457200"/>
-          </a:xfrm>
-          <a:prstGeom prst="rect">
-            <a:avLst/>
-          </a:prstGeom>
-          <a:noFill/>
-          <a:ln/>
-        </p:spPr>
-        <p:txBody>
-          <a:bodyPr wrap="square" lIns="0" tIns="0" rIns="0" bIns="0" rtlCol="0" anchor="ctr"/>
-          <a:lstStyle/>
-          <a:p>
-            <a:pPr indent="0" marL="0">
-              <a:buNone/>
-            </a:pPr>
-            <a:r>
-              <a:rPr lang="en-US" sz="2000" dirty="0">
-                <a:solidFill>
-                  <a:srgbClr val="F4A261"/>
-                </a:solidFill>
-                <a:latin typeface="Meiryo" pitchFamily="34" charset="0"/>
-                <a:ea typeface="Meiryo" pitchFamily="34" charset="-122"/>
-                <a:cs typeface="Meiryo" pitchFamily="34" charset="-120"/>
-              </a:rPr>
-              <a:t>山口様へ　／　2026年8月</a:t>
-            </a:r>
-            <a:endParaRPr lang="en-US" sz="2000" dirty="0"/>
-          </a:p>
-        </p:txBody>
-      </p:sp>
-      <p:sp>
-        <p:nvSpPr>
-          <p:cNvPr id="4" name="Shape 2"/>
-          <p:cNvSpPr/>
-          <p:nvPr/>
-        </p:nvSpPr>
-        <p:spPr>
-          <a:xfrm>
-            <a:off x="914400" y="4206240"/>
-            <a:ext cx="6949440" cy="1463040"/>
-          </a:xfrm>
-          <a:prstGeom prst="roundRect">
-            <a:avLst>
-              <a:gd name="adj" fmla="val 7500"/>
-            </a:avLst>
-          </a:prstGeom>
-          <a:solidFill>
-            <a:srgbClr val="32596B"/>
-          </a:solidFill>
-          <a:ln/>
-        </p:spPr>
-      </p:sp>
-      <p:sp>
-        <p:nvSpPr>
-          <p:cNvPr id="5" name="Text 3"/>
-          <p:cNvSpPr/>
-          <p:nvPr/>
-        </p:nvSpPr>
-        <p:spPr>
-          <a:xfrm>
-            <a:off x="1188720" y="4526280"/>
-            <a:ext cx="6492240" cy="914400"/>
+            <a:endParaRPr lang="en-US" sz="3100" dirty="0"/>
+          </a:p>
+        </p:txBody>
+      </p:sp>
+      <p:sp>
+        <p:nvSpPr>
+          <p:cNvPr id="7" name="Text 4"/>
+          <p:cNvSpPr txBox="1"/>
+          <p:nvPr/>
+        </p:nvSpPr>
+        <p:spPr>
+          <a:xfrm>
+            <a:off x="4892040" y="3133344"/>
+            <a:ext cx="6675120" cy="548640"/>
           </a:xfrm>
           <a:prstGeom prst="rect">
             <a:avLst/>
@@ -2445,42 +2487,179 @@
           <a:p>
             <a:pPr indent="0" marL="0">
               <a:lnSpc>
-                <a:spcPts val="2800"/>
+                <a:spcPct val="130000"/>
               </a:lnSpc>
               <a:buNone/>
             </a:pPr>
             <a:r>
-              <a:rPr lang="en-US" sz="1700" dirty="0">
-                <a:solidFill>
-                  <a:srgbClr val="DCE7EA"/>
-                </a:solidFill>
-                <a:latin typeface="Meiryo" pitchFamily="34" charset="0"/>
-                <a:ea typeface="Meiryo" pitchFamily="34" charset="-122"/>
-                <a:cs typeface="Meiryo" pitchFamily="34" charset="-120"/>
-              </a:rPr>
-              <a:t>このページの文章と写真は、</a:t>
-            </a:r>
-            <a:endParaRPr lang="en-US" sz="1700" dirty="0"/>
+              <a:rPr lang="en-US" sz="1500" dirty="0">
+                <a:solidFill>
+                  <a:srgbClr val="52707A"/>
+                </a:solidFill>
+                <a:latin typeface="Meiryo" pitchFamily="34" charset="0"/>
+                <a:ea typeface="Meiryo" pitchFamily="34" charset="-122"/>
+                <a:cs typeface="Meiryo" pitchFamily="34" charset="-120"/>
+              </a:rPr>
+              <a:t>山口様へ</a:t>
+            </a:r>
+            <a:endParaRPr lang="en-US" sz="1500" dirty="0"/>
           </a:p>
           <a:p>
             <a:pPr indent="0" marL="0">
               <a:lnSpc>
-                <a:spcPts val="2800"/>
+                <a:spcPct val="130000"/>
               </a:lnSpc>
               <a:buNone/>
             </a:pPr>
             <a:r>
-              <a:rPr lang="en-US" sz="1700" dirty="0">
-                <a:solidFill>
-                  <a:srgbClr val="DCE7EA"/>
-                </a:solidFill>
-                <a:latin typeface="Meiryo" pitchFamily="34" charset="0"/>
-                <a:ea typeface="Meiryo" pitchFamily="34" charset="-122"/>
-                <a:cs typeface="Meiryo" pitchFamily="34" charset="-120"/>
-              </a:rPr>
-              <a:t>山口様ご自身で直せるようになりました。</a:t>
-            </a:r>
-            <a:endParaRPr lang="en-US" sz="1700" dirty="0"/>
+              <a:rPr lang="en-US" sz="1500" dirty="0">
+                <a:solidFill>
+                  <a:srgbClr val="52707A"/>
+                </a:solidFill>
+                <a:latin typeface="Meiryo" pitchFamily="34" charset="0"/>
+                <a:ea typeface="Meiryo" pitchFamily="34" charset="-122"/>
+                <a:cs typeface="Meiryo" pitchFamily="34" charset="-120"/>
+              </a:rPr>
+              <a:t>このページの文章と写真は、山口様ご自身で直せるようになりました。</a:t>
+            </a:r>
+            <a:endParaRPr lang="en-US" sz="1500" dirty="0"/>
+          </a:p>
+        </p:txBody>
+      </p:sp>
+      <p:sp>
+        <p:nvSpPr>
+          <p:cNvPr id="8" name="Shape 5"/>
+          <p:cNvSpPr/>
+          <p:nvPr/>
+        </p:nvSpPr>
+        <p:spPr>
+          <a:xfrm>
+            <a:off x="4892040" y="4736592"/>
+            <a:ext cx="1828800" cy="18288"/>
+          </a:xfrm>
+          <a:prstGeom prst="rect">
+            <a:avLst/>
+          </a:prstGeom>
+          <a:solidFill>
+            <a:srgbClr val="F4A261"/>
+          </a:solidFill>
+          <a:ln/>
+        </p:spPr>
+      </p:sp>
+      <p:sp>
+        <p:nvSpPr>
+          <p:cNvPr id="9" name="Text 6"/>
+          <p:cNvSpPr txBox="1"/>
+          <p:nvPr/>
+        </p:nvSpPr>
+        <p:spPr>
+          <a:xfrm>
+            <a:off x="4892040" y="4864608"/>
+            <a:ext cx="6675120" cy="292608"/>
+          </a:xfrm>
+          <a:prstGeom prst="rect">
+            <a:avLst/>
+          </a:prstGeom>
+          <a:noFill/>
+          <a:ln/>
+        </p:spPr>
+        <p:txBody>
+          <a:bodyPr wrap="square" lIns="0" tIns="0" rIns="0" bIns="0" rtlCol="0" anchor="ctr"/>
+          <a:lstStyle/>
+          <a:p>
+            <a:pPr indent="0" marL="0">
+              <a:buNone/>
+            </a:pPr>
+            <a:r>
+              <a:rPr lang="en-US" sz="1250" b="1" dirty="0">
+                <a:solidFill>
+                  <a:srgbClr val="264653"/>
+                </a:solidFill>
+                <a:latin typeface="Meiryo" pitchFamily="34" charset="0"/>
+                <a:ea typeface="Meiryo" pitchFamily="34" charset="-122"/>
+                <a:cs typeface="Meiryo" pitchFamily="34" charset="-120"/>
+              </a:rPr>
+              <a:t>鹿児島のパーキンソン病専門トレーニングスタジオ</a:t>
+            </a:r>
+            <a:endParaRPr lang="en-US" sz="1250" dirty="0"/>
+          </a:p>
+        </p:txBody>
+      </p:sp>
+      <p:sp>
+        <p:nvSpPr>
+          <p:cNvPr id="10" name="Text 7"/>
+          <p:cNvSpPr txBox="1"/>
+          <p:nvPr/>
+        </p:nvSpPr>
+        <p:spPr>
+          <a:xfrm>
+            <a:off x="4892040" y="5193792"/>
+            <a:ext cx="6675120" cy="274320"/>
+          </a:xfrm>
+          <a:prstGeom prst="rect">
+            <a:avLst/>
+          </a:prstGeom>
+          <a:noFill/>
+          <a:ln/>
+        </p:spPr>
+        <p:txBody>
+          <a:bodyPr wrap="square" lIns="0" tIns="0" rIns="0" bIns="0" rtlCol="0" anchor="ctr"/>
+          <a:lstStyle/>
+          <a:p>
+            <a:pPr indent="0" marL="0">
+              <a:buNone/>
+            </a:pPr>
+            <a:r>
+              <a:rPr lang="en-US" sz="1150" dirty="0">
+                <a:solidFill>
+                  <a:srgbClr val="52707A"/>
+                </a:solidFill>
+                <a:latin typeface="Meiryo" pitchFamily="34" charset="0"/>
+                <a:ea typeface="Meiryo" pitchFamily="34" charset="-122"/>
+                <a:cs typeface="Meiryo" pitchFamily="34" charset="-120"/>
+              </a:rPr>
+              <a:t>動くことを楽しむ。明日につながる。</a:t>
+            </a:r>
+            <a:endParaRPr lang="en-US" sz="1150" dirty="0"/>
+          </a:p>
+        </p:txBody>
+      </p:sp>
+      <p:sp>
+        <p:nvSpPr>
+          <p:cNvPr id="11" name="Text 8"/>
+          <p:cNvSpPr txBox="1"/>
+          <p:nvPr/>
+        </p:nvSpPr>
+        <p:spPr>
+          <a:xfrm>
+            <a:off x="4892040" y="5596128"/>
+            <a:ext cx="6675120" cy="274320"/>
+          </a:xfrm>
+          <a:prstGeom prst="rect">
+            <a:avLst/>
+          </a:prstGeom>
+          <a:noFill/>
+          <a:ln/>
+        </p:spPr>
+        <p:txBody>
+          <a:bodyPr wrap="square" lIns="0" tIns="0" rIns="0" bIns="0" rtlCol="0" anchor="ctr"/>
+          <a:lstStyle/>
+          <a:p>
+            <a:pPr indent="0" marL="0">
+              <a:buNone/>
+            </a:pPr>
+            <a:r>
+              <a:rPr lang="en-US" sz="1050" dirty="0">
+                <a:solidFill>
+                  <a:srgbClr val="8A9CA2"/>
+                </a:solidFill>
+                <a:latin typeface="Meiryo" pitchFamily="34" charset="0"/>
+                <a:ea typeface="Meiryo" pitchFamily="34" charset="-122"/>
+                <a:cs typeface="Meiryo" pitchFamily="34" charset="-120"/>
+              </a:rPr>
+              <a:t>aspath-life.com　／　2026年8月　ASPATH 様　ご納品資料</a:t>
+            </a:r>
+            <a:endParaRPr lang="en-US" sz="1050" dirty="0"/>
           </a:p>
         </p:txBody>
       </p:sp>
@@ -2516,227 +2695,9 @@
           <a:chExt cx="0" cy="0"/>
         </a:xfrm>
       </p:grpSpPr>
-      <p:sp>
-        <p:nvSpPr>
-          <p:cNvPr id="2" name="Text 0"/>
-          <p:cNvSpPr/>
-          <p:nvPr/>
-        </p:nvSpPr>
-        <p:spPr>
-          <a:xfrm>
-            <a:off x="548640" y="274320"/>
-            <a:ext cx="11064240" cy="731520"/>
-          </a:xfrm>
-          <a:prstGeom prst="rect">
-            <a:avLst/>
-          </a:prstGeom>
-          <a:noFill/>
-          <a:ln/>
-        </p:spPr>
-        <p:txBody>
-          <a:bodyPr wrap="square" lIns="0" tIns="0" rIns="0" bIns="0" rtlCol="0" anchor="ctr"/>
-          <a:lstStyle/>
-          <a:p>
-            <a:pPr indent="0" marL="0">
-              <a:buNone/>
-            </a:pPr>
-            <a:r>
-              <a:rPr lang="en-US" sz="3400" b="1" dirty="0">
-                <a:solidFill>
-                  <a:srgbClr val="264653"/>
-                </a:solidFill>
-                <a:latin typeface="Meiryo" pitchFamily="34" charset="0"/>
-                <a:ea typeface="Meiryo" pitchFamily="34" charset="-122"/>
-                <a:cs typeface="Meiryo" pitchFamily="34" charset="-120"/>
-              </a:rPr>
-              <a:t>どこが直せるか（前半）</a:t>
-            </a:r>
-            <a:endParaRPr lang="en-US" sz="3400" dirty="0"/>
-          </a:p>
-        </p:txBody>
-      </p:sp>
-      <p:sp>
-        <p:nvSpPr>
-          <p:cNvPr id="3" name="Text 1"/>
-          <p:cNvSpPr/>
-          <p:nvPr/>
-        </p:nvSpPr>
-        <p:spPr>
-          <a:xfrm>
-            <a:off x="566928" y="1024128"/>
-            <a:ext cx="11064240" cy="365760"/>
-          </a:xfrm>
-          <a:prstGeom prst="rect">
-            <a:avLst/>
-          </a:prstGeom>
-          <a:noFill/>
-          <a:ln/>
-        </p:spPr>
-        <p:txBody>
-          <a:bodyPr wrap="square" lIns="0" tIns="0" rIns="0" bIns="0" rtlCol="0" anchor="ctr"/>
-          <a:lstStyle/>
-          <a:p>
-            <a:pPr indent="0" marL="0">
-              <a:buNone/>
-            </a:pPr>
-            <a:r>
-              <a:rPr lang="en-US" sz="1600" dirty="0">
-                <a:solidFill>
-                  <a:srgbClr val="5E7681"/>
-                </a:solidFill>
-                <a:latin typeface="Meiryo" pitchFamily="34" charset="0"/>
-                <a:ea typeface="Meiryo" pitchFamily="34" charset="-122"/>
-                <a:cs typeface="Meiryo" pitchFamily="34" charset="-120"/>
-              </a:rPr>
-              <a:t>編集画面での見え方　緑＝直せる／オレンジ＝触らない</a:t>
-            </a:r>
-            <a:endParaRPr lang="en-US" sz="1600" dirty="0"/>
-          </a:p>
-        </p:txBody>
-      </p:sp>
-      <p:sp>
-        <p:nvSpPr>
-          <p:cNvPr id="4" name="Text 2"/>
-          <p:cNvSpPr/>
-          <p:nvPr/>
-        </p:nvSpPr>
-        <p:spPr>
-          <a:xfrm>
-            <a:off x="11338560" y="6309360"/>
-            <a:ext cx="457200" cy="274320"/>
-          </a:xfrm>
-          <a:prstGeom prst="rect">
-            <a:avLst/>
-          </a:prstGeom>
-          <a:noFill/>
-          <a:ln/>
-        </p:spPr>
-        <p:txBody>
-          <a:bodyPr wrap="square" lIns="0" tIns="0" rIns="0" bIns="0" rtlCol="0" anchor="ctr"/>
-          <a:lstStyle/>
-          <a:p>
-            <a:pPr algn="r" indent="0" marL="0">
-              <a:buNone/>
-            </a:pPr>
-            <a:r>
-              <a:rPr lang="en-US" sz="1100" dirty="0">
-                <a:solidFill>
-                  <a:srgbClr val="A8B4B8"/>
-                </a:solidFill>
-                <a:latin typeface="Meiryo" pitchFamily="34" charset="0"/>
-                <a:ea typeface="Meiryo" pitchFamily="34" charset="-122"/>
-                <a:cs typeface="Meiryo" pitchFamily="34" charset="-120"/>
-              </a:rPr>
-              <a:t>9</a:t>
-            </a:r>
-            <a:endParaRPr lang="en-US" sz="1100" dirty="0"/>
-          </a:p>
-        </p:txBody>
-      </p:sp>
-      <p:sp>
-        <p:nvSpPr>
-          <p:cNvPr id="5" name="Text 3"/>
-          <p:cNvSpPr/>
-          <p:nvPr/>
-        </p:nvSpPr>
-        <p:spPr>
-          <a:xfrm>
-            <a:off x="640080" y="1691640"/>
-            <a:ext cx="5212080" cy="320040"/>
-          </a:xfrm>
-          <a:prstGeom prst="rect">
-            <a:avLst/>
-          </a:prstGeom>
-          <a:noFill/>
-          <a:ln/>
-        </p:spPr>
-        <p:txBody>
-          <a:bodyPr wrap="square" lIns="0" tIns="0" rIns="0" bIns="0" rtlCol="0" anchor="ctr"/>
-          <a:lstStyle/>
-          <a:p>
-            <a:pPr indent="0" marL="0">
-              <a:buNone/>
-            </a:pPr>
-            <a:r>
-              <a:rPr lang="en-US" sz="1800" b="1" dirty="0">
-                <a:solidFill>
-                  <a:srgbClr val="264653"/>
-                </a:solidFill>
-                <a:latin typeface="Meiryo" pitchFamily="34" charset="0"/>
-                <a:ea typeface="Meiryo" pitchFamily="34" charset="-122"/>
-                <a:cs typeface="Meiryo" pitchFamily="34" charset="-120"/>
-              </a:rPr>
-              <a:t>ASPATHの由来 ／ ASPATHの特徴</a:t>
-            </a:r>
-            <a:endParaRPr lang="en-US" sz="1800" dirty="0"/>
-          </a:p>
-        </p:txBody>
-      </p:sp>
-      <p:sp>
-        <p:nvSpPr>
-          <p:cNvPr id="6" name="Text 4"/>
-          <p:cNvSpPr/>
-          <p:nvPr/>
-        </p:nvSpPr>
-        <p:spPr>
-          <a:xfrm>
-            <a:off x="640080" y="2103120"/>
-            <a:ext cx="5212080" cy="685800"/>
-          </a:xfrm>
-          <a:prstGeom prst="rect">
-            <a:avLst/>
-          </a:prstGeom>
-          <a:noFill/>
-          <a:ln/>
-        </p:spPr>
-        <p:txBody>
-          <a:bodyPr wrap="square" lIns="0" tIns="0" rIns="0" bIns="0" rtlCol="0" anchor="ctr"/>
-          <a:lstStyle/>
-          <a:p>
-            <a:pPr indent="0" marL="0">
-              <a:lnSpc>
-                <a:spcPts val="2200"/>
-              </a:lnSpc>
-              <a:buNone/>
-            </a:pPr>
-            <a:r>
-              <a:rPr lang="en-US" sz="1400" dirty="0">
-                <a:solidFill>
-                  <a:srgbClr val="1E2D34"/>
-                </a:solidFill>
-                <a:latin typeface="Meiryo" pitchFamily="34" charset="0"/>
-                <a:ea typeface="Meiryo" pitchFamily="34" charset="-122"/>
-                <a:cs typeface="Meiryo" pitchFamily="34" charset="-120"/>
-              </a:rPr>
-              <a:t>見出しと文章が緑。A S P A T H の一覧は</a:t>
-            </a:r>
-            <a:endParaRPr lang="en-US" sz="1400" dirty="0"/>
-          </a:p>
-          <a:p>
-            <a:pPr indent="0" marL="0">
-              <a:lnSpc>
-                <a:spcPts val="2200"/>
-              </a:lnSpc>
-              <a:buNone/>
-            </a:pPr>
-            <a:r>
-              <a:rPr lang="en-US" sz="1400" dirty="0">
-                <a:solidFill>
-                  <a:srgbClr val="1E2D34"/>
-                </a:solidFill>
-                <a:latin typeface="Meiryo" pitchFamily="34" charset="0"/>
-                <a:ea typeface="Meiryo" pitchFamily="34" charset="-122"/>
-                <a:cs typeface="Meiryo" pitchFamily="34" charset="-120"/>
-              </a:rPr>
-              <a:t>ひとつのオレンジの箱になっています。</a:t>
-            </a:r>
-            <a:endParaRPr lang="en-US" sz="1400" dirty="0"/>
-          </a:p>
-        </p:txBody>
-      </p:sp>
       <p:pic>
         <p:nvPicPr>
-          <p:cNvPr id="7" name="Image 0" descr="/sessions/compassionate-sweet-heisenberg/mnt/dev-aspath-life-main/_wp移行素材/★引継ぎ資料/画像/E1_編集画面_由来と特徴.jpg">    </p:cNvPr>
+          <p:cNvPr id="2" name="Image 0" descr="/sessions/compassionate-sweet-heisenberg/mnt/dev-aspath-life-main/tools/assets/logo-deck.png">    </p:cNvPr>
           <p:cNvPicPr>
             <a:picLocks noChangeAspect="1"/>
           </p:cNvPicPr>
@@ -2750,8 +2711,8 @@
         </p:blipFill>
         <p:spPr>
           <a:xfrm>
-            <a:off x="640080" y="2880360"/>
-            <a:ext cx="4754880" cy="3045260"/>
+            <a:off x="11458173" y="109728"/>
+            <a:ext cx="209571" cy="256032"/>
           </a:xfrm>
           <a:prstGeom prst="rect">
             <a:avLst/>
@@ -2760,52 +2721,208 @@
       </p:pic>
       <p:sp>
         <p:nvSpPr>
+          <p:cNvPr id="3" name="Text 0"/>
+          <p:cNvSpPr txBox="1"/>
+          <p:nvPr/>
+        </p:nvSpPr>
+        <p:spPr>
+          <a:xfrm>
+            <a:off x="8623533" y="128016"/>
+            <a:ext cx="2743200" cy="237744"/>
+          </a:xfrm>
+          <a:prstGeom prst="rect">
+            <a:avLst/>
+          </a:prstGeom>
+          <a:noFill/>
+          <a:ln/>
+        </p:spPr>
+        <p:txBody>
+          <a:bodyPr wrap="square" lIns="0" tIns="0" rIns="0" bIns="0" rtlCol="0" anchor="ctr"/>
+          <a:lstStyle/>
+          <a:p>
+            <a:pPr algn="r" indent="0" marL="0">
+              <a:buNone/>
+            </a:pPr>
+            <a:r>
+              <a:rPr lang="en-US" sz="750" dirty="0">
+                <a:solidFill>
+                  <a:srgbClr val="97A9AF"/>
+                </a:solidFill>
+                <a:latin typeface="Meiryo" pitchFamily="34" charset="0"/>
+                <a:ea typeface="Meiryo" pitchFamily="34" charset="-122"/>
+                <a:cs typeface="Meiryo" pitchFamily="34" charset="-120"/>
+              </a:rPr>
+              <a:t>鹿児島のパーキンソン病専門トレーニングスタジオ</a:t>
+            </a:r>
+            <a:endParaRPr lang="en-US" sz="750" dirty="0"/>
+          </a:p>
+        </p:txBody>
+      </p:sp>
+      <p:sp>
+        <p:nvSpPr>
+          <p:cNvPr id="4" name="Text 1"/>
+          <p:cNvSpPr/>
+          <p:nvPr/>
+        </p:nvSpPr>
+        <p:spPr>
+          <a:xfrm>
+            <a:off x="548640" y="274320"/>
+            <a:ext cx="11064240" cy="731520"/>
+          </a:xfrm>
+          <a:prstGeom prst="rect">
+            <a:avLst/>
+          </a:prstGeom>
+          <a:noFill/>
+          <a:ln/>
+        </p:spPr>
+        <p:txBody>
+          <a:bodyPr wrap="square" lIns="0" tIns="0" rIns="0" bIns="0" rtlCol="0" anchor="ctr"/>
+          <a:lstStyle/>
+          <a:p>
+            <a:pPr indent="0" marL="0">
+              <a:buNone/>
+            </a:pPr>
+            <a:r>
+              <a:rPr lang="en-US" sz="3400" b="1" dirty="0">
+                <a:solidFill>
+                  <a:srgbClr val="264653"/>
+                </a:solidFill>
+                <a:latin typeface="Meiryo" pitchFamily="34" charset="0"/>
+                <a:ea typeface="Meiryo" pitchFamily="34" charset="-122"/>
+                <a:cs typeface="Meiryo" pitchFamily="34" charset="-120"/>
+              </a:rPr>
+              <a:t>どこが直せるか（前半）</a:t>
+            </a:r>
+            <a:endParaRPr lang="en-US" sz="3400" dirty="0"/>
+          </a:p>
+        </p:txBody>
+      </p:sp>
+      <p:sp>
+        <p:nvSpPr>
+          <p:cNvPr id="5" name="Text 2"/>
+          <p:cNvSpPr/>
+          <p:nvPr/>
+        </p:nvSpPr>
+        <p:spPr>
+          <a:xfrm>
+            <a:off x="566928" y="1024128"/>
+            <a:ext cx="11064240" cy="365760"/>
+          </a:xfrm>
+          <a:prstGeom prst="rect">
+            <a:avLst/>
+          </a:prstGeom>
+          <a:noFill/>
+          <a:ln/>
+        </p:spPr>
+        <p:txBody>
+          <a:bodyPr wrap="square" lIns="0" tIns="0" rIns="0" bIns="0" rtlCol="0" anchor="ctr"/>
+          <a:lstStyle/>
+          <a:p>
+            <a:pPr indent="0" marL="0">
+              <a:buNone/>
+            </a:pPr>
+            <a:r>
+              <a:rPr lang="en-US" sz="1600" dirty="0">
+                <a:solidFill>
+                  <a:srgbClr val="5E7681"/>
+                </a:solidFill>
+                <a:latin typeface="Meiryo" pitchFamily="34" charset="0"/>
+                <a:ea typeface="Meiryo" pitchFamily="34" charset="-122"/>
+                <a:cs typeface="Meiryo" pitchFamily="34" charset="-120"/>
+              </a:rPr>
+              <a:t>編集画面での見え方　緑＝直せる／オレンジ＝触らない</a:t>
+            </a:r>
+            <a:endParaRPr lang="en-US" sz="1600" dirty="0"/>
+          </a:p>
+        </p:txBody>
+      </p:sp>
+      <p:sp>
+        <p:nvSpPr>
+          <p:cNvPr id="6" name="Text 3"/>
+          <p:cNvSpPr/>
+          <p:nvPr/>
+        </p:nvSpPr>
+        <p:spPr>
+          <a:xfrm>
+            <a:off x="11338560" y="6309360"/>
+            <a:ext cx="457200" cy="274320"/>
+          </a:xfrm>
+          <a:prstGeom prst="rect">
+            <a:avLst/>
+          </a:prstGeom>
+          <a:noFill/>
+          <a:ln/>
+        </p:spPr>
+        <p:txBody>
+          <a:bodyPr wrap="square" lIns="0" tIns="0" rIns="0" bIns="0" rtlCol="0" anchor="ctr"/>
+          <a:lstStyle/>
+          <a:p>
+            <a:pPr algn="r" indent="0" marL="0">
+              <a:buNone/>
+            </a:pPr>
+            <a:r>
+              <a:rPr lang="en-US" sz="1100" dirty="0">
+                <a:solidFill>
+                  <a:srgbClr val="A8B4B8"/>
+                </a:solidFill>
+                <a:latin typeface="Meiryo" pitchFamily="34" charset="0"/>
+                <a:ea typeface="Meiryo" pitchFamily="34" charset="-122"/>
+                <a:cs typeface="Meiryo" pitchFamily="34" charset="-120"/>
+              </a:rPr>
+              <a:t>9</a:t>
+            </a:r>
+            <a:endParaRPr lang="en-US" sz="1100" dirty="0"/>
+          </a:p>
+        </p:txBody>
+      </p:sp>
+      <p:sp>
+        <p:nvSpPr>
+          <p:cNvPr id="7" name="Text 4"/>
+          <p:cNvSpPr/>
+          <p:nvPr/>
+        </p:nvSpPr>
+        <p:spPr>
+          <a:xfrm>
+            <a:off x="640080" y="1691640"/>
+            <a:ext cx="5212080" cy="320040"/>
+          </a:xfrm>
+          <a:prstGeom prst="rect">
+            <a:avLst/>
+          </a:prstGeom>
+          <a:noFill/>
+          <a:ln/>
+        </p:spPr>
+        <p:txBody>
+          <a:bodyPr wrap="square" lIns="0" tIns="0" rIns="0" bIns="0" rtlCol="0" anchor="ctr"/>
+          <a:lstStyle/>
+          <a:p>
+            <a:pPr indent="0" marL="0">
+              <a:buNone/>
+            </a:pPr>
+            <a:r>
+              <a:rPr lang="en-US" sz="1800" b="1" dirty="0">
+                <a:solidFill>
+                  <a:srgbClr val="264653"/>
+                </a:solidFill>
+                <a:latin typeface="Meiryo" pitchFamily="34" charset="0"/>
+                <a:ea typeface="Meiryo" pitchFamily="34" charset="-122"/>
+                <a:cs typeface="Meiryo" pitchFamily="34" charset="-120"/>
+              </a:rPr>
+              <a:t>ASPATHの由来 ／ ASPATHの特徴</a:t>
+            </a:r>
+            <a:endParaRPr lang="en-US" sz="1800" dirty="0"/>
+          </a:p>
+        </p:txBody>
+      </p:sp>
+      <p:sp>
+        <p:nvSpPr>
           <p:cNvPr id="8" name="Text 5"/>
           <p:cNvSpPr/>
           <p:nvPr/>
         </p:nvSpPr>
         <p:spPr>
           <a:xfrm>
-            <a:off x="6492240" y="1691640"/>
-            <a:ext cx="5212080" cy="320040"/>
-          </a:xfrm>
-          <a:prstGeom prst="rect">
-            <a:avLst/>
-          </a:prstGeom>
-          <a:noFill/>
-          <a:ln/>
-        </p:spPr>
-        <p:txBody>
-          <a:bodyPr wrap="square" lIns="0" tIns="0" rIns="0" bIns="0" rtlCol="0" anchor="ctr"/>
-          <a:lstStyle/>
-          <a:p>
-            <a:pPr indent="0" marL="0">
-              <a:buNone/>
-            </a:pPr>
-            <a:r>
-              <a:rPr lang="en-US" sz="1800" b="1" dirty="0">
-                <a:solidFill>
-                  <a:srgbClr val="264653"/>
-                </a:solidFill>
-                <a:latin typeface="Meiryo" pitchFamily="34" charset="0"/>
-                <a:ea typeface="Meiryo" pitchFamily="34" charset="-122"/>
-                <a:cs typeface="Meiryo" pitchFamily="34" charset="-120"/>
-              </a:rPr>
-              <a:t>01「3つの芯」</a:t>
-            </a:r>
-            <a:endParaRPr lang="en-US" sz="1800" dirty="0"/>
-          </a:p>
-        </p:txBody>
-      </p:sp>
-      <p:sp>
-        <p:nvSpPr>
-          <p:cNvPr id="9" name="Text 6"/>
-          <p:cNvSpPr/>
-          <p:nvPr/>
-        </p:nvSpPr>
-        <p:spPr>
-          <a:xfrm>
-            <a:off x="6492240" y="2103120"/>
+            <a:off x="640080" y="2103120"/>
             <a:ext cx="5212080" cy="685800"/>
           </a:xfrm>
           <a:prstGeom prst="rect">
@@ -2833,7 +2950,7 @@
                 <a:ea typeface="Meiryo" pitchFamily="34" charset="-122"/>
                 <a:cs typeface="Meiryo" pitchFamily="34" charset="-120"/>
               </a:rPr>
-              <a:t>「01」も「① 身体の芯…」も緑。真ん中の</a:t>
+              <a:t>見出しと文章が緑。A S P A T H の一覧は</a:t>
             </a:r>
             <a:endParaRPr lang="en-US" sz="1400" dirty="0"/>
           </a:p>
@@ -2853,7 +2970,7 @@
                 <a:ea typeface="Meiryo" pitchFamily="34" charset="-122"/>
                 <a:cs typeface="Meiryo" pitchFamily="34" charset="-120"/>
               </a:rPr>
-              <a:t>大きな図だけがオレンジ。17か所を直せます。</a:t>
+              <a:t>ひとつのオレンジの箱になっています。</a:t>
             </a:r>
             <a:endParaRPr lang="en-US" sz="1400" dirty="0"/>
           </a:p>
@@ -2861,7 +2978,7 @@
       </p:sp>
       <p:pic>
         <p:nvPicPr>
-          <p:cNvPr id="10" name="Image 1" descr="/sessions/compassionate-sweet-heisenberg/mnt/dev-aspath-life-main/_wp移行素材/★引継ぎ資料/画像/E2_編集画面_01_3つの芯.jpg">    </p:cNvPr>
+          <p:cNvPr id="9" name="Image 1" descr="/sessions/compassionate-sweet-heisenberg/mnt/dev-aspath-life-main/_wp移行素材/★引継ぎ資料/画像/E1_編集画面_由来と特徴.jpg">    </p:cNvPr>
           <p:cNvPicPr>
             <a:picLocks noChangeAspect="1"/>
           </p:cNvPicPr>
@@ -2875,6 +2992,131 @@
         </p:blipFill>
         <p:spPr>
           <a:xfrm>
+            <a:off x="640080" y="2880360"/>
+            <a:ext cx="4754880" cy="3045260"/>
+          </a:xfrm>
+          <a:prstGeom prst="rect">
+            <a:avLst/>
+          </a:prstGeom>
+        </p:spPr>
+      </p:pic>
+      <p:sp>
+        <p:nvSpPr>
+          <p:cNvPr id="10" name="Text 6"/>
+          <p:cNvSpPr/>
+          <p:nvPr/>
+        </p:nvSpPr>
+        <p:spPr>
+          <a:xfrm>
+            <a:off x="6492240" y="1691640"/>
+            <a:ext cx="5212080" cy="320040"/>
+          </a:xfrm>
+          <a:prstGeom prst="rect">
+            <a:avLst/>
+          </a:prstGeom>
+          <a:noFill/>
+          <a:ln/>
+        </p:spPr>
+        <p:txBody>
+          <a:bodyPr wrap="square" lIns="0" tIns="0" rIns="0" bIns="0" rtlCol="0" anchor="ctr"/>
+          <a:lstStyle/>
+          <a:p>
+            <a:pPr indent="0" marL="0">
+              <a:buNone/>
+            </a:pPr>
+            <a:r>
+              <a:rPr lang="en-US" sz="1800" b="1" dirty="0">
+                <a:solidFill>
+                  <a:srgbClr val="264653"/>
+                </a:solidFill>
+                <a:latin typeface="Meiryo" pitchFamily="34" charset="0"/>
+                <a:ea typeface="Meiryo" pitchFamily="34" charset="-122"/>
+                <a:cs typeface="Meiryo" pitchFamily="34" charset="-120"/>
+              </a:rPr>
+              <a:t>01「3つの芯」</a:t>
+            </a:r>
+            <a:endParaRPr lang="en-US" sz="1800" dirty="0"/>
+          </a:p>
+        </p:txBody>
+      </p:sp>
+      <p:sp>
+        <p:nvSpPr>
+          <p:cNvPr id="11" name="Text 7"/>
+          <p:cNvSpPr/>
+          <p:nvPr/>
+        </p:nvSpPr>
+        <p:spPr>
+          <a:xfrm>
+            <a:off x="6492240" y="2103120"/>
+            <a:ext cx="5212080" cy="685800"/>
+          </a:xfrm>
+          <a:prstGeom prst="rect">
+            <a:avLst/>
+          </a:prstGeom>
+          <a:noFill/>
+          <a:ln/>
+        </p:spPr>
+        <p:txBody>
+          <a:bodyPr wrap="square" lIns="0" tIns="0" rIns="0" bIns="0" rtlCol="0" anchor="ctr"/>
+          <a:lstStyle/>
+          <a:p>
+            <a:pPr indent="0" marL="0">
+              <a:lnSpc>
+                <a:spcPts val="2200"/>
+              </a:lnSpc>
+              <a:buNone/>
+            </a:pPr>
+            <a:r>
+              <a:rPr lang="en-US" sz="1400" dirty="0">
+                <a:solidFill>
+                  <a:srgbClr val="1E2D34"/>
+                </a:solidFill>
+                <a:latin typeface="Meiryo" pitchFamily="34" charset="0"/>
+                <a:ea typeface="Meiryo" pitchFamily="34" charset="-122"/>
+                <a:cs typeface="Meiryo" pitchFamily="34" charset="-120"/>
+              </a:rPr>
+              <a:t>「01」も「① 身体の芯…」も緑。真ん中の</a:t>
+            </a:r>
+            <a:endParaRPr lang="en-US" sz="1400" dirty="0"/>
+          </a:p>
+          <a:p>
+            <a:pPr indent="0" marL="0">
+              <a:lnSpc>
+                <a:spcPts val="2200"/>
+              </a:lnSpc>
+              <a:buNone/>
+            </a:pPr>
+            <a:r>
+              <a:rPr lang="en-US" sz="1400" dirty="0">
+                <a:solidFill>
+                  <a:srgbClr val="1E2D34"/>
+                </a:solidFill>
+                <a:latin typeface="Meiryo" pitchFamily="34" charset="0"/>
+                <a:ea typeface="Meiryo" pitchFamily="34" charset="-122"/>
+                <a:cs typeface="Meiryo" pitchFamily="34" charset="-120"/>
+              </a:rPr>
+              <a:t>大きな図だけがオレンジ。17か所を直せます。</a:t>
+            </a:r>
+            <a:endParaRPr lang="en-US" sz="1400" dirty="0"/>
+          </a:p>
+        </p:txBody>
+      </p:sp>
+      <p:pic>
+        <p:nvPicPr>
+          <p:cNvPr id="12" name="Image 2" descr="/sessions/compassionate-sweet-heisenberg/mnt/dev-aspath-life-main/_wp移行素材/★引継ぎ資料/画像/E2_編集画面_01_3つの芯.jpg">    </p:cNvPr>
+          <p:cNvPicPr>
+            <a:picLocks noChangeAspect="1"/>
+          </p:cNvPicPr>
+          <p:nvPr/>
+        </p:nvPicPr>
+        <p:blipFill>
+          <a:blip r:embed="rId3"/>
+          <a:stretch>
+            <a:fillRect/>
+          </a:stretch>
+        </p:blipFill>
+        <p:spPr>
+          <a:xfrm>
             <a:off x="6492240" y="2880360"/>
             <a:ext cx="4754880" cy="3045260"/>
           </a:xfrm>
@@ -2885,7 +3127,7 @@
       </p:pic>
       <p:sp>
         <p:nvSpPr>
-          <p:cNvPr id="11" name="Text 7"/>
+          <p:cNvPr id="13" name="Text 8"/>
           <p:cNvSpPr/>
           <p:nvPr/>
         </p:nvSpPr>
@@ -2924,7 +3166,7 @@
       </p:sp>
       <p:sp>
         <p:nvSpPr>
-          <p:cNvPr id="12" name="Text 8"/>
+          <p:cNvPr id="14" name="Text 9"/>
           <p:cNvSpPr/>
           <p:nvPr/>
         </p:nvSpPr>
@@ -2993,126 +3235,9 @@
           <a:chExt cx="0" cy="0"/>
         </a:xfrm>
       </p:grpSpPr>
-      <p:sp>
-        <p:nvSpPr>
-          <p:cNvPr id="2" name="Text 0"/>
-          <p:cNvSpPr/>
-          <p:nvPr/>
-        </p:nvSpPr>
-        <p:spPr>
-          <a:xfrm>
-            <a:off x="548640" y="274320"/>
-            <a:ext cx="11064240" cy="731520"/>
-          </a:xfrm>
-          <a:prstGeom prst="rect">
-            <a:avLst/>
-          </a:prstGeom>
-          <a:noFill/>
-          <a:ln/>
-        </p:spPr>
-        <p:txBody>
-          <a:bodyPr wrap="square" lIns="0" tIns="0" rIns="0" bIns="0" rtlCol="0" anchor="ctr"/>
-          <a:lstStyle/>
-          <a:p>
-            <a:pPr indent="0" marL="0">
-              <a:buNone/>
-            </a:pPr>
-            <a:r>
-              <a:rPr lang="en-US" sz="3400" b="1" dirty="0">
-                <a:solidFill>
-                  <a:srgbClr val="264653"/>
-                </a:solidFill>
-                <a:latin typeface="Meiryo" pitchFamily="34" charset="0"/>
-                <a:ea typeface="Meiryo" pitchFamily="34" charset="-122"/>
-                <a:cs typeface="Meiryo" pitchFamily="34" charset="-120"/>
-              </a:rPr>
-              <a:t>どこが直せるか（後半）</a:t>
-            </a:r>
-            <a:endParaRPr lang="en-US" sz="3400" dirty="0"/>
-          </a:p>
-        </p:txBody>
-      </p:sp>
-      <p:sp>
-        <p:nvSpPr>
-          <p:cNvPr id="3" name="Text 1"/>
-          <p:cNvSpPr/>
-          <p:nvPr/>
-        </p:nvSpPr>
-        <p:spPr>
-          <a:xfrm>
-            <a:off x="566928" y="1024128"/>
-            <a:ext cx="11064240" cy="365760"/>
-          </a:xfrm>
-          <a:prstGeom prst="rect">
-            <a:avLst/>
-          </a:prstGeom>
-          <a:noFill/>
-          <a:ln/>
-        </p:spPr>
-        <p:txBody>
-          <a:bodyPr wrap="square" lIns="0" tIns="0" rIns="0" bIns="0" rtlCol="0" anchor="ctr"/>
-          <a:lstStyle/>
-          <a:p>
-            <a:pPr indent="0" marL="0">
-              <a:buNone/>
-            </a:pPr>
-            <a:r>
-              <a:rPr lang="en-US" sz="1600" dirty="0">
-                <a:solidFill>
-                  <a:srgbClr val="5E7681"/>
-                </a:solidFill>
-                <a:latin typeface="Meiryo" pitchFamily="34" charset="0"/>
-                <a:ea typeface="Meiryo" pitchFamily="34" charset="-122"/>
-                <a:cs typeface="Meiryo" pitchFamily="34" charset="-120"/>
-              </a:rPr>
-              <a:t>02・03・04 はすべて同じ形です</a:t>
-            </a:r>
-            <a:endParaRPr lang="en-US" sz="1600" dirty="0"/>
-          </a:p>
-        </p:txBody>
-      </p:sp>
-      <p:sp>
-        <p:nvSpPr>
-          <p:cNvPr id="4" name="Text 2"/>
-          <p:cNvSpPr/>
-          <p:nvPr/>
-        </p:nvSpPr>
-        <p:spPr>
-          <a:xfrm>
-            <a:off x="11338560" y="6309360"/>
-            <a:ext cx="457200" cy="274320"/>
-          </a:xfrm>
-          <a:prstGeom prst="rect">
-            <a:avLst/>
-          </a:prstGeom>
-          <a:noFill/>
-          <a:ln/>
-        </p:spPr>
-        <p:txBody>
-          <a:bodyPr wrap="square" lIns="0" tIns="0" rIns="0" bIns="0" rtlCol="0" anchor="ctr"/>
-          <a:lstStyle/>
-          <a:p>
-            <a:pPr algn="r" indent="0" marL="0">
-              <a:buNone/>
-            </a:pPr>
-            <a:r>
-              <a:rPr lang="en-US" sz="1100" dirty="0">
-                <a:solidFill>
-                  <a:srgbClr val="A8B4B8"/>
-                </a:solidFill>
-                <a:latin typeface="Meiryo" pitchFamily="34" charset="0"/>
-                <a:ea typeface="Meiryo" pitchFamily="34" charset="-122"/>
-                <a:cs typeface="Meiryo" pitchFamily="34" charset="-120"/>
-              </a:rPr>
-              <a:t>10</a:t>
-            </a:r>
-            <a:endParaRPr lang="en-US" sz="1100" dirty="0"/>
-          </a:p>
-        </p:txBody>
-      </p:sp>
       <p:pic>
         <p:nvPicPr>
-          <p:cNvPr id="5" name="Image 0" descr="/sessions/compassionate-sweet-heisenberg/mnt/dev-aspath-life-main/_wp移行素材/★引継ぎ資料/画像/E3_編集画面_04.jpg">    </p:cNvPr>
+          <p:cNvPr id="2" name="Image 0" descr="/sessions/compassionate-sweet-heisenberg/mnt/dev-aspath-life-main/tools/assets/logo-deck.png">    </p:cNvPr>
           <p:cNvPicPr>
             <a:picLocks noChangeAspect="1"/>
           </p:cNvPicPr>
@@ -3126,6 +3251,186 @@
         </p:blipFill>
         <p:spPr>
           <a:xfrm>
+            <a:off x="11458173" y="109728"/>
+            <a:ext cx="209571" cy="256032"/>
+          </a:xfrm>
+          <a:prstGeom prst="rect">
+            <a:avLst/>
+          </a:prstGeom>
+        </p:spPr>
+      </p:pic>
+      <p:sp>
+        <p:nvSpPr>
+          <p:cNvPr id="3" name="Text 0"/>
+          <p:cNvSpPr txBox="1"/>
+          <p:nvPr/>
+        </p:nvSpPr>
+        <p:spPr>
+          <a:xfrm>
+            <a:off x="8623533" y="128016"/>
+            <a:ext cx="2743200" cy="237744"/>
+          </a:xfrm>
+          <a:prstGeom prst="rect">
+            <a:avLst/>
+          </a:prstGeom>
+          <a:noFill/>
+          <a:ln/>
+        </p:spPr>
+        <p:txBody>
+          <a:bodyPr wrap="square" lIns="0" tIns="0" rIns="0" bIns="0" rtlCol="0" anchor="ctr"/>
+          <a:lstStyle/>
+          <a:p>
+            <a:pPr algn="r" indent="0" marL="0">
+              <a:buNone/>
+            </a:pPr>
+            <a:r>
+              <a:rPr lang="en-US" sz="750" dirty="0">
+                <a:solidFill>
+                  <a:srgbClr val="97A9AF"/>
+                </a:solidFill>
+                <a:latin typeface="Meiryo" pitchFamily="34" charset="0"/>
+                <a:ea typeface="Meiryo" pitchFamily="34" charset="-122"/>
+                <a:cs typeface="Meiryo" pitchFamily="34" charset="-120"/>
+              </a:rPr>
+              <a:t>鹿児島のパーキンソン病専門トレーニングスタジオ</a:t>
+            </a:r>
+            <a:endParaRPr lang="en-US" sz="750" dirty="0"/>
+          </a:p>
+        </p:txBody>
+      </p:sp>
+      <p:sp>
+        <p:nvSpPr>
+          <p:cNvPr id="4" name="Text 1"/>
+          <p:cNvSpPr/>
+          <p:nvPr/>
+        </p:nvSpPr>
+        <p:spPr>
+          <a:xfrm>
+            <a:off x="548640" y="274320"/>
+            <a:ext cx="11064240" cy="731520"/>
+          </a:xfrm>
+          <a:prstGeom prst="rect">
+            <a:avLst/>
+          </a:prstGeom>
+          <a:noFill/>
+          <a:ln/>
+        </p:spPr>
+        <p:txBody>
+          <a:bodyPr wrap="square" lIns="0" tIns="0" rIns="0" bIns="0" rtlCol="0" anchor="ctr"/>
+          <a:lstStyle/>
+          <a:p>
+            <a:pPr indent="0" marL="0">
+              <a:buNone/>
+            </a:pPr>
+            <a:r>
+              <a:rPr lang="en-US" sz="3400" b="1" dirty="0">
+                <a:solidFill>
+                  <a:srgbClr val="264653"/>
+                </a:solidFill>
+                <a:latin typeface="Meiryo" pitchFamily="34" charset="0"/>
+                <a:ea typeface="Meiryo" pitchFamily="34" charset="-122"/>
+                <a:cs typeface="Meiryo" pitchFamily="34" charset="-120"/>
+              </a:rPr>
+              <a:t>どこが直せるか（後半）</a:t>
+            </a:r>
+            <a:endParaRPr lang="en-US" sz="3400" dirty="0"/>
+          </a:p>
+        </p:txBody>
+      </p:sp>
+      <p:sp>
+        <p:nvSpPr>
+          <p:cNvPr id="5" name="Text 2"/>
+          <p:cNvSpPr/>
+          <p:nvPr/>
+        </p:nvSpPr>
+        <p:spPr>
+          <a:xfrm>
+            <a:off x="566928" y="1024128"/>
+            <a:ext cx="11064240" cy="365760"/>
+          </a:xfrm>
+          <a:prstGeom prst="rect">
+            <a:avLst/>
+          </a:prstGeom>
+          <a:noFill/>
+          <a:ln/>
+        </p:spPr>
+        <p:txBody>
+          <a:bodyPr wrap="square" lIns="0" tIns="0" rIns="0" bIns="0" rtlCol="0" anchor="ctr"/>
+          <a:lstStyle/>
+          <a:p>
+            <a:pPr indent="0" marL="0">
+              <a:buNone/>
+            </a:pPr>
+            <a:r>
+              <a:rPr lang="en-US" sz="1600" dirty="0">
+                <a:solidFill>
+                  <a:srgbClr val="5E7681"/>
+                </a:solidFill>
+                <a:latin typeface="Meiryo" pitchFamily="34" charset="0"/>
+                <a:ea typeface="Meiryo" pitchFamily="34" charset="-122"/>
+                <a:cs typeface="Meiryo" pitchFamily="34" charset="-120"/>
+              </a:rPr>
+              <a:t>02・03・04 はすべて同じ形です</a:t>
+            </a:r>
+            <a:endParaRPr lang="en-US" sz="1600" dirty="0"/>
+          </a:p>
+        </p:txBody>
+      </p:sp>
+      <p:sp>
+        <p:nvSpPr>
+          <p:cNvPr id="6" name="Text 3"/>
+          <p:cNvSpPr/>
+          <p:nvPr/>
+        </p:nvSpPr>
+        <p:spPr>
+          <a:xfrm>
+            <a:off x="11338560" y="6309360"/>
+            <a:ext cx="457200" cy="274320"/>
+          </a:xfrm>
+          <a:prstGeom prst="rect">
+            <a:avLst/>
+          </a:prstGeom>
+          <a:noFill/>
+          <a:ln/>
+        </p:spPr>
+        <p:txBody>
+          <a:bodyPr wrap="square" lIns="0" tIns="0" rIns="0" bIns="0" rtlCol="0" anchor="ctr"/>
+          <a:lstStyle/>
+          <a:p>
+            <a:pPr algn="r" indent="0" marL="0">
+              <a:buNone/>
+            </a:pPr>
+            <a:r>
+              <a:rPr lang="en-US" sz="1100" dirty="0">
+                <a:solidFill>
+                  <a:srgbClr val="A8B4B8"/>
+                </a:solidFill>
+                <a:latin typeface="Meiryo" pitchFamily="34" charset="0"/>
+                <a:ea typeface="Meiryo" pitchFamily="34" charset="-122"/>
+                <a:cs typeface="Meiryo" pitchFamily="34" charset="-120"/>
+              </a:rPr>
+              <a:t>10</a:t>
+            </a:r>
+            <a:endParaRPr lang="en-US" sz="1100" dirty="0"/>
+          </a:p>
+        </p:txBody>
+      </p:sp>
+      <p:pic>
+        <p:nvPicPr>
+          <p:cNvPr id="7" name="Image 1" descr="/sessions/compassionate-sweet-heisenberg/mnt/dev-aspath-life-main/_wp移行素材/★引継ぎ資料/画像/E3_編集画面_04.jpg">    </p:cNvPr>
+          <p:cNvPicPr>
+            <a:picLocks noChangeAspect="1"/>
+          </p:cNvPicPr>
+          <p:nvPr/>
+        </p:nvPicPr>
+        <p:blipFill>
+          <a:blip r:embed="rId2"/>
+          <a:stretch>
+            <a:fillRect/>
+          </a:stretch>
+        </p:blipFill>
+        <p:spPr>
+          <a:xfrm>
             <a:off x="640080" y="1737360"/>
             <a:ext cx="6217920" cy="3982263"/>
           </a:xfrm>
@@ -3136,7 +3441,7 @@
       </p:pic>
       <p:sp>
         <p:nvSpPr>
-          <p:cNvPr id="6" name="Text 3"/>
+          <p:cNvPr id="8" name="Text 4"/>
           <p:cNvSpPr/>
           <p:nvPr/>
         </p:nvSpPr>
@@ -3175,7 +3480,7 @@
       </p:sp>
       <p:sp>
         <p:nvSpPr>
-          <p:cNvPr id="7" name="Shape 4"/>
+          <p:cNvPr id="9" name="Shape 5"/>
           <p:cNvSpPr/>
           <p:nvPr/>
         </p:nvSpPr>
@@ -3197,7 +3502,7 @@
       </p:sp>
       <p:sp>
         <p:nvSpPr>
-          <p:cNvPr id="8" name="Text 5"/>
+          <p:cNvPr id="10" name="Text 6"/>
           <p:cNvSpPr/>
           <p:nvPr/>
         </p:nvSpPr>
@@ -3236,7 +3541,7 @@
       </p:sp>
       <p:sp>
         <p:nvSpPr>
-          <p:cNvPr id="9" name="Text 6"/>
+          <p:cNvPr id="11" name="Text 7"/>
           <p:cNvSpPr/>
           <p:nvPr/>
         </p:nvSpPr>
@@ -3275,7 +3580,7 @@
       </p:sp>
       <p:sp>
         <p:nvSpPr>
-          <p:cNvPr id="10" name="Shape 7"/>
+          <p:cNvPr id="12" name="Shape 8"/>
           <p:cNvSpPr/>
           <p:nvPr/>
         </p:nvSpPr>
@@ -3297,7 +3602,7 @@
       </p:sp>
       <p:sp>
         <p:nvSpPr>
-          <p:cNvPr id="11" name="Text 8"/>
+          <p:cNvPr id="13" name="Text 9"/>
           <p:cNvSpPr/>
           <p:nvPr/>
         </p:nvSpPr>
@@ -3336,7 +3641,7 @@
       </p:sp>
       <p:sp>
         <p:nvSpPr>
-          <p:cNvPr id="12" name="Text 9"/>
+          <p:cNvPr id="14" name="Text 10"/>
           <p:cNvSpPr/>
           <p:nvPr/>
         </p:nvSpPr>
@@ -3375,7 +3680,7 @@
       </p:sp>
       <p:sp>
         <p:nvSpPr>
-          <p:cNvPr id="13" name="Shape 10"/>
+          <p:cNvPr id="15" name="Shape 11"/>
           <p:cNvSpPr/>
           <p:nvPr/>
         </p:nvSpPr>
@@ -3397,7 +3702,7 @@
       </p:sp>
       <p:sp>
         <p:nvSpPr>
-          <p:cNvPr id="14" name="Text 11"/>
+          <p:cNvPr id="16" name="Text 12"/>
           <p:cNvSpPr/>
           <p:nvPr/>
         </p:nvSpPr>
@@ -3436,7 +3741,7 @@
       </p:sp>
       <p:sp>
         <p:nvSpPr>
-          <p:cNvPr id="15" name="Text 12"/>
+          <p:cNvPr id="17" name="Text 13"/>
           <p:cNvSpPr/>
           <p:nvPr/>
         </p:nvSpPr>
@@ -3475,7 +3780,7 @@
       </p:sp>
       <p:sp>
         <p:nvSpPr>
-          <p:cNvPr id="16" name="Shape 13"/>
+          <p:cNvPr id="18" name="Shape 14"/>
           <p:cNvSpPr/>
           <p:nvPr/>
         </p:nvSpPr>
@@ -3497,7 +3802,7 @@
       </p:sp>
       <p:sp>
         <p:nvSpPr>
-          <p:cNvPr id="17" name="Text 14"/>
+          <p:cNvPr id="19" name="Text 15"/>
           <p:cNvSpPr/>
           <p:nvPr/>
         </p:nvSpPr>
@@ -3536,7 +3841,7 @@
       </p:sp>
       <p:sp>
         <p:nvSpPr>
-          <p:cNvPr id="18" name="Text 15"/>
+          <p:cNvPr id="20" name="Text 16"/>
           <p:cNvSpPr/>
           <p:nvPr/>
         </p:nvSpPr>
@@ -3575,7 +3880,7 @@
       </p:sp>
       <p:sp>
         <p:nvSpPr>
-          <p:cNvPr id="19" name="Shape 16"/>
+          <p:cNvPr id="21" name="Shape 17"/>
           <p:cNvSpPr/>
           <p:nvPr/>
         </p:nvSpPr>
@@ -3597,7 +3902,7 @@
       </p:sp>
       <p:sp>
         <p:nvSpPr>
-          <p:cNvPr id="20" name="Text 17"/>
+          <p:cNvPr id="22" name="Text 18"/>
           <p:cNvSpPr/>
           <p:nvPr/>
         </p:nvSpPr>
@@ -3659,7 +3964,7 @@
       </p:sp>
       <p:sp>
         <p:nvSpPr>
-          <p:cNvPr id="21" name="Text 18"/>
+          <p:cNvPr id="23" name="Text 19"/>
           <p:cNvSpPr/>
           <p:nvPr/>
         </p:nvSpPr>
@@ -3728,9 +4033,72 @@
           <a:chExt cx="0" cy="0"/>
         </a:xfrm>
       </p:grpSpPr>
-      <p:sp>
-        <p:nvSpPr>
-          <p:cNvPr id="2" name="Text 0"/>
+      <p:pic>
+        <p:nvPicPr>
+          <p:cNvPr id="2" name="Image 0" descr="/sessions/compassionate-sweet-heisenberg/mnt/dev-aspath-life-main/tools/assets/logo-deck.png">    </p:cNvPr>
+          <p:cNvPicPr>
+            <a:picLocks noChangeAspect="1"/>
+          </p:cNvPicPr>
+          <p:nvPr/>
+        </p:nvPicPr>
+        <p:blipFill>
+          <a:blip r:embed="rId1"/>
+          <a:stretch>
+            <a:fillRect/>
+          </a:stretch>
+        </p:blipFill>
+        <p:spPr>
+          <a:xfrm>
+            <a:off x="11458173" y="109728"/>
+            <a:ext cx="209571" cy="256032"/>
+          </a:xfrm>
+          <a:prstGeom prst="rect">
+            <a:avLst/>
+          </a:prstGeom>
+        </p:spPr>
+      </p:pic>
+      <p:sp>
+        <p:nvSpPr>
+          <p:cNvPr id="3" name="Text 0"/>
+          <p:cNvSpPr txBox="1"/>
+          <p:nvPr/>
+        </p:nvSpPr>
+        <p:spPr>
+          <a:xfrm>
+            <a:off x="8623533" y="128016"/>
+            <a:ext cx="2743200" cy="237744"/>
+          </a:xfrm>
+          <a:prstGeom prst="rect">
+            <a:avLst/>
+          </a:prstGeom>
+          <a:noFill/>
+          <a:ln/>
+        </p:spPr>
+        <p:txBody>
+          <a:bodyPr wrap="square" lIns="0" tIns="0" rIns="0" bIns="0" rtlCol="0" anchor="ctr"/>
+          <a:lstStyle/>
+          <a:p>
+            <a:pPr algn="r" indent="0" marL="0">
+              <a:buNone/>
+            </a:pPr>
+            <a:r>
+              <a:rPr lang="en-US" sz="750" dirty="0">
+                <a:solidFill>
+                  <a:srgbClr val="97A9AF"/>
+                </a:solidFill>
+                <a:latin typeface="Meiryo" pitchFamily="34" charset="0"/>
+                <a:ea typeface="Meiryo" pitchFamily="34" charset="-122"/>
+                <a:cs typeface="Meiryo" pitchFamily="34" charset="-120"/>
+              </a:rPr>
+              <a:t>鹿児島のパーキンソン病専門トレーニングスタジオ</a:t>
+            </a:r>
+            <a:endParaRPr lang="en-US" sz="750" dirty="0"/>
+          </a:p>
+        </p:txBody>
+      </p:sp>
+      <p:sp>
+        <p:nvSpPr>
+          <p:cNvPr id="4" name="Text 1"/>
           <p:cNvSpPr/>
           <p:nvPr/>
         </p:nvSpPr>
@@ -3769,7 +4137,7 @@
       </p:sp>
       <p:sp>
         <p:nvSpPr>
-          <p:cNvPr id="3" name="Text 1"/>
+          <p:cNvPr id="5" name="Text 2"/>
           <p:cNvSpPr/>
           <p:nvPr/>
         </p:nvSpPr>
@@ -3808,7 +4176,7 @@
       </p:sp>
       <p:sp>
         <p:nvSpPr>
-          <p:cNvPr id="4" name="Text 2"/>
+          <p:cNvPr id="6" name="Text 3"/>
           <p:cNvSpPr/>
           <p:nvPr/>
         </p:nvSpPr>
@@ -3847,7 +4215,7 @@
       </p:sp>
       <p:sp>
         <p:nvSpPr>
-          <p:cNvPr id="5" name="Shape 3"/>
+          <p:cNvPr id="7" name="Shape 4"/>
           <p:cNvSpPr/>
           <p:nvPr/>
         </p:nvSpPr>
@@ -3869,7 +4237,7 @@
       </p:sp>
       <p:sp>
         <p:nvSpPr>
-          <p:cNvPr id="6" name="Shape 4"/>
+          <p:cNvPr id="8" name="Shape 5"/>
           <p:cNvSpPr/>
           <p:nvPr/>
         </p:nvSpPr>
@@ -3889,7 +4257,7 @@
       </p:sp>
       <p:sp>
         <p:nvSpPr>
-          <p:cNvPr id="7" name="Text 5"/>
+          <p:cNvPr id="9" name="Text 6"/>
           <p:cNvSpPr/>
           <p:nvPr/>
         </p:nvSpPr>
@@ -3928,7 +4296,7 @@
       </p:sp>
       <p:sp>
         <p:nvSpPr>
-          <p:cNvPr id="8" name="Text 6"/>
+          <p:cNvPr id="10" name="Text 7"/>
           <p:cNvSpPr/>
           <p:nvPr/>
         </p:nvSpPr>
@@ -3967,7 +4335,7 @@
       </p:sp>
       <p:sp>
         <p:nvSpPr>
-          <p:cNvPr id="9" name="Text 7"/>
+          <p:cNvPr id="11" name="Text 8"/>
           <p:cNvSpPr/>
           <p:nvPr/>
         </p:nvSpPr>
@@ -4006,7 +4374,7 @@
       </p:sp>
       <p:sp>
         <p:nvSpPr>
-          <p:cNvPr id="10" name="Shape 8"/>
+          <p:cNvPr id="12" name="Shape 9"/>
           <p:cNvSpPr/>
           <p:nvPr/>
         </p:nvSpPr>
@@ -4028,7 +4396,7 @@
       </p:sp>
       <p:sp>
         <p:nvSpPr>
-          <p:cNvPr id="11" name="Shape 9"/>
+          <p:cNvPr id="13" name="Shape 10"/>
           <p:cNvSpPr/>
           <p:nvPr/>
         </p:nvSpPr>
@@ -4048,7 +4416,7 @@
       </p:sp>
       <p:sp>
         <p:nvSpPr>
-          <p:cNvPr id="12" name="Text 10"/>
+          <p:cNvPr id="14" name="Text 11"/>
           <p:cNvSpPr/>
           <p:nvPr/>
         </p:nvSpPr>
@@ -4087,7 +4455,7 @@
       </p:sp>
       <p:sp>
         <p:nvSpPr>
-          <p:cNvPr id="13" name="Text 11"/>
+          <p:cNvPr id="15" name="Text 12"/>
           <p:cNvSpPr/>
           <p:nvPr/>
         </p:nvSpPr>
@@ -4126,7 +4494,7 @@
       </p:sp>
       <p:sp>
         <p:nvSpPr>
-          <p:cNvPr id="14" name="Text 12"/>
+          <p:cNvPr id="16" name="Text 13"/>
           <p:cNvSpPr/>
           <p:nvPr/>
         </p:nvSpPr>
@@ -4165,7 +4533,7 @@
       </p:sp>
       <p:sp>
         <p:nvSpPr>
-          <p:cNvPr id="15" name="Shape 13"/>
+          <p:cNvPr id="17" name="Shape 14"/>
           <p:cNvSpPr/>
           <p:nvPr/>
         </p:nvSpPr>
@@ -4187,7 +4555,7 @@
       </p:sp>
       <p:sp>
         <p:nvSpPr>
-          <p:cNvPr id="16" name="Shape 14"/>
+          <p:cNvPr id="18" name="Shape 15"/>
           <p:cNvSpPr/>
           <p:nvPr/>
         </p:nvSpPr>
@@ -4207,7 +4575,7 @@
       </p:sp>
       <p:sp>
         <p:nvSpPr>
-          <p:cNvPr id="17" name="Text 15"/>
+          <p:cNvPr id="19" name="Text 16"/>
           <p:cNvSpPr/>
           <p:nvPr/>
         </p:nvSpPr>
@@ -4246,7 +4614,7 @@
       </p:sp>
       <p:sp>
         <p:nvSpPr>
-          <p:cNvPr id="18" name="Text 16"/>
+          <p:cNvPr id="20" name="Text 17"/>
           <p:cNvSpPr/>
           <p:nvPr/>
         </p:nvSpPr>
@@ -4285,7 +4653,7 @@
       </p:sp>
       <p:sp>
         <p:nvSpPr>
-          <p:cNvPr id="19" name="Text 17"/>
+          <p:cNvPr id="21" name="Text 18"/>
           <p:cNvSpPr/>
           <p:nvPr/>
         </p:nvSpPr>
@@ -4324,7 +4692,7 @@
       </p:sp>
       <p:sp>
         <p:nvSpPr>
-          <p:cNvPr id="20" name="Shape 18"/>
+          <p:cNvPr id="22" name="Shape 19"/>
           <p:cNvSpPr/>
           <p:nvPr/>
         </p:nvSpPr>
@@ -4346,7 +4714,7 @@
       </p:sp>
       <p:sp>
         <p:nvSpPr>
-          <p:cNvPr id="21" name="Text 19"/>
+          <p:cNvPr id="23" name="Text 20"/>
           <p:cNvSpPr/>
           <p:nvPr/>
         </p:nvSpPr>
@@ -4418,9 +4786,72 @@
           <a:chExt cx="0" cy="0"/>
         </a:xfrm>
       </p:grpSpPr>
-      <p:sp>
-        <p:nvSpPr>
-          <p:cNvPr id="2" name="Text 0"/>
+      <p:pic>
+        <p:nvPicPr>
+          <p:cNvPr id="2" name="Image 0" descr="/sessions/compassionate-sweet-heisenberg/mnt/dev-aspath-life-main/tools/assets/logo-deck.png">    </p:cNvPr>
+          <p:cNvPicPr>
+            <a:picLocks noChangeAspect="1"/>
+          </p:cNvPicPr>
+          <p:nvPr/>
+        </p:nvPicPr>
+        <p:blipFill>
+          <a:blip r:embed="rId1"/>
+          <a:stretch>
+            <a:fillRect/>
+          </a:stretch>
+        </p:blipFill>
+        <p:spPr>
+          <a:xfrm>
+            <a:off x="11458173" y="109728"/>
+            <a:ext cx="209571" cy="256032"/>
+          </a:xfrm>
+          <a:prstGeom prst="rect">
+            <a:avLst/>
+          </a:prstGeom>
+        </p:spPr>
+      </p:pic>
+      <p:sp>
+        <p:nvSpPr>
+          <p:cNvPr id="3" name="Text 0"/>
+          <p:cNvSpPr txBox="1"/>
+          <p:nvPr/>
+        </p:nvSpPr>
+        <p:spPr>
+          <a:xfrm>
+            <a:off x="8623533" y="128016"/>
+            <a:ext cx="2743200" cy="237744"/>
+          </a:xfrm>
+          <a:prstGeom prst="rect">
+            <a:avLst/>
+          </a:prstGeom>
+          <a:noFill/>
+          <a:ln/>
+        </p:spPr>
+        <p:txBody>
+          <a:bodyPr wrap="square" lIns="0" tIns="0" rIns="0" bIns="0" rtlCol="0" anchor="ctr"/>
+          <a:lstStyle/>
+          <a:p>
+            <a:pPr algn="r" indent="0" marL="0">
+              <a:buNone/>
+            </a:pPr>
+            <a:r>
+              <a:rPr lang="en-US" sz="750" dirty="0">
+                <a:solidFill>
+                  <a:srgbClr val="97A9AF"/>
+                </a:solidFill>
+                <a:latin typeface="Meiryo" pitchFamily="34" charset="0"/>
+                <a:ea typeface="Meiryo" pitchFamily="34" charset="-122"/>
+                <a:cs typeface="Meiryo" pitchFamily="34" charset="-120"/>
+              </a:rPr>
+              <a:t>鹿児島のパーキンソン病専門トレーニングスタジオ</a:t>
+            </a:r>
+            <a:endParaRPr lang="en-US" sz="750" dirty="0"/>
+          </a:p>
+        </p:txBody>
+      </p:sp>
+      <p:sp>
+        <p:nvSpPr>
+          <p:cNvPr id="4" name="Text 1"/>
           <p:cNvSpPr/>
           <p:nvPr/>
         </p:nvSpPr>
@@ -4459,7 +4890,7 @@
       </p:sp>
       <p:sp>
         <p:nvSpPr>
-          <p:cNvPr id="3" name="Text 1"/>
+          <p:cNvPr id="5" name="Text 2"/>
           <p:cNvSpPr/>
           <p:nvPr/>
         </p:nvSpPr>
@@ -4498,7 +4929,7 @@
       </p:sp>
       <p:sp>
         <p:nvSpPr>
-          <p:cNvPr id="4" name="Shape 2"/>
+          <p:cNvPr id="6" name="Shape 3"/>
           <p:cNvSpPr/>
           <p:nvPr/>
         </p:nvSpPr>
@@ -4518,7 +4949,7 @@
       </p:sp>
       <p:sp>
         <p:nvSpPr>
-          <p:cNvPr id="5" name="Text 3"/>
+          <p:cNvPr id="7" name="Text 4"/>
           <p:cNvSpPr/>
           <p:nvPr/>
         </p:nvSpPr>
@@ -4557,7 +4988,7 @@
       </p:sp>
       <p:sp>
         <p:nvSpPr>
-          <p:cNvPr id="6" name="Text 4"/>
+          <p:cNvPr id="8" name="Text 5"/>
           <p:cNvSpPr/>
           <p:nvPr/>
         </p:nvSpPr>
@@ -4596,7 +5027,7 @@
       </p:sp>
       <p:sp>
         <p:nvSpPr>
-          <p:cNvPr id="7" name="Shape 5"/>
+          <p:cNvPr id="9" name="Shape 6"/>
           <p:cNvSpPr/>
           <p:nvPr/>
         </p:nvSpPr>
@@ -4616,7 +5047,7 @@
       </p:sp>
       <p:sp>
         <p:nvSpPr>
-          <p:cNvPr id="8" name="Text 6"/>
+          <p:cNvPr id="10" name="Text 7"/>
           <p:cNvSpPr/>
           <p:nvPr/>
         </p:nvSpPr>
@@ -4655,7 +5086,7 @@
       </p:sp>
       <p:sp>
         <p:nvSpPr>
-          <p:cNvPr id="9" name="Text 7"/>
+          <p:cNvPr id="11" name="Text 8"/>
           <p:cNvSpPr/>
           <p:nvPr/>
         </p:nvSpPr>
@@ -4694,7 +5125,7 @@
       </p:sp>
       <p:sp>
         <p:nvSpPr>
-          <p:cNvPr id="10" name="Shape 8"/>
+          <p:cNvPr id="12" name="Shape 9"/>
           <p:cNvSpPr/>
           <p:nvPr/>
         </p:nvSpPr>
@@ -4714,7 +5145,7 @@
       </p:sp>
       <p:sp>
         <p:nvSpPr>
-          <p:cNvPr id="11" name="Text 9"/>
+          <p:cNvPr id="13" name="Text 10"/>
           <p:cNvSpPr/>
           <p:nvPr/>
         </p:nvSpPr>
@@ -4753,7 +5184,7 @@
       </p:sp>
       <p:sp>
         <p:nvSpPr>
-          <p:cNvPr id="12" name="Text 10"/>
+          <p:cNvPr id="14" name="Text 11"/>
           <p:cNvSpPr/>
           <p:nvPr/>
         </p:nvSpPr>
@@ -4792,7 +5223,7 @@
       </p:sp>
       <p:sp>
         <p:nvSpPr>
-          <p:cNvPr id="13" name="Shape 11"/>
+          <p:cNvPr id="15" name="Shape 12"/>
           <p:cNvSpPr/>
           <p:nvPr/>
         </p:nvSpPr>
@@ -4812,7 +5243,7 @@
       </p:sp>
       <p:sp>
         <p:nvSpPr>
-          <p:cNvPr id="14" name="Text 12"/>
+          <p:cNvPr id="16" name="Text 13"/>
           <p:cNvSpPr/>
           <p:nvPr/>
         </p:nvSpPr>
@@ -4851,7 +5282,7 @@
       </p:sp>
       <p:sp>
         <p:nvSpPr>
-          <p:cNvPr id="15" name="Text 13"/>
+          <p:cNvPr id="17" name="Text 14"/>
           <p:cNvSpPr/>
           <p:nvPr/>
         </p:nvSpPr>
@@ -4890,7 +5321,7 @@
       </p:sp>
       <p:sp>
         <p:nvSpPr>
-          <p:cNvPr id="16" name="Shape 14"/>
+          <p:cNvPr id="18" name="Shape 15"/>
           <p:cNvSpPr/>
           <p:nvPr/>
         </p:nvSpPr>
@@ -4912,7 +5343,7 @@
       </p:sp>
       <p:sp>
         <p:nvSpPr>
-          <p:cNvPr id="17" name="Text 15"/>
+          <p:cNvPr id="19" name="Text 16"/>
           <p:cNvSpPr/>
           <p:nvPr/>
         </p:nvSpPr>
@@ -5004,9 +5435,72 @@
           <a:chExt cx="0" cy="0"/>
         </a:xfrm>
       </p:grpSpPr>
-      <p:sp>
-        <p:nvSpPr>
-          <p:cNvPr id="2" name="Text 0"/>
+      <p:pic>
+        <p:nvPicPr>
+          <p:cNvPr id="2" name="Image 0" descr="/sessions/compassionate-sweet-heisenberg/mnt/dev-aspath-life-main/tools/assets/logo-deck.png">    </p:cNvPr>
+          <p:cNvPicPr>
+            <a:picLocks noChangeAspect="1"/>
+          </p:cNvPicPr>
+          <p:nvPr/>
+        </p:nvPicPr>
+        <p:blipFill>
+          <a:blip r:embed="rId1"/>
+          <a:stretch>
+            <a:fillRect/>
+          </a:stretch>
+        </p:blipFill>
+        <p:spPr>
+          <a:xfrm>
+            <a:off x="11458173" y="109728"/>
+            <a:ext cx="209571" cy="256032"/>
+          </a:xfrm>
+          <a:prstGeom prst="rect">
+            <a:avLst/>
+          </a:prstGeom>
+        </p:spPr>
+      </p:pic>
+      <p:sp>
+        <p:nvSpPr>
+          <p:cNvPr id="3" name="Text 0"/>
+          <p:cNvSpPr txBox="1"/>
+          <p:nvPr/>
+        </p:nvSpPr>
+        <p:spPr>
+          <a:xfrm>
+            <a:off x="8623533" y="128016"/>
+            <a:ext cx="2743200" cy="237744"/>
+          </a:xfrm>
+          <a:prstGeom prst="rect">
+            <a:avLst/>
+          </a:prstGeom>
+          <a:noFill/>
+          <a:ln/>
+        </p:spPr>
+        <p:txBody>
+          <a:bodyPr wrap="square" lIns="0" tIns="0" rIns="0" bIns="0" rtlCol="0" anchor="ctr"/>
+          <a:lstStyle/>
+          <a:p>
+            <a:pPr algn="r" indent="0" marL="0">
+              <a:buNone/>
+            </a:pPr>
+            <a:r>
+              <a:rPr lang="en-US" sz="750" dirty="0">
+                <a:solidFill>
+                  <a:srgbClr val="97A9AF"/>
+                </a:solidFill>
+                <a:latin typeface="Meiryo" pitchFamily="34" charset="0"/>
+                <a:ea typeface="Meiryo" pitchFamily="34" charset="-122"/>
+                <a:cs typeface="Meiryo" pitchFamily="34" charset="-120"/>
+              </a:rPr>
+              <a:t>鹿児島のパーキンソン病専門トレーニングスタジオ</a:t>
+            </a:r>
+            <a:endParaRPr lang="en-US" sz="750" dirty="0"/>
+          </a:p>
+        </p:txBody>
+      </p:sp>
+      <p:sp>
+        <p:nvSpPr>
+          <p:cNvPr id="4" name="Text 1"/>
           <p:cNvSpPr/>
           <p:nvPr/>
         </p:nvSpPr>
@@ -5045,7 +5539,7 @@
       </p:sp>
       <p:sp>
         <p:nvSpPr>
-          <p:cNvPr id="3" name="Text 1"/>
+          <p:cNvPr id="5" name="Text 2"/>
           <p:cNvSpPr/>
           <p:nvPr/>
         </p:nvSpPr>
@@ -5084,7 +5578,7 @@
       </p:sp>
       <p:sp>
         <p:nvSpPr>
-          <p:cNvPr id="4" name="Text 2"/>
+          <p:cNvPr id="6" name="Text 3"/>
           <p:cNvSpPr/>
           <p:nvPr/>
         </p:nvSpPr>
@@ -5123,7 +5617,7 @@
       </p:sp>
       <p:sp>
         <p:nvSpPr>
-          <p:cNvPr id="5" name="Shape 3"/>
+          <p:cNvPr id="7" name="Shape 4"/>
           <p:cNvSpPr/>
           <p:nvPr/>
         </p:nvSpPr>
@@ -5145,7 +5639,7 @@
       </p:sp>
       <p:sp>
         <p:nvSpPr>
-          <p:cNvPr id="6" name="Text 4"/>
+          <p:cNvPr id="8" name="Text 5"/>
           <p:cNvSpPr/>
           <p:nvPr/>
         </p:nvSpPr>
@@ -5184,7 +5678,7 @@
       </p:sp>
       <p:sp>
         <p:nvSpPr>
-          <p:cNvPr id="7" name="Text 5"/>
+          <p:cNvPr id="9" name="Text 6"/>
           <p:cNvSpPr/>
           <p:nvPr/>
         </p:nvSpPr>
@@ -5223,7 +5717,7 @@
       </p:sp>
       <p:sp>
         <p:nvSpPr>
-          <p:cNvPr id="8" name="Shape 6"/>
+          <p:cNvPr id="10" name="Shape 7"/>
           <p:cNvSpPr/>
           <p:nvPr/>
         </p:nvSpPr>
@@ -5243,7 +5737,7 @@
       </p:sp>
       <p:sp>
         <p:nvSpPr>
-          <p:cNvPr id="9" name="Text 7"/>
+          <p:cNvPr id="11" name="Text 8"/>
           <p:cNvSpPr/>
           <p:nvPr/>
         </p:nvSpPr>
@@ -5282,7 +5776,7 @@
       </p:sp>
       <p:sp>
         <p:nvSpPr>
-          <p:cNvPr id="10" name="Text 8"/>
+          <p:cNvPr id="12" name="Text 9"/>
           <p:cNvSpPr/>
           <p:nvPr/>
         </p:nvSpPr>
@@ -5321,7 +5815,7 @@
       </p:sp>
       <p:sp>
         <p:nvSpPr>
-          <p:cNvPr id="11" name="Shape 9"/>
+          <p:cNvPr id="13" name="Shape 10"/>
           <p:cNvSpPr/>
           <p:nvPr/>
         </p:nvSpPr>
@@ -5341,7 +5835,7 @@
       </p:sp>
       <p:sp>
         <p:nvSpPr>
-          <p:cNvPr id="12" name="Text 10"/>
+          <p:cNvPr id="14" name="Text 11"/>
           <p:cNvSpPr/>
           <p:nvPr/>
         </p:nvSpPr>
@@ -5380,7 +5874,7 @@
       </p:sp>
       <p:sp>
         <p:nvSpPr>
-          <p:cNvPr id="13" name="Text 11"/>
+          <p:cNvPr id="15" name="Text 12"/>
           <p:cNvSpPr/>
           <p:nvPr/>
         </p:nvSpPr>
@@ -5419,7 +5913,7 @@
       </p:sp>
       <p:sp>
         <p:nvSpPr>
-          <p:cNvPr id="14" name="Shape 12"/>
+          <p:cNvPr id="16" name="Shape 13"/>
           <p:cNvSpPr/>
           <p:nvPr/>
         </p:nvSpPr>
@@ -5439,7 +5933,7 @@
       </p:sp>
       <p:sp>
         <p:nvSpPr>
-          <p:cNvPr id="15" name="Text 13"/>
+          <p:cNvPr id="17" name="Text 14"/>
           <p:cNvSpPr/>
           <p:nvPr/>
         </p:nvSpPr>
@@ -5478,7 +5972,7 @@
       </p:sp>
       <p:sp>
         <p:nvSpPr>
-          <p:cNvPr id="16" name="Text 14"/>
+          <p:cNvPr id="18" name="Text 15"/>
           <p:cNvSpPr/>
           <p:nvPr/>
         </p:nvSpPr>
@@ -5517,7 +6011,7 @@
       </p:sp>
       <p:sp>
         <p:nvSpPr>
-          <p:cNvPr id="17" name="Shape 15"/>
+          <p:cNvPr id="19" name="Shape 16"/>
           <p:cNvSpPr/>
           <p:nvPr/>
         </p:nvSpPr>
@@ -5539,7 +6033,7 @@
       </p:sp>
       <p:sp>
         <p:nvSpPr>
-          <p:cNvPr id="18" name="Text 16"/>
+          <p:cNvPr id="20" name="Text 17"/>
           <p:cNvSpPr/>
           <p:nvPr/>
         </p:nvSpPr>
@@ -5611,9 +6105,72 @@
           <a:chExt cx="0" cy="0"/>
         </a:xfrm>
       </p:grpSpPr>
-      <p:sp>
-        <p:nvSpPr>
-          <p:cNvPr id="2" name="Text 0"/>
+      <p:pic>
+        <p:nvPicPr>
+          <p:cNvPr id="2" name="Image 0" descr="/sessions/compassionate-sweet-heisenberg/mnt/dev-aspath-life-main/tools/assets/logo-deck.png">    </p:cNvPr>
+          <p:cNvPicPr>
+            <a:picLocks noChangeAspect="1"/>
+          </p:cNvPicPr>
+          <p:nvPr/>
+        </p:nvPicPr>
+        <p:blipFill>
+          <a:blip r:embed="rId1"/>
+          <a:stretch>
+            <a:fillRect/>
+          </a:stretch>
+        </p:blipFill>
+        <p:spPr>
+          <a:xfrm>
+            <a:off x="11458173" y="109728"/>
+            <a:ext cx="209571" cy="256032"/>
+          </a:xfrm>
+          <a:prstGeom prst="rect">
+            <a:avLst/>
+          </a:prstGeom>
+        </p:spPr>
+      </p:pic>
+      <p:sp>
+        <p:nvSpPr>
+          <p:cNvPr id="3" name="Text 0"/>
+          <p:cNvSpPr txBox="1"/>
+          <p:nvPr/>
+        </p:nvSpPr>
+        <p:spPr>
+          <a:xfrm>
+            <a:off x="8623533" y="128016"/>
+            <a:ext cx="2743200" cy="237744"/>
+          </a:xfrm>
+          <a:prstGeom prst="rect">
+            <a:avLst/>
+          </a:prstGeom>
+          <a:noFill/>
+          <a:ln/>
+        </p:spPr>
+        <p:txBody>
+          <a:bodyPr wrap="square" lIns="0" tIns="0" rIns="0" bIns="0" rtlCol="0" anchor="ctr"/>
+          <a:lstStyle/>
+          <a:p>
+            <a:pPr algn="r" indent="0" marL="0">
+              <a:buNone/>
+            </a:pPr>
+            <a:r>
+              <a:rPr lang="en-US" sz="750" dirty="0">
+                <a:solidFill>
+                  <a:srgbClr val="97A9AF"/>
+                </a:solidFill>
+                <a:latin typeface="Meiryo" pitchFamily="34" charset="0"/>
+                <a:ea typeface="Meiryo" pitchFamily="34" charset="-122"/>
+                <a:cs typeface="Meiryo" pitchFamily="34" charset="-120"/>
+              </a:rPr>
+              <a:t>鹿児島のパーキンソン病専門トレーニングスタジオ</a:t>
+            </a:r>
+            <a:endParaRPr lang="en-US" sz="750" dirty="0"/>
+          </a:p>
+        </p:txBody>
+      </p:sp>
+      <p:sp>
+        <p:nvSpPr>
+          <p:cNvPr id="4" name="Text 1"/>
           <p:cNvSpPr/>
           <p:nvPr/>
         </p:nvSpPr>
@@ -5652,7 +6209,7 @@
       </p:sp>
       <p:sp>
         <p:nvSpPr>
-          <p:cNvPr id="3" name="Text 1"/>
+          <p:cNvPr id="5" name="Text 2"/>
           <p:cNvSpPr/>
           <p:nvPr/>
         </p:nvSpPr>
@@ -5691,7 +6248,7 @@
       </p:sp>
       <p:sp>
         <p:nvSpPr>
-          <p:cNvPr id="4" name="Text 2"/>
+          <p:cNvPr id="6" name="Text 3"/>
           <p:cNvSpPr/>
           <p:nvPr/>
         </p:nvSpPr>
@@ -6450,14 +7007,14 @@
       </p:graphicFrame>
       <p:pic>
         <p:nvPicPr>
-          <p:cNvPr id="6" name="Image 0" descr="/sessions/compassionate-sweet-heisenberg/mnt/dev-aspath-life-main/_wp移行素材/★引継ぎ資料/画像/A4_右がわのパネル.jpg">    </p:cNvPr>
+          <p:cNvPr id="8" name="Image 1" descr="/sessions/compassionate-sweet-heisenberg/mnt/dev-aspath-life-main/_wp移行素材/★引継ぎ資料/画像/A4_右がわのパネル.jpg">    </p:cNvPr>
           <p:cNvPicPr>
             <a:picLocks noChangeAspect="1"/>
           </p:cNvPicPr>
           <p:nvPr/>
         </p:nvPicPr>
         <p:blipFill>
-          <a:blip r:embed="rId1"/>
+          <a:blip r:embed="rId2"/>
           <a:stretch>
             <a:fillRect/>
           </a:stretch>
@@ -6474,7 +7031,7 @@
       </p:pic>
       <p:sp>
         <p:nvSpPr>
-          <p:cNvPr id="7" name="Shape 3"/>
+          <p:cNvPr id="9" name="Shape 4"/>
           <p:cNvSpPr/>
           <p:nvPr/>
         </p:nvSpPr>
@@ -6496,7 +7053,7 @@
       </p:sp>
       <p:sp>
         <p:nvSpPr>
-          <p:cNvPr id="8" name="Text 4"/>
+          <p:cNvPr id="10" name="Text 5"/>
           <p:cNvSpPr/>
           <p:nvPr/>
         </p:nvSpPr>
@@ -6588,9 +7145,72 @@
           <a:chExt cx="0" cy="0"/>
         </a:xfrm>
       </p:grpSpPr>
-      <p:sp>
-        <p:nvSpPr>
-          <p:cNvPr id="2" name="Text 0"/>
+      <p:pic>
+        <p:nvPicPr>
+          <p:cNvPr id="2" name="Image 0" descr="/sessions/compassionate-sweet-heisenberg/mnt/dev-aspath-life-main/tools/assets/logo-deck.png">    </p:cNvPr>
+          <p:cNvPicPr>
+            <a:picLocks noChangeAspect="1"/>
+          </p:cNvPicPr>
+          <p:nvPr/>
+        </p:nvPicPr>
+        <p:blipFill>
+          <a:blip r:embed="rId1"/>
+          <a:stretch>
+            <a:fillRect/>
+          </a:stretch>
+        </p:blipFill>
+        <p:spPr>
+          <a:xfrm>
+            <a:off x="11458173" y="109728"/>
+            <a:ext cx="209571" cy="256032"/>
+          </a:xfrm>
+          <a:prstGeom prst="rect">
+            <a:avLst/>
+          </a:prstGeom>
+        </p:spPr>
+      </p:pic>
+      <p:sp>
+        <p:nvSpPr>
+          <p:cNvPr id="3" name="Text 0"/>
+          <p:cNvSpPr txBox="1"/>
+          <p:nvPr/>
+        </p:nvSpPr>
+        <p:spPr>
+          <a:xfrm>
+            <a:off x="8623533" y="128016"/>
+            <a:ext cx="2743200" cy="237744"/>
+          </a:xfrm>
+          <a:prstGeom prst="rect">
+            <a:avLst/>
+          </a:prstGeom>
+          <a:noFill/>
+          <a:ln/>
+        </p:spPr>
+        <p:txBody>
+          <a:bodyPr wrap="square" lIns="0" tIns="0" rIns="0" bIns="0" rtlCol="0" anchor="ctr"/>
+          <a:lstStyle/>
+          <a:p>
+            <a:pPr algn="r" indent="0" marL="0">
+              <a:buNone/>
+            </a:pPr>
+            <a:r>
+              <a:rPr lang="en-US" sz="750" dirty="0">
+                <a:solidFill>
+                  <a:srgbClr val="97A9AF"/>
+                </a:solidFill>
+                <a:latin typeface="Meiryo" pitchFamily="34" charset="0"/>
+                <a:ea typeface="Meiryo" pitchFamily="34" charset="-122"/>
+                <a:cs typeface="Meiryo" pitchFamily="34" charset="-120"/>
+              </a:rPr>
+              <a:t>鹿児島のパーキンソン病専門トレーニングスタジオ</a:t>
+            </a:r>
+            <a:endParaRPr lang="en-US" sz="750" dirty="0"/>
+          </a:p>
+        </p:txBody>
+      </p:sp>
+      <p:sp>
+        <p:nvSpPr>
+          <p:cNvPr id="4" name="Text 1"/>
           <p:cNvSpPr/>
           <p:nvPr/>
         </p:nvSpPr>
@@ -6629,7 +7249,7 @@
       </p:sp>
       <p:sp>
         <p:nvSpPr>
-          <p:cNvPr id="3" name="Text 1"/>
+          <p:cNvPr id="5" name="Text 2"/>
           <p:cNvSpPr/>
           <p:nvPr/>
         </p:nvSpPr>
@@ -6668,7 +7288,7 @@
       </p:sp>
       <p:sp>
         <p:nvSpPr>
-          <p:cNvPr id="4" name="Text 2"/>
+          <p:cNvPr id="6" name="Text 3"/>
           <p:cNvSpPr/>
           <p:nvPr/>
         </p:nvSpPr>
@@ -6707,7 +7327,7 @@
       </p:sp>
       <p:sp>
         <p:nvSpPr>
-          <p:cNvPr id="5" name="Shape 3"/>
+          <p:cNvPr id="7" name="Shape 4"/>
           <p:cNvSpPr/>
           <p:nvPr/>
         </p:nvSpPr>
@@ -6729,7 +7349,7 @@
       </p:sp>
       <p:sp>
         <p:nvSpPr>
-          <p:cNvPr id="6" name="Shape 4"/>
+          <p:cNvPr id="8" name="Shape 5"/>
           <p:cNvSpPr/>
           <p:nvPr/>
         </p:nvSpPr>
@@ -6749,7 +7369,7 @@
       </p:sp>
       <p:sp>
         <p:nvSpPr>
-          <p:cNvPr id="7" name="Text 5"/>
+          <p:cNvPr id="9" name="Text 6"/>
           <p:cNvSpPr/>
           <p:nvPr/>
         </p:nvSpPr>
@@ -6788,7 +7408,7 @@
       </p:sp>
       <p:sp>
         <p:nvSpPr>
-          <p:cNvPr id="8" name="Text 6"/>
+          <p:cNvPr id="10" name="Text 7"/>
           <p:cNvSpPr/>
           <p:nvPr/>
         </p:nvSpPr>
@@ -6827,7 +7447,7 @@
       </p:sp>
       <p:sp>
         <p:nvSpPr>
-          <p:cNvPr id="9" name="Text 7"/>
+          <p:cNvPr id="11" name="Text 8"/>
           <p:cNvSpPr/>
           <p:nvPr/>
         </p:nvSpPr>
@@ -6866,7 +7486,7 @@
       </p:sp>
       <p:sp>
         <p:nvSpPr>
-          <p:cNvPr id="10" name="Shape 8"/>
+          <p:cNvPr id="12" name="Shape 9"/>
           <p:cNvSpPr/>
           <p:nvPr/>
         </p:nvSpPr>
@@ -6888,7 +7508,7 @@
       </p:sp>
       <p:sp>
         <p:nvSpPr>
-          <p:cNvPr id="11" name="Shape 9"/>
+          <p:cNvPr id="13" name="Shape 10"/>
           <p:cNvSpPr/>
           <p:nvPr/>
         </p:nvSpPr>
@@ -6908,7 +7528,7 @@
       </p:sp>
       <p:sp>
         <p:nvSpPr>
-          <p:cNvPr id="12" name="Text 10"/>
+          <p:cNvPr id="14" name="Text 11"/>
           <p:cNvSpPr/>
           <p:nvPr/>
         </p:nvSpPr>
@@ -6947,7 +7567,7 @@
       </p:sp>
       <p:sp>
         <p:nvSpPr>
-          <p:cNvPr id="13" name="Text 11"/>
+          <p:cNvPr id="15" name="Text 12"/>
           <p:cNvSpPr/>
           <p:nvPr/>
         </p:nvSpPr>
@@ -6986,7 +7606,7 @@
       </p:sp>
       <p:sp>
         <p:nvSpPr>
-          <p:cNvPr id="14" name="Text 12"/>
+          <p:cNvPr id="16" name="Text 13"/>
           <p:cNvSpPr/>
           <p:nvPr/>
         </p:nvSpPr>
@@ -7025,7 +7645,7 @@
       </p:sp>
       <p:sp>
         <p:nvSpPr>
-          <p:cNvPr id="15" name="Shape 13"/>
+          <p:cNvPr id="17" name="Shape 14"/>
           <p:cNvSpPr/>
           <p:nvPr/>
         </p:nvSpPr>
@@ -7047,7 +7667,7 @@
       </p:sp>
       <p:sp>
         <p:nvSpPr>
-          <p:cNvPr id="16" name="Shape 14"/>
+          <p:cNvPr id="18" name="Shape 15"/>
           <p:cNvSpPr/>
           <p:nvPr/>
         </p:nvSpPr>
@@ -7067,7 +7687,7 @@
       </p:sp>
       <p:sp>
         <p:nvSpPr>
-          <p:cNvPr id="17" name="Text 15"/>
+          <p:cNvPr id="19" name="Text 16"/>
           <p:cNvSpPr/>
           <p:nvPr/>
         </p:nvSpPr>
@@ -7106,7 +7726,7 @@
       </p:sp>
       <p:sp>
         <p:nvSpPr>
-          <p:cNvPr id="18" name="Text 16"/>
+          <p:cNvPr id="20" name="Text 17"/>
           <p:cNvSpPr/>
           <p:nvPr/>
         </p:nvSpPr>
@@ -7145,7 +7765,7 @@
       </p:sp>
       <p:sp>
         <p:nvSpPr>
-          <p:cNvPr id="19" name="Text 17"/>
+          <p:cNvPr id="21" name="Text 18"/>
           <p:cNvSpPr/>
           <p:nvPr/>
         </p:nvSpPr>
@@ -7214,9 +7834,72 @@
           <a:chExt cx="0" cy="0"/>
         </a:xfrm>
       </p:grpSpPr>
-      <p:sp>
-        <p:nvSpPr>
-          <p:cNvPr id="2" name="Text 0"/>
+      <p:pic>
+        <p:nvPicPr>
+          <p:cNvPr id="2" name="Image 0" descr="/sessions/compassionate-sweet-heisenberg/mnt/dev-aspath-life-main/tools/assets/logo-deck-white.png">    </p:cNvPr>
+          <p:cNvPicPr>
+            <a:picLocks noChangeAspect="1"/>
+          </p:cNvPicPr>
+          <p:nvPr/>
+        </p:nvPicPr>
+        <p:blipFill>
+          <a:blip r:embed="rId1"/>
+          <a:stretch>
+            <a:fillRect/>
+          </a:stretch>
+        </p:blipFill>
+        <p:spPr>
+          <a:xfrm>
+            <a:off x="11458173" y="109728"/>
+            <a:ext cx="209571" cy="256032"/>
+          </a:xfrm>
+          <a:prstGeom prst="rect">
+            <a:avLst/>
+          </a:prstGeom>
+        </p:spPr>
+      </p:pic>
+      <p:sp>
+        <p:nvSpPr>
+          <p:cNvPr id="3" name="Text 0"/>
+          <p:cNvSpPr txBox="1"/>
+          <p:nvPr/>
+        </p:nvSpPr>
+        <p:spPr>
+          <a:xfrm>
+            <a:off x="8623533" y="128016"/>
+            <a:ext cx="2743200" cy="237744"/>
+          </a:xfrm>
+          <a:prstGeom prst="rect">
+            <a:avLst/>
+          </a:prstGeom>
+          <a:noFill/>
+          <a:ln/>
+        </p:spPr>
+        <p:txBody>
+          <a:bodyPr wrap="square" lIns="0" tIns="0" rIns="0" bIns="0" rtlCol="0" anchor="ctr"/>
+          <a:lstStyle/>
+          <a:p>
+            <a:pPr algn="r" indent="0" marL="0">
+              <a:buNone/>
+            </a:pPr>
+            <a:r>
+              <a:rPr lang="en-US" sz="750" dirty="0">
+                <a:solidFill>
+                  <a:srgbClr val="9FBAC1"/>
+                </a:solidFill>
+                <a:latin typeface="Meiryo" pitchFamily="34" charset="0"/>
+                <a:ea typeface="Meiryo" pitchFamily="34" charset="-122"/>
+                <a:cs typeface="Meiryo" pitchFamily="34" charset="-120"/>
+              </a:rPr>
+              <a:t>鹿児島のパーキンソン病専門トレーニングスタジオ</a:t>
+            </a:r>
+            <a:endParaRPr lang="en-US" sz="750" dirty="0"/>
+          </a:p>
+        </p:txBody>
+      </p:sp>
+      <p:sp>
+        <p:nvSpPr>
+          <p:cNvPr id="4" name="Text 1"/>
           <p:cNvSpPr/>
           <p:nvPr/>
         </p:nvSpPr>
@@ -7255,7 +7938,7 @@
       </p:sp>
       <p:sp>
         <p:nvSpPr>
-          <p:cNvPr id="3" name="Text 1"/>
+          <p:cNvPr id="5" name="Text 2"/>
           <p:cNvSpPr/>
           <p:nvPr/>
         </p:nvSpPr>
@@ -7294,7 +7977,7 @@
       </p:sp>
       <p:sp>
         <p:nvSpPr>
-          <p:cNvPr id="4" name="Text 2"/>
+          <p:cNvPr id="6" name="Text 3"/>
           <p:cNvSpPr/>
           <p:nvPr/>
         </p:nvSpPr>
@@ -7333,7 +8016,7 @@
       </p:sp>
       <p:sp>
         <p:nvSpPr>
-          <p:cNvPr id="5" name="Shape 3"/>
+          <p:cNvPr id="7" name="Shape 4"/>
           <p:cNvSpPr/>
           <p:nvPr/>
         </p:nvSpPr>
@@ -7355,7 +8038,7 @@
       </p:sp>
       <p:sp>
         <p:nvSpPr>
-          <p:cNvPr id="6" name="Shape 4"/>
+          <p:cNvPr id="8" name="Shape 5"/>
           <p:cNvSpPr/>
           <p:nvPr/>
         </p:nvSpPr>
@@ -7375,7 +8058,7 @@
       </p:sp>
       <p:sp>
         <p:nvSpPr>
-          <p:cNvPr id="7" name="Text 5"/>
+          <p:cNvPr id="9" name="Text 6"/>
           <p:cNvSpPr/>
           <p:nvPr/>
         </p:nvSpPr>
@@ -7414,7 +8097,7 @@
       </p:sp>
       <p:sp>
         <p:nvSpPr>
-          <p:cNvPr id="8" name="Text 6"/>
+          <p:cNvPr id="10" name="Text 7"/>
           <p:cNvSpPr/>
           <p:nvPr/>
         </p:nvSpPr>
@@ -7453,7 +8136,7 @@
       </p:sp>
       <p:sp>
         <p:nvSpPr>
-          <p:cNvPr id="9" name="Text 7"/>
+          <p:cNvPr id="11" name="Text 8"/>
           <p:cNvSpPr/>
           <p:nvPr/>
         </p:nvSpPr>
@@ -7492,7 +8175,7 @@
       </p:sp>
       <p:sp>
         <p:nvSpPr>
-          <p:cNvPr id="10" name="Shape 8"/>
+          <p:cNvPr id="12" name="Shape 9"/>
           <p:cNvSpPr/>
           <p:nvPr/>
         </p:nvSpPr>
@@ -7514,7 +8197,7 @@
       </p:sp>
       <p:sp>
         <p:nvSpPr>
-          <p:cNvPr id="11" name="Shape 9"/>
+          <p:cNvPr id="13" name="Shape 10"/>
           <p:cNvSpPr/>
           <p:nvPr/>
         </p:nvSpPr>
@@ -7534,7 +8217,7 @@
       </p:sp>
       <p:sp>
         <p:nvSpPr>
-          <p:cNvPr id="12" name="Text 10"/>
+          <p:cNvPr id="14" name="Text 11"/>
           <p:cNvSpPr/>
           <p:nvPr/>
         </p:nvSpPr>
@@ -7573,7 +8256,7 @@
       </p:sp>
       <p:sp>
         <p:nvSpPr>
-          <p:cNvPr id="13" name="Text 11"/>
+          <p:cNvPr id="15" name="Text 12"/>
           <p:cNvSpPr/>
           <p:nvPr/>
         </p:nvSpPr>
@@ -7612,7 +8295,7 @@
       </p:sp>
       <p:sp>
         <p:nvSpPr>
-          <p:cNvPr id="14" name="Text 12"/>
+          <p:cNvPr id="16" name="Text 13"/>
           <p:cNvSpPr/>
           <p:nvPr/>
         </p:nvSpPr>
@@ -7651,7 +8334,7 @@
       </p:sp>
       <p:sp>
         <p:nvSpPr>
-          <p:cNvPr id="15" name="Shape 13"/>
+          <p:cNvPr id="17" name="Shape 14"/>
           <p:cNvSpPr/>
           <p:nvPr/>
         </p:nvSpPr>
@@ -7673,7 +8356,7 @@
       </p:sp>
       <p:sp>
         <p:nvSpPr>
-          <p:cNvPr id="16" name="Shape 14"/>
+          <p:cNvPr id="18" name="Shape 15"/>
           <p:cNvSpPr/>
           <p:nvPr/>
         </p:nvSpPr>
@@ -7693,7 +8376,7 @@
       </p:sp>
       <p:sp>
         <p:nvSpPr>
-          <p:cNvPr id="17" name="Text 15"/>
+          <p:cNvPr id="19" name="Text 16"/>
           <p:cNvSpPr/>
           <p:nvPr/>
         </p:nvSpPr>
@@ -7732,7 +8415,7 @@
       </p:sp>
       <p:sp>
         <p:nvSpPr>
-          <p:cNvPr id="18" name="Text 16"/>
+          <p:cNvPr id="20" name="Text 17"/>
           <p:cNvSpPr/>
           <p:nvPr/>
         </p:nvSpPr>
@@ -7771,7 +8454,7 @@
       </p:sp>
       <p:sp>
         <p:nvSpPr>
-          <p:cNvPr id="19" name="Text 17"/>
+          <p:cNvPr id="21" name="Text 18"/>
           <p:cNvSpPr/>
           <p:nvPr/>
         </p:nvSpPr>
@@ -7810,7 +8493,7 @@
       </p:sp>
       <p:sp>
         <p:nvSpPr>
-          <p:cNvPr id="20" name="Text 18"/>
+          <p:cNvPr id="22" name="Text 19"/>
           <p:cNvSpPr/>
           <p:nvPr/>
         </p:nvSpPr>
@@ -7879,9 +8562,72 @@
           <a:chExt cx="0" cy="0"/>
         </a:xfrm>
       </p:grpSpPr>
-      <p:sp>
-        <p:nvSpPr>
-          <p:cNvPr id="2" name="Text 0"/>
+      <p:pic>
+        <p:nvPicPr>
+          <p:cNvPr id="2" name="Image 0" descr="/sessions/compassionate-sweet-heisenberg/mnt/dev-aspath-life-main/tools/assets/logo-deck.png">    </p:cNvPr>
+          <p:cNvPicPr>
+            <a:picLocks noChangeAspect="1"/>
+          </p:cNvPicPr>
+          <p:nvPr/>
+        </p:nvPicPr>
+        <p:blipFill>
+          <a:blip r:embed="rId1"/>
+          <a:stretch>
+            <a:fillRect/>
+          </a:stretch>
+        </p:blipFill>
+        <p:spPr>
+          <a:xfrm>
+            <a:off x="11458173" y="109728"/>
+            <a:ext cx="209571" cy="256032"/>
+          </a:xfrm>
+          <a:prstGeom prst="rect">
+            <a:avLst/>
+          </a:prstGeom>
+        </p:spPr>
+      </p:pic>
+      <p:sp>
+        <p:nvSpPr>
+          <p:cNvPr id="3" name="Text 0"/>
+          <p:cNvSpPr txBox="1"/>
+          <p:nvPr/>
+        </p:nvSpPr>
+        <p:spPr>
+          <a:xfrm>
+            <a:off x="8623533" y="128016"/>
+            <a:ext cx="2743200" cy="237744"/>
+          </a:xfrm>
+          <a:prstGeom prst="rect">
+            <a:avLst/>
+          </a:prstGeom>
+          <a:noFill/>
+          <a:ln/>
+        </p:spPr>
+        <p:txBody>
+          <a:bodyPr wrap="square" lIns="0" tIns="0" rIns="0" bIns="0" rtlCol="0" anchor="ctr"/>
+          <a:lstStyle/>
+          <a:p>
+            <a:pPr algn="r" indent="0" marL="0">
+              <a:buNone/>
+            </a:pPr>
+            <a:r>
+              <a:rPr lang="en-US" sz="750" dirty="0">
+                <a:solidFill>
+                  <a:srgbClr val="97A9AF"/>
+                </a:solidFill>
+                <a:latin typeface="Meiryo" pitchFamily="34" charset="0"/>
+                <a:ea typeface="Meiryo" pitchFamily="34" charset="-122"/>
+                <a:cs typeface="Meiryo" pitchFamily="34" charset="-120"/>
+              </a:rPr>
+              <a:t>鹿児島のパーキンソン病専門トレーニングスタジオ</a:t>
+            </a:r>
+            <a:endParaRPr lang="en-US" sz="750" dirty="0"/>
+          </a:p>
+        </p:txBody>
+      </p:sp>
+      <p:sp>
+        <p:nvSpPr>
+          <p:cNvPr id="4" name="Text 1"/>
           <p:cNvSpPr/>
           <p:nvPr/>
         </p:nvSpPr>
@@ -7920,7 +8666,7 @@
       </p:sp>
       <p:sp>
         <p:nvSpPr>
-          <p:cNvPr id="3" name="Text 1"/>
+          <p:cNvPr id="5" name="Text 2"/>
           <p:cNvSpPr/>
           <p:nvPr/>
         </p:nvSpPr>
@@ -7959,7 +8705,7 @@
       </p:sp>
       <p:sp>
         <p:nvSpPr>
-          <p:cNvPr id="4" name="Text 2"/>
+          <p:cNvPr id="6" name="Text 3"/>
           <p:cNvSpPr/>
           <p:nvPr/>
         </p:nvSpPr>
@@ -7998,7 +8744,7 @@
       </p:sp>
       <p:sp>
         <p:nvSpPr>
-          <p:cNvPr id="5" name="Shape 3"/>
+          <p:cNvPr id="7" name="Shape 4"/>
           <p:cNvSpPr/>
           <p:nvPr/>
         </p:nvSpPr>
@@ -8020,7 +8766,7 @@
       </p:sp>
       <p:sp>
         <p:nvSpPr>
-          <p:cNvPr id="6" name="Shape 4"/>
+          <p:cNvPr id="8" name="Shape 5"/>
           <p:cNvSpPr/>
           <p:nvPr/>
         </p:nvSpPr>
@@ -8042,7 +8788,7 @@
       </p:sp>
       <p:sp>
         <p:nvSpPr>
-          <p:cNvPr id="7" name="Shape 5"/>
+          <p:cNvPr id="9" name="Shape 6"/>
           <p:cNvSpPr/>
           <p:nvPr/>
         </p:nvSpPr>
@@ -8062,7 +8808,7 @@
       </p:sp>
       <p:sp>
         <p:nvSpPr>
-          <p:cNvPr id="8" name="Text 6"/>
+          <p:cNvPr id="10" name="Text 7"/>
           <p:cNvSpPr/>
           <p:nvPr/>
         </p:nvSpPr>
@@ -8101,7 +8847,7 @@
       </p:sp>
       <p:sp>
         <p:nvSpPr>
-          <p:cNvPr id="9" name="Text 7"/>
+          <p:cNvPr id="11" name="Text 8"/>
           <p:cNvSpPr/>
           <p:nvPr/>
         </p:nvSpPr>
@@ -8186,7 +8932,7 @@
       </p:sp>
       <p:sp>
         <p:nvSpPr>
-          <p:cNvPr id="10" name="Shape 8"/>
+          <p:cNvPr id="12" name="Shape 9"/>
           <p:cNvSpPr/>
           <p:nvPr/>
         </p:nvSpPr>
@@ -8208,7 +8954,7 @@
       </p:sp>
       <p:sp>
         <p:nvSpPr>
-          <p:cNvPr id="11" name="Shape 9"/>
+          <p:cNvPr id="13" name="Shape 10"/>
           <p:cNvSpPr/>
           <p:nvPr/>
         </p:nvSpPr>
@@ -8230,7 +8976,7 @@
       </p:sp>
       <p:sp>
         <p:nvSpPr>
-          <p:cNvPr id="12" name="Shape 10"/>
+          <p:cNvPr id="14" name="Shape 11"/>
           <p:cNvSpPr/>
           <p:nvPr/>
         </p:nvSpPr>
@@ -8250,7 +8996,7 @@
       </p:sp>
       <p:sp>
         <p:nvSpPr>
-          <p:cNvPr id="13" name="Text 11"/>
+          <p:cNvPr id="15" name="Text 12"/>
           <p:cNvSpPr/>
           <p:nvPr/>
         </p:nvSpPr>
@@ -8289,7 +9035,7 @@
       </p:sp>
       <p:sp>
         <p:nvSpPr>
-          <p:cNvPr id="14" name="Text 12"/>
+          <p:cNvPr id="16" name="Text 13"/>
           <p:cNvSpPr/>
           <p:nvPr/>
         </p:nvSpPr>
@@ -8374,7 +9120,7 @@
       </p:sp>
       <p:sp>
         <p:nvSpPr>
-          <p:cNvPr id="15" name="Shape 13"/>
+          <p:cNvPr id="17" name="Shape 14"/>
           <p:cNvSpPr/>
           <p:nvPr/>
         </p:nvSpPr>
@@ -8396,7 +9142,7 @@
       </p:sp>
       <p:sp>
         <p:nvSpPr>
-          <p:cNvPr id="16" name="Text 14"/>
+          <p:cNvPr id="18" name="Text 15"/>
           <p:cNvSpPr/>
           <p:nvPr/>
         </p:nvSpPr>
@@ -8488,9 +9234,72 @@
           <a:chExt cx="0" cy="0"/>
         </a:xfrm>
       </p:grpSpPr>
-      <p:sp>
-        <p:nvSpPr>
-          <p:cNvPr id="2" name="Text 0"/>
+      <p:pic>
+        <p:nvPicPr>
+          <p:cNvPr id="2" name="Image 0" descr="/sessions/compassionate-sweet-heisenberg/mnt/dev-aspath-life-main/tools/assets/logo-deck.png">    </p:cNvPr>
+          <p:cNvPicPr>
+            <a:picLocks noChangeAspect="1"/>
+          </p:cNvPicPr>
+          <p:nvPr/>
+        </p:nvPicPr>
+        <p:blipFill>
+          <a:blip r:embed="rId1"/>
+          <a:stretch>
+            <a:fillRect/>
+          </a:stretch>
+        </p:blipFill>
+        <p:spPr>
+          <a:xfrm>
+            <a:off x="11458173" y="109728"/>
+            <a:ext cx="209571" cy="256032"/>
+          </a:xfrm>
+          <a:prstGeom prst="rect">
+            <a:avLst/>
+          </a:prstGeom>
+        </p:spPr>
+      </p:pic>
+      <p:sp>
+        <p:nvSpPr>
+          <p:cNvPr id="3" name="Text 0"/>
+          <p:cNvSpPr txBox="1"/>
+          <p:nvPr/>
+        </p:nvSpPr>
+        <p:spPr>
+          <a:xfrm>
+            <a:off x="8623533" y="128016"/>
+            <a:ext cx="2743200" cy="237744"/>
+          </a:xfrm>
+          <a:prstGeom prst="rect">
+            <a:avLst/>
+          </a:prstGeom>
+          <a:noFill/>
+          <a:ln/>
+        </p:spPr>
+        <p:txBody>
+          <a:bodyPr wrap="square" lIns="0" tIns="0" rIns="0" bIns="0" rtlCol="0" anchor="ctr"/>
+          <a:lstStyle/>
+          <a:p>
+            <a:pPr algn="r" indent="0" marL="0">
+              <a:buNone/>
+            </a:pPr>
+            <a:r>
+              <a:rPr lang="en-US" sz="750" dirty="0">
+                <a:solidFill>
+                  <a:srgbClr val="97A9AF"/>
+                </a:solidFill>
+                <a:latin typeface="Meiryo" pitchFamily="34" charset="0"/>
+                <a:ea typeface="Meiryo" pitchFamily="34" charset="-122"/>
+                <a:cs typeface="Meiryo" pitchFamily="34" charset="-120"/>
+              </a:rPr>
+              <a:t>鹿児島のパーキンソン病専門トレーニングスタジオ</a:t>
+            </a:r>
+            <a:endParaRPr lang="en-US" sz="750" dirty="0"/>
+          </a:p>
+        </p:txBody>
+      </p:sp>
+      <p:sp>
+        <p:nvSpPr>
+          <p:cNvPr id="4" name="Text 1"/>
           <p:cNvSpPr/>
           <p:nvPr/>
         </p:nvSpPr>
@@ -8529,7 +9338,7 @@
       </p:sp>
       <p:sp>
         <p:nvSpPr>
-          <p:cNvPr id="3" name="Text 1"/>
+          <p:cNvPr id="5" name="Text 2"/>
           <p:cNvSpPr/>
           <p:nvPr/>
         </p:nvSpPr>
@@ -8568,7 +9377,7 @@
       </p:sp>
       <p:sp>
         <p:nvSpPr>
-          <p:cNvPr id="4" name="Text 2"/>
+          <p:cNvPr id="6" name="Text 3"/>
           <p:cNvSpPr/>
           <p:nvPr/>
         </p:nvSpPr>
@@ -8607,7 +9416,7 @@
       </p:sp>
       <p:sp>
         <p:nvSpPr>
-          <p:cNvPr id="5" name="Shape 3"/>
+          <p:cNvPr id="7" name="Shape 4"/>
           <p:cNvSpPr/>
           <p:nvPr/>
         </p:nvSpPr>
@@ -8629,7 +9438,7 @@
       </p:sp>
       <p:sp>
         <p:nvSpPr>
-          <p:cNvPr id="6" name="Text 4"/>
+          <p:cNvPr id="8" name="Text 5"/>
           <p:cNvSpPr/>
           <p:nvPr/>
         </p:nvSpPr>
@@ -8668,7 +9477,7 @@
       </p:sp>
       <p:sp>
         <p:nvSpPr>
-          <p:cNvPr id="7" name="Shape 5"/>
+          <p:cNvPr id="9" name="Shape 6"/>
           <p:cNvSpPr/>
           <p:nvPr/>
         </p:nvSpPr>
@@ -8688,7 +9497,7 @@
       </p:sp>
       <p:sp>
         <p:nvSpPr>
-          <p:cNvPr id="8" name="Text 6"/>
+          <p:cNvPr id="10" name="Text 7"/>
           <p:cNvSpPr/>
           <p:nvPr/>
         </p:nvSpPr>
@@ -8727,7 +9536,7 @@
       </p:sp>
       <p:sp>
         <p:nvSpPr>
-          <p:cNvPr id="9" name="Text 7"/>
+          <p:cNvPr id="11" name="Text 8"/>
           <p:cNvSpPr/>
           <p:nvPr/>
         </p:nvSpPr>
@@ -8766,7 +9575,7 @@
       </p:sp>
       <p:sp>
         <p:nvSpPr>
-          <p:cNvPr id="10" name="Shape 8"/>
+          <p:cNvPr id="12" name="Shape 9"/>
           <p:cNvSpPr/>
           <p:nvPr/>
         </p:nvSpPr>
@@ -8786,7 +9595,7 @@
       </p:sp>
       <p:sp>
         <p:nvSpPr>
-          <p:cNvPr id="11" name="Text 9"/>
+          <p:cNvPr id="13" name="Text 10"/>
           <p:cNvSpPr/>
           <p:nvPr/>
         </p:nvSpPr>
@@ -8825,7 +9634,7 @@
       </p:sp>
       <p:sp>
         <p:nvSpPr>
-          <p:cNvPr id="12" name="Text 10"/>
+          <p:cNvPr id="14" name="Text 11"/>
           <p:cNvSpPr/>
           <p:nvPr/>
         </p:nvSpPr>
@@ -8864,7 +9673,7 @@
       </p:sp>
       <p:sp>
         <p:nvSpPr>
-          <p:cNvPr id="13" name="Shape 11"/>
+          <p:cNvPr id="15" name="Shape 12"/>
           <p:cNvSpPr/>
           <p:nvPr/>
         </p:nvSpPr>
@@ -8884,7 +9693,7 @@
       </p:sp>
       <p:sp>
         <p:nvSpPr>
-          <p:cNvPr id="14" name="Text 12"/>
+          <p:cNvPr id="16" name="Text 13"/>
           <p:cNvSpPr/>
           <p:nvPr/>
         </p:nvSpPr>
@@ -8923,7 +9732,7 @@
       </p:sp>
       <p:sp>
         <p:nvSpPr>
-          <p:cNvPr id="15" name="Text 13"/>
+          <p:cNvPr id="17" name="Text 14"/>
           <p:cNvSpPr/>
           <p:nvPr/>
         </p:nvSpPr>
@@ -8962,7 +9771,7 @@
       </p:sp>
       <p:sp>
         <p:nvSpPr>
-          <p:cNvPr id="16" name="Shape 14"/>
+          <p:cNvPr id="18" name="Shape 15"/>
           <p:cNvSpPr/>
           <p:nvPr/>
         </p:nvSpPr>
@@ -8984,7 +9793,7 @@
       </p:sp>
       <p:sp>
         <p:nvSpPr>
-          <p:cNvPr id="17" name="Text 15"/>
+          <p:cNvPr id="19" name="Text 16"/>
           <p:cNvSpPr/>
           <p:nvPr/>
         </p:nvSpPr>
@@ -9056,126 +9865,9 @@
           <a:chExt cx="0" cy="0"/>
         </a:xfrm>
       </p:grpSpPr>
-      <p:sp>
-        <p:nvSpPr>
-          <p:cNvPr id="2" name="Text 0"/>
-          <p:cNvSpPr/>
-          <p:nvPr/>
-        </p:nvSpPr>
-        <p:spPr>
-          <a:xfrm>
-            <a:off x="548640" y="274320"/>
-            <a:ext cx="11064240" cy="731520"/>
-          </a:xfrm>
-          <a:prstGeom prst="rect">
-            <a:avLst/>
-          </a:prstGeom>
-          <a:noFill/>
-          <a:ln/>
-        </p:spPr>
-        <p:txBody>
-          <a:bodyPr wrap="square" lIns="0" tIns="0" rIns="0" bIns="0" rtlCol="0" anchor="ctr"/>
-          <a:lstStyle/>
-          <a:p>
-            <a:pPr indent="0" marL="0">
-              <a:buNone/>
-            </a:pPr>
-            <a:r>
-              <a:rPr lang="en-US" sz="3400" b="1" dirty="0">
-                <a:solidFill>
-                  <a:srgbClr val="264653"/>
-                </a:solidFill>
-                <a:latin typeface="Meiryo" pitchFamily="34" charset="0"/>
-                <a:ea typeface="Meiryo" pitchFamily="34" charset="-122"/>
-                <a:cs typeface="Meiryo" pitchFamily="34" charset="-120"/>
-              </a:rPr>
-              <a:t>② 画面の見かた</a:t>
-            </a:r>
-            <a:endParaRPr lang="en-US" sz="3400" dirty="0"/>
-          </a:p>
-        </p:txBody>
-      </p:sp>
-      <p:sp>
-        <p:nvSpPr>
-          <p:cNvPr id="3" name="Text 1"/>
-          <p:cNvSpPr/>
-          <p:nvPr/>
-        </p:nvSpPr>
-        <p:spPr>
-          <a:xfrm>
-            <a:off x="566928" y="1024128"/>
-            <a:ext cx="11064240" cy="365760"/>
-          </a:xfrm>
-          <a:prstGeom prst="rect">
-            <a:avLst/>
-          </a:prstGeom>
-          <a:noFill/>
-          <a:ln/>
-        </p:spPr>
-        <p:txBody>
-          <a:bodyPr wrap="square" lIns="0" tIns="0" rIns="0" bIns="0" rtlCol="0" anchor="ctr"/>
-          <a:lstStyle/>
-          <a:p>
-            <a:pPr indent="0" marL="0">
-              <a:buNone/>
-            </a:pPr>
-            <a:r>
-              <a:rPr lang="en-US" sz="1600" dirty="0">
-                <a:solidFill>
-                  <a:srgbClr val="5E7681"/>
-                </a:solidFill>
-                <a:latin typeface="Meiryo" pitchFamily="34" charset="0"/>
-                <a:ea typeface="Meiryo" pitchFamily="34" charset="-122"/>
-                <a:cs typeface="Meiryo" pitchFamily="34" charset="-120"/>
-              </a:rPr>
-              <a:t>文章のかたまりが上から順に並んでいます</a:t>
-            </a:r>
-            <a:endParaRPr lang="en-US" sz="1600" dirty="0"/>
-          </a:p>
-        </p:txBody>
-      </p:sp>
-      <p:sp>
-        <p:nvSpPr>
-          <p:cNvPr id="4" name="Text 2"/>
-          <p:cNvSpPr/>
-          <p:nvPr/>
-        </p:nvSpPr>
-        <p:spPr>
-          <a:xfrm>
-            <a:off x="11338560" y="6309360"/>
-            <a:ext cx="457200" cy="274320"/>
-          </a:xfrm>
-          <a:prstGeom prst="rect">
-            <a:avLst/>
-          </a:prstGeom>
-          <a:noFill/>
-          <a:ln/>
-        </p:spPr>
-        <p:txBody>
-          <a:bodyPr wrap="square" lIns="0" tIns="0" rIns="0" bIns="0" rtlCol="0" anchor="ctr"/>
-          <a:lstStyle/>
-          <a:p>
-            <a:pPr algn="r" indent="0" marL="0">
-              <a:buNone/>
-            </a:pPr>
-            <a:r>
-              <a:rPr lang="en-US" sz="1100" dirty="0">
-                <a:solidFill>
-                  <a:srgbClr val="A8B4B8"/>
-                </a:solidFill>
-                <a:latin typeface="Meiryo" pitchFamily="34" charset="0"/>
-                <a:ea typeface="Meiryo" pitchFamily="34" charset="-122"/>
-                <a:cs typeface="Meiryo" pitchFamily="34" charset="-120"/>
-              </a:rPr>
-              <a:t>3</a:t>
-            </a:r>
-            <a:endParaRPr lang="en-US" sz="1100" dirty="0"/>
-          </a:p>
-        </p:txBody>
-      </p:sp>
       <p:pic>
         <p:nvPicPr>
-          <p:cNvPr id="5" name="Image 0" descr="/sessions/compassionate-sweet-heisenberg/mnt/dev-aspath-life-main/_wp移行素材/★引継ぎ資料/画像/A1_編集画面ぜんたい.jpg">    </p:cNvPr>
+          <p:cNvPr id="2" name="Image 0" descr="/sessions/compassionate-sweet-heisenberg/mnt/dev-aspath-life-main/tools/assets/logo-deck.png">    </p:cNvPr>
           <p:cNvPicPr>
             <a:picLocks noChangeAspect="1"/>
           </p:cNvPicPr>
@@ -9189,6 +9881,186 @@
         </p:blipFill>
         <p:spPr>
           <a:xfrm>
+            <a:off x="11458173" y="109728"/>
+            <a:ext cx="209571" cy="256032"/>
+          </a:xfrm>
+          <a:prstGeom prst="rect">
+            <a:avLst/>
+          </a:prstGeom>
+        </p:spPr>
+      </p:pic>
+      <p:sp>
+        <p:nvSpPr>
+          <p:cNvPr id="3" name="Text 0"/>
+          <p:cNvSpPr txBox="1"/>
+          <p:nvPr/>
+        </p:nvSpPr>
+        <p:spPr>
+          <a:xfrm>
+            <a:off x="8623533" y="128016"/>
+            <a:ext cx="2743200" cy="237744"/>
+          </a:xfrm>
+          <a:prstGeom prst="rect">
+            <a:avLst/>
+          </a:prstGeom>
+          <a:noFill/>
+          <a:ln/>
+        </p:spPr>
+        <p:txBody>
+          <a:bodyPr wrap="square" lIns="0" tIns="0" rIns="0" bIns="0" rtlCol="0" anchor="ctr"/>
+          <a:lstStyle/>
+          <a:p>
+            <a:pPr algn="r" indent="0" marL="0">
+              <a:buNone/>
+            </a:pPr>
+            <a:r>
+              <a:rPr lang="en-US" sz="750" dirty="0">
+                <a:solidFill>
+                  <a:srgbClr val="97A9AF"/>
+                </a:solidFill>
+                <a:latin typeface="Meiryo" pitchFamily="34" charset="0"/>
+                <a:ea typeface="Meiryo" pitchFamily="34" charset="-122"/>
+                <a:cs typeface="Meiryo" pitchFamily="34" charset="-120"/>
+              </a:rPr>
+              <a:t>鹿児島のパーキンソン病専門トレーニングスタジオ</a:t>
+            </a:r>
+            <a:endParaRPr lang="en-US" sz="750" dirty="0"/>
+          </a:p>
+        </p:txBody>
+      </p:sp>
+      <p:sp>
+        <p:nvSpPr>
+          <p:cNvPr id="4" name="Text 1"/>
+          <p:cNvSpPr/>
+          <p:nvPr/>
+        </p:nvSpPr>
+        <p:spPr>
+          <a:xfrm>
+            <a:off x="548640" y="274320"/>
+            <a:ext cx="11064240" cy="731520"/>
+          </a:xfrm>
+          <a:prstGeom prst="rect">
+            <a:avLst/>
+          </a:prstGeom>
+          <a:noFill/>
+          <a:ln/>
+        </p:spPr>
+        <p:txBody>
+          <a:bodyPr wrap="square" lIns="0" tIns="0" rIns="0" bIns="0" rtlCol="0" anchor="ctr"/>
+          <a:lstStyle/>
+          <a:p>
+            <a:pPr indent="0" marL="0">
+              <a:buNone/>
+            </a:pPr>
+            <a:r>
+              <a:rPr lang="en-US" sz="3400" b="1" dirty="0">
+                <a:solidFill>
+                  <a:srgbClr val="264653"/>
+                </a:solidFill>
+                <a:latin typeface="Meiryo" pitchFamily="34" charset="0"/>
+                <a:ea typeface="Meiryo" pitchFamily="34" charset="-122"/>
+                <a:cs typeface="Meiryo" pitchFamily="34" charset="-120"/>
+              </a:rPr>
+              <a:t>② 画面の見かた</a:t>
+            </a:r>
+            <a:endParaRPr lang="en-US" sz="3400" dirty="0"/>
+          </a:p>
+        </p:txBody>
+      </p:sp>
+      <p:sp>
+        <p:nvSpPr>
+          <p:cNvPr id="5" name="Text 2"/>
+          <p:cNvSpPr/>
+          <p:nvPr/>
+        </p:nvSpPr>
+        <p:spPr>
+          <a:xfrm>
+            <a:off x="566928" y="1024128"/>
+            <a:ext cx="11064240" cy="365760"/>
+          </a:xfrm>
+          <a:prstGeom prst="rect">
+            <a:avLst/>
+          </a:prstGeom>
+          <a:noFill/>
+          <a:ln/>
+        </p:spPr>
+        <p:txBody>
+          <a:bodyPr wrap="square" lIns="0" tIns="0" rIns="0" bIns="0" rtlCol="0" anchor="ctr"/>
+          <a:lstStyle/>
+          <a:p>
+            <a:pPr indent="0" marL="0">
+              <a:buNone/>
+            </a:pPr>
+            <a:r>
+              <a:rPr lang="en-US" sz="1600" dirty="0">
+                <a:solidFill>
+                  <a:srgbClr val="5E7681"/>
+                </a:solidFill>
+                <a:latin typeface="Meiryo" pitchFamily="34" charset="0"/>
+                <a:ea typeface="Meiryo" pitchFamily="34" charset="-122"/>
+                <a:cs typeface="Meiryo" pitchFamily="34" charset="-120"/>
+              </a:rPr>
+              <a:t>文章のかたまりが上から順に並んでいます</a:t>
+            </a:r>
+            <a:endParaRPr lang="en-US" sz="1600" dirty="0"/>
+          </a:p>
+        </p:txBody>
+      </p:sp>
+      <p:sp>
+        <p:nvSpPr>
+          <p:cNvPr id="6" name="Text 3"/>
+          <p:cNvSpPr/>
+          <p:nvPr/>
+        </p:nvSpPr>
+        <p:spPr>
+          <a:xfrm>
+            <a:off x="11338560" y="6309360"/>
+            <a:ext cx="457200" cy="274320"/>
+          </a:xfrm>
+          <a:prstGeom prst="rect">
+            <a:avLst/>
+          </a:prstGeom>
+          <a:noFill/>
+          <a:ln/>
+        </p:spPr>
+        <p:txBody>
+          <a:bodyPr wrap="square" lIns="0" tIns="0" rIns="0" bIns="0" rtlCol="0" anchor="ctr"/>
+          <a:lstStyle/>
+          <a:p>
+            <a:pPr algn="r" indent="0" marL="0">
+              <a:buNone/>
+            </a:pPr>
+            <a:r>
+              <a:rPr lang="en-US" sz="1100" dirty="0">
+                <a:solidFill>
+                  <a:srgbClr val="A8B4B8"/>
+                </a:solidFill>
+                <a:latin typeface="Meiryo" pitchFamily="34" charset="0"/>
+                <a:ea typeface="Meiryo" pitchFamily="34" charset="-122"/>
+                <a:cs typeface="Meiryo" pitchFamily="34" charset="-120"/>
+              </a:rPr>
+              <a:t>3</a:t>
+            </a:r>
+            <a:endParaRPr lang="en-US" sz="1100" dirty="0"/>
+          </a:p>
+        </p:txBody>
+      </p:sp>
+      <p:pic>
+        <p:nvPicPr>
+          <p:cNvPr id="7" name="Image 1" descr="/sessions/compassionate-sweet-heisenberg/mnt/dev-aspath-life-main/_wp移行素材/★引継ぎ資料/画像/A1_編集画面ぜんたい.jpg">    </p:cNvPr>
+          <p:cNvPicPr>
+            <a:picLocks noChangeAspect="1"/>
+          </p:cNvPicPr>
+          <p:nvPr/>
+        </p:nvPicPr>
+        <p:blipFill>
+          <a:blip r:embed="rId2"/>
+          <a:stretch>
+            <a:fillRect/>
+          </a:stretch>
+        </p:blipFill>
+        <p:spPr>
+          <a:xfrm>
             <a:off x="640080" y="1691640"/>
             <a:ext cx="7863840" cy="4058756"/>
           </a:xfrm>
@@ -9199,7 +10071,7 @@
       </p:pic>
       <p:sp>
         <p:nvSpPr>
-          <p:cNvPr id="6" name="Text 3"/>
+          <p:cNvPr id="8" name="Text 4"/>
           <p:cNvSpPr/>
           <p:nvPr/>
         </p:nvSpPr>
@@ -9261,7 +10133,7 @@
       </p:sp>
       <p:sp>
         <p:nvSpPr>
-          <p:cNvPr id="7" name="Text 4"/>
+          <p:cNvPr id="9" name="Text 5"/>
           <p:cNvSpPr/>
           <p:nvPr/>
         </p:nvSpPr>
@@ -9346,7 +10218,7 @@
       </p:sp>
       <p:sp>
         <p:nvSpPr>
-          <p:cNvPr id="8" name="Shape 5"/>
+          <p:cNvPr id="10" name="Shape 6"/>
           <p:cNvSpPr/>
           <p:nvPr/>
         </p:nvSpPr>
@@ -9368,7 +10240,7 @@
       </p:sp>
       <p:sp>
         <p:nvSpPr>
-          <p:cNvPr id="9" name="Text 6"/>
+          <p:cNvPr id="11" name="Text 7"/>
           <p:cNvSpPr/>
           <p:nvPr/>
         </p:nvSpPr>
@@ -9480,126 +10352,9 @@
           <a:chExt cx="0" cy="0"/>
         </a:xfrm>
       </p:grpSpPr>
-      <p:sp>
-        <p:nvSpPr>
-          <p:cNvPr id="2" name="Text 0"/>
-          <p:cNvSpPr/>
-          <p:nvPr/>
-        </p:nvSpPr>
-        <p:spPr>
-          <a:xfrm>
-            <a:off x="548640" y="274320"/>
-            <a:ext cx="11064240" cy="731520"/>
-          </a:xfrm>
-          <a:prstGeom prst="rect">
-            <a:avLst/>
-          </a:prstGeom>
-          <a:noFill/>
-          <a:ln/>
-        </p:spPr>
-        <p:txBody>
-          <a:bodyPr wrap="square" lIns="0" tIns="0" rIns="0" bIns="0" rtlCol="0" anchor="ctr"/>
-          <a:lstStyle/>
-          <a:p>
-            <a:pPr indent="0" marL="0">
-              <a:buNone/>
-            </a:pPr>
-            <a:r>
-              <a:rPr lang="en-US" sz="3400" b="1" dirty="0">
-                <a:solidFill>
-                  <a:srgbClr val="264653"/>
-                </a:solidFill>
-                <a:latin typeface="Meiryo" pitchFamily="34" charset="0"/>
-                <a:ea typeface="Meiryo" pitchFamily="34" charset="-122"/>
-                <a:cs typeface="Meiryo" pitchFamily="34" charset="-120"/>
-              </a:rPr>
-              <a:t>③ 文章を直す</a:t>
-            </a:r>
-            <a:endParaRPr lang="en-US" sz="3400" dirty="0"/>
-          </a:p>
-        </p:txBody>
-      </p:sp>
-      <p:sp>
-        <p:nvSpPr>
-          <p:cNvPr id="3" name="Text 1"/>
-          <p:cNvSpPr/>
-          <p:nvPr/>
-        </p:nvSpPr>
-        <p:spPr>
-          <a:xfrm>
-            <a:off x="566928" y="1024128"/>
-            <a:ext cx="11064240" cy="365760"/>
-          </a:xfrm>
-          <a:prstGeom prst="rect">
-            <a:avLst/>
-          </a:prstGeom>
-          <a:noFill/>
-          <a:ln/>
-        </p:spPr>
-        <p:txBody>
-          <a:bodyPr wrap="square" lIns="0" tIns="0" rIns="0" bIns="0" rtlCol="0" anchor="ctr"/>
-          <a:lstStyle/>
-          <a:p>
-            <a:pPr indent="0" marL="0">
-              <a:buNone/>
-            </a:pPr>
-            <a:r>
-              <a:rPr lang="en-US" sz="1600" dirty="0">
-                <a:solidFill>
-                  <a:srgbClr val="5E7681"/>
-                </a:solidFill>
-                <a:latin typeface="Meiryo" pitchFamily="34" charset="0"/>
-                <a:ea typeface="Meiryo" pitchFamily="34" charset="-122"/>
-                <a:cs typeface="Meiryo" pitchFamily="34" charset="-120"/>
-              </a:rPr>
-              <a:t>クリックして書き換えるだけです</a:t>
-            </a:r>
-            <a:endParaRPr lang="en-US" sz="1600" dirty="0"/>
-          </a:p>
-        </p:txBody>
-      </p:sp>
-      <p:sp>
-        <p:nvSpPr>
-          <p:cNvPr id="4" name="Text 2"/>
-          <p:cNvSpPr/>
-          <p:nvPr/>
-        </p:nvSpPr>
-        <p:spPr>
-          <a:xfrm>
-            <a:off x="11338560" y="6309360"/>
-            <a:ext cx="457200" cy="274320"/>
-          </a:xfrm>
-          <a:prstGeom prst="rect">
-            <a:avLst/>
-          </a:prstGeom>
-          <a:noFill/>
-          <a:ln/>
-        </p:spPr>
-        <p:txBody>
-          <a:bodyPr wrap="square" lIns="0" tIns="0" rIns="0" bIns="0" rtlCol="0" anchor="ctr"/>
-          <a:lstStyle/>
-          <a:p>
-            <a:pPr algn="r" indent="0" marL="0">
-              <a:buNone/>
-            </a:pPr>
-            <a:r>
-              <a:rPr lang="en-US" sz="1100" dirty="0">
-                <a:solidFill>
-                  <a:srgbClr val="A8B4B8"/>
-                </a:solidFill>
-                <a:latin typeface="Meiryo" pitchFamily="34" charset="0"/>
-                <a:ea typeface="Meiryo" pitchFamily="34" charset="-122"/>
-                <a:cs typeface="Meiryo" pitchFamily="34" charset="-120"/>
-              </a:rPr>
-              <a:t>4</a:t>
-            </a:r>
-            <a:endParaRPr lang="en-US" sz="1100" dirty="0"/>
-          </a:p>
-        </p:txBody>
-      </p:sp>
       <p:pic>
         <p:nvPicPr>
-          <p:cNvPr id="5" name="Image 0" descr="/sessions/compassionate-sweet-heisenberg/mnt/dev-aspath-life-main/_wp移行素材/★引継ぎ資料/画像/A2_文章をえらぶ.jpg">    </p:cNvPr>
+          <p:cNvPr id="2" name="Image 0" descr="/sessions/compassionate-sweet-heisenberg/mnt/dev-aspath-life-main/tools/assets/logo-deck.png">    </p:cNvPr>
           <p:cNvPicPr>
             <a:picLocks noChangeAspect="1"/>
           </p:cNvPicPr>
@@ -9613,6 +10368,186 @@
         </p:blipFill>
         <p:spPr>
           <a:xfrm>
+            <a:off x="11458173" y="109728"/>
+            <a:ext cx="209571" cy="256032"/>
+          </a:xfrm>
+          <a:prstGeom prst="rect">
+            <a:avLst/>
+          </a:prstGeom>
+        </p:spPr>
+      </p:pic>
+      <p:sp>
+        <p:nvSpPr>
+          <p:cNvPr id="3" name="Text 0"/>
+          <p:cNvSpPr txBox="1"/>
+          <p:nvPr/>
+        </p:nvSpPr>
+        <p:spPr>
+          <a:xfrm>
+            <a:off x="8623533" y="128016"/>
+            <a:ext cx="2743200" cy="237744"/>
+          </a:xfrm>
+          <a:prstGeom prst="rect">
+            <a:avLst/>
+          </a:prstGeom>
+          <a:noFill/>
+          <a:ln/>
+        </p:spPr>
+        <p:txBody>
+          <a:bodyPr wrap="square" lIns="0" tIns="0" rIns="0" bIns="0" rtlCol="0" anchor="ctr"/>
+          <a:lstStyle/>
+          <a:p>
+            <a:pPr algn="r" indent="0" marL="0">
+              <a:buNone/>
+            </a:pPr>
+            <a:r>
+              <a:rPr lang="en-US" sz="750" dirty="0">
+                <a:solidFill>
+                  <a:srgbClr val="97A9AF"/>
+                </a:solidFill>
+                <a:latin typeface="Meiryo" pitchFamily="34" charset="0"/>
+                <a:ea typeface="Meiryo" pitchFamily="34" charset="-122"/>
+                <a:cs typeface="Meiryo" pitchFamily="34" charset="-120"/>
+              </a:rPr>
+              <a:t>鹿児島のパーキンソン病専門トレーニングスタジオ</a:t>
+            </a:r>
+            <a:endParaRPr lang="en-US" sz="750" dirty="0"/>
+          </a:p>
+        </p:txBody>
+      </p:sp>
+      <p:sp>
+        <p:nvSpPr>
+          <p:cNvPr id="4" name="Text 1"/>
+          <p:cNvSpPr/>
+          <p:nvPr/>
+        </p:nvSpPr>
+        <p:spPr>
+          <a:xfrm>
+            <a:off x="548640" y="274320"/>
+            <a:ext cx="11064240" cy="731520"/>
+          </a:xfrm>
+          <a:prstGeom prst="rect">
+            <a:avLst/>
+          </a:prstGeom>
+          <a:noFill/>
+          <a:ln/>
+        </p:spPr>
+        <p:txBody>
+          <a:bodyPr wrap="square" lIns="0" tIns="0" rIns="0" bIns="0" rtlCol="0" anchor="ctr"/>
+          <a:lstStyle/>
+          <a:p>
+            <a:pPr indent="0" marL="0">
+              <a:buNone/>
+            </a:pPr>
+            <a:r>
+              <a:rPr lang="en-US" sz="3400" b="1" dirty="0">
+                <a:solidFill>
+                  <a:srgbClr val="264653"/>
+                </a:solidFill>
+                <a:latin typeface="Meiryo" pitchFamily="34" charset="0"/>
+                <a:ea typeface="Meiryo" pitchFamily="34" charset="-122"/>
+                <a:cs typeface="Meiryo" pitchFamily="34" charset="-120"/>
+              </a:rPr>
+              <a:t>③ 文章を直す</a:t>
+            </a:r>
+            <a:endParaRPr lang="en-US" sz="3400" dirty="0"/>
+          </a:p>
+        </p:txBody>
+      </p:sp>
+      <p:sp>
+        <p:nvSpPr>
+          <p:cNvPr id="5" name="Text 2"/>
+          <p:cNvSpPr/>
+          <p:nvPr/>
+        </p:nvSpPr>
+        <p:spPr>
+          <a:xfrm>
+            <a:off x="566928" y="1024128"/>
+            <a:ext cx="11064240" cy="365760"/>
+          </a:xfrm>
+          <a:prstGeom prst="rect">
+            <a:avLst/>
+          </a:prstGeom>
+          <a:noFill/>
+          <a:ln/>
+        </p:spPr>
+        <p:txBody>
+          <a:bodyPr wrap="square" lIns="0" tIns="0" rIns="0" bIns="0" rtlCol="0" anchor="ctr"/>
+          <a:lstStyle/>
+          <a:p>
+            <a:pPr indent="0" marL="0">
+              <a:buNone/>
+            </a:pPr>
+            <a:r>
+              <a:rPr lang="en-US" sz="1600" dirty="0">
+                <a:solidFill>
+                  <a:srgbClr val="5E7681"/>
+                </a:solidFill>
+                <a:latin typeface="Meiryo" pitchFamily="34" charset="0"/>
+                <a:ea typeface="Meiryo" pitchFamily="34" charset="-122"/>
+                <a:cs typeface="Meiryo" pitchFamily="34" charset="-120"/>
+              </a:rPr>
+              <a:t>クリックして書き換えるだけです</a:t>
+            </a:r>
+            <a:endParaRPr lang="en-US" sz="1600" dirty="0"/>
+          </a:p>
+        </p:txBody>
+      </p:sp>
+      <p:sp>
+        <p:nvSpPr>
+          <p:cNvPr id="6" name="Text 3"/>
+          <p:cNvSpPr/>
+          <p:nvPr/>
+        </p:nvSpPr>
+        <p:spPr>
+          <a:xfrm>
+            <a:off x="11338560" y="6309360"/>
+            <a:ext cx="457200" cy="274320"/>
+          </a:xfrm>
+          <a:prstGeom prst="rect">
+            <a:avLst/>
+          </a:prstGeom>
+          <a:noFill/>
+          <a:ln/>
+        </p:spPr>
+        <p:txBody>
+          <a:bodyPr wrap="square" lIns="0" tIns="0" rIns="0" bIns="0" rtlCol="0" anchor="ctr"/>
+          <a:lstStyle/>
+          <a:p>
+            <a:pPr algn="r" indent="0" marL="0">
+              <a:buNone/>
+            </a:pPr>
+            <a:r>
+              <a:rPr lang="en-US" sz="1100" dirty="0">
+                <a:solidFill>
+                  <a:srgbClr val="A8B4B8"/>
+                </a:solidFill>
+                <a:latin typeface="Meiryo" pitchFamily="34" charset="0"/>
+                <a:ea typeface="Meiryo" pitchFamily="34" charset="-122"/>
+                <a:cs typeface="Meiryo" pitchFamily="34" charset="-120"/>
+              </a:rPr>
+              <a:t>4</a:t>
+            </a:r>
+            <a:endParaRPr lang="en-US" sz="1100" dirty="0"/>
+          </a:p>
+        </p:txBody>
+      </p:sp>
+      <p:pic>
+        <p:nvPicPr>
+          <p:cNvPr id="7" name="Image 1" descr="/sessions/compassionate-sweet-heisenberg/mnt/dev-aspath-life-main/_wp移行素材/★引継ぎ資料/画像/A2_文章をえらぶ.jpg">    </p:cNvPr>
+          <p:cNvPicPr>
+            <a:picLocks noChangeAspect="1"/>
+          </p:cNvPicPr>
+          <p:nvPr/>
+        </p:nvPicPr>
+        <p:blipFill>
+          <a:blip r:embed="rId2"/>
+          <a:stretch>
+            <a:fillRect/>
+          </a:stretch>
+        </p:blipFill>
+        <p:spPr>
+          <a:xfrm>
             <a:off x="640080" y="1691640"/>
             <a:ext cx="7863840" cy="4058756"/>
           </a:xfrm>
@@ -9623,7 +10558,7 @@
       </p:pic>
       <p:sp>
         <p:nvSpPr>
-          <p:cNvPr id="6" name="Shape 3"/>
+          <p:cNvPr id="8" name="Shape 4"/>
           <p:cNvSpPr/>
           <p:nvPr/>
         </p:nvSpPr>
@@ -9643,7 +10578,7 @@
       </p:sp>
       <p:sp>
         <p:nvSpPr>
-          <p:cNvPr id="7" name="Text 4"/>
+          <p:cNvPr id="9" name="Text 5"/>
           <p:cNvSpPr/>
           <p:nvPr/>
         </p:nvSpPr>
@@ -9682,7 +10617,7 @@
       </p:sp>
       <p:sp>
         <p:nvSpPr>
-          <p:cNvPr id="8" name="Text 5"/>
+          <p:cNvPr id="10" name="Text 6"/>
           <p:cNvSpPr/>
           <p:nvPr/>
         </p:nvSpPr>
@@ -9721,7 +10656,7 @@
       </p:sp>
       <p:sp>
         <p:nvSpPr>
-          <p:cNvPr id="9" name="Shape 6"/>
+          <p:cNvPr id="11" name="Shape 7"/>
           <p:cNvSpPr/>
           <p:nvPr/>
         </p:nvSpPr>
@@ -9741,7 +10676,7 @@
       </p:sp>
       <p:sp>
         <p:nvSpPr>
-          <p:cNvPr id="10" name="Text 7"/>
+          <p:cNvPr id="12" name="Text 8"/>
           <p:cNvSpPr/>
           <p:nvPr/>
         </p:nvSpPr>
@@ -9780,7 +10715,7 @@
       </p:sp>
       <p:sp>
         <p:nvSpPr>
-          <p:cNvPr id="11" name="Text 8"/>
+          <p:cNvPr id="13" name="Text 9"/>
           <p:cNvSpPr/>
           <p:nvPr/>
         </p:nvSpPr>
@@ -9819,7 +10754,7 @@
       </p:sp>
       <p:sp>
         <p:nvSpPr>
-          <p:cNvPr id="12" name="Shape 9"/>
+          <p:cNvPr id="14" name="Shape 10"/>
           <p:cNvSpPr/>
           <p:nvPr/>
         </p:nvSpPr>
@@ -9839,7 +10774,7 @@
       </p:sp>
       <p:sp>
         <p:nvSpPr>
-          <p:cNvPr id="13" name="Text 10"/>
+          <p:cNvPr id="15" name="Text 11"/>
           <p:cNvSpPr/>
           <p:nvPr/>
         </p:nvSpPr>
@@ -9878,7 +10813,7 @@
       </p:sp>
       <p:sp>
         <p:nvSpPr>
-          <p:cNvPr id="14" name="Text 11"/>
+          <p:cNvPr id="16" name="Text 12"/>
           <p:cNvSpPr/>
           <p:nvPr/>
         </p:nvSpPr>
@@ -9917,7 +10852,7 @@
       </p:sp>
       <p:sp>
         <p:nvSpPr>
-          <p:cNvPr id="15" name="Shape 12"/>
+          <p:cNvPr id="17" name="Shape 13"/>
           <p:cNvSpPr/>
           <p:nvPr/>
         </p:nvSpPr>
@@ -9939,7 +10874,7 @@
       </p:sp>
       <p:sp>
         <p:nvSpPr>
-          <p:cNvPr id="16" name="Text 13"/>
+          <p:cNvPr id="18" name="Text 14"/>
           <p:cNvSpPr/>
           <p:nvPr/>
         </p:nvSpPr>
@@ -10060,126 +10995,9 @@
           <a:chExt cx="0" cy="0"/>
         </a:xfrm>
       </p:grpSpPr>
-      <p:sp>
-        <p:nvSpPr>
-          <p:cNvPr id="2" name="Text 0"/>
-          <p:cNvSpPr/>
-          <p:nvPr/>
-        </p:nvSpPr>
-        <p:spPr>
-          <a:xfrm>
-            <a:off x="548640" y="274320"/>
-            <a:ext cx="11064240" cy="731520"/>
-          </a:xfrm>
-          <a:prstGeom prst="rect">
-            <a:avLst/>
-          </a:prstGeom>
-          <a:noFill/>
-          <a:ln/>
-        </p:spPr>
-        <p:txBody>
-          <a:bodyPr wrap="square" lIns="0" tIns="0" rIns="0" bIns="0" rtlCol="0" anchor="ctr"/>
-          <a:lstStyle/>
-          <a:p>
-            <a:pPr indent="0" marL="0">
-              <a:buNone/>
-            </a:pPr>
-            <a:r>
-              <a:rPr lang="en-US" sz="3400" b="1" dirty="0">
-                <a:solidFill>
-                  <a:srgbClr val="264653"/>
-                </a:solidFill>
-                <a:latin typeface="Meiryo" pitchFamily="34" charset="0"/>
-                <a:ea typeface="Meiryo" pitchFamily="34" charset="-122"/>
-                <a:cs typeface="Meiryo" pitchFamily="34" charset="-120"/>
-              </a:rPr>
-              <a:t>文字を太くする・改行する</a:t>
-            </a:r>
-            <a:endParaRPr lang="en-US" sz="3400" dirty="0"/>
-          </a:p>
-        </p:txBody>
-      </p:sp>
-      <p:sp>
-        <p:nvSpPr>
-          <p:cNvPr id="3" name="Text 1"/>
-          <p:cNvSpPr/>
-          <p:nvPr/>
-        </p:nvSpPr>
-        <p:spPr>
-          <a:xfrm>
-            <a:off x="566928" y="1024128"/>
-            <a:ext cx="11064240" cy="365760"/>
-          </a:xfrm>
-          <a:prstGeom prst="rect">
-            <a:avLst/>
-          </a:prstGeom>
-          <a:noFill/>
-          <a:ln/>
-        </p:spPr>
-        <p:txBody>
-          <a:bodyPr wrap="square" lIns="0" tIns="0" rIns="0" bIns="0" rtlCol="0" anchor="ctr"/>
-          <a:lstStyle/>
-          <a:p>
-            <a:pPr indent="0" marL="0">
-              <a:buNone/>
-            </a:pPr>
-            <a:r>
-              <a:rPr lang="en-US" sz="1600" dirty="0">
-                <a:solidFill>
-                  <a:srgbClr val="5E7681"/>
-                </a:solidFill>
-                <a:latin typeface="Meiryo" pitchFamily="34" charset="0"/>
-                <a:ea typeface="Meiryo" pitchFamily="34" charset="-122"/>
-                <a:cs typeface="Meiryo" pitchFamily="34" charset="-120"/>
-              </a:rPr>
-              <a:t>文章を選ぶと上に出てくるボタン</a:t>
-            </a:r>
-            <a:endParaRPr lang="en-US" sz="1600" dirty="0"/>
-          </a:p>
-        </p:txBody>
-      </p:sp>
-      <p:sp>
-        <p:nvSpPr>
-          <p:cNvPr id="4" name="Text 2"/>
-          <p:cNvSpPr/>
-          <p:nvPr/>
-        </p:nvSpPr>
-        <p:spPr>
-          <a:xfrm>
-            <a:off x="11338560" y="6309360"/>
-            <a:ext cx="457200" cy="274320"/>
-          </a:xfrm>
-          <a:prstGeom prst="rect">
-            <a:avLst/>
-          </a:prstGeom>
-          <a:noFill/>
-          <a:ln/>
-        </p:spPr>
-        <p:txBody>
-          <a:bodyPr wrap="square" lIns="0" tIns="0" rIns="0" bIns="0" rtlCol="0" anchor="ctr"/>
-          <a:lstStyle/>
-          <a:p>
-            <a:pPr algn="r" indent="0" marL="0">
-              <a:buNone/>
-            </a:pPr>
-            <a:r>
-              <a:rPr lang="en-US" sz="1100" dirty="0">
-                <a:solidFill>
-                  <a:srgbClr val="A8B4B8"/>
-                </a:solidFill>
-                <a:latin typeface="Meiryo" pitchFamily="34" charset="0"/>
-                <a:ea typeface="Meiryo" pitchFamily="34" charset="-122"/>
-                <a:cs typeface="Meiryo" pitchFamily="34" charset="-120"/>
-              </a:rPr>
-              <a:t>5</a:t>
-            </a:r>
-            <a:endParaRPr lang="en-US" sz="1100" dirty="0"/>
-          </a:p>
-        </p:txBody>
-      </p:sp>
       <p:pic>
         <p:nvPicPr>
-          <p:cNvPr id="5" name="Image 0" descr="/sessions/compassionate-sweet-heisenberg/mnt/dev-aspath-life-main/_wp移行素材/★引継ぎ資料/画像/A5_文字をかえるボタン.jpg">    </p:cNvPr>
+          <p:cNvPr id="2" name="Image 0" descr="/sessions/compassionate-sweet-heisenberg/mnt/dev-aspath-life-main/tools/assets/logo-deck.png">    </p:cNvPr>
           <p:cNvPicPr>
             <a:picLocks noChangeAspect="1"/>
           </p:cNvPicPr>
@@ -10193,6 +11011,186 @@
         </p:blipFill>
         <p:spPr>
           <a:xfrm>
+            <a:off x="11458173" y="109728"/>
+            <a:ext cx="209571" cy="256032"/>
+          </a:xfrm>
+          <a:prstGeom prst="rect">
+            <a:avLst/>
+          </a:prstGeom>
+        </p:spPr>
+      </p:pic>
+      <p:sp>
+        <p:nvSpPr>
+          <p:cNvPr id="3" name="Text 0"/>
+          <p:cNvSpPr txBox="1"/>
+          <p:nvPr/>
+        </p:nvSpPr>
+        <p:spPr>
+          <a:xfrm>
+            <a:off x="8623533" y="128016"/>
+            <a:ext cx="2743200" cy="237744"/>
+          </a:xfrm>
+          <a:prstGeom prst="rect">
+            <a:avLst/>
+          </a:prstGeom>
+          <a:noFill/>
+          <a:ln/>
+        </p:spPr>
+        <p:txBody>
+          <a:bodyPr wrap="square" lIns="0" tIns="0" rIns="0" bIns="0" rtlCol="0" anchor="ctr"/>
+          <a:lstStyle/>
+          <a:p>
+            <a:pPr algn="r" indent="0" marL="0">
+              <a:buNone/>
+            </a:pPr>
+            <a:r>
+              <a:rPr lang="en-US" sz="750" dirty="0">
+                <a:solidFill>
+                  <a:srgbClr val="97A9AF"/>
+                </a:solidFill>
+                <a:latin typeface="Meiryo" pitchFamily="34" charset="0"/>
+                <a:ea typeface="Meiryo" pitchFamily="34" charset="-122"/>
+                <a:cs typeface="Meiryo" pitchFamily="34" charset="-120"/>
+              </a:rPr>
+              <a:t>鹿児島のパーキンソン病専門トレーニングスタジオ</a:t>
+            </a:r>
+            <a:endParaRPr lang="en-US" sz="750" dirty="0"/>
+          </a:p>
+        </p:txBody>
+      </p:sp>
+      <p:sp>
+        <p:nvSpPr>
+          <p:cNvPr id="4" name="Text 1"/>
+          <p:cNvSpPr/>
+          <p:nvPr/>
+        </p:nvSpPr>
+        <p:spPr>
+          <a:xfrm>
+            <a:off x="548640" y="274320"/>
+            <a:ext cx="11064240" cy="731520"/>
+          </a:xfrm>
+          <a:prstGeom prst="rect">
+            <a:avLst/>
+          </a:prstGeom>
+          <a:noFill/>
+          <a:ln/>
+        </p:spPr>
+        <p:txBody>
+          <a:bodyPr wrap="square" lIns="0" tIns="0" rIns="0" bIns="0" rtlCol="0" anchor="ctr"/>
+          <a:lstStyle/>
+          <a:p>
+            <a:pPr indent="0" marL="0">
+              <a:buNone/>
+            </a:pPr>
+            <a:r>
+              <a:rPr lang="en-US" sz="3400" b="1" dirty="0">
+                <a:solidFill>
+                  <a:srgbClr val="264653"/>
+                </a:solidFill>
+                <a:latin typeface="Meiryo" pitchFamily="34" charset="0"/>
+                <a:ea typeface="Meiryo" pitchFamily="34" charset="-122"/>
+                <a:cs typeface="Meiryo" pitchFamily="34" charset="-120"/>
+              </a:rPr>
+              <a:t>文字を太くする・改行する</a:t>
+            </a:r>
+            <a:endParaRPr lang="en-US" sz="3400" dirty="0"/>
+          </a:p>
+        </p:txBody>
+      </p:sp>
+      <p:sp>
+        <p:nvSpPr>
+          <p:cNvPr id="5" name="Text 2"/>
+          <p:cNvSpPr/>
+          <p:nvPr/>
+        </p:nvSpPr>
+        <p:spPr>
+          <a:xfrm>
+            <a:off x="566928" y="1024128"/>
+            <a:ext cx="11064240" cy="365760"/>
+          </a:xfrm>
+          <a:prstGeom prst="rect">
+            <a:avLst/>
+          </a:prstGeom>
+          <a:noFill/>
+          <a:ln/>
+        </p:spPr>
+        <p:txBody>
+          <a:bodyPr wrap="square" lIns="0" tIns="0" rIns="0" bIns="0" rtlCol="0" anchor="ctr"/>
+          <a:lstStyle/>
+          <a:p>
+            <a:pPr indent="0" marL="0">
+              <a:buNone/>
+            </a:pPr>
+            <a:r>
+              <a:rPr lang="en-US" sz="1600" dirty="0">
+                <a:solidFill>
+                  <a:srgbClr val="5E7681"/>
+                </a:solidFill>
+                <a:latin typeface="Meiryo" pitchFamily="34" charset="0"/>
+                <a:ea typeface="Meiryo" pitchFamily="34" charset="-122"/>
+                <a:cs typeface="Meiryo" pitchFamily="34" charset="-120"/>
+              </a:rPr>
+              <a:t>文章を選ぶと上に出てくるボタン</a:t>
+            </a:r>
+            <a:endParaRPr lang="en-US" sz="1600" dirty="0"/>
+          </a:p>
+        </p:txBody>
+      </p:sp>
+      <p:sp>
+        <p:nvSpPr>
+          <p:cNvPr id="6" name="Text 3"/>
+          <p:cNvSpPr/>
+          <p:nvPr/>
+        </p:nvSpPr>
+        <p:spPr>
+          <a:xfrm>
+            <a:off x="11338560" y="6309360"/>
+            <a:ext cx="457200" cy="274320"/>
+          </a:xfrm>
+          <a:prstGeom prst="rect">
+            <a:avLst/>
+          </a:prstGeom>
+          <a:noFill/>
+          <a:ln/>
+        </p:spPr>
+        <p:txBody>
+          <a:bodyPr wrap="square" lIns="0" tIns="0" rIns="0" bIns="0" rtlCol="0" anchor="ctr"/>
+          <a:lstStyle/>
+          <a:p>
+            <a:pPr algn="r" indent="0" marL="0">
+              <a:buNone/>
+            </a:pPr>
+            <a:r>
+              <a:rPr lang="en-US" sz="1100" dirty="0">
+                <a:solidFill>
+                  <a:srgbClr val="A8B4B8"/>
+                </a:solidFill>
+                <a:latin typeface="Meiryo" pitchFamily="34" charset="0"/>
+                <a:ea typeface="Meiryo" pitchFamily="34" charset="-122"/>
+                <a:cs typeface="Meiryo" pitchFamily="34" charset="-120"/>
+              </a:rPr>
+              <a:t>5</a:t>
+            </a:r>
+            <a:endParaRPr lang="en-US" sz="1100" dirty="0"/>
+          </a:p>
+        </p:txBody>
+      </p:sp>
+      <p:pic>
+        <p:nvPicPr>
+          <p:cNvPr id="7" name="Image 1" descr="/sessions/compassionate-sweet-heisenberg/mnt/dev-aspath-life-main/_wp移行素材/★引継ぎ資料/画像/A5_文字をかえるボタン.jpg">    </p:cNvPr>
+          <p:cNvPicPr>
+            <a:picLocks noChangeAspect="1"/>
+          </p:cNvPicPr>
+          <p:nvPr/>
+        </p:nvPicPr>
+        <p:blipFill>
+          <a:blip r:embed="rId2"/>
+          <a:stretch>
+            <a:fillRect/>
+          </a:stretch>
+        </p:blipFill>
+        <p:spPr>
+          <a:xfrm>
             <a:off x="1417320" y="1874520"/>
             <a:ext cx="9326880" cy="1252864"/>
           </a:xfrm>
@@ -10203,7 +11201,7 @@
       </p:pic>
       <p:sp>
         <p:nvSpPr>
-          <p:cNvPr id="6" name="Shape 3"/>
+          <p:cNvPr id="8" name="Shape 4"/>
           <p:cNvSpPr/>
           <p:nvPr/>
         </p:nvSpPr>
@@ -10225,7 +11223,7 @@
       </p:sp>
       <p:sp>
         <p:nvSpPr>
-          <p:cNvPr id="7" name="Text 4"/>
+          <p:cNvPr id="9" name="Text 5"/>
           <p:cNvSpPr/>
           <p:nvPr/>
         </p:nvSpPr>
@@ -10264,7 +11262,7 @@
       </p:sp>
       <p:sp>
         <p:nvSpPr>
-          <p:cNvPr id="8" name="Text 5"/>
+          <p:cNvPr id="10" name="Text 6"/>
           <p:cNvSpPr/>
           <p:nvPr/>
         </p:nvSpPr>
@@ -10326,7 +11324,7 @@
       </p:sp>
       <p:sp>
         <p:nvSpPr>
-          <p:cNvPr id="9" name="Shape 6"/>
+          <p:cNvPr id="11" name="Shape 7"/>
           <p:cNvSpPr/>
           <p:nvPr/>
         </p:nvSpPr>
@@ -10348,7 +11346,7 @@
       </p:sp>
       <p:sp>
         <p:nvSpPr>
-          <p:cNvPr id="10" name="Text 7"/>
+          <p:cNvPr id="12" name="Text 8"/>
           <p:cNvSpPr/>
           <p:nvPr/>
         </p:nvSpPr>
@@ -10387,7 +11385,7 @@
       </p:sp>
       <p:sp>
         <p:nvSpPr>
-          <p:cNvPr id="11" name="Text 8"/>
+          <p:cNvPr id="13" name="Text 9"/>
           <p:cNvSpPr/>
           <p:nvPr/>
         </p:nvSpPr>
@@ -10449,7 +11447,7 @@
       </p:sp>
       <p:sp>
         <p:nvSpPr>
-          <p:cNvPr id="12" name="Shape 9"/>
+          <p:cNvPr id="14" name="Shape 10"/>
           <p:cNvSpPr/>
           <p:nvPr/>
         </p:nvSpPr>
@@ -10471,7 +11469,7 @@
       </p:sp>
       <p:sp>
         <p:nvSpPr>
-          <p:cNvPr id="13" name="Text 10"/>
+          <p:cNvPr id="15" name="Text 11"/>
           <p:cNvSpPr/>
           <p:nvPr/>
         </p:nvSpPr>
@@ -10563,126 +11561,9 @@
           <a:chExt cx="0" cy="0"/>
         </a:xfrm>
       </p:grpSpPr>
-      <p:sp>
-        <p:nvSpPr>
-          <p:cNvPr id="2" name="Text 0"/>
-          <p:cNvSpPr/>
-          <p:nvPr/>
-        </p:nvSpPr>
-        <p:spPr>
-          <a:xfrm>
-            <a:off x="548640" y="274320"/>
-            <a:ext cx="11064240" cy="731520"/>
-          </a:xfrm>
-          <a:prstGeom prst="rect">
-            <a:avLst/>
-          </a:prstGeom>
-          <a:noFill/>
-          <a:ln/>
-        </p:spPr>
-        <p:txBody>
-          <a:bodyPr wrap="square" lIns="0" tIns="0" rIns="0" bIns="0" rtlCol="0" anchor="ctr"/>
-          <a:lstStyle/>
-          <a:p>
-            <a:pPr indent="0" marL="0">
-              <a:buNone/>
-            </a:pPr>
-            <a:r>
-              <a:rPr lang="en-US" sz="3400" b="1" dirty="0">
-                <a:solidFill>
-                  <a:srgbClr val="264653"/>
-                </a:solidFill>
-                <a:latin typeface="Meiryo" pitchFamily="34" charset="0"/>
-                <a:ea typeface="Meiryo" pitchFamily="34" charset="-122"/>
-                <a:cs typeface="Meiryo" pitchFamily="34" charset="-120"/>
-              </a:rPr>
-              <a:t>④ 触らない部分の見分けかた</a:t>
-            </a:r>
-            <a:endParaRPr lang="en-US" sz="3400" dirty="0"/>
-          </a:p>
-        </p:txBody>
-      </p:sp>
-      <p:sp>
-        <p:nvSpPr>
-          <p:cNvPr id="3" name="Text 1"/>
-          <p:cNvSpPr/>
-          <p:nvPr/>
-        </p:nvSpPr>
-        <p:spPr>
-          <a:xfrm>
-            <a:off x="566928" y="1024128"/>
-            <a:ext cx="11064240" cy="365760"/>
-          </a:xfrm>
-          <a:prstGeom prst="rect">
-            <a:avLst/>
-          </a:prstGeom>
-          <a:noFill/>
-          <a:ln/>
-        </p:spPr>
-        <p:txBody>
-          <a:bodyPr wrap="square" lIns="0" tIns="0" rIns="0" bIns="0" rtlCol="0" anchor="ctr"/>
-          <a:lstStyle/>
-          <a:p>
-            <a:pPr indent="0" marL="0">
-              <a:buNone/>
-            </a:pPr>
-            <a:r>
-              <a:rPr lang="en-US" sz="1600" dirty="0">
-                <a:solidFill>
-                  <a:srgbClr val="5E7681"/>
-                </a:solidFill>
-                <a:latin typeface="Meiryo" pitchFamily="34" charset="0"/>
-                <a:ea typeface="Meiryo" pitchFamily="34" charset="-122"/>
-                <a:cs typeface="Meiryo" pitchFamily="34" charset="-120"/>
-              </a:rPr>
-              <a:t>クリックしても文字が編集できない箱があります</a:t>
-            </a:r>
-            <a:endParaRPr lang="en-US" sz="1600" dirty="0"/>
-          </a:p>
-        </p:txBody>
-      </p:sp>
-      <p:sp>
-        <p:nvSpPr>
-          <p:cNvPr id="4" name="Text 2"/>
-          <p:cNvSpPr/>
-          <p:nvPr/>
-        </p:nvSpPr>
-        <p:spPr>
-          <a:xfrm>
-            <a:off x="11338560" y="6309360"/>
-            <a:ext cx="457200" cy="274320"/>
-          </a:xfrm>
-          <a:prstGeom prst="rect">
-            <a:avLst/>
-          </a:prstGeom>
-          <a:noFill/>
-          <a:ln/>
-        </p:spPr>
-        <p:txBody>
-          <a:bodyPr wrap="square" lIns="0" tIns="0" rIns="0" bIns="0" rtlCol="0" anchor="ctr"/>
-          <a:lstStyle/>
-          <a:p>
-            <a:pPr algn="r" indent="0" marL="0">
-              <a:buNone/>
-            </a:pPr>
-            <a:r>
-              <a:rPr lang="en-US" sz="1100" dirty="0">
-                <a:solidFill>
-                  <a:srgbClr val="A8B4B8"/>
-                </a:solidFill>
-                <a:latin typeface="Meiryo" pitchFamily="34" charset="0"/>
-                <a:ea typeface="Meiryo" pitchFamily="34" charset="-122"/>
-                <a:cs typeface="Meiryo" pitchFamily="34" charset="-120"/>
-              </a:rPr>
-              <a:t>6</a:t>
-            </a:r>
-            <a:endParaRPr lang="en-US" sz="1100" dirty="0"/>
-          </a:p>
-        </p:txBody>
-      </p:sp>
       <p:pic>
         <p:nvPicPr>
-          <p:cNvPr id="5" name="Image 0" descr="/sessions/compassionate-sweet-heisenberg/mnt/dev-aspath-life-main/_wp移行素材/★引継ぎ資料/画像/A3_さわらない箱.jpg">    </p:cNvPr>
+          <p:cNvPr id="2" name="Image 0" descr="/sessions/compassionate-sweet-heisenberg/mnt/dev-aspath-life-main/tools/assets/logo-deck.png">    </p:cNvPr>
           <p:cNvPicPr>
             <a:picLocks noChangeAspect="1"/>
           </p:cNvPicPr>
@@ -10696,6 +11577,186 @@
         </p:blipFill>
         <p:spPr>
           <a:xfrm>
+            <a:off x="11458173" y="109728"/>
+            <a:ext cx="209571" cy="256032"/>
+          </a:xfrm>
+          <a:prstGeom prst="rect">
+            <a:avLst/>
+          </a:prstGeom>
+        </p:spPr>
+      </p:pic>
+      <p:sp>
+        <p:nvSpPr>
+          <p:cNvPr id="3" name="Text 0"/>
+          <p:cNvSpPr txBox="1"/>
+          <p:nvPr/>
+        </p:nvSpPr>
+        <p:spPr>
+          <a:xfrm>
+            <a:off x="8623533" y="128016"/>
+            <a:ext cx="2743200" cy="237744"/>
+          </a:xfrm>
+          <a:prstGeom prst="rect">
+            <a:avLst/>
+          </a:prstGeom>
+          <a:noFill/>
+          <a:ln/>
+        </p:spPr>
+        <p:txBody>
+          <a:bodyPr wrap="square" lIns="0" tIns="0" rIns="0" bIns="0" rtlCol="0" anchor="ctr"/>
+          <a:lstStyle/>
+          <a:p>
+            <a:pPr algn="r" indent="0" marL="0">
+              <a:buNone/>
+            </a:pPr>
+            <a:r>
+              <a:rPr lang="en-US" sz="750" dirty="0">
+                <a:solidFill>
+                  <a:srgbClr val="97A9AF"/>
+                </a:solidFill>
+                <a:latin typeface="Meiryo" pitchFamily="34" charset="0"/>
+                <a:ea typeface="Meiryo" pitchFamily="34" charset="-122"/>
+                <a:cs typeface="Meiryo" pitchFamily="34" charset="-120"/>
+              </a:rPr>
+              <a:t>鹿児島のパーキンソン病専門トレーニングスタジオ</a:t>
+            </a:r>
+            <a:endParaRPr lang="en-US" sz="750" dirty="0"/>
+          </a:p>
+        </p:txBody>
+      </p:sp>
+      <p:sp>
+        <p:nvSpPr>
+          <p:cNvPr id="4" name="Text 1"/>
+          <p:cNvSpPr/>
+          <p:nvPr/>
+        </p:nvSpPr>
+        <p:spPr>
+          <a:xfrm>
+            <a:off x="548640" y="274320"/>
+            <a:ext cx="11064240" cy="731520"/>
+          </a:xfrm>
+          <a:prstGeom prst="rect">
+            <a:avLst/>
+          </a:prstGeom>
+          <a:noFill/>
+          <a:ln/>
+        </p:spPr>
+        <p:txBody>
+          <a:bodyPr wrap="square" lIns="0" tIns="0" rIns="0" bIns="0" rtlCol="0" anchor="ctr"/>
+          <a:lstStyle/>
+          <a:p>
+            <a:pPr indent="0" marL="0">
+              <a:buNone/>
+            </a:pPr>
+            <a:r>
+              <a:rPr lang="en-US" sz="3400" b="1" dirty="0">
+                <a:solidFill>
+                  <a:srgbClr val="264653"/>
+                </a:solidFill>
+                <a:latin typeface="Meiryo" pitchFamily="34" charset="0"/>
+                <a:ea typeface="Meiryo" pitchFamily="34" charset="-122"/>
+                <a:cs typeface="Meiryo" pitchFamily="34" charset="-120"/>
+              </a:rPr>
+              <a:t>④ 触らない部分の見分けかた</a:t>
+            </a:r>
+            <a:endParaRPr lang="en-US" sz="3400" dirty="0"/>
+          </a:p>
+        </p:txBody>
+      </p:sp>
+      <p:sp>
+        <p:nvSpPr>
+          <p:cNvPr id="5" name="Text 2"/>
+          <p:cNvSpPr/>
+          <p:nvPr/>
+        </p:nvSpPr>
+        <p:spPr>
+          <a:xfrm>
+            <a:off x="566928" y="1024128"/>
+            <a:ext cx="11064240" cy="365760"/>
+          </a:xfrm>
+          <a:prstGeom prst="rect">
+            <a:avLst/>
+          </a:prstGeom>
+          <a:noFill/>
+          <a:ln/>
+        </p:spPr>
+        <p:txBody>
+          <a:bodyPr wrap="square" lIns="0" tIns="0" rIns="0" bIns="0" rtlCol="0" anchor="ctr"/>
+          <a:lstStyle/>
+          <a:p>
+            <a:pPr indent="0" marL="0">
+              <a:buNone/>
+            </a:pPr>
+            <a:r>
+              <a:rPr lang="en-US" sz="1600" dirty="0">
+                <a:solidFill>
+                  <a:srgbClr val="5E7681"/>
+                </a:solidFill>
+                <a:latin typeface="Meiryo" pitchFamily="34" charset="0"/>
+                <a:ea typeface="Meiryo" pitchFamily="34" charset="-122"/>
+                <a:cs typeface="Meiryo" pitchFamily="34" charset="-120"/>
+              </a:rPr>
+              <a:t>クリックしても文字が編集できない箱があります</a:t>
+            </a:r>
+            <a:endParaRPr lang="en-US" sz="1600" dirty="0"/>
+          </a:p>
+        </p:txBody>
+      </p:sp>
+      <p:sp>
+        <p:nvSpPr>
+          <p:cNvPr id="6" name="Text 3"/>
+          <p:cNvSpPr/>
+          <p:nvPr/>
+        </p:nvSpPr>
+        <p:spPr>
+          <a:xfrm>
+            <a:off x="11338560" y="6309360"/>
+            <a:ext cx="457200" cy="274320"/>
+          </a:xfrm>
+          <a:prstGeom prst="rect">
+            <a:avLst/>
+          </a:prstGeom>
+          <a:noFill/>
+          <a:ln/>
+        </p:spPr>
+        <p:txBody>
+          <a:bodyPr wrap="square" lIns="0" tIns="0" rIns="0" bIns="0" rtlCol="0" anchor="ctr"/>
+          <a:lstStyle/>
+          <a:p>
+            <a:pPr algn="r" indent="0" marL="0">
+              <a:buNone/>
+            </a:pPr>
+            <a:r>
+              <a:rPr lang="en-US" sz="1100" dirty="0">
+                <a:solidFill>
+                  <a:srgbClr val="A8B4B8"/>
+                </a:solidFill>
+                <a:latin typeface="Meiryo" pitchFamily="34" charset="0"/>
+                <a:ea typeface="Meiryo" pitchFamily="34" charset="-122"/>
+                <a:cs typeface="Meiryo" pitchFamily="34" charset="-120"/>
+              </a:rPr>
+              <a:t>6</a:t>
+            </a:r>
+            <a:endParaRPr lang="en-US" sz="1100" dirty="0"/>
+          </a:p>
+        </p:txBody>
+      </p:sp>
+      <p:pic>
+        <p:nvPicPr>
+          <p:cNvPr id="7" name="Image 1" descr="/sessions/compassionate-sweet-heisenberg/mnt/dev-aspath-life-main/_wp移行素材/★引継ぎ資料/画像/A3_さわらない箱.jpg">    </p:cNvPr>
+          <p:cNvPicPr>
+            <a:picLocks noChangeAspect="1"/>
+          </p:cNvPicPr>
+          <p:nvPr/>
+        </p:nvPicPr>
+        <p:blipFill>
+          <a:blip r:embed="rId2"/>
+          <a:stretch>
+            <a:fillRect/>
+          </a:stretch>
+        </p:blipFill>
+        <p:spPr>
+          <a:xfrm>
             <a:off x="640080" y="1691640"/>
             <a:ext cx="7863840" cy="4058756"/>
           </a:xfrm>
@@ -10706,7 +11767,7 @@
       </p:pic>
       <p:sp>
         <p:nvSpPr>
-          <p:cNvPr id="6" name="Text 3"/>
+          <p:cNvPr id="8" name="Text 4"/>
           <p:cNvSpPr/>
           <p:nvPr/>
         </p:nvSpPr>
@@ -10745,7 +11806,7 @@
       </p:sp>
       <p:sp>
         <p:nvSpPr>
-          <p:cNvPr id="7" name="Shape 4"/>
+          <p:cNvPr id="9" name="Shape 5"/>
           <p:cNvSpPr/>
           <p:nvPr/>
         </p:nvSpPr>
@@ -10767,7 +11828,7 @@
       </p:sp>
       <p:sp>
         <p:nvSpPr>
-          <p:cNvPr id="8" name="Text 5"/>
+          <p:cNvPr id="10" name="Text 6"/>
           <p:cNvSpPr/>
           <p:nvPr/>
         </p:nvSpPr>
@@ -10806,7 +11867,7 @@
       </p:sp>
       <p:sp>
         <p:nvSpPr>
-          <p:cNvPr id="9" name="Text 6"/>
+          <p:cNvPr id="11" name="Text 7"/>
           <p:cNvSpPr/>
           <p:nvPr/>
         </p:nvSpPr>
@@ -10848,7 +11909,7 @@
       </p:sp>
       <p:sp>
         <p:nvSpPr>
-          <p:cNvPr id="10" name="Shape 7"/>
+          <p:cNvPr id="12" name="Shape 8"/>
           <p:cNvSpPr/>
           <p:nvPr/>
         </p:nvSpPr>
@@ -10870,7 +11931,7 @@
       </p:sp>
       <p:sp>
         <p:nvSpPr>
-          <p:cNvPr id="11" name="Text 8"/>
+          <p:cNvPr id="13" name="Text 9"/>
           <p:cNvSpPr/>
           <p:nvPr/>
         </p:nvSpPr>
@@ -11011,9 +12072,72 @@
           <a:chExt cx="0" cy="0"/>
         </a:xfrm>
       </p:grpSpPr>
-      <p:sp>
-        <p:nvSpPr>
-          <p:cNvPr id="2" name="Text 0"/>
+      <p:pic>
+        <p:nvPicPr>
+          <p:cNvPr id="2" name="Image 0" descr="/sessions/compassionate-sweet-heisenberg/mnt/dev-aspath-life-main/tools/assets/logo-deck.png">    </p:cNvPr>
+          <p:cNvPicPr>
+            <a:picLocks noChangeAspect="1"/>
+          </p:cNvPicPr>
+          <p:nvPr/>
+        </p:nvPicPr>
+        <p:blipFill>
+          <a:blip r:embed="rId1"/>
+          <a:stretch>
+            <a:fillRect/>
+          </a:stretch>
+        </p:blipFill>
+        <p:spPr>
+          <a:xfrm>
+            <a:off x="11458173" y="109728"/>
+            <a:ext cx="209571" cy="256032"/>
+          </a:xfrm>
+          <a:prstGeom prst="rect">
+            <a:avLst/>
+          </a:prstGeom>
+        </p:spPr>
+      </p:pic>
+      <p:sp>
+        <p:nvSpPr>
+          <p:cNvPr id="3" name="Text 0"/>
+          <p:cNvSpPr txBox="1"/>
+          <p:nvPr/>
+        </p:nvSpPr>
+        <p:spPr>
+          <a:xfrm>
+            <a:off x="8623533" y="128016"/>
+            <a:ext cx="2743200" cy="237744"/>
+          </a:xfrm>
+          <a:prstGeom prst="rect">
+            <a:avLst/>
+          </a:prstGeom>
+          <a:noFill/>
+          <a:ln/>
+        </p:spPr>
+        <p:txBody>
+          <a:bodyPr wrap="square" lIns="0" tIns="0" rIns="0" bIns="0" rtlCol="0" anchor="ctr"/>
+          <a:lstStyle/>
+          <a:p>
+            <a:pPr algn="r" indent="0" marL="0">
+              <a:buNone/>
+            </a:pPr>
+            <a:r>
+              <a:rPr lang="en-US" sz="750" dirty="0">
+                <a:solidFill>
+                  <a:srgbClr val="97A9AF"/>
+                </a:solidFill>
+                <a:latin typeface="Meiryo" pitchFamily="34" charset="0"/>
+                <a:ea typeface="Meiryo" pitchFamily="34" charset="-122"/>
+                <a:cs typeface="Meiryo" pitchFamily="34" charset="-120"/>
+              </a:rPr>
+              <a:t>鹿児島のパーキンソン病専門トレーニングスタジオ</a:t>
+            </a:r>
+            <a:endParaRPr lang="en-US" sz="750" dirty="0"/>
+          </a:p>
+        </p:txBody>
+      </p:sp>
+      <p:sp>
+        <p:nvSpPr>
+          <p:cNvPr id="4" name="Text 1"/>
           <p:cNvSpPr/>
           <p:nvPr/>
         </p:nvSpPr>
@@ -11052,7 +12176,7 @@
       </p:sp>
       <p:sp>
         <p:nvSpPr>
-          <p:cNvPr id="3" name="Text 1"/>
+          <p:cNvPr id="5" name="Text 2"/>
           <p:cNvSpPr/>
           <p:nvPr/>
         </p:nvSpPr>
@@ -11091,7 +12215,7 @@
       </p:sp>
       <p:sp>
         <p:nvSpPr>
-          <p:cNvPr id="4" name="Text 2"/>
+          <p:cNvPr id="6" name="Text 3"/>
           <p:cNvSpPr/>
           <p:nvPr/>
         </p:nvSpPr>
@@ -12809,7 +13933,7 @@
       </p:graphicFrame>
       <p:sp>
         <p:nvSpPr>
-          <p:cNvPr id="6" name="Shape 3"/>
+          <p:cNvPr id="8" name="Shape 4"/>
           <p:cNvSpPr/>
           <p:nvPr/>
         </p:nvSpPr>
@@ -12831,7 +13955,7 @@
       </p:sp>
       <p:sp>
         <p:nvSpPr>
-          <p:cNvPr id="7" name="Text 4"/>
+          <p:cNvPr id="9" name="Text 5"/>
           <p:cNvSpPr/>
           <p:nvPr/>
         </p:nvSpPr>
@@ -12903,126 +14027,9 @@
           <a:chExt cx="0" cy="0"/>
         </a:xfrm>
       </p:grpSpPr>
-      <p:sp>
-        <p:nvSpPr>
-          <p:cNvPr id="2" name="Text 0"/>
-          <p:cNvSpPr/>
-          <p:nvPr/>
-        </p:nvSpPr>
-        <p:spPr>
-          <a:xfrm>
-            <a:off x="548640" y="274320"/>
-            <a:ext cx="11064240" cy="731520"/>
-          </a:xfrm>
-          <a:prstGeom prst="rect">
-            <a:avLst/>
-          </a:prstGeom>
-          <a:noFill/>
-          <a:ln/>
-        </p:spPr>
-        <p:txBody>
-          <a:bodyPr wrap="square" lIns="0" tIns="0" rIns="0" bIns="0" rtlCol="0" anchor="ctr"/>
-          <a:lstStyle/>
-          <a:p>
-            <a:pPr indent="0" marL="0">
-              <a:buNone/>
-            </a:pPr>
-            <a:r>
-              <a:rPr lang="en-US" sz="3400" b="1" dirty="0">
-                <a:solidFill>
-                  <a:srgbClr val="264653"/>
-                </a:solidFill>
-                <a:latin typeface="Meiryo" pitchFamily="34" charset="0"/>
-                <a:ea typeface="Meiryo" pitchFamily="34" charset="-122"/>
-                <a:cs typeface="Meiryo" pitchFamily="34" charset="-120"/>
-              </a:rPr>
-              <a:t>編集画面は、サイトとは見た目が違います</a:t>
-            </a:r>
-            <a:endParaRPr lang="en-US" sz="3400" dirty="0"/>
-          </a:p>
-        </p:txBody>
-      </p:sp>
-      <p:sp>
-        <p:nvSpPr>
-          <p:cNvPr id="3" name="Text 1"/>
-          <p:cNvSpPr/>
-          <p:nvPr/>
-        </p:nvSpPr>
-        <p:spPr>
-          <a:xfrm>
-            <a:off x="566928" y="1024128"/>
-            <a:ext cx="11064240" cy="365760"/>
-          </a:xfrm>
-          <a:prstGeom prst="rect">
-            <a:avLst/>
-          </a:prstGeom>
-          <a:noFill/>
-          <a:ln/>
-        </p:spPr>
-        <p:txBody>
-          <a:bodyPr wrap="square" lIns="0" tIns="0" rIns="0" bIns="0" rtlCol="0" anchor="ctr"/>
-          <a:lstStyle/>
-          <a:p>
-            <a:pPr indent="0" marL="0">
-              <a:buNone/>
-            </a:pPr>
-            <a:r>
-              <a:rPr lang="en-US" sz="1600" dirty="0">
-                <a:solidFill>
-                  <a:srgbClr val="5E7681"/>
-                </a:solidFill>
-                <a:latin typeface="Meiryo" pitchFamily="34" charset="0"/>
-                <a:ea typeface="Meiryo" pitchFamily="34" charset="-122"/>
-                <a:cs typeface="Meiryo" pitchFamily="34" charset="-120"/>
-              </a:rPr>
-              <a:t>ここを先にお伝えします</a:t>
-            </a:r>
-            <a:endParaRPr lang="en-US" sz="1600" dirty="0"/>
-          </a:p>
-        </p:txBody>
-      </p:sp>
-      <p:sp>
-        <p:nvSpPr>
-          <p:cNvPr id="4" name="Text 2"/>
-          <p:cNvSpPr/>
-          <p:nvPr/>
-        </p:nvSpPr>
-        <p:spPr>
-          <a:xfrm>
-            <a:off x="11338560" y="6309360"/>
-            <a:ext cx="457200" cy="274320"/>
-          </a:xfrm>
-          <a:prstGeom prst="rect">
-            <a:avLst/>
-          </a:prstGeom>
-          <a:noFill/>
-          <a:ln/>
-        </p:spPr>
-        <p:txBody>
-          <a:bodyPr wrap="square" lIns="0" tIns="0" rIns="0" bIns="0" rtlCol="0" anchor="ctr"/>
-          <a:lstStyle/>
-          <a:p>
-            <a:pPr algn="r" indent="0" marL="0">
-              <a:buNone/>
-            </a:pPr>
-            <a:r>
-              <a:rPr lang="en-US" sz="1100" dirty="0">
-                <a:solidFill>
-                  <a:srgbClr val="A8B4B8"/>
-                </a:solidFill>
-                <a:latin typeface="Meiryo" pitchFamily="34" charset="0"/>
-                <a:ea typeface="Meiryo" pitchFamily="34" charset="-122"/>
-                <a:cs typeface="Meiryo" pitchFamily="34" charset="-120"/>
-              </a:rPr>
-              <a:t>8</a:t>
-            </a:r>
-            <a:endParaRPr lang="en-US" sz="1100" dirty="0"/>
-          </a:p>
-        </p:txBody>
-      </p:sp>
       <p:pic>
         <p:nvPicPr>
-          <p:cNvPr id="5" name="Image 0" descr="/sessions/compassionate-sweet-heisenberg/mnt/dev-aspath-life-main/_wp移行素材/★引継ぎ資料/画像/E0_編集画面_色分け拡大.jpg">    </p:cNvPr>
+          <p:cNvPr id="2" name="Image 0" descr="/sessions/compassionate-sweet-heisenberg/mnt/dev-aspath-life-main/tools/assets/logo-deck.png">    </p:cNvPr>
           <p:cNvPicPr>
             <a:picLocks noChangeAspect="1"/>
           </p:cNvPicPr>
@@ -13036,6 +14043,186 @@
         </p:blipFill>
         <p:spPr>
           <a:xfrm>
+            <a:off x="11458173" y="109728"/>
+            <a:ext cx="209571" cy="256032"/>
+          </a:xfrm>
+          <a:prstGeom prst="rect">
+            <a:avLst/>
+          </a:prstGeom>
+        </p:spPr>
+      </p:pic>
+      <p:sp>
+        <p:nvSpPr>
+          <p:cNvPr id="3" name="Text 0"/>
+          <p:cNvSpPr txBox="1"/>
+          <p:nvPr/>
+        </p:nvSpPr>
+        <p:spPr>
+          <a:xfrm>
+            <a:off x="8623533" y="128016"/>
+            <a:ext cx="2743200" cy="237744"/>
+          </a:xfrm>
+          <a:prstGeom prst="rect">
+            <a:avLst/>
+          </a:prstGeom>
+          <a:noFill/>
+          <a:ln/>
+        </p:spPr>
+        <p:txBody>
+          <a:bodyPr wrap="square" lIns="0" tIns="0" rIns="0" bIns="0" rtlCol="0" anchor="ctr"/>
+          <a:lstStyle/>
+          <a:p>
+            <a:pPr algn="r" indent="0" marL="0">
+              <a:buNone/>
+            </a:pPr>
+            <a:r>
+              <a:rPr lang="en-US" sz="750" dirty="0">
+                <a:solidFill>
+                  <a:srgbClr val="97A9AF"/>
+                </a:solidFill>
+                <a:latin typeface="Meiryo" pitchFamily="34" charset="0"/>
+                <a:ea typeface="Meiryo" pitchFamily="34" charset="-122"/>
+                <a:cs typeface="Meiryo" pitchFamily="34" charset="-120"/>
+              </a:rPr>
+              <a:t>鹿児島のパーキンソン病専門トレーニングスタジオ</a:t>
+            </a:r>
+            <a:endParaRPr lang="en-US" sz="750" dirty="0"/>
+          </a:p>
+        </p:txBody>
+      </p:sp>
+      <p:sp>
+        <p:nvSpPr>
+          <p:cNvPr id="4" name="Text 1"/>
+          <p:cNvSpPr/>
+          <p:nvPr/>
+        </p:nvSpPr>
+        <p:spPr>
+          <a:xfrm>
+            <a:off x="548640" y="274320"/>
+            <a:ext cx="11064240" cy="731520"/>
+          </a:xfrm>
+          <a:prstGeom prst="rect">
+            <a:avLst/>
+          </a:prstGeom>
+          <a:noFill/>
+          <a:ln/>
+        </p:spPr>
+        <p:txBody>
+          <a:bodyPr wrap="square" lIns="0" tIns="0" rIns="0" bIns="0" rtlCol="0" anchor="ctr"/>
+          <a:lstStyle/>
+          <a:p>
+            <a:pPr indent="0" marL="0">
+              <a:buNone/>
+            </a:pPr>
+            <a:r>
+              <a:rPr lang="en-US" sz="3400" b="1" dirty="0">
+                <a:solidFill>
+                  <a:srgbClr val="264653"/>
+                </a:solidFill>
+                <a:latin typeface="Meiryo" pitchFamily="34" charset="0"/>
+                <a:ea typeface="Meiryo" pitchFamily="34" charset="-122"/>
+                <a:cs typeface="Meiryo" pitchFamily="34" charset="-120"/>
+              </a:rPr>
+              <a:t>編集画面は、サイトとは見た目が違います</a:t>
+            </a:r>
+            <a:endParaRPr lang="en-US" sz="3400" dirty="0"/>
+          </a:p>
+        </p:txBody>
+      </p:sp>
+      <p:sp>
+        <p:nvSpPr>
+          <p:cNvPr id="5" name="Text 2"/>
+          <p:cNvSpPr/>
+          <p:nvPr/>
+        </p:nvSpPr>
+        <p:spPr>
+          <a:xfrm>
+            <a:off x="566928" y="1024128"/>
+            <a:ext cx="11064240" cy="365760"/>
+          </a:xfrm>
+          <a:prstGeom prst="rect">
+            <a:avLst/>
+          </a:prstGeom>
+          <a:noFill/>
+          <a:ln/>
+        </p:spPr>
+        <p:txBody>
+          <a:bodyPr wrap="square" lIns="0" tIns="0" rIns="0" bIns="0" rtlCol="0" anchor="ctr"/>
+          <a:lstStyle/>
+          <a:p>
+            <a:pPr indent="0" marL="0">
+              <a:buNone/>
+            </a:pPr>
+            <a:r>
+              <a:rPr lang="en-US" sz="1600" dirty="0">
+                <a:solidFill>
+                  <a:srgbClr val="5E7681"/>
+                </a:solidFill>
+                <a:latin typeface="Meiryo" pitchFamily="34" charset="0"/>
+                <a:ea typeface="Meiryo" pitchFamily="34" charset="-122"/>
+                <a:cs typeface="Meiryo" pitchFamily="34" charset="-120"/>
+              </a:rPr>
+              <a:t>ここを先にお伝えします</a:t>
+            </a:r>
+            <a:endParaRPr lang="en-US" sz="1600" dirty="0"/>
+          </a:p>
+        </p:txBody>
+      </p:sp>
+      <p:sp>
+        <p:nvSpPr>
+          <p:cNvPr id="6" name="Text 3"/>
+          <p:cNvSpPr/>
+          <p:nvPr/>
+        </p:nvSpPr>
+        <p:spPr>
+          <a:xfrm>
+            <a:off x="11338560" y="6309360"/>
+            <a:ext cx="457200" cy="274320"/>
+          </a:xfrm>
+          <a:prstGeom prst="rect">
+            <a:avLst/>
+          </a:prstGeom>
+          <a:noFill/>
+          <a:ln/>
+        </p:spPr>
+        <p:txBody>
+          <a:bodyPr wrap="square" lIns="0" tIns="0" rIns="0" bIns="0" rtlCol="0" anchor="ctr"/>
+          <a:lstStyle/>
+          <a:p>
+            <a:pPr algn="r" indent="0" marL="0">
+              <a:buNone/>
+            </a:pPr>
+            <a:r>
+              <a:rPr lang="en-US" sz="1100" dirty="0">
+                <a:solidFill>
+                  <a:srgbClr val="A8B4B8"/>
+                </a:solidFill>
+                <a:latin typeface="Meiryo" pitchFamily="34" charset="0"/>
+                <a:ea typeface="Meiryo" pitchFamily="34" charset="-122"/>
+                <a:cs typeface="Meiryo" pitchFamily="34" charset="-120"/>
+              </a:rPr>
+              <a:t>8</a:t>
+            </a:r>
+            <a:endParaRPr lang="en-US" sz="1100" dirty="0"/>
+          </a:p>
+        </p:txBody>
+      </p:sp>
+      <p:pic>
+        <p:nvPicPr>
+          <p:cNvPr id="7" name="Image 1" descr="/sessions/compassionate-sweet-heisenberg/mnt/dev-aspath-life-main/_wp移行素材/★引継ぎ資料/画像/E0_編集画面_色分け拡大.jpg">    </p:cNvPr>
+          <p:cNvPicPr>
+            <a:picLocks noChangeAspect="1"/>
+          </p:cNvPicPr>
+          <p:nvPr/>
+        </p:nvPicPr>
+        <p:blipFill>
+          <a:blip r:embed="rId2"/>
+          <a:stretch>
+            <a:fillRect/>
+          </a:stretch>
+        </p:blipFill>
+        <p:spPr>
+          <a:xfrm>
             <a:off x="731520" y="1691640"/>
             <a:ext cx="6035040" cy="3652787"/>
           </a:xfrm>
@@ -13046,7 +14233,7 @@
       </p:pic>
       <p:sp>
         <p:nvSpPr>
-          <p:cNvPr id="6" name="Shape 3"/>
+          <p:cNvPr id="8" name="Shape 4"/>
           <p:cNvSpPr/>
           <p:nvPr/>
         </p:nvSpPr>
@@ -13068,7 +14255,7 @@
       </p:sp>
       <p:sp>
         <p:nvSpPr>
-          <p:cNvPr id="7" name="Text 4"/>
+          <p:cNvPr id="9" name="Text 5"/>
           <p:cNvSpPr/>
           <p:nvPr/>
         </p:nvSpPr>
@@ -13107,7 +14294,7 @@
       </p:sp>
       <p:sp>
         <p:nvSpPr>
-          <p:cNvPr id="8" name="Text 5"/>
+          <p:cNvPr id="10" name="Text 6"/>
           <p:cNvSpPr/>
           <p:nvPr/>
         </p:nvSpPr>
@@ -13189,7 +14376,7 @@
       </p:sp>
       <p:sp>
         <p:nvSpPr>
-          <p:cNvPr id="9" name="Shape 6"/>
+          <p:cNvPr id="11" name="Shape 7"/>
           <p:cNvSpPr/>
           <p:nvPr/>
         </p:nvSpPr>
@@ -13211,7 +14398,7 @@
       </p:sp>
       <p:sp>
         <p:nvSpPr>
-          <p:cNvPr id="10" name="Text 7"/>
+          <p:cNvPr id="12" name="Text 8"/>
           <p:cNvSpPr/>
           <p:nvPr/>
         </p:nvSpPr>
@@ -13250,7 +14437,7 @@
       </p:sp>
       <p:sp>
         <p:nvSpPr>
-          <p:cNvPr id="11" name="Text 8"/>
+          <p:cNvPr id="13" name="Text 9"/>
           <p:cNvSpPr/>
           <p:nvPr/>
         </p:nvSpPr>
@@ -13332,7 +14519,7 @@
       </p:sp>
       <p:sp>
         <p:nvSpPr>
-          <p:cNvPr id="12" name="Shape 9"/>
+          <p:cNvPr id="14" name="Shape 10"/>
           <p:cNvSpPr/>
           <p:nvPr/>
         </p:nvSpPr>
@@ -13354,7 +14541,7 @@
       </p:sp>
       <p:sp>
         <p:nvSpPr>
-          <p:cNvPr id="13" name="Text 10"/>
+          <p:cNvPr id="15" name="Text 11"/>
           <p:cNvSpPr/>
           <p:nvPr/>
         </p:nvSpPr>

--- a/_wp移行素材/★引継ぎ資料/★山口様向け_ASPATHについて_文章の直し方.pptx
+++ b/_wp移行素材/★引継ぎ資料/★山口様向け_ASPATHについて_文章の直し方.pptx
@@ -10624,7 +10624,7 @@
         <p:spPr>
           <a:xfrm>
             <a:off x="9345168" y="1874520"/>
-            <a:ext cx="2926080" cy="384048"/>
+            <a:ext cx="2697480" cy="384048"/>
           </a:xfrm>
           <a:prstGeom prst="rect">
             <a:avLst/>
@@ -10722,7 +10722,7 @@
         <p:spPr>
           <a:xfrm>
             <a:off x="9345168" y="2606040"/>
-            <a:ext cx="2926080" cy="384048"/>
+            <a:ext cx="2697480" cy="384048"/>
           </a:xfrm>
           <a:prstGeom prst="rect">
             <a:avLst/>
@@ -10820,7 +10820,7 @@
         <p:spPr>
           <a:xfrm>
             <a:off x="9345168" y="3337560"/>
-            <a:ext cx="2926080" cy="384048"/>
+            <a:ext cx="2697480" cy="384048"/>
           </a:xfrm>
           <a:prstGeom prst="rect">
             <a:avLst/>
